--- a/seminar/slides/세션0_환경구축과_큰그림.pptx
+++ b/seminar/slides/세션0_환경구축과_큰그림.pptx
@@ -15,9 +15,10 @@
     <p:sldId id="263" r:id="rId9"/>
     <p:sldId id="264" r:id="rId10"/>
     <p:sldId id="265" r:id="rId11"/>
+    <p:sldId id="266" r:id="rId12"/>
   </p:sldIdLst>
   <p:notesMasterIdLst>
-    <p:notesMasterId r:id="rId12"/>
+    <p:notesMasterId r:id="rId13"/>
   </p:notesMasterIdLst>
   <p:sldSz cx="12192000" cy="6858000"/>
   <p:notesSz cx="6858000" cy="12192000"/>
@@ -599,7 +600,7 @@
           <a:p>
             <a:r>
               <a:rPr lang="en-US" dirty="0"/>
-              <a:t>환경 준비 완료 → 세션 1부터 코드. kernel_move_inv_write로 시작.</a:t>
+              <a:t>세션 0의 핵심 목표: 전원 빌드·실행 성공. 환경 문제를 여기서 다 해결.</a:t>
             </a:r>
             <a:endParaRPr lang="en-US" dirty="0"/>
           </a:p>
@@ -623,6 +624,94 @@
             <a:fld id="{F7021451-1387-4CA6-816F-3879F97B5CBC}" type="slidenum">
               <a:rPr lang="en-US"/>
               <a:t>10</a:t>
+            </a:fld>
+            <a:endParaRPr lang="en-US"/>
+          </a:p>
+        </p:txBody>
+      </p:sp>
+    </p:spTree>
+    <p:extLst>
+      <p:ext uri="{BB962C8B-B14F-4D97-AF65-F5344CB8AC3E}">
+        <p14:creationId xmlns:p14="http://schemas.microsoft.com/office/powerpoint/2010/main" val="1024086991"/>
+      </p:ext>
+    </p:extLst>
+  </p:cSld>
+  <p:clrMapOvr>
+    <a:masterClrMapping/>
+  </p:clrMapOvr>
+</p:notes>
+</file>
+
+<file path=ppt/notesSlides/notesSlide11.xml><?xml version="1.0" encoding="utf-8"?>
+<p:notes xmlns:a="http://schemas.openxmlformats.org/drawingml/2006/main" xmlns:r="http://schemas.openxmlformats.org/officeDocument/2006/relationships" xmlns:p="http://schemas.openxmlformats.org/presentationml/2006/main">
+  <p:cSld>
+    <p:spTree>
+      <p:nvGrpSpPr>
+        <p:cNvPr id="1" name=""/>
+        <p:cNvGrpSpPr/>
+        <p:nvPr/>
+      </p:nvGrpSpPr>
+      <p:grpSpPr>
+        <a:xfrm>
+          <a:off x="0" y="0"/>
+          <a:ext cx="0" cy="0"/>
+          <a:chOff x="0" y="0"/>
+          <a:chExt cx="0" cy="0"/>
+        </a:xfrm>
+      </p:grpSpPr>
+      <p:sp>
+        <p:nvSpPr>
+          <p:cNvPr id="2" name="Slide Image Placeholder 1"/>
+          <p:cNvSpPr>
+            <a:spLocks noGrp="1" noRot="1" noChangeAspect="1"/>
+          </p:cNvSpPr>
+          <p:nvPr>
+            <p:ph type="sldImg"/>
+          </p:nvPr>
+        </p:nvSpPr>
+        <p:spPr/>
+      </p:sp>
+      <p:sp>
+        <p:nvSpPr>
+          <p:cNvPr id="3" name="Notes Placeholder 2"/>
+          <p:cNvSpPr>
+            <a:spLocks noGrp="1"/>
+          </p:cNvSpPr>
+          <p:nvPr>
+            <p:ph type="body" idx="1"/>
+          </p:nvPr>
+        </p:nvSpPr>
+        <p:spPr/>
+        <p:txBody>
+          <a:bodyPr/>
+          <a:lstStyle/>
+          <a:p>
+            <a:r>
+              <a:rPr lang="en-US" dirty="0"/>
+              <a:t>환경 준비 완료 → 세션 1부터 코드. kernel_move_inv_write로 시작.</a:t>
+            </a:r>
+            <a:endParaRPr lang="en-US" dirty="0"/>
+          </a:p>
+        </p:txBody>
+      </p:sp>
+      <p:sp>
+        <p:nvSpPr>
+          <p:cNvPr id="4" name="Slide Number Placeholder 3"/>
+          <p:cNvSpPr>
+            <a:spLocks noGrp="1"/>
+          </p:cNvSpPr>
+          <p:nvPr>
+            <p:ph type="sldNum" sz="quarter" idx="10"/>
+          </p:nvPr>
+        </p:nvSpPr>
+        <p:spPr/>
+        <p:txBody>
+          <a:bodyPr/>
+          <a:lstStyle/>
+          <a:p>
+            <a:fld id="{F7021451-1387-4CA6-816F-3879F97B5CBC}" type="slidenum">
+              <a:rPr lang="en-US"/>
+              <a:t>11</a:t>
             </a:fld>
             <a:endParaRPr lang="en-US"/>
           </a:p>
@@ -863,7 +952,7 @@
           <a:p>
             <a:r>
               <a:rPr lang="en-US" dirty="0"/>
-              <a:t>하드/소프트 오류 구분은 세미나 전체의 배경. doc/의 SAAHPC 2009 논문(한국어 EPUB)을 안내.</a:t>
+              <a:t>호스트/디바이스가 분리된 메모리를 갖는다는 것이 CUDA의 근본 구조. PCIe를 통한 cudaMemcpy가 다리 역할.</a:t>
             </a:r>
             <a:endParaRPr lang="en-US" dirty="0"/>
           </a:p>
@@ -951,7 +1040,7 @@
           <a:p>
             <a:r>
               <a:rPr lang="en-US" dirty="0"/>
-              <a:t>아키텍처 번호를 왜 지정하는지(세대별 기계어)를 짚어주세요. 빌드 실패의 흔한 원인.</a:t>
+              <a:t>하드/소프트 오류 구분은 세미나 전체의 배경. doc/의 SAAHPC 2009 논문(한국어 EPUB)을 안내.</a:t>
             </a:r>
             <a:endParaRPr lang="en-US" dirty="0"/>
           </a:p>
@@ -1039,7 +1128,7 @@
           <a:p>
             <a:r>
               <a:rPr lang="en-US" dirty="0"/>
-              <a:t>'아무 일도 안 일어나는데요?'가 정상. 세션 2에서 일부러 오류를 주입해 검출을 봅니다.</a:t>
+              <a:t>아키텍처 번호를 왜 지정하는지(세대별 기계어)를 짚어주세요. 빌드 실패의 흔한 원인.</a:t>
             </a:r>
             <a:endParaRPr lang="en-US" dirty="0"/>
           </a:p>
@@ -1127,7 +1216,7 @@
           <a:p>
             <a:r>
               <a:rPr lang="en-US" dirty="0"/>
-              <a:t>각 테스트가 서로 다른 종류의 오류를 노림. 세부 알고리즘은 세션 2~3에서 다룹니다.</a:t>
+              <a:t>'아무 일도 안 일어나는데요?'가 정상. 세션 2에서 일부러 오류를 주입해 검출을 봅니다.</a:t>
             </a:r>
             <a:endParaRPr lang="en-US" dirty="0"/>
           </a:p>
@@ -1215,7 +1304,7 @@
           <a:p>
             <a:r>
               <a:rPr lang="en-US" dirty="0"/>
-              <a:t>전체 코드 지도. main→thread_func→run_tests→커널. 각 단계가 앞으로의 세션에 대응.</a:t>
+              <a:t>각 테스트가 서로 다른 종류의 오류를 노림. 세부 알고리즘은 세션 2~3에서 다룹니다.</a:t>
             </a:r>
             <a:endParaRPr lang="en-US" dirty="0"/>
           </a:p>
@@ -1303,7 +1392,7 @@
           <a:p>
             <a:r>
               <a:rPr lang="en-US" dirty="0"/>
-              <a:t>세션 0의 핵심 목표: 전원 빌드·실행 성공. 환경 문제를 여기서 다 해결.</a:t>
+              <a:t>전체 코드 지도. main→thread_func→run_tests→커널. 각 단계가 앞으로의 세션에 대응.</a:t>
             </a:r>
             <a:endParaRPr lang="en-US" dirty="0"/>
           </a:p>
@@ -1981,6 +2070,743 @@
         </p:nvSpPr>
         <p:spPr>
           <a:xfrm>
+            <a:off x="548640" y="411480"/>
+            <a:ext cx="640080" cy="640080"/>
+          </a:xfrm>
+          <a:prstGeom prst="roundRect">
+            <a:avLst>
+              <a:gd name="adj" fmla="val 12857"/>
+            </a:avLst>
+          </a:prstGeom>
+          <a:solidFill>
+            <a:srgbClr val="8CC63F"/>
+          </a:solidFill>
+          <a:ln/>
+        </p:spPr>
+        <p:txBody>
+          <a:bodyPr wrap="square" rtlCol="0" anchor="ctr"/>
+          <a:lstStyle/>
+          <a:p>
+            <a:pPr algn="ctr" indent="0" marL="0">
+              <a:buNone/>
+            </a:pPr>
+            <a:r>
+              <a:rPr lang="en-US" sz="2200" b="1" dirty="0">
+                <a:solidFill>
+                  <a:srgbClr val="13161C"/>
+                </a:solidFill>
+                <a:latin typeface="Courier New" pitchFamily="34" charset="0"/>
+                <a:ea typeface="Courier New" pitchFamily="34" charset="-122"/>
+                <a:cs typeface="Courier New" pitchFamily="34" charset="-120"/>
+              </a:rPr>
+              <a:t>8</a:t>
+            </a:r>
+            <a:endParaRPr lang="en-US" sz="2200" dirty="0"/>
+          </a:p>
+        </p:txBody>
+      </p:sp>
+      <p:sp>
+        <p:nvSpPr>
+          <p:cNvPr id="3" name="Text 1"/>
+          <p:cNvSpPr/>
+          <p:nvPr/>
+        </p:nvSpPr>
+        <p:spPr>
+          <a:xfrm>
+            <a:off x="1325880" y="384048"/>
+            <a:ext cx="10287000" cy="694944"/>
+          </a:xfrm>
+          <a:prstGeom prst="rect">
+            <a:avLst/>
+          </a:prstGeom>
+          <a:noFill/>
+          <a:ln/>
+        </p:spPr>
+        <p:txBody>
+          <a:bodyPr wrap="square" lIns="0" tIns="0" rIns="0" bIns="0" rtlCol="0" anchor="ctr"/>
+          <a:lstStyle/>
+          <a:p>
+            <a:pPr algn="l" indent="0" marL="0">
+              <a:buNone/>
+            </a:pPr>
+            <a:r>
+              <a:rPr lang="en-US" sz="3000" b="1" dirty="0">
+                <a:solidFill>
+                  <a:srgbClr val="E8EDF2"/>
+                </a:solidFill>
+                <a:latin typeface="Malgun Gothic" pitchFamily="34" charset="0"/>
+                <a:ea typeface="Malgun Gothic" pitchFamily="34" charset="-122"/>
+                <a:cs typeface="Malgun Gothic" pitchFamily="34" charset="-120"/>
+              </a:rPr>
+              <a:t>실습 미리보기 · Lab 0</a:t>
+            </a:r>
+            <a:endParaRPr lang="en-US" sz="3000" dirty="0"/>
+          </a:p>
+        </p:txBody>
+      </p:sp>
+      <p:sp>
+        <p:nvSpPr>
+          <p:cNvPr id="4" name="Shape 2"/>
+          <p:cNvSpPr/>
+          <p:nvPr/>
+        </p:nvSpPr>
+        <p:spPr>
+          <a:xfrm>
+            <a:off x="548640" y="1554480"/>
+            <a:ext cx="5303520" cy="1965960"/>
+          </a:xfrm>
+          <a:prstGeom prst="roundRect">
+            <a:avLst>
+              <a:gd name="adj" fmla="val 3721"/>
+            </a:avLst>
+          </a:prstGeom>
+          <a:solidFill>
+            <a:srgbClr val="1E232C"/>
+          </a:solidFill>
+          <a:ln/>
+        </p:spPr>
+      </p:sp>
+      <p:sp>
+        <p:nvSpPr>
+          <p:cNvPr id="5" name="Text 3"/>
+          <p:cNvSpPr/>
+          <p:nvPr/>
+        </p:nvSpPr>
+        <p:spPr>
+          <a:xfrm>
+            <a:off x="804672" y="1755648"/>
+            <a:ext cx="1188720" cy="502920"/>
+          </a:xfrm>
+          <a:prstGeom prst="roundRect">
+            <a:avLst>
+              <a:gd name="adj" fmla="val 14545"/>
+            </a:avLst>
+          </a:prstGeom>
+          <a:solidFill>
+            <a:srgbClr val="4FB0C6"/>
+          </a:solidFill>
+          <a:ln/>
+        </p:spPr>
+        <p:txBody>
+          <a:bodyPr wrap="square" rtlCol="0" anchor="ctr"/>
+          <a:lstStyle/>
+          <a:p>
+            <a:pPr algn="ctr" indent="0" marL="0">
+              <a:buNone/>
+            </a:pPr>
+            <a:r>
+              <a:rPr lang="en-US" sz="1700" b="1" dirty="0">
+                <a:solidFill>
+                  <a:srgbClr val="13161C"/>
+                </a:solidFill>
+                <a:latin typeface="Courier New" pitchFamily="34" charset="0"/>
+                <a:ea typeface="Courier New" pitchFamily="34" charset="-122"/>
+                <a:cs typeface="Courier New" pitchFamily="34" charset="-120"/>
+              </a:rPr>
+              <a:t>Ex 0</a:t>
+            </a:r>
+            <a:endParaRPr lang="en-US" sz="1700" dirty="0"/>
+          </a:p>
+        </p:txBody>
+      </p:sp>
+      <p:sp>
+        <p:nvSpPr>
+          <p:cNvPr id="6" name="Text 4"/>
+          <p:cNvSpPr/>
+          <p:nvPr/>
+        </p:nvSpPr>
+        <p:spPr>
+          <a:xfrm>
+            <a:off x="2148840" y="1773936"/>
+            <a:ext cx="3474720" cy="822960"/>
+          </a:xfrm>
+          <a:prstGeom prst="rect">
+            <a:avLst/>
+          </a:prstGeom>
+          <a:noFill/>
+          <a:ln/>
+        </p:spPr>
+        <p:txBody>
+          <a:bodyPr wrap="square" lIns="0" tIns="0" rIns="0" bIns="0" rtlCol="0" anchor="t"/>
+          <a:lstStyle/>
+          <a:p>
+            <a:pPr indent="0" marL="0">
+              <a:buNone/>
+            </a:pPr>
+            <a:r>
+              <a:rPr lang="en-US" sz="1700" b="1" dirty="0">
+                <a:solidFill>
+                  <a:srgbClr val="E8EDF2"/>
+                </a:solidFill>
+                <a:latin typeface="Malgun Gothic" pitchFamily="34" charset="0"/>
+                <a:ea typeface="Malgun Gothic" pitchFamily="34" charset="-122"/>
+                <a:cs typeface="Malgun Gothic" pitchFamily="34" charset="-120"/>
+              </a:rPr>
+              <a:t>내 환경 점검</a:t>
+            </a:r>
+            <a:endParaRPr lang="en-US" sz="1700" dirty="0"/>
+          </a:p>
+        </p:txBody>
+      </p:sp>
+      <p:sp>
+        <p:nvSpPr>
+          <p:cNvPr id="7" name="Text 5"/>
+          <p:cNvSpPr/>
+          <p:nvPr/>
+        </p:nvSpPr>
+        <p:spPr>
+          <a:xfrm>
+            <a:off x="804672" y="2651760"/>
+            <a:ext cx="4791456" cy="731520"/>
+          </a:xfrm>
+          <a:prstGeom prst="rect">
+            <a:avLst/>
+          </a:prstGeom>
+          <a:noFill/>
+          <a:ln/>
+        </p:spPr>
+        <p:txBody>
+          <a:bodyPr wrap="square" lIns="0" tIns="0" rIns="0" bIns="0" rtlCol="0" anchor="t"/>
+          <a:lstStyle/>
+          <a:p>
+            <a:pPr indent="0" marL="0">
+              <a:lnSpc>
+                <a:spcPct val="110000"/>
+              </a:lnSpc>
+              <a:buNone/>
+            </a:pPr>
+            <a:r>
+              <a:rPr lang="en-US" sz="1400" dirty="0">
+                <a:solidFill>
+                  <a:srgbClr val="9AA6B2"/>
+                </a:solidFill>
+                <a:latin typeface="Malgun Gothic" pitchFamily="34" charset="0"/>
+                <a:ea typeface="Malgun Gothic" pitchFamily="34" charset="-122"/>
+                <a:cs typeface="Malgun Gothic" pitchFamily="34" charset="-120"/>
+              </a:rPr>
+              <a:t>nvidia-smi · nvcc · cmake 버전 확인</a:t>
+            </a:r>
+            <a:endParaRPr lang="en-US" sz="1400" dirty="0"/>
+          </a:p>
+        </p:txBody>
+      </p:sp>
+      <p:sp>
+        <p:nvSpPr>
+          <p:cNvPr id="8" name="Shape 6"/>
+          <p:cNvSpPr/>
+          <p:nvPr/>
+        </p:nvSpPr>
+        <p:spPr>
+          <a:xfrm>
+            <a:off x="6309360" y="1554480"/>
+            <a:ext cx="5303520" cy="1965960"/>
+          </a:xfrm>
+          <a:prstGeom prst="roundRect">
+            <a:avLst>
+              <a:gd name="adj" fmla="val 3721"/>
+            </a:avLst>
+          </a:prstGeom>
+          <a:solidFill>
+            <a:srgbClr val="1E232C"/>
+          </a:solidFill>
+          <a:ln/>
+        </p:spPr>
+      </p:sp>
+      <p:sp>
+        <p:nvSpPr>
+          <p:cNvPr id="9" name="Text 7"/>
+          <p:cNvSpPr/>
+          <p:nvPr/>
+        </p:nvSpPr>
+        <p:spPr>
+          <a:xfrm>
+            <a:off x="6565392" y="1755648"/>
+            <a:ext cx="1188720" cy="502920"/>
+          </a:xfrm>
+          <a:prstGeom prst="roundRect">
+            <a:avLst>
+              <a:gd name="adj" fmla="val 14545"/>
+            </a:avLst>
+          </a:prstGeom>
+          <a:solidFill>
+            <a:srgbClr val="8CC63F"/>
+          </a:solidFill>
+          <a:ln/>
+        </p:spPr>
+        <p:txBody>
+          <a:bodyPr wrap="square" rtlCol="0" anchor="ctr"/>
+          <a:lstStyle/>
+          <a:p>
+            <a:pPr algn="ctr" indent="0" marL="0">
+              <a:buNone/>
+            </a:pPr>
+            <a:r>
+              <a:rPr lang="en-US" sz="1700" b="1" dirty="0">
+                <a:solidFill>
+                  <a:srgbClr val="13161C"/>
+                </a:solidFill>
+                <a:latin typeface="Courier New" pitchFamily="34" charset="0"/>
+                <a:ea typeface="Courier New" pitchFamily="34" charset="-122"/>
+                <a:cs typeface="Courier New" pitchFamily="34" charset="-120"/>
+              </a:rPr>
+              <a:t>Ex 1</a:t>
+            </a:r>
+            <a:endParaRPr lang="en-US" sz="1700" dirty="0"/>
+          </a:p>
+        </p:txBody>
+      </p:sp>
+      <p:sp>
+        <p:nvSpPr>
+          <p:cNvPr id="10" name="Text 8"/>
+          <p:cNvSpPr/>
+          <p:nvPr/>
+        </p:nvSpPr>
+        <p:spPr>
+          <a:xfrm>
+            <a:off x="7909560" y="1773936"/>
+            <a:ext cx="3474720" cy="822960"/>
+          </a:xfrm>
+          <a:prstGeom prst="rect">
+            <a:avLst/>
+          </a:prstGeom>
+          <a:noFill/>
+          <a:ln/>
+        </p:spPr>
+        <p:txBody>
+          <a:bodyPr wrap="square" lIns="0" tIns="0" rIns="0" bIns="0" rtlCol="0" anchor="t"/>
+          <a:lstStyle/>
+          <a:p>
+            <a:pPr indent="0" marL="0">
+              <a:buNone/>
+            </a:pPr>
+            <a:r>
+              <a:rPr lang="en-US" sz="1700" b="1" dirty="0">
+                <a:solidFill>
+                  <a:srgbClr val="E8EDF2"/>
+                </a:solidFill>
+                <a:latin typeface="Malgun Gothic" pitchFamily="34" charset="0"/>
+                <a:ea typeface="Malgun Gothic" pitchFamily="34" charset="-122"/>
+                <a:cs typeface="Malgun Gothic" pitchFamily="34" charset="-120"/>
+              </a:rPr>
+              <a:t>빌드하기</a:t>
+            </a:r>
+            <a:endParaRPr lang="en-US" sz="1700" dirty="0"/>
+          </a:p>
+        </p:txBody>
+      </p:sp>
+      <p:sp>
+        <p:nvSpPr>
+          <p:cNvPr id="11" name="Text 9"/>
+          <p:cNvSpPr/>
+          <p:nvPr/>
+        </p:nvSpPr>
+        <p:spPr>
+          <a:xfrm>
+            <a:off x="6565392" y="2651760"/>
+            <a:ext cx="4791456" cy="731520"/>
+          </a:xfrm>
+          <a:prstGeom prst="rect">
+            <a:avLst/>
+          </a:prstGeom>
+          <a:noFill/>
+          <a:ln/>
+        </p:spPr>
+        <p:txBody>
+          <a:bodyPr wrap="square" lIns="0" tIns="0" rIns="0" bIns="0" rtlCol="0" anchor="t"/>
+          <a:lstStyle/>
+          <a:p>
+            <a:pPr indent="0" marL="0">
+              <a:lnSpc>
+                <a:spcPct val="110000"/>
+              </a:lnSpc>
+              <a:buNone/>
+            </a:pPr>
+            <a:r>
+              <a:rPr lang="en-US" sz="1400" dirty="0">
+                <a:solidFill>
+                  <a:srgbClr val="9AA6B2"/>
+                </a:solidFill>
+                <a:latin typeface="Malgun Gothic" pitchFamily="34" charset="0"/>
+                <a:ea typeface="Malgun Gothic" pitchFamily="34" charset="-122"/>
+                <a:cs typeface="Malgun Gothic" pitchFamily="34" charset="-120"/>
+              </a:rPr>
+              <a:t>cmake + make로 cuda_memtest 생성</a:t>
+            </a:r>
+            <a:endParaRPr lang="en-US" sz="1400" dirty="0"/>
+          </a:p>
+        </p:txBody>
+      </p:sp>
+      <p:sp>
+        <p:nvSpPr>
+          <p:cNvPr id="12" name="Shape 10"/>
+          <p:cNvSpPr/>
+          <p:nvPr/>
+        </p:nvSpPr>
+        <p:spPr>
+          <a:xfrm>
+            <a:off x="548640" y="3840480"/>
+            <a:ext cx="5303520" cy="1965960"/>
+          </a:xfrm>
+          <a:prstGeom prst="roundRect">
+            <a:avLst>
+              <a:gd name="adj" fmla="val 3721"/>
+            </a:avLst>
+          </a:prstGeom>
+          <a:solidFill>
+            <a:srgbClr val="1E232C"/>
+          </a:solidFill>
+          <a:ln/>
+        </p:spPr>
+      </p:sp>
+      <p:sp>
+        <p:nvSpPr>
+          <p:cNvPr id="13" name="Text 11"/>
+          <p:cNvSpPr/>
+          <p:nvPr/>
+        </p:nvSpPr>
+        <p:spPr>
+          <a:xfrm>
+            <a:off x="804672" y="4041648"/>
+            <a:ext cx="1188720" cy="502920"/>
+          </a:xfrm>
+          <a:prstGeom prst="roundRect">
+            <a:avLst>
+              <a:gd name="adj" fmla="val 14545"/>
+            </a:avLst>
+          </a:prstGeom>
+          <a:solidFill>
+            <a:srgbClr val="E0A458"/>
+          </a:solidFill>
+          <a:ln/>
+        </p:spPr>
+        <p:txBody>
+          <a:bodyPr wrap="square" rtlCol="0" anchor="ctr"/>
+          <a:lstStyle/>
+          <a:p>
+            <a:pPr algn="ctr" indent="0" marL="0">
+              <a:buNone/>
+            </a:pPr>
+            <a:r>
+              <a:rPr lang="en-US" sz="1700" b="1" dirty="0">
+                <a:solidFill>
+                  <a:srgbClr val="13161C"/>
+                </a:solidFill>
+                <a:latin typeface="Courier New" pitchFamily="34" charset="0"/>
+                <a:ea typeface="Courier New" pitchFamily="34" charset="-122"/>
+                <a:cs typeface="Courier New" pitchFamily="34" charset="-120"/>
+              </a:rPr>
+              <a:t>Ex 2</a:t>
+            </a:r>
+            <a:endParaRPr lang="en-US" sz="1700" dirty="0"/>
+          </a:p>
+        </p:txBody>
+      </p:sp>
+      <p:sp>
+        <p:nvSpPr>
+          <p:cNvPr id="14" name="Text 12"/>
+          <p:cNvSpPr/>
+          <p:nvPr/>
+        </p:nvSpPr>
+        <p:spPr>
+          <a:xfrm>
+            <a:off x="2148840" y="4059936"/>
+            <a:ext cx="3474720" cy="822960"/>
+          </a:xfrm>
+          <a:prstGeom prst="rect">
+            <a:avLst/>
+          </a:prstGeom>
+          <a:noFill/>
+          <a:ln/>
+        </p:spPr>
+        <p:txBody>
+          <a:bodyPr wrap="square" lIns="0" tIns="0" rIns="0" bIns="0" rtlCol="0" anchor="t"/>
+          <a:lstStyle/>
+          <a:p>
+            <a:pPr indent="0" marL="0">
+              <a:buNone/>
+            </a:pPr>
+            <a:r>
+              <a:rPr lang="en-US" sz="1700" b="1" dirty="0">
+                <a:solidFill>
+                  <a:srgbClr val="E8EDF2"/>
+                </a:solidFill>
+                <a:latin typeface="Malgun Gothic" pitchFamily="34" charset="0"/>
+                <a:ea typeface="Malgun Gothic" pitchFamily="34" charset="-122"/>
+                <a:cs typeface="Malgun Gothic" pitchFamily="34" charset="-120"/>
+              </a:rPr>
+              <a:t>테스트 목록 보기</a:t>
+            </a:r>
+            <a:endParaRPr lang="en-US" sz="1700" dirty="0"/>
+          </a:p>
+        </p:txBody>
+      </p:sp>
+      <p:sp>
+        <p:nvSpPr>
+          <p:cNvPr id="15" name="Text 13"/>
+          <p:cNvSpPr/>
+          <p:nvPr/>
+        </p:nvSpPr>
+        <p:spPr>
+          <a:xfrm>
+            <a:off x="804672" y="4937760"/>
+            <a:ext cx="4791456" cy="731520"/>
+          </a:xfrm>
+          <a:prstGeom prst="rect">
+            <a:avLst/>
+          </a:prstGeom>
+          <a:noFill/>
+          <a:ln/>
+        </p:spPr>
+        <p:txBody>
+          <a:bodyPr wrap="square" lIns="0" tIns="0" rIns="0" bIns="0" rtlCol="0" anchor="t"/>
+          <a:lstStyle/>
+          <a:p>
+            <a:pPr indent="0" marL="0">
+              <a:lnSpc>
+                <a:spcPct val="110000"/>
+              </a:lnSpc>
+              <a:buNone/>
+            </a:pPr>
+            <a:r>
+              <a:rPr lang="en-US" sz="1400" dirty="0">
+                <a:solidFill>
+                  <a:srgbClr val="9AA6B2"/>
+                </a:solidFill>
+                <a:latin typeface="Malgun Gothic" pitchFamily="34" charset="0"/>
+                <a:ea typeface="Malgun Gothic" pitchFamily="34" charset="-122"/>
+                <a:cs typeface="Malgun Gothic" pitchFamily="34" charset="-120"/>
+              </a:rPr>
+              <a:t>--list_tests 로 11개 테스트 확인</a:t>
+            </a:r>
+            <a:endParaRPr lang="en-US" sz="1400" dirty="0"/>
+          </a:p>
+        </p:txBody>
+      </p:sp>
+      <p:sp>
+        <p:nvSpPr>
+          <p:cNvPr id="16" name="Shape 14"/>
+          <p:cNvSpPr/>
+          <p:nvPr/>
+        </p:nvSpPr>
+        <p:spPr>
+          <a:xfrm>
+            <a:off x="6309360" y="3840480"/>
+            <a:ext cx="5303520" cy="1965960"/>
+          </a:xfrm>
+          <a:prstGeom prst="roundRect">
+            <a:avLst>
+              <a:gd name="adj" fmla="val 3721"/>
+            </a:avLst>
+          </a:prstGeom>
+          <a:solidFill>
+            <a:srgbClr val="1E232C"/>
+          </a:solidFill>
+          <a:ln/>
+        </p:spPr>
+      </p:sp>
+      <p:sp>
+        <p:nvSpPr>
+          <p:cNvPr id="17" name="Text 15"/>
+          <p:cNvSpPr/>
+          <p:nvPr/>
+        </p:nvSpPr>
+        <p:spPr>
+          <a:xfrm>
+            <a:off x="6565392" y="4041648"/>
+            <a:ext cx="1188720" cy="502920"/>
+          </a:xfrm>
+          <a:prstGeom prst="roundRect">
+            <a:avLst>
+              <a:gd name="adj" fmla="val 14545"/>
+            </a:avLst>
+          </a:prstGeom>
+          <a:solidFill>
+            <a:srgbClr val="8CC63F"/>
+          </a:solidFill>
+          <a:ln/>
+        </p:spPr>
+        <p:txBody>
+          <a:bodyPr wrap="square" rtlCol="0" anchor="ctr"/>
+          <a:lstStyle/>
+          <a:p>
+            <a:pPr algn="ctr" indent="0" marL="0">
+              <a:buNone/>
+            </a:pPr>
+            <a:r>
+              <a:rPr lang="en-US" sz="1700" b="1" dirty="0">
+                <a:solidFill>
+                  <a:srgbClr val="13161C"/>
+                </a:solidFill>
+                <a:latin typeface="Courier New" pitchFamily="34" charset="0"/>
+                <a:ea typeface="Courier New" pitchFamily="34" charset="-122"/>
+                <a:cs typeface="Courier New" pitchFamily="34" charset="-120"/>
+              </a:rPr>
+              <a:t>Ex 3</a:t>
+            </a:r>
+            <a:endParaRPr lang="en-US" sz="1700" dirty="0"/>
+          </a:p>
+        </p:txBody>
+      </p:sp>
+      <p:sp>
+        <p:nvSpPr>
+          <p:cNvPr id="18" name="Text 16"/>
+          <p:cNvSpPr/>
+          <p:nvPr/>
+        </p:nvSpPr>
+        <p:spPr>
+          <a:xfrm>
+            <a:off x="7909560" y="4059936"/>
+            <a:ext cx="3474720" cy="822960"/>
+          </a:xfrm>
+          <a:prstGeom prst="rect">
+            <a:avLst/>
+          </a:prstGeom>
+          <a:noFill/>
+          <a:ln/>
+        </p:spPr>
+        <p:txBody>
+          <a:bodyPr wrap="square" lIns="0" tIns="0" rIns="0" bIns="0" rtlCol="0" anchor="t"/>
+          <a:lstStyle/>
+          <a:p>
+            <a:pPr indent="0" marL="0">
+              <a:buNone/>
+            </a:pPr>
+            <a:r>
+              <a:rPr lang="en-US" sz="1700" b="1" dirty="0">
+                <a:solidFill>
+                  <a:srgbClr val="E8EDF2"/>
+                </a:solidFill>
+                <a:latin typeface="Malgun Gothic" pitchFamily="34" charset="0"/>
+                <a:ea typeface="Malgun Gothic" pitchFamily="34" charset="-122"/>
+                <a:cs typeface="Malgun Gothic" pitchFamily="34" charset="-120"/>
+              </a:rPr>
+              <a:t>첫 실행</a:t>
+            </a:r>
+            <a:endParaRPr lang="en-US" sz="1700" dirty="0"/>
+          </a:p>
+        </p:txBody>
+      </p:sp>
+      <p:sp>
+        <p:nvSpPr>
+          <p:cNvPr id="19" name="Text 17"/>
+          <p:cNvSpPr/>
+          <p:nvPr/>
+        </p:nvSpPr>
+        <p:spPr>
+          <a:xfrm>
+            <a:off x="6565392" y="4937760"/>
+            <a:ext cx="4791456" cy="731520"/>
+          </a:xfrm>
+          <a:prstGeom prst="rect">
+            <a:avLst/>
+          </a:prstGeom>
+          <a:noFill/>
+          <a:ln/>
+        </p:spPr>
+        <p:txBody>
+          <a:bodyPr wrap="square" lIns="0" tIns="0" rIns="0" bIns="0" rtlCol="0" anchor="t"/>
+          <a:lstStyle/>
+          <a:p>
+            <a:pPr indent="0" marL="0">
+              <a:lnSpc>
+                <a:spcPct val="110000"/>
+              </a:lnSpc>
+              <a:buNone/>
+            </a:pPr>
+            <a:r>
+              <a:rPr lang="en-US" sz="1400" dirty="0">
+                <a:solidFill>
+                  <a:srgbClr val="9AA6B2"/>
+                </a:solidFill>
+                <a:latin typeface="Malgun Gothic" pitchFamily="34" charset="0"/>
+                <a:ea typeface="Malgun Gothic" pitchFamily="34" charset="-122"/>
+                <a:cs typeface="Malgun Gothic" pitchFamily="34" charset="-120"/>
+              </a:rPr>
+              <a:t>--stress 로 GPU 메모리 실제 검사</a:t>
+            </a:r>
+            <a:endParaRPr lang="en-US" sz="1400" dirty="0"/>
+          </a:p>
+        </p:txBody>
+      </p:sp>
+      <p:sp>
+        <p:nvSpPr>
+          <p:cNvPr id="20" name="Text 18"/>
+          <p:cNvSpPr/>
+          <p:nvPr/>
+        </p:nvSpPr>
+        <p:spPr>
+          <a:xfrm>
+            <a:off x="548640" y="5943600"/>
+            <a:ext cx="11064240" cy="365760"/>
+          </a:xfrm>
+          <a:prstGeom prst="rect">
+            <a:avLst/>
+          </a:prstGeom>
+          <a:noFill/>
+          <a:ln/>
+        </p:spPr>
+        <p:txBody>
+          <a:bodyPr wrap="square" lIns="0" tIns="0" rIns="0" bIns="0" rtlCol="0" anchor="ctr"/>
+          <a:lstStyle/>
+          <a:p>
+            <a:pPr algn="ctr" indent="0" marL="0">
+              <a:buNone/>
+            </a:pPr>
+            <a:r>
+              <a:rPr lang="en-US" sz="1300" i="1" dirty="0">
+                <a:solidFill>
+                  <a:srgbClr val="9AA6B2"/>
+                </a:solidFill>
+                <a:latin typeface="Malgun Gothic" pitchFamily="34" charset="0"/>
+                <a:ea typeface="Malgun Gothic" pitchFamily="34" charset="-122"/>
+                <a:cs typeface="Malgun Gothic" pitchFamily="34" charset="-120"/>
+              </a:rPr>
+              <a:t>GPU가 없다면 Google Colab(런타임→GPU)으로 진행할 수 있습니다.</a:t>
+            </a:r>
+            <a:endParaRPr lang="en-US" sz="1300" dirty="0"/>
+          </a:p>
+        </p:txBody>
+      </p:sp>
+    </p:spTree>
+  </p:cSld>
+  <p:clrMapOvr>
+    <a:masterClrMapping/>
+  </p:clrMapOvr>
+</p:sld>
+</file>
+
+<file path=ppt/slides/slide11.xml><?xml version="1.0" encoding="utf-8"?>
+<p:sld xmlns:a="http://schemas.openxmlformats.org/drawingml/2006/main" xmlns:r="http://schemas.openxmlformats.org/officeDocument/2006/relationships" xmlns:p="http://schemas.openxmlformats.org/presentationml/2006/main">
+  <p:cSld name="Slide 11">
+    <p:bg>
+      <p:bgPr>
+        <a:solidFill>
+          <a:srgbClr val="13161C"/>
+        </a:solidFill>
+      </p:bgPr>
+    </p:bg>
+    <p:spTree>
+      <p:nvGrpSpPr>
+        <p:cNvPr id="1" name=""/>
+        <p:cNvGrpSpPr/>
+        <p:nvPr/>
+      </p:nvGrpSpPr>
+      <p:grpSpPr>
+        <a:xfrm>
+          <a:off x="0" y="0"/>
+          <a:ext cx="0" cy="0"/>
+          <a:chOff x="0" y="0"/>
+          <a:chExt cx="0" cy="0"/>
+        </a:xfrm>
+      </p:grpSpPr>
+      <p:sp>
+        <p:nvSpPr>
+          <p:cNvPr id="2" name="Text 0"/>
+          <p:cNvSpPr/>
+          <p:nvPr/>
+        </p:nvSpPr>
+        <p:spPr>
+          <a:xfrm>
             <a:off x="548640" y="1463040"/>
             <a:ext cx="9144000" cy="457200"/>
           </a:xfrm>
@@ -3725,7 +4551,7 @@
                 <a:ea typeface="Courier New" pitchFamily="34" charset="-122"/>
                 <a:cs typeface="Courier New" pitchFamily="34" charset="-120"/>
               </a:rPr>
-              <a:t>3</a:t>
+              <a:t>2</a:t>
             </a:r>
             <a:endParaRPr lang="en-US" sz="2200" dirty="0"/>
           </a:p>
@@ -3764,7 +4590,7 @@
                 <a:ea typeface="Malgun Gothic" pitchFamily="34" charset="-122"/>
                 <a:cs typeface="Malgun Gothic" pitchFamily="34" charset="-120"/>
               </a:rPr>
-              <a:t>cuda_memtest가 푸는 문제</a:t>
+              <a:t>CUDA 하드웨어 구조 · 호스트와 디바이스</a:t>
             </a:r>
             <a:endParaRPr lang="en-US" sz="3000" dirty="0"/>
           </a:p>
@@ -3778,8 +4604,8 @@
         </p:nvSpPr>
         <p:spPr>
           <a:xfrm>
-            <a:off x="548640" y="1463040"/>
-            <a:ext cx="11064240" cy="457200"/>
+            <a:off x="548640" y="1371600"/>
+            <a:ext cx="11064240" cy="411480"/>
           </a:xfrm>
           <a:prstGeom prst="rect">
             <a:avLst/>
@@ -3795,7 +4621,7 @@
               <a:buNone/>
             </a:pPr>
             <a:r>
-              <a:rPr lang="en-US" sz="1700" dirty="0">
+              <a:rPr lang="en-US" sz="1500" dirty="0">
                 <a:solidFill>
                   <a:srgbClr val="9AA6B2"/>
                 </a:solidFill>
@@ -3803,9 +4629,9 @@
                 <a:ea typeface="Malgun Gothic" pitchFamily="34" charset="-122"/>
                 <a:cs typeface="Malgun Gothic" pitchFamily="34" charset="-120"/>
               </a:rPr>
-              <a:t>GPU 메모리도 고장 납니다. 이 도구는 그 고장을 찾아냅니다.</a:t>
-            </a:r>
-            <a:endParaRPr lang="en-US" sz="1700" dirty="0"/>
+              <a:t>CPU(호스트)와 GPU(디바이스)는 별개의 메모리를 가지며, 데이터는 PCIe를 통해 오갑니다.</a:t>
+            </a:r>
+            <a:endParaRPr lang="en-US" sz="1500" dirty="0"/>
           </a:p>
         </p:txBody>
       </p:sp>
@@ -3817,18 +4643,23 @@
         </p:nvSpPr>
         <p:spPr>
           <a:xfrm>
-            <a:off x="548640" y="2148840"/>
-            <a:ext cx="5349240" cy="2377440"/>
+            <a:off x="548640" y="1920240"/>
+            <a:ext cx="4297680" cy="3703320"/>
           </a:xfrm>
           <a:prstGeom prst="roundRect">
             <a:avLst>
-              <a:gd name="adj" fmla="val 3077"/>
+              <a:gd name="adj" fmla="val 1728"/>
             </a:avLst>
           </a:prstGeom>
           <a:solidFill>
             <a:srgbClr val="1E232C"/>
           </a:solidFill>
-          <a:ln/>
+          <a:ln w="19050">
+            <a:solidFill>
+              <a:srgbClr val="4FB0C6"/>
+            </a:solidFill>
+            <a:prstDash val="solid"/>
+          </a:ln>
         </p:spPr>
       </p:sp>
       <p:sp>
@@ -3839,8 +4670,8 @@
         </p:nvSpPr>
         <p:spPr>
           <a:xfrm>
-            <a:off x="822960" y="2377440"/>
-            <a:ext cx="4800600" cy="457200"/>
+            <a:off x="777240" y="2057400"/>
+            <a:ext cx="3840480" cy="365760"/>
           </a:xfrm>
           <a:prstGeom prst="rect">
             <a:avLst/>
@@ -3856,133 +4687,267 @@
               <a:buNone/>
             </a:pPr>
             <a:r>
-              <a:rPr lang="en-US" sz="2000" b="1" dirty="0">
-                <a:solidFill>
-                  <a:srgbClr val="8CC63F"/>
-                </a:solidFill>
-                <a:latin typeface="Malgun Gothic" pitchFamily="34" charset="0"/>
-                <a:ea typeface="Malgun Gothic" pitchFamily="34" charset="-122"/>
-                <a:cs typeface="Malgun Gothic" pitchFamily="34" charset="-120"/>
-              </a:rPr>
-              <a:t>하드 오류(hard error)</a:t>
-            </a:r>
-            <a:endParaRPr lang="en-US" sz="2000" dirty="0"/>
-          </a:p>
-        </p:txBody>
-      </p:sp>
-      <p:sp>
-        <p:nvSpPr>
-          <p:cNvPr id="7" name="Text 5"/>
-          <p:cNvSpPr/>
-          <p:nvPr/>
-        </p:nvSpPr>
-        <p:spPr>
-          <a:xfrm>
-            <a:off x="822960" y="2834640"/>
-            <a:ext cx="4800600" cy="411480"/>
-          </a:xfrm>
-          <a:prstGeom prst="rect">
-            <a:avLst/>
-          </a:prstGeom>
-          <a:noFill/>
-          <a:ln/>
-        </p:spPr>
-        <p:txBody>
-          <a:bodyPr wrap="square" lIns="0" tIns="0" rIns="0" bIns="0" rtlCol="0" anchor="ctr"/>
-          <a:lstStyle/>
-          <a:p>
-            <a:pPr indent="0" marL="0">
-              <a:buNone/>
-            </a:pPr>
-            <a:r>
-              <a:rPr lang="en-US" sz="1500" b="1" dirty="0">
-                <a:solidFill>
-                  <a:srgbClr val="9AA6B2"/>
-                </a:solidFill>
-                <a:latin typeface="Malgun Gothic" pitchFamily="34" charset="0"/>
-                <a:ea typeface="Malgun Gothic" pitchFamily="34" charset="-122"/>
-                <a:cs typeface="Malgun Gothic" pitchFamily="34" charset="-120"/>
-              </a:rPr>
-              <a:t>영구적 고장</a:t>
-            </a:r>
-            <a:endParaRPr lang="en-US" sz="1500" dirty="0"/>
-          </a:p>
-        </p:txBody>
-      </p:sp>
-      <p:sp>
-        <p:nvSpPr>
-          <p:cNvPr id="8" name="Text 6"/>
-          <p:cNvSpPr/>
-          <p:nvPr/>
-        </p:nvSpPr>
-        <p:spPr>
-          <a:xfrm>
-            <a:off x="822960" y="3337560"/>
-            <a:ext cx="4800600" cy="1005840"/>
-          </a:xfrm>
-          <a:prstGeom prst="rect">
-            <a:avLst/>
-          </a:prstGeom>
-          <a:noFill/>
-          <a:ln/>
-        </p:spPr>
-        <p:txBody>
-          <a:bodyPr wrap="square" lIns="0" tIns="0" rIns="0" bIns="0" rtlCol="0" anchor="t"/>
-          <a:lstStyle/>
-          <a:p>
-            <a:pPr indent="0" marL="0">
-              <a:lnSpc>
-                <a:spcPct val="120000"/>
-              </a:lnSpc>
-              <a:buNone/>
-            </a:pPr>
-            <a:r>
-              <a:rPr lang="en-US" sz="1500" dirty="0">
-                <a:solidFill>
-                  <a:srgbClr val="E8EDF2"/>
-                </a:solidFill>
-                <a:latin typeface="Malgun Gothic" pitchFamily="34" charset="0"/>
-                <a:ea typeface="Malgun Gothic" pitchFamily="34" charset="-122"/>
-                <a:cs typeface="Malgun Gothic" pitchFamily="34" charset="-120"/>
-              </a:rPr>
-              <a:t>제조 결함·노후화로 특정 비트가 항상 틀림. 재부팅해도 그대로.</a:t>
-            </a:r>
-            <a:endParaRPr lang="en-US" sz="1500" dirty="0"/>
-          </a:p>
-        </p:txBody>
-      </p:sp>
-      <p:sp>
-        <p:nvSpPr>
-          <p:cNvPr id="9" name="Shape 7"/>
-          <p:cNvSpPr/>
-          <p:nvPr/>
-        </p:nvSpPr>
-        <p:spPr>
-          <a:xfrm>
-            <a:off x="6263640" y="2148840"/>
-            <a:ext cx="5349240" cy="2377440"/>
+              <a:rPr lang="en-US" sz="1600" b="1" dirty="0">
+                <a:solidFill>
+                  <a:srgbClr val="4FB0C6"/>
+                </a:solidFill>
+                <a:latin typeface="Malgun Gothic" pitchFamily="34" charset="0"/>
+                <a:ea typeface="Malgun Gothic" pitchFamily="34" charset="-122"/>
+                <a:cs typeface="Malgun Gothic" pitchFamily="34" charset="-120"/>
+              </a:rPr>
+              <a:t>호스트(Host)</a:t>
+            </a:r>
+            <a:endParaRPr lang="en-US" sz="1600" dirty="0"/>
+          </a:p>
+        </p:txBody>
+      </p:sp>
+      <p:sp>
+        <p:nvSpPr>
+          <p:cNvPr id="7" name="Shape 5"/>
+          <p:cNvSpPr/>
+          <p:nvPr/>
+        </p:nvSpPr>
+        <p:spPr>
+          <a:xfrm>
+            <a:off x="868680" y="2606040"/>
+            <a:ext cx="3657600" cy="1234440"/>
           </a:xfrm>
           <a:prstGeom prst="roundRect">
             <a:avLst>
-              <a:gd name="adj" fmla="val 3077"/>
+              <a:gd name="adj" fmla="val 3704"/>
+            </a:avLst>
+          </a:prstGeom>
+          <a:solidFill>
+            <a:srgbClr val="0E1116"/>
+          </a:solidFill>
+          <a:ln w="12700">
+            <a:solidFill>
+              <a:srgbClr val="2C3440"/>
+            </a:solidFill>
+            <a:prstDash val="solid"/>
+          </a:ln>
+        </p:spPr>
+      </p:sp>
+      <p:sp>
+        <p:nvSpPr>
+          <p:cNvPr id="8" name="Text 6"/>
+          <p:cNvSpPr/>
+          <p:nvPr/>
+        </p:nvSpPr>
+        <p:spPr>
+          <a:xfrm>
+            <a:off x="868680" y="2788920"/>
+            <a:ext cx="3657600" cy="457200"/>
+          </a:xfrm>
+          <a:prstGeom prst="rect">
+            <a:avLst/>
+          </a:prstGeom>
+          <a:noFill/>
+          <a:ln/>
+        </p:spPr>
+        <p:txBody>
+          <a:bodyPr wrap="square" lIns="0" tIns="0" rIns="0" bIns="0" rtlCol="0" anchor="ctr"/>
+          <a:lstStyle/>
+          <a:p>
+            <a:pPr algn="ctr" indent="0" marL="0">
+              <a:buNone/>
+            </a:pPr>
+            <a:r>
+              <a:rPr lang="en-US" sz="2000" b="1" dirty="0">
+                <a:solidFill>
+                  <a:srgbClr val="E8EDF2"/>
+                </a:solidFill>
+                <a:latin typeface="Malgun Gothic" pitchFamily="34" charset="0"/>
+                <a:ea typeface="Malgun Gothic" pitchFamily="34" charset="-122"/>
+                <a:cs typeface="Malgun Gothic" pitchFamily="34" charset="-120"/>
+              </a:rPr>
+              <a:t>CPU</a:t>
+            </a:r>
+            <a:endParaRPr lang="en-US" sz="2000" dirty="0"/>
+          </a:p>
+        </p:txBody>
+      </p:sp>
+      <p:sp>
+        <p:nvSpPr>
+          <p:cNvPr id="9" name="Text 7"/>
+          <p:cNvSpPr/>
+          <p:nvPr/>
+        </p:nvSpPr>
+        <p:spPr>
+          <a:xfrm>
+            <a:off x="868680" y="3291840"/>
+            <a:ext cx="3657600" cy="457200"/>
+          </a:xfrm>
+          <a:prstGeom prst="rect">
+            <a:avLst/>
+          </a:prstGeom>
+          <a:noFill/>
+          <a:ln/>
+        </p:spPr>
+        <p:txBody>
+          <a:bodyPr wrap="square" lIns="0" tIns="0" rIns="0" bIns="0" rtlCol="0" anchor="ctr"/>
+          <a:lstStyle/>
+          <a:p>
+            <a:pPr algn="ctr" indent="0" marL="0">
+              <a:buNone/>
+            </a:pPr>
+            <a:r>
+              <a:rPr lang="en-US" sz="1200" dirty="0">
+                <a:solidFill>
+                  <a:srgbClr val="9AA6B2"/>
+                </a:solidFill>
+                <a:latin typeface="Malgun Gothic" pitchFamily="34" charset="0"/>
+                <a:ea typeface="Malgun Gothic" pitchFamily="34" charset="-122"/>
+                <a:cs typeface="Malgun Gothic" pitchFamily="34" charset="-120"/>
+              </a:rPr>
+              <a:t>강력한 코어 수 개~수십 개</a:t>
+            </a:r>
+            <a:endParaRPr lang="en-US" sz="1200" dirty="0"/>
+          </a:p>
+        </p:txBody>
+      </p:sp>
+      <p:sp>
+        <p:nvSpPr>
+          <p:cNvPr id="10" name="Shape 8"/>
+          <p:cNvSpPr/>
+          <p:nvPr/>
+        </p:nvSpPr>
+        <p:spPr>
+          <a:xfrm>
+            <a:off x="868680" y="4023360"/>
+            <a:ext cx="3657600" cy="1280160"/>
+          </a:xfrm>
+          <a:prstGeom prst="roundRect">
+            <a:avLst>
+              <a:gd name="adj" fmla="val 3571"/>
+            </a:avLst>
+          </a:prstGeom>
+          <a:solidFill>
+            <a:srgbClr val="0E1116"/>
+          </a:solidFill>
+          <a:ln w="12700">
+            <a:solidFill>
+              <a:srgbClr val="2C3440"/>
+            </a:solidFill>
+            <a:prstDash val="solid"/>
+          </a:ln>
+        </p:spPr>
+      </p:sp>
+      <p:sp>
+        <p:nvSpPr>
+          <p:cNvPr id="11" name="Text 9"/>
+          <p:cNvSpPr/>
+          <p:nvPr/>
+        </p:nvSpPr>
+        <p:spPr>
+          <a:xfrm>
+            <a:off x="868680" y="4251960"/>
+            <a:ext cx="3657600" cy="457200"/>
+          </a:xfrm>
+          <a:prstGeom prst="rect">
+            <a:avLst/>
+          </a:prstGeom>
+          <a:noFill/>
+          <a:ln/>
+        </p:spPr>
+        <p:txBody>
+          <a:bodyPr wrap="square" lIns="0" tIns="0" rIns="0" bIns="0" rtlCol="0" anchor="ctr"/>
+          <a:lstStyle/>
+          <a:p>
+            <a:pPr algn="ctr" indent="0" marL="0">
+              <a:buNone/>
+            </a:pPr>
+            <a:r>
+              <a:rPr lang="en-US" sz="1600" b="1" dirty="0">
+                <a:solidFill>
+                  <a:srgbClr val="E8EDF2"/>
+                </a:solidFill>
+                <a:latin typeface="Malgun Gothic" pitchFamily="34" charset="0"/>
+                <a:ea typeface="Malgun Gothic" pitchFamily="34" charset="-122"/>
+                <a:cs typeface="Malgun Gothic" pitchFamily="34" charset="-120"/>
+              </a:rPr>
+              <a:t>호스트 메모리 (RAM)</a:t>
+            </a:r>
+            <a:endParaRPr lang="en-US" sz="1600" dirty="0"/>
+          </a:p>
+        </p:txBody>
+      </p:sp>
+      <p:sp>
+        <p:nvSpPr>
+          <p:cNvPr id="12" name="Text 10"/>
+          <p:cNvSpPr/>
+          <p:nvPr/>
+        </p:nvSpPr>
+        <p:spPr>
+          <a:xfrm>
+            <a:off x="868680" y="4754880"/>
+            <a:ext cx="3657600" cy="365760"/>
+          </a:xfrm>
+          <a:prstGeom prst="rect">
+            <a:avLst/>
+          </a:prstGeom>
+          <a:noFill/>
+          <a:ln/>
+        </p:spPr>
+        <p:txBody>
+          <a:bodyPr wrap="square" lIns="0" tIns="0" rIns="0" bIns="0" rtlCol="0" anchor="ctr"/>
+          <a:lstStyle/>
+          <a:p>
+            <a:pPr algn="ctr" indent="0" marL="0">
+              <a:buNone/>
+            </a:pPr>
+            <a:r>
+              <a:rPr lang="en-US" sz="1200" dirty="0">
+                <a:solidFill>
+                  <a:srgbClr val="9AA6B2"/>
+                </a:solidFill>
+                <a:latin typeface="Malgun Gothic" pitchFamily="34" charset="0"/>
+                <a:ea typeface="Malgun Gothic" pitchFamily="34" charset="-122"/>
+                <a:cs typeface="Malgun Gothic" pitchFamily="34" charset="-120"/>
+              </a:rPr>
+              <a:t>시스템 메인 메모리</a:t>
+            </a:r>
+            <a:endParaRPr lang="en-US" sz="1200" dirty="0"/>
+          </a:p>
+        </p:txBody>
+      </p:sp>
+      <p:sp>
+        <p:nvSpPr>
+          <p:cNvPr id="13" name="Shape 11"/>
+          <p:cNvSpPr/>
+          <p:nvPr/>
+        </p:nvSpPr>
+        <p:spPr>
+          <a:xfrm>
+            <a:off x="7315200" y="1920240"/>
+            <a:ext cx="4297680" cy="3703320"/>
+          </a:xfrm>
+          <a:prstGeom prst="roundRect">
+            <a:avLst>
+              <a:gd name="adj" fmla="val 1728"/>
             </a:avLst>
           </a:prstGeom>
           <a:solidFill>
             <a:srgbClr val="1E232C"/>
           </a:solidFill>
-          <a:ln/>
-        </p:spPr>
-      </p:sp>
-      <p:sp>
-        <p:nvSpPr>
-          <p:cNvPr id="10" name="Text 8"/>
-          <p:cNvSpPr/>
-          <p:nvPr/>
-        </p:nvSpPr>
-        <p:spPr>
-          <a:xfrm>
-            <a:off x="6537960" y="2377440"/>
-            <a:ext cx="4800600" cy="457200"/>
+          <a:ln w="19050">
+            <a:solidFill>
+              <a:srgbClr val="8CC63F"/>
+            </a:solidFill>
+            <a:prstDash val="solid"/>
+          </a:ln>
+        </p:spPr>
+      </p:sp>
+      <p:sp>
+        <p:nvSpPr>
+          <p:cNvPr id="14" name="Text 12"/>
+          <p:cNvSpPr/>
+          <p:nvPr/>
+        </p:nvSpPr>
+        <p:spPr>
+          <a:xfrm>
+            <a:off x="7543800" y="2057400"/>
+            <a:ext cx="3840480" cy="365760"/>
           </a:xfrm>
           <a:prstGeom prst="rect">
             <a:avLst/>
@@ -3998,173 +4963,815 @@
               <a:buNone/>
             </a:pPr>
             <a:r>
-              <a:rPr lang="en-US" sz="2000" b="1" dirty="0">
-                <a:solidFill>
-                  <a:srgbClr val="4FB0C6"/>
-                </a:solidFill>
-                <a:latin typeface="Malgun Gothic" pitchFamily="34" charset="0"/>
-                <a:ea typeface="Malgun Gothic" pitchFamily="34" charset="-122"/>
-                <a:cs typeface="Malgun Gothic" pitchFamily="34" charset="-120"/>
-              </a:rPr>
-              <a:t>소프트 오류(soft error)</a:t>
-            </a:r>
-            <a:endParaRPr lang="en-US" sz="2000" dirty="0"/>
-          </a:p>
-        </p:txBody>
-      </p:sp>
-      <p:sp>
-        <p:nvSpPr>
-          <p:cNvPr id="11" name="Text 9"/>
-          <p:cNvSpPr/>
-          <p:nvPr/>
-        </p:nvSpPr>
-        <p:spPr>
-          <a:xfrm>
-            <a:off x="6537960" y="2834640"/>
-            <a:ext cx="4800600" cy="411480"/>
-          </a:xfrm>
-          <a:prstGeom prst="rect">
-            <a:avLst/>
-          </a:prstGeom>
-          <a:noFill/>
-          <a:ln/>
-        </p:spPr>
-        <p:txBody>
-          <a:bodyPr wrap="square" lIns="0" tIns="0" rIns="0" bIns="0" rtlCol="0" anchor="ctr"/>
-          <a:lstStyle/>
-          <a:p>
-            <a:pPr indent="0" marL="0">
-              <a:buNone/>
-            </a:pPr>
-            <a:r>
-              <a:rPr lang="en-US" sz="1500" b="1" dirty="0">
-                <a:solidFill>
-                  <a:srgbClr val="9AA6B2"/>
-                </a:solidFill>
-                <a:latin typeface="Malgun Gothic" pitchFamily="34" charset="0"/>
-                <a:ea typeface="Malgun Gothic" pitchFamily="34" charset="-122"/>
-                <a:cs typeface="Malgun Gothic" pitchFamily="34" charset="-120"/>
-              </a:rPr>
-              <a:t>일시적 뒤집힘</a:t>
-            </a:r>
-            <a:endParaRPr lang="en-US" sz="1500" dirty="0"/>
-          </a:p>
-        </p:txBody>
-      </p:sp>
-      <p:sp>
-        <p:nvSpPr>
-          <p:cNvPr id="12" name="Text 10"/>
-          <p:cNvSpPr/>
-          <p:nvPr/>
-        </p:nvSpPr>
-        <p:spPr>
-          <a:xfrm>
-            <a:off x="6537960" y="3337560"/>
-            <a:ext cx="4800600" cy="1005840"/>
-          </a:xfrm>
-          <a:prstGeom prst="rect">
-            <a:avLst/>
-          </a:prstGeom>
-          <a:noFill/>
-          <a:ln/>
-        </p:spPr>
-        <p:txBody>
-          <a:bodyPr wrap="square" lIns="0" tIns="0" rIns="0" bIns="0" rtlCol="0" anchor="t"/>
-          <a:lstStyle/>
-          <a:p>
-            <a:pPr indent="0" marL="0">
-              <a:lnSpc>
-                <a:spcPct val="120000"/>
-              </a:lnSpc>
-              <a:buNone/>
-            </a:pPr>
-            <a:r>
-              <a:rPr lang="en-US" sz="1500" dirty="0">
-                <a:solidFill>
-                  <a:srgbClr val="E8EDF2"/>
-                </a:solidFill>
-                <a:latin typeface="Malgun Gothic" pitchFamily="34" charset="0"/>
-                <a:ea typeface="Malgun Gothic" pitchFamily="34" charset="-122"/>
-                <a:cs typeface="Malgun Gothic" pitchFamily="34" charset="-120"/>
-              </a:rPr>
-              <a:t>우주 방사선 등으로 비트가 잠깐 뒤집힘. 다시 쓰면 정상.</a:t>
-            </a:r>
-            <a:endParaRPr lang="en-US" sz="1500" dirty="0"/>
-          </a:p>
-        </p:txBody>
-      </p:sp>
-      <p:sp>
-        <p:nvSpPr>
-          <p:cNvPr id="13" name="Shape 11"/>
-          <p:cNvSpPr/>
-          <p:nvPr/>
-        </p:nvSpPr>
-        <p:spPr>
-          <a:xfrm>
-            <a:off x="548640" y="4754880"/>
-            <a:ext cx="11064240" cy="1143000"/>
+              <a:rPr lang="en-US" sz="1600" b="1" dirty="0">
+                <a:solidFill>
+                  <a:srgbClr val="8CC63F"/>
+                </a:solidFill>
+                <a:latin typeface="Malgun Gothic" pitchFamily="34" charset="0"/>
+                <a:ea typeface="Malgun Gothic" pitchFamily="34" charset="-122"/>
+                <a:cs typeface="Malgun Gothic" pitchFamily="34" charset="-120"/>
+              </a:rPr>
+              <a:t>디바이스(Device) · GPU</a:t>
+            </a:r>
+            <a:endParaRPr lang="en-US" sz="1600" dirty="0"/>
+          </a:p>
+        </p:txBody>
+      </p:sp>
+      <p:sp>
+        <p:nvSpPr>
+          <p:cNvPr id="15" name="Shape 13"/>
+          <p:cNvSpPr/>
+          <p:nvPr/>
+        </p:nvSpPr>
+        <p:spPr>
+          <a:xfrm>
+            <a:off x="7635240" y="2606040"/>
+            <a:ext cx="811530" cy="1234440"/>
           </a:xfrm>
           <a:prstGeom prst="roundRect">
             <a:avLst>
-              <a:gd name="adj" fmla="val 6400"/>
+              <a:gd name="adj" fmla="val 4507"/>
+            </a:avLst>
+          </a:prstGeom>
+          <a:solidFill>
+            <a:srgbClr val="0E1116"/>
+          </a:solidFill>
+          <a:ln w="12700">
+            <a:solidFill>
+              <a:srgbClr val="2C3440"/>
+            </a:solidFill>
+            <a:prstDash val="solid"/>
+          </a:ln>
+        </p:spPr>
+      </p:sp>
+      <p:sp>
+        <p:nvSpPr>
+          <p:cNvPr id="16" name="Text 14"/>
+          <p:cNvSpPr/>
+          <p:nvPr/>
+        </p:nvSpPr>
+        <p:spPr>
+          <a:xfrm>
+            <a:off x="7635240" y="2880360"/>
+            <a:ext cx="811530" cy="365760"/>
+          </a:xfrm>
+          <a:prstGeom prst="rect">
+            <a:avLst/>
+          </a:prstGeom>
+          <a:noFill/>
+          <a:ln/>
+        </p:spPr>
+        <p:txBody>
+          <a:bodyPr wrap="square" lIns="0" tIns="0" rIns="0" bIns="0" rtlCol="0" anchor="ctr"/>
+          <a:lstStyle/>
+          <a:p>
+            <a:pPr algn="ctr" indent="0" marL="0">
+              <a:buNone/>
+            </a:pPr>
+            <a:r>
+              <a:rPr lang="en-US" sz="1300" b="1" dirty="0">
+                <a:solidFill>
+                  <a:srgbClr val="8CC63F"/>
+                </a:solidFill>
+                <a:latin typeface="Courier New" pitchFamily="34" charset="0"/>
+                <a:ea typeface="Courier New" pitchFamily="34" charset="-122"/>
+                <a:cs typeface="Courier New" pitchFamily="34" charset="-120"/>
+              </a:rPr>
+              <a:t>SM</a:t>
+            </a:r>
+            <a:endParaRPr lang="en-US" sz="1300" dirty="0"/>
+          </a:p>
+        </p:txBody>
+      </p:sp>
+      <p:sp>
+        <p:nvSpPr>
+          <p:cNvPr id="17" name="Text 15"/>
+          <p:cNvSpPr/>
+          <p:nvPr/>
+        </p:nvSpPr>
+        <p:spPr>
+          <a:xfrm>
+            <a:off x="7635240" y="3246120"/>
+            <a:ext cx="811530" cy="502920"/>
+          </a:xfrm>
+          <a:prstGeom prst="rect">
+            <a:avLst/>
+          </a:prstGeom>
+          <a:noFill/>
+          <a:ln/>
+        </p:spPr>
+        <p:txBody>
+          <a:bodyPr wrap="square" lIns="0" tIns="0" rIns="0" bIns="0" rtlCol="0" anchor="ctr"/>
+          <a:lstStyle/>
+          <a:p>
+            <a:pPr algn="ctr" indent="0" marL="0">
+              <a:lnSpc>
+                <a:spcPct val="100000"/>
+              </a:lnSpc>
+              <a:buNone/>
+            </a:pPr>
+            <a:r>
+              <a:rPr lang="en-US" sz="950" dirty="0">
+                <a:solidFill>
+                  <a:srgbClr val="9AA6B2"/>
+                </a:solidFill>
+                <a:latin typeface="Malgun Gothic" pitchFamily="34" charset="0"/>
+                <a:ea typeface="Malgun Gothic" pitchFamily="34" charset="-122"/>
+                <a:cs typeface="Malgun Gothic" pitchFamily="34" charset="-120"/>
+              </a:rPr>
+              <a:t>코어</a:t>
+            </a:r>
+            <a:endParaRPr lang="en-US" sz="950" dirty="0"/>
+          </a:p>
+          <a:p>
+            <a:pPr algn="ctr" indent="0" marL="0">
+              <a:lnSpc>
+                <a:spcPct val="100000"/>
+              </a:lnSpc>
+              <a:buNone/>
+            </a:pPr>
+            <a:r>
+              <a:rPr lang="en-US" sz="950" dirty="0">
+                <a:solidFill>
+                  <a:srgbClr val="9AA6B2"/>
+                </a:solidFill>
+                <a:latin typeface="Malgun Gothic" pitchFamily="34" charset="0"/>
+                <a:ea typeface="Malgun Gothic" pitchFamily="34" charset="-122"/>
+                <a:cs typeface="Malgun Gothic" pitchFamily="34" charset="-120"/>
+              </a:rPr>
+              <a:t>다수</a:t>
+            </a:r>
+            <a:endParaRPr lang="en-US" sz="950" dirty="0"/>
+          </a:p>
+        </p:txBody>
+      </p:sp>
+      <p:sp>
+        <p:nvSpPr>
+          <p:cNvPr id="18" name="Shape 16"/>
+          <p:cNvSpPr/>
+          <p:nvPr/>
+        </p:nvSpPr>
+        <p:spPr>
+          <a:xfrm>
+            <a:off x="8583930" y="2606040"/>
+            <a:ext cx="811530" cy="1234440"/>
+          </a:xfrm>
+          <a:prstGeom prst="roundRect">
+            <a:avLst>
+              <a:gd name="adj" fmla="val 4507"/>
+            </a:avLst>
+          </a:prstGeom>
+          <a:solidFill>
+            <a:srgbClr val="0E1116"/>
+          </a:solidFill>
+          <a:ln w="12700">
+            <a:solidFill>
+              <a:srgbClr val="2C3440"/>
+            </a:solidFill>
+            <a:prstDash val="solid"/>
+          </a:ln>
+        </p:spPr>
+      </p:sp>
+      <p:sp>
+        <p:nvSpPr>
+          <p:cNvPr id="19" name="Text 17"/>
+          <p:cNvSpPr/>
+          <p:nvPr/>
+        </p:nvSpPr>
+        <p:spPr>
+          <a:xfrm>
+            <a:off x="8583930" y="2880360"/>
+            <a:ext cx="811530" cy="365760"/>
+          </a:xfrm>
+          <a:prstGeom prst="rect">
+            <a:avLst/>
+          </a:prstGeom>
+          <a:noFill/>
+          <a:ln/>
+        </p:spPr>
+        <p:txBody>
+          <a:bodyPr wrap="square" lIns="0" tIns="0" rIns="0" bIns="0" rtlCol="0" anchor="ctr"/>
+          <a:lstStyle/>
+          <a:p>
+            <a:pPr algn="ctr" indent="0" marL="0">
+              <a:buNone/>
+            </a:pPr>
+            <a:r>
+              <a:rPr lang="en-US" sz="1300" b="1" dirty="0">
+                <a:solidFill>
+                  <a:srgbClr val="8CC63F"/>
+                </a:solidFill>
+                <a:latin typeface="Courier New" pitchFamily="34" charset="0"/>
+                <a:ea typeface="Courier New" pitchFamily="34" charset="-122"/>
+                <a:cs typeface="Courier New" pitchFamily="34" charset="-120"/>
+              </a:rPr>
+              <a:t>SM</a:t>
+            </a:r>
+            <a:endParaRPr lang="en-US" sz="1300" dirty="0"/>
+          </a:p>
+        </p:txBody>
+      </p:sp>
+      <p:sp>
+        <p:nvSpPr>
+          <p:cNvPr id="20" name="Text 18"/>
+          <p:cNvSpPr/>
+          <p:nvPr/>
+        </p:nvSpPr>
+        <p:spPr>
+          <a:xfrm>
+            <a:off x="8583930" y="3246120"/>
+            <a:ext cx="811530" cy="502920"/>
+          </a:xfrm>
+          <a:prstGeom prst="rect">
+            <a:avLst/>
+          </a:prstGeom>
+          <a:noFill/>
+          <a:ln/>
+        </p:spPr>
+        <p:txBody>
+          <a:bodyPr wrap="square" lIns="0" tIns="0" rIns="0" bIns="0" rtlCol="0" anchor="ctr"/>
+          <a:lstStyle/>
+          <a:p>
+            <a:pPr algn="ctr" indent="0" marL="0">
+              <a:lnSpc>
+                <a:spcPct val="100000"/>
+              </a:lnSpc>
+              <a:buNone/>
+            </a:pPr>
+            <a:r>
+              <a:rPr lang="en-US" sz="950" dirty="0">
+                <a:solidFill>
+                  <a:srgbClr val="9AA6B2"/>
+                </a:solidFill>
+                <a:latin typeface="Malgun Gothic" pitchFamily="34" charset="0"/>
+                <a:ea typeface="Malgun Gothic" pitchFamily="34" charset="-122"/>
+                <a:cs typeface="Malgun Gothic" pitchFamily="34" charset="-120"/>
+              </a:rPr>
+              <a:t>코어</a:t>
+            </a:r>
+            <a:endParaRPr lang="en-US" sz="950" dirty="0"/>
+          </a:p>
+          <a:p>
+            <a:pPr algn="ctr" indent="0" marL="0">
+              <a:lnSpc>
+                <a:spcPct val="100000"/>
+              </a:lnSpc>
+              <a:buNone/>
+            </a:pPr>
+            <a:r>
+              <a:rPr lang="en-US" sz="950" dirty="0">
+                <a:solidFill>
+                  <a:srgbClr val="9AA6B2"/>
+                </a:solidFill>
+                <a:latin typeface="Malgun Gothic" pitchFamily="34" charset="0"/>
+                <a:ea typeface="Malgun Gothic" pitchFamily="34" charset="-122"/>
+                <a:cs typeface="Malgun Gothic" pitchFamily="34" charset="-120"/>
+              </a:rPr>
+              <a:t>다수</a:t>
+            </a:r>
+            <a:endParaRPr lang="en-US" sz="950" dirty="0"/>
+          </a:p>
+        </p:txBody>
+      </p:sp>
+      <p:sp>
+        <p:nvSpPr>
+          <p:cNvPr id="21" name="Shape 19"/>
+          <p:cNvSpPr/>
+          <p:nvPr/>
+        </p:nvSpPr>
+        <p:spPr>
+          <a:xfrm>
+            <a:off x="9532620" y="2606040"/>
+            <a:ext cx="811530" cy="1234440"/>
+          </a:xfrm>
+          <a:prstGeom prst="roundRect">
+            <a:avLst>
+              <a:gd name="adj" fmla="val 4507"/>
+            </a:avLst>
+          </a:prstGeom>
+          <a:solidFill>
+            <a:srgbClr val="0E1116"/>
+          </a:solidFill>
+          <a:ln w="12700">
+            <a:solidFill>
+              <a:srgbClr val="2C3440"/>
+            </a:solidFill>
+            <a:prstDash val="solid"/>
+          </a:ln>
+        </p:spPr>
+      </p:sp>
+      <p:sp>
+        <p:nvSpPr>
+          <p:cNvPr id="22" name="Text 20"/>
+          <p:cNvSpPr/>
+          <p:nvPr/>
+        </p:nvSpPr>
+        <p:spPr>
+          <a:xfrm>
+            <a:off x="9532620" y="2880360"/>
+            <a:ext cx="811530" cy="365760"/>
+          </a:xfrm>
+          <a:prstGeom prst="rect">
+            <a:avLst/>
+          </a:prstGeom>
+          <a:noFill/>
+          <a:ln/>
+        </p:spPr>
+        <p:txBody>
+          <a:bodyPr wrap="square" lIns="0" tIns="0" rIns="0" bIns="0" rtlCol="0" anchor="ctr"/>
+          <a:lstStyle/>
+          <a:p>
+            <a:pPr algn="ctr" indent="0" marL="0">
+              <a:buNone/>
+            </a:pPr>
+            <a:r>
+              <a:rPr lang="en-US" sz="1300" b="1" dirty="0">
+                <a:solidFill>
+                  <a:srgbClr val="8CC63F"/>
+                </a:solidFill>
+                <a:latin typeface="Courier New" pitchFamily="34" charset="0"/>
+                <a:ea typeface="Courier New" pitchFamily="34" charset="-122"/>
+                <a:cs typeface="Courier New" pitchFamily="34" charset="-120"/>
+              </a:rPr>
+              <a:t>SM</a:t>
+            </a:r>
+            <a:endParaRPr lang="en-US" sz="1300" dirty="0"/>
+          </a:p>
+        </p:txBody>
+      </p:sp>
+      <p:sp>
+        <p:nvSpPr>
+          <p:cNvPr id="23" name="Text 21"/>
+          <p:cNvSpPr/>
+          <p:nvPr/>
+        </p:nvSpPr>
+        <p:spPr>
+          <a:xfrm>
+            <a:off x="9532620" y="3246120"/>
+            <a:ext cx="811530" cy="502920"/>
+          </a:xfrm>
+          <a:prstGeom prst="rect">
+            <a:avLst/>
+          </a:prstGeom>
+          <a:noFill/>
+          <a:ln/>
+        </p:spPr>
+        <p:txBody>
+          <a:bodyPr wrap="square" lIns="0" tIns="0" rIns="0" bIns="0" rtlCol="0" anchor="ctr"/>
+          <a:lstStyle/>
+          <a:p>
+            <a:pPr algn="ctr" indent="0" marL="0">
+              <a:lnSpc>
+                <a:spcPct val="100000"/>
+              </a:lnSpc>
+              <a:buNone/>
+            </a:pPr>
+            <a:r>
+              <a:rPr lang="en-US" sz="950" dirty="0">
+                <a:solidFill>
+                  <a:srgbClr val="9AA6B2"/>
+                </a:solidFill>
+                <a:latin typeface="Malgun Gothic" pitchFamily="34" charset="0"/>
+                <a:ea typeface="Malgun Gothic" pitchFamily="34" charset="-122"/>
+                <a:cs typeface="Malgun Gothic" pitchFamily="34" charset="-120"/>
+              </a:rPr>
+              <a:t>코어</a:t>
+            </a:r>
+            <a:endParaRPr lang="en-US" sz="950" dirty="0"/>
+          </a:p>
+          <a:p>
+            <a:pPr algn="ctr" indent="0" marL="0">
+              <a:lnSpc>
+                <a:spcPct val="100000"/>
+              </a:lnSpc>
+              <a:buNone/>
+            </a:pPr>
+            <a:r>
+              <a:rPr lang="en-US" sz="950" dirty="0">
+                <a:solidFill>
+                  <a:srgbClr val="9AA6B2"/>
+                </a:solidFill>
+                <a:latin typeface="Malgun Gothic" pitchFamily="34" charset="0"/>
+                <a:ea typeface="Malgun Gothic" pitchFamily="34" charset="-122"/>
+                <a:cs typeface="Malgun Gothic" pitchFamily="34" charset="-120"/>
+              </a:rPr>
+              <a:t>다수</a:t>
+            </a:r>
+            <a:endParaRPr lang="en-US" sz="950" dirty="0"/>
+          </a:p>
+        </p:txBody>
+      </p:sp>
+      <p:sp>
+        <p:nvSpPr>
+          <p:cNvPr id="24" name="Shape 22"/>
+          <p:cNvSpPr/>
+          <p:nvPr/>
+        </p:nvSpPr>
+        <p:spPr>
+          <a:xfrm>
+            <a:off x="10481310" y="2606040"/>
+            <a:ext cx="811530" cy="1234440"/>
+          </a:xfrm>
+          <a:prstGeom prst="roundRect">
+            <a:avLst>
+              <a:gd name="adj" fmla="val 4507"/>
+            </a:avLst>
+          </a:prstGeom>
+          <a:solidFill>
+            <a:srgbClr val="0E1116"/>
+          </a:solidFill>
+          <a:ln w="12700">
+            <a:solidFill>
+              <a:srgbClr val="2C3440"/>
+            </a:solidFill>
+            <a:prstDash val="solid"/>
+          </a:ln>
+        </p:spPr>
+      </p:sp>
+      <p:sp>
+        <p:nvSpPr>
+          <p:cNvPr id="25" name="Text 23"/>
+          <p:cNvSpPr/>
+          <p:nvPr/>
+        </p:nvSpPr>
+        <p:spPr>
+          <a:xfrm>
+            <a:off x="10481310" y="2880360"/>
+            <a:ext cx="811530" cy="365760"/>
+          </a:xfrm>
+          <a:prstGeom prst="rect">
+            <a:avLst/>
+          </a:prstGeom>
+          <a:noFill/>
+          <a:ln/>
+        </p:spPr>
+        <p:txBody>
+          <a:bodyPr wrap="square" lIns="0" tIns="0" rIns="0" bIns="0" rtlCol="0" anchor="ctr"/>
+          <a:lstStyle/>
+          <a:p>
+            <a:pPr algn="ctr" indent="0" marL="0">
+              <a:buNone/>
+            </a:pPr>
+            <a:r>
+              <a:rPr lang="en-US" sz="1300" b="1" dirty="0">
+                <a:solidFill>
+                  <a:srgbClr val="8CC63F"/>
+                </a:solidFill>
+                <a:latin typeface="Courier New" pitchFamily="34" charset="0"/>
+                <a:ea typeface="Courier New" pitchFamily="34" charset="-122"/>
+                <a:cs typeface="Courier New" pitchFamily="34" charset="-120"/>
+              </a:rPr>
+              <a:t>SM</a:t>
+            </a:r>
+            <a:endParaRPr lang="en-US" sz="1300" dirty="0"/>
+          </a:p>
+        </p:txBody>
+      </p:sp>
+      <p:sp>
+        <p:nvSpPr>
+          <p:cNvPr id="26" name="Text 24"/>
+          <p:cNvSpPr/>
+          <p:nvPr/>
+        </p:nvSpPr>
+        <p:spPr>
+          <a:xfrm>
+            <a:off x="10481310" y="3246120"/>
+            <a:ext cx="811530" cy="502920"/>
+          </a:xfrm>
+          <a:prstGeom prst="rect">
+            <a:avLst/>
+          </a:prstGeom>
+          <a:noFill/>
+          <a:ln/>
+        </p:spPr>
+        <p:txBody>
+          <a:bodyPr wrap="square" lIns="0" tIns="0" rIns="0" bIns="0" rtlCol="0" anchor="ctr"/>
+          <a:lstStyle/>
+          <a:p>
+            <a:pPr algn="ctr" indent="0" marL="0">
+              <a:lnSpc>
+                <a:spcPct val="100000"/>
+              </a:lnSpc>
+              <a:buNone/>
+            </a:pPr>
+            <a:r>
+              <a:rPr lang="en-US" sz="950" dirty="0">
+                <a:solidFill>
+                  <a:srgbClr val="9AA6B2"/>
+                </a:solidFill>
+                <a:latin typeface="Malgun Gothic" pitchFamily="34" charset="0"/>
+                <a:ea typeface="Malgun Gothic" pitchFamily="34" charset="-122"/>
+                <a:cs typeface="Malgun Gothic" pitchFamily="34" charset="-120"/>
+              </a:rPr>
+              <a:t>코어</a:t>
+            </a:r>
+            <a:endParaRPr lang="en-US" sz="950" dirty="0"/>
+          </a:p>
+          <a:p>
+            <a:pPr algn="ctr" indent="0" marL="0">
+              <a:lnSpc>
+                <a:spcPct val="100000"/>
+              </a:lnSpc>
+              <a:buNone/>
+            </a:pPr>
+            <a:r>
+              <a:rPr lang="en-US" sz="950" dirty="0">
+                <a:solidFill>
+                  <a:srgbClr val="9AA6B2"/>
+                </a:solidFill>
+                <a:latin typeface="Malgun Gothic" pitchFamily="34" charset="0"/>
+                <a:ea typeface="Malgun Gothic" pitchFamily="34" charset="-122"/>
+                <a:cs typeface="Malgun Gothic" pitchFamily="34" charset="-120"/>
+              </a:rPr>
+              <a:t>다수</a:t>
+            </a:r>
+            <a:endParaRPr lang="en-US" sz="950" dirty="0"/>
+          </a:p>
+        </p:txBody>
+      </p:sp>
+      <p:sp>
+        <p:nvSpPr>
+          <p:cNvPr id="27" name="Text 25"/>
+          <p:cNvSpPr/>
+          <p:nvPr/>
+        </p:nvSpPr>
+        <p:spPr>
+          <a:xfrm>
+            <a:off x="7635240" y="3858768"/>
+            <a:ext cx="3657600" cy="274320"/>
+          </a:xfrm>
+          <a:prstGeom prst="rect">
+            <a:avLst/>
+          </a:prstGeom>
+          <a:noFill/>
+          <a:ln/>
+        </p:spPr>
+        <p:txBody>
+          <a:bodyPr wrap="square" lIns="0" tIns="0" rIns="0" bIns="0" rtlCol="0" anchor="ctr"/>
+          <a:lstStyle/>
+          <a:p>
+            <a:pPr algn="ctr" indent="0" marL="0">
+              <a:buNone/>
+            </a:pPr>
+            <a:r>
+              <a:rPr lang="en-US" sz="1050" i="1" dirty="0">
+                <a:solidFill>
+                  <a:srgbClr val="9AA6B2"/>
+                </a:solidFill>
+                <a:latin typeface="Malgun Gothic" pitchFamily="34" charset="0"/>
+                <a:ea typeface="Malgun Gothic" pitchFamily="34" charset="-122"/>
+                <a:cs typeface="Malgun Gothic" pitchFamily="34" charset="-120"/>
+              </a:rPr>
+              <a:t>SM(스트리밍 멀티프로세서) 수십 개 · 코어 수천 개</a:t>
+            </a:r>
+            <a:endParaRPr lang="en-US" sz="1050" dirty="0"/>
+          </a:p>
+        </p:txBody>
+      </p:sp>
+      <p:sp>
+        <p:nvSpPr>
+          <p:cNvPr id="28" name="Shape 26"/>
+          <p:cNvSpPr/>
+          <p:nvPr/>
+        </p:nvSpPr>
+        <p:spPr>
+          <a:xfrm>
+            <a:off x="7635240" y="4251960"/>
+            <a:ext cx="3657600" cy="1051560"/>
+          </a:xfrm>
+          <a:prstGeom prst="roundRect">
+            <a:avLst>
+              <a:gd name="adj" fmla="val 4348"/>
             </a:avLst>
           </a:prstGeom>
           <a:solidFill>
             <a:srgbClr val="1A2418"/>
           </a:solidFill>
-          <a:ln/>
-        </p:spPr>
-      </p:sp>
-      <p:sp>
-        <p:nvSpPr>
-          <p:cNvPr id="14" name="Text 12"/>
-          <p:cNvSpPr/>
-          <p:nvPr/>
-        </p:nvSpPr>
-        <p:spPr>
-          <a:xfrm>
-            <a:off x="822960" y="4937760"/>
-            <a:ext cx="10515600" cy="822960"/>
-          </a:xfrm>
-          <a:prstGeom prst="rect">
-            <a:avLst/>
-          </a:prstGeom>
-          <a:noFill/>
-          <a:ln/>
-        </p:spPr>
-        <p:txBody>
-          <a:bodyPr wrap="square" lIns="0" tIns="0" rIns="0" bIns="0" rtlCol="0" anchor="ctr"/>
-          <a:lstStyle/>
-          <a:p>
-            <a:pPr indent="0" marL="0">
+          <a:ln w="12700">
+            <a:solidFill>
+              <a:srgbClr val="8CC63F"/>
+            </a:solidFill>
+            <a:prstDash val="solid"/>
+          </a:ln>
+        </p:spPr>
+      </p:sp>
+      <p:sp>
+        <p:nvSpPr>
+          <p:cNvPr id="29" name="Text 27"/>
+          <p:cNvSpPr/>
+          <p:nvPr/>
+        </p:nvSpPr>
+        <p:spPr>
+          <a:xfrm>
+            <a:off x="7635240" y="4407408"/>
+            <a:ext cx="3657600" cy="411480"/>
+          </a:xfrm>
+          <a:prstGeom prst="rect">
+            <a:avLst/>
+          </a:prstGeom>
+          <a:noFill/>
+          <a:ln/>
+        </p:spPr>
+        <p:txBody>
+          <a:bodyPr wrap="square" lIns="0" tIns="0" rIns="0" bIns="0" rtlCol="0" anchor="ctr"/>
+          <a:lstStyle/>
+          <a:p>
+            <a:pPr algn="ctr" indent="0" marL="0">
               <a:buNone/>
             </a:pPr>
             <a:r>
               <a:rPr lang="en-US" sz="1500" b="1" dirty="0">
                 <a:solidFill>
+                  <a:srgbClr val="E8EDF2"/>
+                </a:solidFill>
+                <a:latin typeface="Malgun Gothic" pitchFamily="34" charset="0"/>
+                <a:ea typeface="Malgun Gothic" pitchFamily="34" charset="-122"/>
+                <a:cs typeface="Malgun Gothic" pitchFamily="34" charset="-120"/>
+              </a:rPr>
+              <a:t>디바이스 메모리 (VRAM)</a:t>
+            </a:r>
+            <a:endParaRPr lang="en-US" sz="1500" dirty="0"/>
+          </a:p>
+        </p:txBody>
+      </p:sp>
+      <p:sp>
+        <p:nvSpPr>
+          <p:cNvPr id="30" name="Text 28"/>
+          <p:cNvSpPr/>
+          <p:nvPr/>
+        </p:nvSpPr>
+        <p:spPr>
+          <a:xfrm>
+            <a:off x="7635240" y="4800600"/>
+            <a:ext cx="3657600" cy="365760"/>
+          </a:xfrm>
+          <a:prstGeom prst="rect">
+            <a:avLst/>
+          </a:prstGeom>
+          <a:noFill/>
+          <a:ln/>
+        </p:spPr>
+        <p:txBody>
+          <a:bodyPr wrap="square" lIns="0" tIns="0" rIns="0" bIns="0" rtlCol="0" anchor="ctr"/>
+          <a:lstStyle/>
+          <a:p>
+            <a:pPr algn="ctr" indent="0" marL="0">
+              <a:buNone/>
+            </a:pPr>
+            <a:r>
+              <a:rPr lang="en-US" sz="1150" dirty="0">
+                <a:solidFill>
+                  <a:srgbClr val="8CC63F"/>
+                </a:solidFill>
+                <a:latin typeface="Malgun Gothic" pitchFamily="34" charset="0"/>
+                <a:ea typeface="Malgun Gothic" pitchFamily="34" charset="-122"/>
+                <a:cs typeface="Malgun Gothic" pitchFamily="34" charset="-120"/>
+              </a:rPr>
+              <a:t>cuda_memtest가 검사하는 대상 (예: 4 GB)</a:t>
+            </a:r>
+            <a:endParaRPr lang="en-US" sz="1150" dirty="0"/>
+          </a:p>
+        </p:txBody>
+      </p:sp>
+      <p:sp>
+        <p:nvSpPr>
+          <p:cNvPr id="31" name="Shape 29"/>
+          <p:cNvSpPr/>
+          <p:nvPr/>
+        </p:nvSpPr>
+        <p:spPr>
+          <a:xfrm>
+            <a:off x="4892040" y="3337560"/>
+            <a:ext cx="2377440" cy="0"/>
+          </a:xfrm>
+          <a:prstGeom prst="line">
+            <a:avLst/>
+          </a:prstGeom>
+          <a:noFill/>
+          <a:ln w="38100">
+            <a:solidFill>
+              <a:srgbClr val="E0A458"/>
+            </a:solidFill>
+            <a:prstDash val="solid"/>
+            <a:headEnd type="triangle"/>
+            <a:tailEnd type="triangle"/>
+          </a:ln>
+        </p:spPr>
+      </p:sp>
+      <p:sp>
+        <p:nvSpPr>
+          <p:cNvPr id="32" name="Text 30"/>
+          <p:cNvSpPr/>
+          <p:nvPr/>
+        </p:nvSpPr>
+        <p:spPr>
+          <a:xfrm>
+            <a:off x="4892040" y="2880360"/>
+            <a:ext cx="2377440" cy="320040"/>
+          </a:xfrm>
+          <a:prstGeom prst="rect">
+            <a:avLst/>
+          </a:prstGeom>
+          <a:noFill/>
+          <a:ln/>
+        </p:spPr>
+        <p:txBody>
+          <a:bodyPr wrap="square" lIns="0" tIns="0" rIns="0" bIns="0" rtlCol="0" anchor="ctr"/>
+          <a:lstStyle/>
+          <a:p>
+            <a:pPr algn="ctr" indent="0" marL="0">
+              <a:buNone/>
+            </a:pPr>
+            <a:r>
+              <a:rPr lang="en-US" sz="1300" b="1" dirty="0">
+                <a:solidFill>
                   <a:srgbClr val="E0A458"/>
                 </a:solidFill>
-                <a:latin typeface="Malgun Gothic" pitchFamily="34" charset="0"/>
-                <a:ea typeface="Malgun Gothic" pitchFamily="34" charset="-122"/>
-                <a:cs typeface="Malgun Gothic" pitchFamily="34" charset="-120"/>
-              </a:rPr>
-              <a:t>실제 배경: </a:t>
-            </a:r>
-            <a:pPr indent="0" marL="0">
-              <a:buNone/>
-            </a:pPr>
-            <a:r>
-              <a:rPr lang="en-US" sz="1500" dirty="0">
-                <a:solidFill>
-                  <a:srgbClr val="E8EDF2"/>
-                </a:solidFill>
-                <a:latin typeface="Malgun Gothic" pitchFamily="34" charset="0"/>
-                <a:ea typeface="Malgun Gothic" pitchFamily="34" charset="-122"/>
-                <a:cs typeface="Malgun Gothic" pitchFamily="34" charset="-120"/>
-              </a:rPr>
-              <a:t>이 도구는 NCSA의 대규모 GPU 클러스터(500+ Tesla GPU) 운영에서 나왔습니다. 원논문은 doc/ 폴더에 있고, 한국어 EPUB 번역본도 함께 제공됩니다.</a:t>
-            </a:r>
-            <a:endParaRPr lang="en-US" sz="1500" dirty="0"/>
+                <a:latin typeface="Courier New" pitchFamily="34" charset="0"/>
+                <a:ea typeface="Courier New" pitchFamily="34" charset="-122"/>
+                <a:cs typeface="Courier New" pitchFamily="34" charset="-120"/>
+              </a:rPr>
+              <a:t>PCIe</a:t>
+            </a:r>
+            <a:endParaRPr lang="en-US" sz="1300" dirty="0"/>
+          </a:p>
+        </p:txBody>
+      </p:sp>
+      <p:sp>
+        <p:nvSpPr>
+          <p:cNvPr id="33" name="Text 31"/>
+          <p:cNvSpPr/>
+          <p:nvPr/>
+        </p:nvSpPr>
+        <p:spPr>
+          <a:xfrm>
+            <a:off x="4800600" y="3474720"/>
+            <a:ext cx="2560320" cy="320040"/>
+          </a:xfrm>
+          <a:prstGeom prst="rect">
+            <a:avLst/>
+          </a:prstGeom>
+          <a:noFill/>
+          <a:ln/>
+        </p:spPr>
+        <p:txBody>
+          <a:bodyPr wrap="square" lIns="0" tIns="0" rIns="0" bIns="0" rtlCol="0" anchor="ctr"/>
+          <a:lstStyle/>
+          <a:p>
+            <a:pPr algn="ctr" indent="0" marL="0">
+              <a:buNone/>
+            </a:pPr>
+            <a:r>
+              <a:rPr lang="en-US" sz="1100" dirty="0">
+                <a:solidFill>
+                  <a:srgbClr val="9AA6B2"/>
+                </a:solidFill>
+                <a:latin typeface="Courier New" pitchFamily="34" charset="0"/>
+                <a:ea typeface="Courier New" pitchFamily="34" charset="-122"/>
+                <a:cs typeface="Courier New" pitchFamily="34" charset="-120"/>
+              </a:rPr>
+              <a:t>cudaMemcpy</a:t>
+            </a:r>
+            <a:endParaRPr lang="en-US" sz="1100" dirty="0"/>
+          </a:p>
+        </p:txBody>
+      </p:sp>
+      <p:sp>
+        <p:nvSpPr>
+          <p:cNvPr id="34" name="Text 32"/>
+          <p:cNvSpPr/>
+          <p:nvPr/>
+        </p:nvSpPr>
+        <p:spPr>
+          <a:xfrm>
+            <a:off x="548640" y="5806440"/>
+            <a:ext cx="11064240" cy="365760"/>
+          </a:xfrm>
+          <a:prstGeom prst="rect">
+            <a:avLst/>
+          </a:prstGeom>
+          <a:noFill/>
+          <a:ln/>
+        </p:spPr>
+        <p:txBody>
+          <a:bodyPr wrap="square" lIns="0" tIns="0" rIns="0" bIns="0" rtlCol="0" anchor="ctr"/>
+          <a:lstStyle/>
+          <a:p>
+            <a:pPr algn="ctr" indent="0" marL="0">
+              <a:buNone/>
+            </a:pPr>
+            <a:r>
+              <a:rPr lang="en-US" sz="1300" i="1" dirty="0">
+                <a:solidFill>
+                  <a:srgbClr val="9AA6B2"/>
+                </a:solidFill>
+                <a:latin typeface="Malgun Gothic" pitchFamily="34" charset="0"/>
+                <a:ea typeface="Malgun Gothic" pitchFamily="34" charset="-122"/>
+                <a:cs typeface="Malgun Gothic" pitchFamily="34" charset="-120"/>
+              </a:rPr>
+              <a:t>핵심: CPU는 GPU 메모리를 직접 못 읽습니다. 반드시 cudaMemcpy로 복사해야 합니다 (세션 2에서 자세히).</a:t>
+            </a:r>
+            <a:endParaRPr lang="en-US" sz="1300" dirty="0"/>
           </a:p>
         </p:txBody>
       </p:sp>
@@ -4237,7 +5844,7 @@
                 <a:ea typeface="Courier New" pitchFamily="34" charset="-122"/>
                 <a:cs typeface="Courier New" pitchFamily="34" charset="-120"/>
               </a:rPr>
-              <a:t>4</a:t>
+              <a:t>3</a:t>
             </a:r>
             <a:endParaRPr lang="en-US" sz="2200" dirty="0"/>
           </a:p>
@@ -4276,7 +5883,7 @@
                 <a:ea typeface="Malgun Gothic" pitchFamily="34" charset="-122"/>
                 <a:cs typeface="Malgun Gothic" pitchFamily="34" charset="-120"/>
               </a:rPr>
-              <a:t>빌드 시스템 · CMake</a:t>
+              <a:t>cuda_memtest가 푸는 문제</a:t>
             </a:r>
             <a:endParaRPr lang="en-US" sz="3000" dirty="0"/>
           </a:p>
@@ -4284,176 +5891,57 @@
       </p:sp>
       <p:sp>
         <p:nvSpPr>
-          <p:cNvPr id="4" name="Shape 2"/>
-          <p:cNvSpPr/>
-          <p:nvPr/>
-        </p:nvSpPr>
-        <p:spPr>
-          <a:xfrm>
-            <a:off x="548640" y="1554480"/>
-            <a:ext cx="11064240" cy="1828800"/>
+          <p:cNvPr id="4" name="Text 2"/>
+          <p:cNvSpPr/>
+          <p:nvPr/>
+        </p:nvSpPr>
+        <p:spPr>
+          <a:xfrm>
+            <a:off x="548640" y="1463040"/>
+            <a:ext cx="11064240" cy="457200"/>
+          </a:xfrm>
+          <a:prstGeom prst="rect">
+            <a:avLst/>
+          </a:prstGeom>
+          <a:noFill/>
+          <a:ln/>
+        </p:spPr>
+        <p:txBody>
+          <a:bodyPr wrap="square" lIns="0" tIns="0" rIns="0" bIns="0" rtlCol="0" anchor="ctr"/>
+          <a:lstStyle/>
+          <a:p>
+            <a:pPr indent="0" marL="0">
+              <a:buNone/>
+            </a:pPr>
+            <a:r>
+              <a:rPr lang="en-US" sz="1700" dirty="0">
+                <a:solidFill>
+                  <a:srgbClr val="9AA6B2"/>
+                </a:solidFill>
+                <a:latin typeface="Malgun Gothic" pitchFamily="34" charset="0"/>
+                <a:ea typeface="Malgun Gothic" pitchFamily="34" charset="-122"/>
+                <a:cs typeface="Malgun Gothic" pitchFamily="34" charset="-120"/>
+              </a:rPr>
+              <a:t>GPU 메모리도 고장 납니다. 이 도구는 그 고장을 찾아냅니다.</a:t>
+            </a:r>
+            <a:endParaRPr lang="en-US" sz="1700" dirty="0"/>
+          </a:p>
+        </p:txBody>
+      </p:sp>
+      <p:sp>
+        <p:nvSpPr>
+          <p:cNvPr id="5" name="Shape 3"/>
+          <p:cNvSpPr/>
+          <p:nvPr/>
+        </p:nvSpPr>
+        <p:spPr>
+          <a:xfrm>
+            <a:off x="548640" y="2148840"/>
+            <a:ext cx="5349240" cy="2377440"/>
           </a:xfrm>
           <a:prstGeom prst="roundRect">
             <a:avLst>
-              <a:gd name="adj" fmla="val 3000"/>
-            </a:avLst>
-          </a:prstGeom>
-          <a:solidFill>
-            <a:srgbClr val="0E1116"/>
-          </a:solidFill>
-          <a:ln w="12700">
-            <a:solidFill>
-              <a:srgbClr val="2C3440"/>
-            </a:solidFill>
-            <a:prstDash val="solid"/>
-          </a:ln>
-        </p:spPr>
-      </p:sp>
-      <p:sp>
-        <p:nvSpPr>
-          <p:cNvPr id="5" name="Text 3"/>
-          <p:cNvSpPr/>
-          <p:nvPr/>
-        </p:nvSpPr>
-        <p:spPr>
-          <a:xfrm>
-            <a:off x="749808" y="1700784"/>
-            <a:ext cx="10661904" cy="1536192"/>
-          </a:xfrm>
-          <a:prstGeom prst="rect">
-            <a:avLst/>
-          </a:prstGeom>
-          <a:noFill/>
-          <a:ln/>
-        </p:spPr>
-        <p:txBody>
-          <a:bodyPr wrap="square" lIns="0" tIns="0" rIns="0" bIns="0" rtlCol="0" anchor="t"/>
-          <a:lstStyle/>
-          <a:p>
-            <a:pPr algn="l" indent="0" marL="0">
-              <a:lnSpc>
-                <a:spcPct val="108000"/>
-              </a:lnSpc>
-              <a:buNone/>
-            </a:pPr>
-            <a:r>
-              <a:rPr lang="en-US" sz="1350" dirty="0">
-                <a:solidFill>
-                  <a:srgbClr val="E8EDF2"/>
-                </a:solidFill>
-                <a:latin typeface="Courier New" pitchFamily="34" charset="0"/>
-                <a:ea typeface="Courier New" pitchFamily="34" charset="-122"/>
-                <a:cs typeface="Courier New" pitchFamily="34" charset="-120"/>
-              </a:rPr>
-              <a:t>mkdir build &amp;&amp; cd build</a:t>
-            </a:r>
-            <a:endParaRPr lang="en-US" sz="1350" dirty="0"/>
-          </a:p>
-          <a:p>
-            <a:pPr algn="l" indent="0" marL="0">
-              <a:lnSpc>
-                <a:spcPct val="108000"/>
-              </a:lnSpc>
-              <a:buNone/>
-            </a:pPr>
-            <a:r>
-              <a:rPr lang="en-US" sz="1350" dirty="0">
-                <a:solidFill>
-                  <a:srgbClr val="8CC63F"/>
-                </a:solidFill>
-                <a:latin typeface="Courier New" pitchFamily="34" charset="0"/>
-                <a:ea typeface="Courier New" pitchFamily="34" charset="-122"/>
-                <a:cs typeface="Courier New" pitchFamily="34" charset="-120"/>
-              </a:rPr>
-              <a:t>cmake -DCMAKE_CUDA_ARCHITECTURES=86 ..   # 본인 GPU 번호로 교체</a:t>
-            </a:r>
-            <a:endParaRPr lang="en-US" sz="1350" dirty="0"/>
-          </a:p>
-          <a:p>
-            <a:pPr algn="l" indent="0" marL="0">
-              <a:lnSpc>
-                <a:spcPct val="108000"/>
-              </a:lnSpc>
-              <a:buNone/>
-            </a:pPr>
-            <a:r>
-              <a:rPr lang="en-US" sz="1350" dirty="0">
-                <a:solidFill>
-                  <a:srgbClr val="E8EDF2"/>
-                </a:solidFill>
-                <a:latin typeface="Courier New" pitchFamily="34" charset="0"/>
-                <a:ea typeface="Courier New" pitchFamily="34" charset="-122"/>
-                <a:cs typeface="Courier New" pitchFamily="34" charset="-120"/>
-              </a:rPr>
-              <a:t>make -j</a:t>
-            </a:r>
-            <a:endParaRPr lang="en-US" sz="1350" dirty="0"/>
-          </a:p>
-          <a:p>
-            <a:pPr algn="l" indent="0" marL="0">
-              <a:lnSpc>
-                <a:spcPct val="108000"/>
-              </a:lnSpc>
-              <a:buNone/>
-            </a:pPr>
-            <a:endParaRPr lang="en-US" sz="1350" dirty="0"/>
-          </a:p>
-          <a:p>
-            <a:pPr algn="l" indent="0" marL="0">
-              <a:lnSpc>
-                <a:spcPct val="108000"/>
-              </a:lnSpc>
-              <a:buNone/>
-            </a:pPr>
-            <a:r>
-              <a:rPr lang="en-US" sz="1350" dirty="0">
-                <a:solidFill>
-                  <a:srgbClr val="9AA6B2"/>
-                </a:solidFill>
-                <a:latin typeface="Courier New" pitchFamily="34" charset="0"/>
-                <a:ea typeface="Courier New" pitchFamily="34" charset="-122"/>
-                <a:cs typeface="Courier New" pitchFamily="34" charset="-120"/>
-              </a:rPr>
-              <a:t># AMD GPU면 HIP 백엔드</a:t>
-            </a:r>
-            <a:endParaRPr lang="en-US" sz="1350" dirty="0"/>
-          </a:p>
-          <a:p>
-            <a:pPr algn="l" indent="0" marL="0">
-              <a:lnSpc>
-                <a:spcPct val="108000"/>
-              </a:lnSpc>
-              <a:buNone/>
-            </a:pPr>
-            <a:r>
-              <a:rPr lang="en-US" sz="1350" dirty="0">
-                <a:solidFill>
-                  <a:srgbClr val="4FB0C6"/>
-                </a:solidFill>
-                <a:latin typeface="Courier New" pitchFamily="34" charset="0"/>
-                <a:ea typeface="Courier New" pitchFamily="34" charset="-122"/>
-                <a:cs typeface="Courier New" pitchFamily="34" charset="-120"/>
-              </a:rPr>
-              <a:t>cmake -DCUDA_MEMTEST_BACKEND=hip -DGPU_TARGETS=gfx90a ..</a:t>
-            </a:r>
-            <a:endParaRPr lang="en-US" sz="1350" dirty="0"/>
-          </a:p>
-        </p:txBody>
-      </p:sp>
-      <p:sp>
-        <p:nvSpPr>
-          <p:cNvPr id="6" name="Shape 4"/>
-          <p:cNvSpPr/>
-          <p:nvPr/>
-        </p:nvSpPr>
-        <p:spPr>
-          <a:xfrm>
-            <a:off x="548640" y="3703320"/>
-            <a:ext cx="5349240" cy="1737360"/>
-          </a:xfrm>
-          <a:prstGeom prst="roundRect">
-            <a:avLst>
-              <a:gd name="adj" fmla="val 4211"/>
+              <a:gd name="adj" fmla="val 3077"/>
             </a:avLst>
           </a:prstGeom>
           <a:solidFill>
@@ -4464,40 +5952,79 @@
       </p:sp>
       <p:sp>
         <p:nvSpPr>
+          <p:cNvPr id="6" name="Text 4"/>
+          <p:cNvSpPr/>
+          <p:nvPr/>
+        </p:nvSpPr>
+        <p:spPr>
+          <a:xfrm>
+            <a:off x="822960" y="2377440"/>
+            <a:ext cx="4800600" cy="457200"/>
+          </a:xfrm>
+          <a:prstGeom prst="rect">
+            <a:avLst/>
+          </a:prstGeom>
+          <a:noFill/>
+          <a:ln/>
+        </p:spPr>
+        <p:txBody>
+          <a:bodyPr wrap="square" lIns="0" tIns="0" rIns="0" bIns="0" rtlCol="0" anchor="ctr"/>
+          <a:lstStyle/>
+          <a:p>
+            <a:pPr indent="0" marL="0">
+              <a:buNone/>
+            </a:pPr>
+            <a:r>
+              <a:rPr lang="en-US" sz="2000" b="1" dirty="0">
+                <a:solidFill>
+                  <a:srgbClr val="8CC63F"/>
+                </a:solidFill>
+                <a:latin typeface="Malgun Gothic" pitchFamily="34" charset="0"/>
+                <a:ea typeface="Malgun Gothic" pitchFamily="34" charset="-122"/>
+                <a:cs typeface="Malgun Gothic" pitchFamily="34" charset="-120"/>
+              </a:rPr>
+              <a:t>하드 오류(hard error)</a:t>
+            </a:r>
+            <a:endParaRPr lang="en-US" sz="2000" dirty="0"/>
+          </a:p>
+        </p:txBody>
+      </p:sp>
+      <p:sp>
+        <p:nvSpPr>
           <p:cNvPr id="7" name="Text 5"/>
           <p:cNvSpPr/>
           <p:nvPr/>
         </p:nvSpPr>
         <p:spPr>
           <a:xfrm>
-            <a:off x="777240" y="3886200"/>
-            <a:ext cx="4892040" cy="640080"/>
-          </a:xfrm>
-          <a:prstGeom prst="rect">
-            <a:avLst/>
-          </a:prstGeom>
-          <a:noFill/>
-          <a:ln/>
-        </p:spPr>
-        <p:txBody>
-          <a:bodyPr wrap="square" lIns="0" tIns="0" rIns="0" bIns="0" rtlCol="0" anchor="t"/>
+            <a:off x="822960" y="2834640"/>
+            <a:ext cx="4800600" cy="411480"/>
+          </a:xfrm>
+          <a:prstGeom prst="rect">
+            <a:avLst/>
+          </a:prstGeom>
+          <a:noFill/>
+          <a:ln/>
+        </p:spPr>
+        <p:txBody>
+          <a:bodyPr wrap="square" lIns="0" tIns="0" rIns="0" bIns="0" rtlCol="0" anchor="ctr"/>
           <a:lstStyle/>
           <a:p>
             <a:pPr indent="0" marL="0">
               <a:buNone/>
             </a:pPr>
             <a:r>
-              <a:rPr lang="en-US" sz="1400" b="1" dirty="0">
-                <a:solidFill>
-                  <a:srgbClr val="8CC63F"/>
-                </a:solidFill>
-                <a:latin typeface="Courier New" pitchFamily="34" charset="0"/>
-                <a:ea typeface="Courier New" pitchFamily="34" charset="-122"/>
-                <a:cs typeface="Courier New" pitchFamily="34" charset="-120"/>
-              </a:rPr>
-              <a:t>CMAKE_CUDA_ARCHITECTURES</a:t>
-            </a:r>
-            <a:endParaRPr lang="en-US" sz="1400" dirty="0"/>
+              <a:rPr lang="en-US" sz="1500" b="1" dirty="0">
+                <a:solidFill>
+                  <a:srgbClr val="9AA6B2"/>
+                </a:solidFill>
+                <a:latin typeface="Malgun Gothic" pitchFamily="34" charset="0"/>
+                <a:ea typeface="Malgun Gothic" pitchFamily="34" charset="-122"/>
+                <a:cs typeface="Malgun Gothic" pitchFamily="34" charset="-120"/>
+              </a:rPr>
+              <a:t>영구적 고장</a:t>
+            </a:r>
+            <a:endParaRPr lang="en-US" sz="1500" dirty="0"/>
           </a:p>
         </p:txBody>
       </p:sp>
@@ -4509,8 +6036,8 @@
         </p:nvSpPr>
         <p:spPr>
           <a:xfrm>
-            <a:off x="777240" y="4526280"/>
-            <a:ext cx="4892040" cy="822960"/>
+            <a:off x="822960" y="3337560"/>
+            <a:ext cx="4800600" cy="1005840"/>
           </a:xfrm>
           <a:prstGeom prst="rect">
             <a:avLst/>
@@ -4529,7 +6056,7 @@
               <a:buNone/>
             </a:pPr>
             <a:r>
-              <a:rPr lang="en-US" sz="1400" dirty="0">
+              <a:rPr lang="en-US" sz="1500" dirty="0">
                 <a:solidFill>
                   <a:srgbClr val="E8EDF2"/>
                 </a:solidFill>
@@ -4537,9 +6064,9 @@
                 <a:ea typeface="Malgun Gothic" pitchFamily="34" charset="-122"/>
                 <a:cs typeface="Malgun Gothic" pitchFamily="34" charset="-120"/>
               </a:rPr>
-              <a:t>GPU 세대(sm_XX)를 지정. 세대마다 기계어가 다름.</a:t>
-            </a:r>
-            <a:endParaRPr lang="en-US" sz="1400" dirty="0"/>
+              <a:t>제조 결함·노후화로 특정 비트가 항상 틀림. 재부팅해도 그대로.</a:t>
+            </a:r>
+            <a:endParaRPr lang="en-US" sz="1500" dirty="0"/>
           </a:p>
         </p:txBody>
       </p:sp>
@@ -4551,12 +6078,12 @@
         </p:nvSpPr>
         <p:spPr>
           <a:xfrm>
-            <a:off x="6263640" y="3703320"/>
-            <a:ext cx="5349240" cy="1737360"/>
+            <a:off x="6263640" y="2148840"/>
+            <a:ext cx="5349240" cy="2377440"/>
           </a:xfrm>
           <a:prstGeom prst="roundRect">
             <a:avLst>
-              <a:gd name="adj" fmla="val 4211"/>
+              <a:gd name="adj" fmla="val 3077"/>
             </a:avLst>
           </a:prstGeom>
           <a:solidFill>
@@ -4573,34 +6100,34 @@
         </p:nvSpPr>
         <p:spPr>
           <a:xfrm>
-            <a:off x="6492240" y="3886200"/>
-            <a:ext cx="4892040" cy="640080"/>
-          </a:xfrm>
-          <a:prstGeom prst="rect">
-            <a:avLst/>
-          </a:prstGeom>
-          <a:noFill/>
-          <a:ln/>
-        </p:spPr>
-        <p:txBody>
-          <a:bodyPr wrap="square" lIns="0" tIns="0" rIns="0" bIns="0" rtlCol="0" anchor="t"/>
+            <a:off x="6537960" y="2377440"/>
+            <a:ext cx="4800600" cy="457200"/>
+          </a:xfrm>
+          <a:prstGeom prst="rect">
+            <a:avLst/>
+          </a:prstGeom>
+          <a:noFill/>
+          <a:ln/>
+        </p:spPr>
+        <p:txBody>
+          <a:bodyPr wrap="square" lIns="0" tIns="0" rIns="0" bIns="0" rtlCol="0" anchor="ctr"/>
           <a:lstStyle/>
           <a:p>
             <a:pPr indent="0" marL="0">
               <a:buNone/>
             </a:pPr>
             <a:r>
-              <a:rPr lang="en-US" sz="1400" b="1" dirty="0">
+              <a:rPr lang="en-US" sz="2000" b="1" dirty="0">
                 <a:solidFill>
                   <a:srgbClr val="4FB0C6"/>
                 </a:solidFill>
-                <a:latin typeface="Courier New" pitchFamily="34" charset="0"/>
-                <a:ea typeface="Courier New" pitchFamily="34" charset="-122"/>
-                <a:cs typeface="Courier New" pitchFamily="34" charset="-120"/>
-              </a:rPr>
-              <a:t>CUDA_MEMTEST_BACKEND</a:t>
-            </a:r>
-            <a:endParaRPr lang="en-US" sz="1400" dirty="0"/>
+                <a:latin typeface="Malgun Gothic" pitchFamily="34" charset="0"/>
+                <a:ea typeface="Malgun Gothic" pitchFamily="34" charset="-122"/>
+                <a:cs typeface="Malgun Gothic" pitchFamily="34" charset="-120"/>
+              </a:rPr>
+              <a:t>소프트 오류(soft error)</a:t>
+            </a:r>
+            <a:endParaRPr lang="en-US" sz="2000" dirty="0"/>
           </a:p>
         </p:txBody>
       </p:sp>
@@ -4612,8 +6139,47 @@
         </p:nvSpPr>
         <p:spPr>
           <a:xfrm>
-            <a:off x="6492240" y="4526280"/>
-            <a:ext cx="4892040" cy="822960"/>
+            <a:off x="6537960" y="2834640"/>
+            <a:ext cx="4800600" cy="411480"/>
+          </a:xfrm>
+          <a:prstGeom prst="rect">
+            <a:avLst/>
+          </a:prstGeom>
+          <a:noFill/>
+          <a:ln/>
+        </p:spPr>
+        <p:txBody>
+          <a:bodyPr wrap="square" lIns="0" tIns="0" rIns="0" bIns="0" rtlCol="0" anchor="ctr"/>
+          <a:lstStyle/>
+          <a:p>
+            <a:pPr indent="0" marL="0">
+              <a:buNone/>
+            </a:pPr>
+            <a:r>
+              <a:rPr lang="en-US" sz="1500" b="1" dirty="0">
+                <a:solidFill>
+                  <a:srgbClr val="9AA6B2"/>
+                </a:solidFill>
+                <a:latin typeface="Malgun Gothic" pitchFamily="34" charset="0"/>
+                <a:ea typeface="Malgun Gothic" pitchFamily="34" charset="-122"/>
+                <a:cs typeface="Malgun Gothic" pitchFamily="34" charset="-120"/>
+              </a:rPr>
+              <a:t>일시적 뒤집힘</a:t>
+            </a:r>
+            <a:endParaRPr lang="en-US" sz="1500" dirty="0"/>
+          </a:p>
+        </p:txBody>
+      </p:sp>
+      <p:sp>
+        <p:nvSpPr>
+          <p:cNvPr id="12" name="Text 10"/>
+          <p:cNvSpPr/>
+          <p:nvPr/>
+        </p:nvSpPr>
+        <p:spPr>
+          <a:xfrm>
+            <a:off x="6537960" y="3337560"/>
+            <a:ext cx="4800600" cy="1005840"/>
           </a:xfrm>
           <a:prstGeom prst="rect">
             <a:avLst/>
@@ -4632,7 +6198,7 @@
               <a:buNone/>
             </a:pPr>
             <a:r>
-              <a:rPr lang="en-US" sz="1400" dirty="0">
+              <a:rPr lang="en-US" sz="1500" dirty="0">
                 <a:solidFill>
                   <a:srgbClr val="E8EDF2"/>
                 </a:solidFill>
@@ -4640,22 +6206,44 @@
                 <a:ea typeface="Malgun Gothic" pitchFamily="34" charset="-122"/>
                 <a:cs typeface="Malgun Gothic" pitchFamily="34" charset="-120"/>
               </a:rPr>
-              <a:t>cuda / hip 백엔드 선택 (CMakeLists.txt:22).</a:t>
-            </a:r>
-            <a:endParaRPr lang="en-US" sz="1400" dirty="0"/>
-          </a:p>
-        </p:txBody>
-      </p:sp>
-      <p:sp>
-        <p:nvSpPr>
-          <p:cNvPr id="12" name="Text 10"/>
-          <p:cNvSpPr/>
-          <p:nvPr/>
-        </p:nvSpPr>
-        <p:spPr>
-          <a:xfrm>
-            <a:off x="548640" y="5623560"/>
-            <a:ext cx="11064240" cy="457200"/>
+              <a:t>우주 방사선 등으로 비트가 잠깐 뒤집힘. 다시 쓰면 정상.</a:t>
+            </a:r>
+            <a:endParaRPr lang="en-US" sz="1500" dirty="0"/>
+          </a:p>
+        </p:txBody>
+      </p:sp>
+      <p:sp>
+        <p:nvSpPr>
+          <p:cNvPr id="13" name="Shape 11"/>
+          <p:cNvSpPr/>
+          <p:nvPr/>
+        </p:nvSpPr>
+        <p:spPr>
+          <a:xfrm>
+            <a:off x="548640" y="4754880"/>
+            <a:ext cx="11064240" cy="1143000"/>
+          </a:xfrm>
+          <a:prstGeom prst="roundRect">
+            <a:avLst>
+              <a:gd name="adj" fmla="val 6400"/>
+            </a:avLst>
+          </a:prstGeom>
+          <a:solidFill>
+            <a:srgbClr val="1A2418"/>
+          </a:solidFill>
+          <a:ln/>
+        </p:spPr>
+      </p:sp>
+      <p:sp>
+        <p:nvSpPr>
+          <p:cNvPr id="14" name="Text 12"/>
+          <p:cNvSpPr/>
+          <p:nvPr/>
+        </p:nvSpPr>
+        <p:spPr>
+          <a:xfrm>
+            <a:off x="822960" y="4937760"/>
+            <a:ext cx="10515600" cy="822960"/>
           </a:xfrm>
           <a:prstGeom prst="rect">
             <a:avLst/>
@@ -4671,17 +6259,31 @@
               <a:buNone/>
             </a:pPr>
             <a:r>
-              <a:rPr lang="en-US" sz="1300" i="1" dirty="0">
-                <a:solidFill>
-                  <a:srgbClr val="9AA6B2"/>
-                </a:solidFill>
-                <a:latin typeface="Malgun Gothic" pitchFamily="34" charset="0"/>
-                <a:ea typeface="Malgun Gothic" pitchFamily="34" charset="-122"/>
-                <a:cs typeface="Malgun Gothic" pitchFamily="34" charset="-120"/>
-              </a:rPr>
-              <a:t>본인 GPU의 sm_XX 번호: developer.nvidia.com/cuda-gpus  (예: T4→75, RTX30→86, RTX40→89, A100→80)</a:t>
-            </a:r>
-            <a:endParaRPr lang="en-US" sz="1300" dirty="0"/>
+              <a:rPr lang="en-US" sz="1500" b="1" dirty="0">
+                <a:solidFill>
+                  <a:srgbClr val="E0A458"/>
+                </a:solidFill>
+                <a:latin typeface="Malgun Gothic" pitchFamily="34" charset="0"/>
+                <a:ea typeface="Malgun Gothic" pitchFamily="34" charset="-122"/>
+                <a:cs typeface="Malgun Gothic" pitchFamily="34" charset="-120"/>
+              </a:rPr>
+              <a:t>실제 배경: </a:t>
+            </a:r>
+            <a:pPr indent="0" marL="0">
+              <a:buNone/>
+            </a:pPr>
+            <a:r>
+              <a:rPr lang="en-US" sz="1500" dirty="0">
+                <a:solidFill>
+                  <a:srgbClr val="E8EDF2"/>
+                </a:solidFill>
+                <a:latin typeface="Malgun Gothic" pitchFamily="34" charset="0"/>
+                <a:ea typeface="Malgun Gothic" pitchFamily="34" charset="-122"/>
+                <a:cs typeface="Malgun Gothic" pitchFamily="34" charset="-120"/>
+              </a:rPr>
+              <a:t>이 도구는 NCSA의 대규모 GPU 클러스터(500+ Tesla GPU) 운영에서 나왔습니다. 원논문은 doc/ 폴더에 있고, 한국어 EPUB 번역본도 함께 제공됩니다.</a:t>
+            </a:r>
+            <a:endParaRPr lang="en-US" sz="1500" dirty="0"/>
           </a:p>
         </p:txBody>
       </p:sp>
@@ -4754,7 +6356,7 @@
                 <a:ea typeface="Courier New" pitchFamily="34" charset="-122"/>
                 <a:cs typeface="Courier New" pitchFamily="34" charset="-120"/>
               </a:rPr>
-              <a:t>5</a:t>
+              <a:t>4</a:t>
             </a:r>
             <a:endParaRPr lang="en-US" sz="2200" dirty="0"/>
           </a:p>
@@ -4793,7 +6395,7 @@
                 <a:ea typeface="Malgun Gothic" pitchFamily="34" charset="-122"/>
                 <a:cs typeface="Malgun Gothic" pitchFamily="34" charset="-120"/>
               </a:rPr>
-              <a:t>첫 실행</a:t>
+              <a:t>빌드 시스템 · CMake</a:t>
             </a:r>
             <a:endParaRPr lang="en-US" sz="3000" dirty="0"/>
           </a:p>
@@ -4807,73 +6409,12 @@
         </p:nvSpPr>
         <p:spPr>
           <a:xfrm>
-            <a:off x="548640" y="1600200"/>
-            <a:ext cx="11064240" cy="1234440"/>
+            <a:off x="548640" y="1554480"/>
+            <a:ext cx="11064240" cy="1828800"/>
           </a:xfrm>
           <a:prstGeom prst="roundRect">
             <a:avLst>
-              <a:gd name="adj" fmla="val 5926"/>
-            </a:avLst>
-          </a:prstGeom>
-          <a:solidFill>
-            <a:srgbClr val="1E232C"/>
-          </a:solidFill>
-          <a:ln/>
-        </p:spPr>
-      </p:sp>
-      <p:sp>
-        <p:nvSpPr>
-          <p:cNvPr id="5" name="Text 3"/>
-          <p:cNvSpPr/>
-          <p:nvPr/>
-        </p:nvSpPr>
-        <p:spPr>
-          <a:xfrm>
-            <a:off x="822960" y="1764792"/>
-            <a:ext cx="3291840" cy="914400"/>
-          </a:xfrm>
-          <a:prstGeom prst="rect">
-            <a:avLst/>
-          </a:prstGeom>
-          <a:noFill/>
-          <a:ln/>
-        </p:spPr>
-        <p:txBody>
-          <a:bodyPr wrap="square" lIns="0" tIns="0" rIns="0" bIns="0" rtlCol="0" anchor="ctr"/>
-          <a:lstStyle/>
-          <a:p>
-            <a:pPr indent="0" marL="0">
-              <a:buNone/>
-            </a:pPr>
-            <a:r>
-              <a:rPr lang="en-US" sz="1700" b="1" dirty="0">
-                <a:solidFill>
-                  <a:srgbClr val="8CC63F"/>
-                </a:solidFill>
-                <a:latin typeface="Malgun Gothic" pitchFamily="34" charset="0"/>
-                <a:ea typeface="Malgun Gothic" pitchFamily="34" charset="-122"/>
-                <a:cs typeface="Malgun Gothic" pitchFamily="34" charset="-120"/>
-              </a:rPr>
-              <a:t>테스트 목록 보기</a:t>
-            </a:r>
-            <a:endParaRPr lang="en-US" sz="1700" dirty="0"/>
-          </a:p>
-        </p:txBody>
-      </p:sp>
-      <p:sp>
-        <p:nvSpPr>
-          <p:cNvPr id="6" name="Shape 4"/>
-          <p:cNvSpPr/>
-          <p:nvPr/>
-        </p:nvSpPr>
-        <p:spPr>
-          <a:xfrm>
-            <a:off x="4206240" y="1801368"/>
-            <a:ext cx="5669280" cy="502920"/>
-          </a:xfrm>
-          <a:prstGeom prst="roundRect">
-            <a:avLst>
-              <a:gd name="adj" fmla="val 7273"/>
+              <a:gd name="adj" fmla="val 3000"/>
             </a:avLst>
           </a:prstGeom>
           <a:solidFill>
@@ -4889,30 +6430,33 @@
       </p:sp>
       <p:sp>
         <p:nvSpPr>
-          <p:cNvPr id="7" name="Text 5"/>
-          <p:cNvSpPr/>
-          <p:nvPr/>
-        </p:nvSpPr>
-        <p:spPr>
-          <a:xfrm>
-            <a:off x="4389120" y="1801368"/>
-            <a:ext cx="5303520" cy="502920"/>
-          </a:xfrm>
-          <a:prstGeom prst="rect">
-            <a:avLst/>
-          </a:prstGeom>
-          <a:noFill/>
-          <a:ln/>
-        </p:spPr>
-        <p:txBody>
-          <a:bodyPr wrap="square" lIns="0" tIns="0" rIns="0" bIns="0" rtlCol="0" anchor="ctr"/>
-          <a:lstStyle/>
-          <a:p>
-            <a:pPr indent="0" marL="0">
-              <a:buNone/>
-            </a:pPr>
-            <a:r>
-              <a:rPr lang="en-US" sz="1200" dirty="0">
+          <p:cNvPr id="5" name="Text 3"/>
+          <p:cNvSpPr/>
+          <p:nvPr/>
+        </p:nvSpPr>
+        <p:spPr>
+          <a:xfrm>
+            <a:off x="749808" y="1700784"/>
+            <a:ext cx="10661904" cy="1536192"/>
+          </a:xfrm>
+          <a:prstGeom prst="rect">
+            <a:avLst/>
+          </a:prstGeom>
+          <a:noFill/>
+          <a:ln/>
+        </p:spPr>
+        <p:txBody>
+          <a:bodyPr wrap="square" lIns="0" tIns="0" rIns="0" bIns="0" rtlCol="0" anchor="t"/>
+          <a:lstStyle/>
+          <a:p>
+            <a:pPr algn="l" indent="0" marL="0">
+              <a:lnSpc>
+                <a:spcPct val="108000"/>
+              </a:lnSpc>
+              <a:buNone/>
+            </a:pPr>
+            <a:r>
+              <a:rPr lang="en-US" sz="1350" dirty="0">
                 <a:solidFill>
                   <a:srgbClr val="E8EDF2"/>
                 </a:solidFill>
@@ -4920,65 +6464,115 @@
                 <a:ea typeface="Courier New" pitchFamily="34" charset="-122"/>
                 <a:cs typeface="Courier New" pitchFamily="34" charset="-120"/>
               </a:rPr>
-              <a:t>./cuda_memtest --list_tests</a:t>
-            </a:r>
-            <a:endParaRPr lang="en-US" sz="1200" dirty="0"/>
-          </a:p>
-        </p:txBody>
-      </p:sp>
-      <p:sp>
-        <p:nvSpPr>
-          <p:cNvPr id="8" name="Text 6"/>
-          <p:cNvSpPr/>
-          <p:nvPr/>
-        </p:nvSpPr>
-        <p:spPr>
-          <a:xfrm>
-            <a:off x="4206240" y="2331720"/>
-            <a:ext cx="7132320" cy="365760"/>
-          </a:xfrm>
-          <a:prstGeom prst="rect">
-            <a:avLst/>
-          </a:prstGeom>
-          <a:noFill/>
-          <a:ln/>
-        </p:spPr>
-        <p:txBody>
-          <a:bodyPr wrap="square" lIns="0" tIns="0" rIns="0" bIns="0" rtlCol="0" anchor="ctr"/>
-          <a:lstStyle/>
-          <a:p>
-            <a:pPr indent="0" marL="0">
-              <a:buNone/>
-            </a:pPr>
-            <a:r>
-              <a:rPr lang="en-US" sz="1300" dirty="0">
+              <a:t>mkdir build &amp;&amp; cd build</a:t>
+            </a:r>
+            <a:endParaRPr lang="en-US" sz="1350" dirty="0"/>
+          </a:p>
+          <a:p>
+            <a:pPr algn="l" indent="0" marL="0">
+              <a:lnSpc>
+                <a:spcPct val="108000"/>
+              </a:lnSpc>
+              <a:buNone/>
+            </a:pPr>
+            <a:r>
+              <a:rPr lang="en-US" sz="1350" dirty="0">
+                <a:solidFill>
+                  <a:srgbClr val="8CC63F"/>
+                </a:solidFill>
+                <a:latin typeface="Courier New" pitchFamily="34" charset="0"/>
+                <a:ea typeface="Courier New" pitchFamily="34" charset="-122"/>
+                <a:cs typeface="Courier New" pitchFamily="34" charset="-120"/>
+              </a:rPr>
+              <a:t>cmake -DCMAKE_CUDA_ARCHITECTURES=86 ..   # 본인 GPU 번호로 교체</a:t>
+            </a:r>
+            <a:endParaRPr lang="en-US" sz="1350" dirty="0"/>
+          </a:p>
+          <a:p>
+            <a:pPr algn="l" indent="0" marL="0">
+              <a:lnSpc>
+                <a:spcPct val="108000"/>
+              </a:lnSpc>
+              <a:buNone/>
+            </a:pPr>
+            <a:r>
+              <a:rPr lang="en-US" sz="1350" dirty="0">
+                <a:solidFill>
+                  <a:srgbClr val="E8EDF2"/>
+                </a:solidFill>
+                <a:latin typeface="Courier New" pitchFamily="34" charset="0"/>
+                <a:ea typeface="Courier New" pitchFamily="34" charset="-122"/>
+                <a:cs typeface="Courier New" pitchFamily="34" charset="-120"/>
+              </a:rPr>
+              <a:t>make -j</a:t>
+            </a:r>
+            <a:endParaRPr lang="en-US" sz="1350" dirty="0"/>
+          </a:p>
+          <a:p>
+            <a:pPr algn="l" indent="0" marL="0">
+              <a:lnSpc>
+                <a:spcPct val="108000"/>
+              </a:lnSpc>
+              <a:buNone/>
+            </a:pPr>
+            <a:endParaRPr lang="en-US" sz="1350" dirty="0"/>
+          </a:p>
+          <a:p>
+            <a:pPr algn="l" indent="0" marL="0">
+              <a:lnSpc>
+                <a:spcPct val="108000"/>
+              </a:lnSpc>
+              <a:buNone/>
+            </a:pPr>
+            <a:r>
+              <a:rPr lang="en-US" sz="1350" dirty="0">
                 <a:solidFill>
                   <a:srgbClr val="9AA6B2"/>
                 </a:solidFill>
-                <a:latin typeface="Malgun Gothic" pitchFamily="34" charset="0"/>
-                <a:ea typeface="Malgun Gothic" pitchFamily="34" charset="-122"/>
-                <a:cs typeface="Malgun Gothic" pitchFamily="34" charset="-120"/>
-              </a:rPr>
-              <a:t>11개 메모리 테스트가 나옴</a:t>
-            </a:r>
-            <a:endParaRPr lang="en-US" sz="1300" dirty="0"/>
-          </a:p>
-        </p:txBody>
-      </p:sp>
-      <p:sp>
-        <p:nvSpPr>
-          <p:cNvPr id="9" name="Shape 7"/>
-          <p:cNvSpPr/>
-          <p:nvPr/>
-        </p:nvSpPr>
-        <p:spPr>
-          <a:xfrm>
-            <a:off x="548640" y="2971800"/>
-            <a:ext cx="11064240" cy="1234440"/>
+                <a:latin typeface="Courier New" pitchFamily="34" charset="0"/>
+                <a:ea typeface="Courier New" pitchFamily="34" charset="-122"/>
+                <a:cs typeface="Courier New" pitchFamily="34" charset="-120"/>
+              </a:rPr>
+              <a:t># AMD GPU면 HIP 백엔드</a:t>
+            </a:r>
+            <a:endParaRPr lang="en-US" sz="1350" dirty="0"/>
+          </a:p>
+          <a:p>
+            <a:pPr algn="l" indent="0" marL="0">
+              <a:lnSpc>
+                <a:spcPct val="108000"/>
+              </a:lnSpc>
+              <a:buNone/>
+            </a:pPr>
+            <a:r>
+              <a:rPr lang="en-US" sz="1350" dirty="0">
+                <a:solidFill>
+                  <a:srgbClr val="4FB0C6"/>
+                </a:solidFill>
+                <a:latin typeface="Courier New" pitchFamily="34" charset="0"/>
+                <a:ea typeface="Courier New" pitchFamily="34" charset="-122"/>
+                <a:cs typeface="Courier New" pitchFamily="34" charset="-120"/>
+              </a:rPr>
+              <a:t>cmake -DCUDA_MEMTEST_BACKEND=hip -DGPU_TARGETS=gfx90a ..</a:t>
+            </a:r>
+            <a:endParaRPr lang="en-US" sz="1350" dirty="0"/>
+          </a:p>
+        </p:txBody>
+      </p:sp>
+      <p:sp>
+        <p:nvSpPr>
+          <p:cNvPr id="6" name="Shape 4"/>
+          <p:cNvSpPr/>
+          <p:nvPr/>
+        </p:nvSpPr>
+        <p:spPr>
+          <a:xfrm>
+            <a:off x="548640" y="3703320"/>
+            <a:ext cx="5349240" cy="1737360"/>
           </a:xfrm>
           <a:prstGeom prst="roundRect">
             <a:avLst>
-              <a:gd name="adj" fmla="val 5926"/>
+              <a:gd name="adj" fmla="val 4211"/>
             </a:avLst>
           </a:prstGeom>
           <a:solidFill>
@@ -4989,162 +6583,99 @@
       </p:sp>
       <p:sp>
         <p:nvSpPr>
-          <p:cNvPr id="10" name="Text 8"/>
-          <p:cNvSpPr/>
-          <p:nvPr/>
-        </p:nvSpPr>
-        <p:spPr>
-          <a:xfrm>
-            <a:off x="822960" y="3136392"/>
-            <a:ext cx="3291840" cy="914400"/>
-          </a:xfrm>
-          <a:prstGeom prst="rect">
-            <a:avLst/>
-          </a:prstGeom>
-          <a:noFill/>
-          <a:ln/>
-        </p:spPr>
-        <p:txBody>
-          <a:bodyPr wrap="square" lIns="0" tIns="0" rIns="0" bIns="0" rtlCol="0" anchor="ctr"/>
+          <p:cNvPr id="7" name="Text 5"/>
+          <p:cNvSpPr/>
+          <p:nvPr/>
+        </p:nvSpPr>
+        <p:spPr>
+          <a:xfrm>
+            <a:off x="777240" y="3886200"/>
+            <a:ext cx="4892040" cy="640080"/>
+          </a:xfrm>
+          <a:prstGeom prst="rect">
+            <a:avLst/>
+          </a:prstGeom>
+          <a:noFill/>
+          <a:ln/>
+        </p:spPr>
+        <p:txBody>
+          <a:bodyPr wrap="square" lIns="0" tIns="0" rIns="0" bIns="0" rtlCol="0" anchor="t"/>
           <a:lstStyle/>
           <a:p>
             <a:pPr indent="0" marL="0">
               <a:buNone/>
             </a:pPr>
             <a:r>
-              <a:rPr lang="en-US" sz="1700" b="1" dirty="0">
-                <a:solidFill>
-                  <a:srgbClr val="4FB0C6"/>
-                </a:solidFill>
-                <a:latin typeface="Malgun Gothic" pitchFamily="34" charset="0"/>
-                <a:ea typeface="Malgun Gothic" pitchFamily="34" charset="-122"/>
-                <a:cs typeface="Malgun Gothic" pitchFamily="34" charset="-120"/>
-              </a:rPr>
-              <a:t>빠른 스트레스 실행</a:t>
-            </a:r>
-            <a:endParaRPr lang="en-US" sz="1700" dirty="0"/>
-          </a:p>
-        </p:txBody>
-      </p:sp>
-      <p:sp>
-        <p:nvSpPr>
-          <p:cNvPr id="11" name="Shape 9"/>
-          <p:cNvSpPr/>
-          <p:nvPr/>
-        </p:nvSpPr>
-        <p:spPr>
-          <a:xfrm>
-            <a:off x="4206240" y="3172968"/>
-            <a:ext cx="5669280" cy="502920"/>
-          </a:xfrm>
-          <a:prstGeom prst="roundRect">
-            <a:avLst>
-              <a:gd name="adj" fmla="val 7273"/>
-            </a:avLst>
-          </a:prstGeom>
-          <a:solidFill>
-            <a:srgbClr val="0E1116"/>
-          </a:solidFill>
-          <a:ln w="12700">
-            <a:solidFill>
-              <a:srgbClr val="2C3440"/>
-            </a:solidFill>
-            <a:prstDash val="solid"/>
-          </a:ln>
-        </p:spPr>
-      </p:sp>
-      <p:sp>
-        <p:nvSpPr>
-          <p:cNvPr id="12" name="Text 10"/>
-          <p:cNvSpPr/>
-          <p:nvPr/>
-        </p:nvSpPr>
-        <p:spPr>
-          <a:xfrm>
-            <a:off x="4389120" y="3172968"/>
-            <a:ext cx="5303520" cy="502920"/>
-          </a:xfrm>
-          <a:prstGeom prst="rect">
-            <a:avLst/>
-          </a:prstGeom>
-          <a:noFill/>
-          <a:ln/>
-        </p:spPr>
-        <p:txBody>
-          <a:bodyPr wrap="square" lIns="0" tIns="0" rIns="0" bIns="0" rtlCol="0" anchor="ctr"/>
-          <a:lstStyle/>
-          <a:p>
-            <a:pPr indent="0" marL="0">
-              <a:buNone/>
-            </a:pPr>
-            <a:r>
-              <a:rPr lang="en-US" sz="1200" dirty="0">
-                <a:solidFill>
-                  <a:srgbClr val="E8EDF2"/>
+              <a:rPr lang="en-US" sz="1400" b="1" dirty="0">
+                <a:solidFill>
+                  <a:srgbClr val="8CC63F"/>
                 </a:solidFill>
                 <a:latin typeface="Courier New" pitchFamily="34" charset="0"/>
                 <a:ea typeface="Courier New" pitchFamily="34" charset="-122"/>
                 <a:cs typeface="Courier New" pitchFamily="34" charset="-120"/>
               </a:rPr>
-              <a:t>./cuda_memtest --stress --num_iterations 100 --num_passes 1</a:t>
-            </a:r>
-            <a:endParaRPr lang="en-US" sz="1200" dirty="0"/>
-          </a:p>
-        </p:txBody>
-      </p:sp>
-      <p:sp>
-        <p:nvSpPr>
-          <p:cNvPr id="13" name="Text 11"/>
-          <p:cNvSpPr/>
-          <p:nvPr/>
-        </p:nvSpPr>
-        <p:spPr>
-          <a:xfrm>
-            <a:off x="4206240" y="3703320"/>
-            <a:ext cx="7132320" cy="365760"/>
-          </a:xfrm>
-          <a:prstGeom prst="rect">
-            <a:avLst/>
-          </a:prstGeom>
-          <a:noFill/>
-          <a:ln/>
-        </p:spPr>
-        <p:txBody>
-          <a:bodyPr wrap="square" lIns="0" tIns="0" rIns="0" bIns="0" rtlCol="0" anchor="ctr"/>
+              <a:t>CMAKE_CUDA_ARCHITECTURES</a:t>
+            </a:r>
+            <a:endParaRPr lang="en-US" sz="1400" dirty="0"/>
+          </a:p>
+        </p:txBody>
+      </p:sp>
+      <p:sp>
+        <p:nvSpPr>
+          <p:cNvPr id="8" name="Text 6"/>
+          <p:cNvSpPr/>
+          <p:nvPr/>
+        </p:nvSpPr>
+        <p:spPr>
+          <a:xfrm>
+            <a:off x="777240" y="4526280"/>
+            <a:ext cx="4892040" cy="822960"/>
+          </a:xfrm>
+          <a:prstGeom prst="rect">
+            <a:avLst/>
+          </a:prstGeom>
+          <a:noFill/>
+          <a:ln/>
+        </p:spPr>
+        <p:txBody>
+          <a:bodyPr wrap="square" lIns="0" tIns="0" rIns="0" bIns="0" rtlCol="0" anchor="t"/>
           <a:lstStyle/>
           <a:p>
             <a:pPr indent="0" marL="0">
-              <a:buNone/>
-            </a:pPr>
-            <a:r>
-              <a:rPr lang="en-US" sz="1300" dirty="0">
-                <a:solidFill>
-                  <a:srgbClr val="9AA6B2"/>
-                </a:solidFill>
-                <a:latin typeface="Malgun Gothic" pitchFamily="34" charset="0"/>
-                <a:ea typeface="Malgun Gothic" pitchFamily="34" charset="-122"/>
-                <a:cs typeface="Malgun Gothic" pitchFamily="34" charset="-120"/>
-              </a:rPr>
-              <a:t>GPU 메모리를 실제로 검사</a:t>
-            </a:r>
-            <a:endParaRPr lang="en-US" sz="1300" dirty="0"/>
-          </a:p>
-        </p:txBody>
-      </p:sp>
-      <p:sp>
-        <p:nvSpPr>
-          <p:cNvPr id="14" name="Shape 12"/>
-          <p:cNvSpPr/>
-          <p:nvPr/>
-        </p:nvSpPr>
-        <p:spPr>
-          <a:xfrm>
-            <a:off x="548640" y="4343400"/>
-            <a:ext cx="11064240" cy="1234440"/>
+              <a:lnSpc>
+                <a:spcPct val="120000"/>
+              </a:lnSpc>
+              <a:buNone/>
+            </a:pPr>
+            <a:r>
+              <a:rPr lang="en-US" sz="1400" dirty="0">
+                <a:solidFill>
+                  <a:srgbClr val="E8EDF2"/>
+                </a:solidFill>
+                <a:latin typeface="Malgun Gothic" pitchFamily="34" charset="0"/>
+                <a:ea typeface="Malgun Gothic" pitchFamily="34" charset="-122"/>
+                <a:cs typeface="Malgun Gothic" pitchFamily="34" charset="-120"/>
+              </a:rPr>
+              <a:t>GPU 세대(sm_XX)를 지정. 세대마다 기계어가 다름.</a:t>
+            </a:r>
+            <a:endParaRPr lang="en-US" sz="1400" dirty="0"/>
+          </a:p>
+        </p:txBody>
+      </p:sp>
+      <p:sp>
+        <p:nvSpPr>
+          <p:cNvPr id="9" name="Shape 7"/>
+          <p:cNvSpPr/>
+          <p:nvPr/>
+        </p:nvSpPr>
+        <p:spPr>
+          <a:xfrm>
+            <a:off x="6263640" y="3703320"/>
+            <a:ext cx="5349240" cy="1737360"/>
           </a:xfrm>
           <a:prstGeom prst="roundRect">
             <a:avLst>
-              <a:gd name="adj" fmla="val 5926"/>
+              <a:gd name="adj" fmla="val 4211"/>
             </a:avLst>
           </a:prstGeom>
           <a:solidFill>
@@ -5155,135 +6686,111 @@
       </p:sp>
       <p:sp>
         <p:nvSpPr>
-          <p:cNvPr id="15" name="Text 13"/>
-          <p:cNvSpPr/>
-          <p:nvPr/>
-        </p:nvSpPr>
-        <p:spPr>
-          <a:xfrm>
-            <a:off x="822960" y="4507992"/>
-            <a:ext cx="3291840" cy="914400"/>
-          </a:xfrm>
-          <a:prstGeom prst="rect">
-            <a:avLst/>
-          </a:prstGeom>
-          <a:noFill/>
-          <a:ln/>
-        </p:spPr>
-        <p:txBody>
-          <a:bodyPr wrap="square" lIns="0" tIns="0" rIns="0" bIns="0" rtlCol="0" anchor="ctr"/>
+          <p:cNvPr id="10" name="Text 8"/>
+          <p:cNvSpPr/>
+          <p:nvPr/>
+        </p:nvSpPr>
+        <p:spPr>
+          <a:xfrm>
+            <a:off x="6492240" y="3886200"/>
+            <a:ext cx="4892040" cy="640080"/>
+          </a:xfrm>
+          <a:prstGeom prst="rect">
+            <a:avLst/>
+          </a:prstGeom>
+          <a:noFill/>
+          <a:ln/>
+        </p:spPr>
+        <p:txBody>
+          <a:bodyPr wrap="square" lIns="0" tIns="0" rIns="0" bIns="0" rtlCol="0" anchor="t"/>
           <a:lstStyle/>
           <a:p>
             <a:pPr indent="0" marL="0">
               <a:buNone/>
             </a:pPr>
             <a:r>
-              <a:rPr lang="en-US" sz="1700" b="1" dirty="0">
-                <a:solidFill>
-                  <a:srgbClr val="E0A458"/>
-                </a:solidFill>
-                <a:latin typeface="Malgun Gothic" pitchFamily="34" charset="0"/>
-                <a:ea typeface="Malgun Gothic" pitchFamily="34" charset="-122"/>
-                <a:cs typeface="Malgun Gothic" pitchFamily="34" charset="-120"/>
-              </a:rPr>
-              <a:t>상태 점검 스크립트</a:t>
-            </a:r>
-            <a:endParaRPr lang="en-US" sz="1700" dirty="0"/>
-          </a:p>
-        </p:txBody>
-      </p:sp>
-      <p:sp>
-        <p:nvSpPr>
-          <p:cNvPr id="16" name="Shape 14"/>
-          <p:cNvSpPr/>
-          <p:nvPr/>
-        </p:nvSpPr>
-        <p:spPr>
-          <a:xfrm>
-            <a:off x="4206240" y="4544568"/>
-            <a:ext cx="5669280" cy="502920"/>
-          </a:xfrm>
-          <a:prstGeom prst="roundRect">
-            <a:avLst>
-              <a:gd name="adj" fmla="val 7273"/>
-            </a:avLst>
-          </a:prstGeom>
-          <a:solidFill>
-            <a:srgbClr val="0E1116"/>
-          </a:solidFill>
-          <a:ln w="12700">
-            <a:solidFill>
-              <a:srgbClr val="2C3440"/>
-            </a:solidFill>
-            <a:prstDash val="solid"/>
-          </a:ln>
-        </p:spPr>
-      </p:sp>
-      <p:sp>
-        <p:nvSpPr>
-          <p:cNvPr id="17" name="Text 15"/>
-          <p:cNvSpPr/>
-          <p:nvPr/>
-        </p:nvSpPr>
-        <p:spPr>
-          <a:xfrm>
-            <a:off x="4389120" y="4544568"/>
-            <a:ext cx="5303520" cy="502920"/>
-          </a:xfrm>
-          <a:prstGeom prst="rect">
-            <a:avLst/>
-          </a:prstGeom>
-          <a:noFill/>
-          <a:ln/>
-        </p:spPr>
-        <p:txBody>
-          <a:bodyPr wrap="square" lIns="0" tIns="0" rIns="0" bIns="0" rtlCol="0" anchor="ctr"/>
-          <a:lstStyle/>
-          <a:p>
-            <a:pPr indent="0" marL="0">
-              <a:buNone/>
-            </a:pPr>
-            <a:r>
-              <a:rPr lang="en-US" sz="1200" dirty="0">
-                <a:solidFill>
-                  <a:srgbClr val="E8EDF2"/>
+              <a:rPr lang="en-US" sz="1400" b="1" dirty="0">
+                <a:solidFill>
+                  <a:srgbClr val="4FB0C6"/>
                 </a:solidFill>
                 <a:latin typeface="Courier New" pitchFamily="34" charset="0"/>
                 <a:ea typeface="Courier New" pitchFamily="34" charset="-122"/>
                 <a:cs typeface="Courier New" pitchFamily="34" charset="-120"/>
               </a:rPr>
-              <a:t>./sanity_check.sh 0</a:t>
-            </a:r>
-            <a:endParaRPr lang="en-US" sz="1200" dirty="0"/>
-          </a:p>
-        </p:txBody>
-      </p:sp>
-      <p:sp>
-        <p:nvSpPr>
-          <p:cNvPr id="18" name="Text 16"/>
-          <p:cNvSpPr/>
-          <p:nvPr/>
-        </p:nvSpPr>
-        <p:spPr>
-          <a:xfrm>
-            <a:off x="4206240" y="5074920"/>
-            <a:ext cx="7132320" cy="365760"/>
-          </a:xfrm>
-          <a:prstGeom prst="rect">
-            <a:avLst/>
-          </a:prstGeom>
-          <a:noFill/>
-          <a:ln/>
-        </p:spPr>
-        <p:txBody>
-          <a:bodyPr wrap="square" lIns="0" tIns="0" rIns="0" bIns="0" rtlCol="0" anchor="ctr"/>
+              <a:t>CUDA_MEMTEST_BACKEND</a:t>
+            </a:r>
+            <a:endParaRPr lang="en-US" sz="1400" dirty="0"/>
+          </a:p>
+        </p:txBody>
+      </p:sp>
+      <p:sp>
+        <p:nvSpPr>
+          <p:cNvPr id="11" name="Text 9"/>
+          <p:cNvSpPr/>
+          <p:nvPr/>
+        </p:nvSpPr>
+        <p:spPr>
+          <a:xfrm>
+            <a:off x="6492240" y="4526280"/>
+            <a:ext cx="4892040" cy="822960"/>
+          </a:xfrm>
+          <a:prstGeom prst="rect">
+            <a:avLst/>
+          </a:prstGeom>
+          <a:noFill/>
+          <a:ln/>
+        </p:spPr>
+        <p:txBody>
+          <a:bodyPr wrap="square" lIns="0" tIns="0" rIns="0" bIns="0" rtlCol="0" anchor="t"/>
           <a:lstStyle/>
           <a:p>
             <a:pPr indent="0" marL="0">
-              <a:buNone/>
-            </a:pPr>
-            <a:r>
-              <a:rPr lang="en-US" sz="1300" dirty="0">
+              <a:lnSpc>
+                <a:spcPct val="120000"/>
+              </a:lnSpc>
+              <a:buNone/>
+            </a:pPr>
+            <a:r>
+              <a:rPr lang="en-US" sz="1400" dirty="0">
+                <a:solidFill>
+                  <a:srgbClr val="E8EDF2"/>
+                </a:solidFill>
+                <a:latin typeface="Malgun Gothic" pitchFamily="34" charset="0"/>
+                <a:ea typeface="Malgun Gothic" pitchFamily="34" charset="-122"/>
+                <a:cs typeface="Malgun Gothic" pitchFamily="34" charset="-120"/>
+              </a:rPr>
+              <a:t>cuda / hip 백엔드 선택 (CMakeLists.txt:22).</a:t>
+            </a:r>
+            <a:endParaRPr lang="en-US" sz="1400" dirty="0"/>
+          </a:p>
+        </p:txBody>
+      </p:sp>
+      <p:sp>
+        <p:nvSpPr>
+          <p:cNvPr id="12" name="Text 10"/>
+          <p:cNvSpPr/>
+          <p:nvPr/>
+        </p:nvSpPr>
+        <p:spPr>
+          <a:xfrm>
+            <a:off x="548640" y="5623560"/>
+            <a:ext cx="11064240" cy="457200"/>
+          </a:xfrm>
+          <a:prstGeom prst="rect">
+            <a:avLst/>
+          </a:prstGeom>
+          <a:noFill/>
+          <a:ln/>
+        </p:spPr>
+        <p:txBody>
+          <a:bodyPr wrap="square" lIns="0" tIns="0" rIns="0" bIns="0" rtlCol="0" anchor="ctr"/>
+          <a:lstStyle/>
+          <a:p>
+            <a:pPr indent="0" marL="0">
+              <a:buNone/>
+            </a:pPr>
+            <a:r>
+              <a:rPr lang="en-US" sz="1300" i="1" dirty="0">
                 <a:solidFill>
                   <a:srgbClr val="9AA6B2"/>
                 </a:solidFill>
@@ -5291,48 +6798,9 @@
                 <a:ea typeface="Malgun Gothic" pitchFamily="34" charset="-122"/>
                 <a:cs typeface="Malgun Gothic" pitchFamily="34" charset="-120"/>
               </a:rPr>
-              <a:t>특정 GPU 건강 빠르게 점검</a:t>
+              <a:t>본인 GPU의 sm_XX 번호: developer.nvidia.com/cuda-gpus  (예: T4→75, RTX30→86, RTX40→89, A100→80)</a:t>
             </a:r>
             <a:endParaRPr lang="en-US" sz="1300" dirty="0"/>
-          </a:p>
-        </p:txBody>
-      </p:sp>
-      <p:sp>
-        <p:nvSpPr>
-          <p:cNvPr id="19" name="Text 17"/>
-          <p:cNvSpPr/>
-          <p:nvPr/>
-        </p:nvSpPr>
-        <p:spPr>
-          <a:xfrm>
-            <a:off x="548640" y="5852160"/>
-            <a:ext cx="11064240" cy="365760"/>
-          </a:xfrm>
-          <a:prstGeom prst="rect">
-            <a:avLst/>
-          </a:prstGeom>
-          <a:noFill/>
-          <a:ln/>
-        </p:spPr>
-        <p:txBody>
-          <a:bodyPr wrap="square" lIns="0" tIns="0" rIns="0" bIns="0" rtlCol="0" anchor="ctr"/>
-          <a:lstStyle/>
-          <a:p>
-            <a:pPr algn="ctr" indent="0" marL="0">
-              <a:buNone/>
-            </a:pPr>
-            <a:r>
-              <a:rPr lang="en-US" sz="1400" i="1" dirty="0">
-                <a:solidFill>
-                  <a:srgbClr val="9AA6B2"/>
-                </a:solidFill>
-                <a:latin typeface="Malgun Gothic" pitchFamily="34" charset="0"/>
-                <a:ea typeface="Malgun Gothic" pitchFamily="34" charset="-122"/>
-                <a:cs typeface="Malgun Gothic" pitchFamily="34" charset="-120"/>
-              </a:rPr>
-              <a:t>오류 없이 끝나면 성공입니다 — 건강한 GPU는 '아무 일도 안 일어난 것처럼' 조용히 끝납니다.</a:t>
-            </a:r>
-            <a:endParaRPr lang="en-US" sz="1400" dirty="0"/>
           </a:p>
         </p:txBody>
       </p:sp>
@@ -5405,7 +6873,7 @@
                 <a:ea typeface="Courier New" pitchFamily="34" charset="-122"/>
                 <a:cs typeface="Courier New" pitchFamily="34" charset="-120"/>
               </a:rPr>
-              <a:t>6</a:t>
+              <a:t>5</a:t>
             </a:r>
             <a:endParaRPr lang="en-US" sz="2200" dirty="0"/>
           </a:p>
@@ -5444,7 +6912,7 @@
                 <a:ea typeface="Malgun Gothic" pitchFamily="34" charset="-122"/>
                 <a:cs typeface="Malgun Gothic" pitchFamily="34" charset="-120"/>
               </a:rPr>
-              <a:t>11개 테스트 한눈에</a:t>
+              <a:t>첫 실행</a:t>
             </a:r>
             <a:endParaRPr lang="en-US" sz="3000" dirty="0"/>
           </a:p>
@@ -5459,11 +6927,11 @@
         <p:spPr>
           <a:xfrm>
             <a:off x="548640" y="1600200"/>
-            <a:ext cx="3505200" cy="786384"/>
+            <a:ext cx="11064240" cy="1234440"/>
           </a:xfrm>
           <a:prstGeom prst="roundRect">
             <a:avLst>
-              <a:gd name="adj" fmla="val 6977"/>
+              <a:gd name="adj" fmla="val 5926"/>
             </a:avLst>
           </a:prstGeom>
           <a:solidFill>
@@ -5480,51 +6948,113 @@
         </p:nvSpPr>
         <p:spPr>
           <a:xfrm>
-            <a:off x="731520" y="1728216"/>
-            <a:ext cx="658368" cy="530352"/>
+            <a:off x="822960" y="1764792"/>
+            <a:ext cx="3291840" cy="914400"/>
+          </a:xfrm>
+          <a:prstGeom prst="rect">
+            <a:avLst/>
+          </a:prstGeom>
+          <a:noFill/>
+          <a:ln/>
+        </p:spPr>
+        <p:txBody>
+          <a:bodyPr wrap="square" lIns="0" tIns="0" rIns="0" bIns="0" rtlCol="0" anchor="ctr"/>
+          <a:lstStyle/>
+          <a:p>
+            <a:pPr indent="0" marL="0">
+              <a:buNone/>
+            </a:pPr>
+            <a:r>
+              <a:rPr lang="en-US" sz="1700" b="1" dirty="0">
+                <a:solidFill>
+                  <a:srgbClr val="8CC63F"/>
+                </a:solidFill>
+                <a:latin typeface="Malgun Gothic" pitchFamily="34" charset="0"/>
+                <a:ea typeface="Malgun Gothic" pitchFamily="34" charset="-122"/>
+                <a:cs typeface="Malgun Gothic" pitchFamily="34" charset="-120"/>
+              </a:rPr>
+              <a:t>테스트 목록 보기</a:t>
+            </a:r>
+            <a:endParaRPr lang="en-US" sz="1700" dirty="0"/>
+          </a:p>
+        </p:txBody>
+      </p:sp>
+      <p:sp>
+        <p:nvSpPr>
+          <p:cNvPr id="6" name="Shape 4"/>
+          <p:cNvSpPr/>
+          <p:nvPr/>
+        </p:nvSpPr>
+        <p:spPr>
+          <a:xfrm>
+            <a:off x="4206240" y="1801368"/>
+            <a:ext cx="5669280" cy="502920"/>
           </a:xfrm>
           <a:prstGeom prst="roundRect">
             <a:avLst>
-              <a:gd name="adj" fmla="val 10345"/>
+              <a:gd name="adj" fmla="val 7273"/>
             </a:avLst>
           </a:prstGeom>
           <a:solidFill>
-            <a:srgbClr val="4FB0C6"/>
+            <a:srgbClr val="0E1116"/>
           </a:solidFill>
-          <a:ln/>
-        </p:spPr>
-        <p:txBody>
-          <a:bodyPr wrap="square" rtlCol="0" anchor="ctr"/>
-          <a:lstStyle/>
-          <a:p>
-            <a:pPr algn="ctr" indent="0" marL="0">
-              <a:buNone/>
-            </a:pPr>
-            <a:r>
-              <a:rPr lang="en-US" sz="1600" b="1" dirty="0">
-                <a:solidFill>
-                  <a:srgbClr val="13161C"/>
+          <a:ln w="12700">
+            <a:solidFill>
+              <a:srgbClr val="2C3440"/>
+            </a:solidFill>
+            <a:prstDash val="solid"/>
+          </a:ln>
+        </p:spPr>
+      </p:sp>
+      <p:sp>
+        <p:nvSpPr>
+          <p:cNvPr id="7" name="Text 5"/>
+          <p:cNvSpPr/>
+          <p:nvPr/>
+        </p:nvSpPr>
+        <p:spPr>
+          <a:xfrm>
+            <a:off x="4389120" y="1801368"/>
+            <a:ext cx="5303520" cy="502920"/>
+          </a:xfrm>
+          <a:prstGeom prst="rect">
+            <a:avLst/>
+          </a:prstGeom>
+          <a:noFill/>
+          <a:ln/>
+        </p:spPr>
+        <p:txBody>
+          <a:bodyPr wrap="square" lIns="0" tIns="0" rIns="0" bIns="0" rtlCol="0" anchor="ctr"/>
+          <a:lstStyle/>
+          <a:p>
+            <a:pPr indent="0" marL="0">
+              <a:buNone/>
+            </a:pPr>
+            <a:r>
+              <a:rPr lang="en-US" sz="1200" dirty="0">
+                <a:solidFill>
+                  <a:srgbClr val="E8EDF2"/>
                 </a:solidFill>
                 <a:latin typeface="Courier New" pitchFamily="34" charset="0"/>
                 <a:ea typeface="Courier New" pitchFamily="34" charset="-122"/>
                 <a:cs typeface="Courier New" pitchFamily="34" charset="-120"/>
               </a:rPr>
-              <a:t>0</a:t>
-            </a:r>
-            <a:endParaRPr lang="en-US" sz="1600" dirty="0"/>
-          </a:p>
-        </p:txBody>
-      </p:sp>
-      <p:sp>
-        <p:nvSpPr>
-          <p:cNvPr id="6" name="Text 4"/>
-          <p:cNvSpPr/>
-          <p:nvPr/>
-        </p:nvSpPr>
-        <p:spPr>
-          <a:xfrm>
-            <a:off x="1508760" y="1691640"/>
-            <a:ext cx="2407920" cy="384048"/>
+              <a:t>./cuda_memtest --list_tests</a:t>
+            </a:r>
+            <a:endParaRPr lang="en-US" sz="1200" dirty="0"/>
+          </a:p>
+        </p:txBody>
+      </p:sp>
+      <p:sp>
+        <p:nvSpPr>
+          <p:cNvPr id="8" name="Text 6"/>
+          <p:cNvSpPr/>
+          <p:nvPr/>
+        </p:nvSpPr>
+        <p:spPr>
+          <a:xfrm>
+            <a:off x="4206240" y="2331720"/>
+            <a:ext cx="7132320" cy="365760"/>
           </a:xfrm>
           <a:prstGeom prst="rect">
             <a:avLst/>
@@ -5540,46 +7070,7 @@
               <a:buNone/>
             </a:pPr>
             <a:r>
-              <a:rPr lang="en-US" sz="1350" b="1" dirty="0">
-                <a:solidFill>
-                  <a:srgbClr val="E8EDF2"/>
-                </a:solidFill>
-                <a:latin typeface="Malgun Gothic" pitchFamily="34" charset="0"/>
-                <a:ea typeface="Malgun Gothic" pitchFamily="34" charset="-122"/>
-                <a:cs typeface="Malgun Gothic" pitchFamily="34" charset="-120"/>
-              </a:rPr>
-              <a:t>Walking 1 bit</a:t>
-            </a:r>
-            <a:endParaRPr lang="en-US" sz="1350" dirty="0"/>
-          </a:p>
-        </p:txBody>
-      </p:sp>
-      <p:sp>
-        <p:nvSpPr>
-          <p:cNvPr id="7" name="Text 5"/>
-          <p:cNvSpPr/>
-          <p:nvPr/>
-        </p:nvSpPr>
-        <p:spPr>
-          <a:xfrm>
-            <a:off x="1508760" y="2020824"/>
-            <a:ext cx="2407920" cy="310896"/>
-          </a:xfrm>
-          <a:prstGeom prst="rect">
-            <a:avLst/>
-          </a:prstGeom>
-          <a:noFill/>
-          <a:ln/>
-        </p:spPr>
-        <p:txBody>
-          <a:bodyPr wrap="square" lIns="0" tIns="0" rIns="0" bIns="0" rtlCol="0" anchor="ctr"/>
-          <a:lstStyle/>
-          <a:p>
-            <a:pPr indent="0" marL="0">
-              <a:buNone/>
-            </a:pPr>
-            <a:r>
-              <a:rPr lang="en-US" sz="1150" dirty="0">
+              <a:rPr lang="en-US" sz="1300" dirty="0">
                 <a:solidFill>
                   <a:srgbClr val="9AA6B2"/>
                 </a:solidFill>
@@ -5587,26 +7078,26 @@
                 <a:ea typeface="Malgun Gothic" pitchFamily="34" charset="-122"/>
                 <a:cs typeface="Malgun Gothic" pitchFamily="34" charset="-120"/>
               </a:rPr>
-              <a:t>주소 배선</a:t>
-            </a:r>
-            <a:endParaRPr lang="en-US" sz="1150" dirty="0"/>
-          </a:p>
-        </p:txBody>
-      </p:sp>
-      <p:sp>
-        <p:nvSpPr>
-          <p:cNvPr id="8" name="Shape 6"/>
-          <p:cNvSpPr/>
-          <p:nvPr/>
-        </p:nvSpPr>
-        <p:spPr>
-          <a:xfrm>
-            <a:off x="4328160" y="1600200"/>
-            <a:ext cx="3505200" cy="786384"/>
+              <a:t>11개 메모리 테스트가 나옴</a:t>
+            </a:r>
+            <a:endParaRPr lang="en-US" sz="1300" dirty="0"/>
+          </a:p>
+        </p:txBody>
+      </p:sp>
+      <p:sp>
+        <p:nvSpPr>
+          <p:cNvPr id="9" name="Shape 7"/>
+          <p:cNvSpPr/>
+          <p:nvPr/>
+        </p:nvSpPr>
+        <p:spPr>
+          <a:xfrm>
+            <a:off x="548640" y="2971800"/>
+            <a:ext cx="11064240" cy="1234440"/>
           </a:xfrm>
           <a:prstGeom prst="roundRect">
             <a:avLst>
-              <a:gd name="adj" fmla="val 6977"/>
+              <a:gd name="adj" fmla="val 5926"/>
             </a:avLst>
           </a:prstGeom>
           <a:solidFill>
@@ -5617,57 +7108,119 @@
       </p:sp>
       <p:sp>
         <p:nvSpPr>
-          <p:cNvPr id="9" name="Text 7"/>
-          <p:cNvSpPr/>
-          <p:nvPr/>
-        </p:nvSpPr>
-        <p:spPr>
-          <a:xfrm>
-            <a:off x="4511040" y="1728216"/>
-            <a:ext cx="658368" cy="530352"/>
+          <p:cNvPr id="10" name="Text 8"/>
+          <p:cNvSpPr/>
+          <p:nvPr/>
+        </p:nvSpPr>
+        <p:spPr>
+          <a:xfrm>
+            <a:off x="822960" y="3136392"/>
+            <a:ext cx="3291840" cy="914400"/>
+          </a:xfrm>
+          <a:prstGeom prst="rect">
+            <a:avLst/>
+          </a:prstGeom>
+          <a:noFill/>
+          <a:ln/>
+        </p:spPr>
+        <p:txBody>
+          <a:bodyPr wrap="square" lIns="0" tIns="0" rIns="0" bIns="0" rtlCol="0" anchor="ctr"/>
+          <a:lstStyle/>
+          <a:p>
+            <a:pPr indent="0" marL="0">
+              <a:buNone/>
+            </a:pPr>
+            <a:r>
+              <a:rPr lang="en-US" sz="1700" b="1" dirty="0">
+                <a:solidFill>
+                  <a:srgbClr val="4FB0C6"/>
+                </a:solidFill>
+                <a:latin typeface="Malgun Gothic" pitchFamily="34" charset="0"/>
+                <a:ea typeface="Malgun Gothic" pitchFamily="34" charset="-122"/>
+                <a:cs typeface="Malgun Gothic" pitchFamily="34" charset="-120"/>
+              </a:rPr>
+              <a:t>빠른 스트레스 실행</a:t>
+            </a:r>
+            <a:endParaRPr lang="en-US" sz="1700" dirty="0"/>
+          </a:p>
+        </p:txBody>
+      </p:sp>
+      <p:sp>
+        <p:nvSpPr>
+          <p:cNvPr id="11" name="Shape 9"/>
+          <p:cNvSpPr/>
+          <p:nvPr/>
+        </p:nvSpPr>
+        <p:spPr>
+          <a:xfrm>
+            <a:off x="4206240" y="3172968"/>
+            <a:ext cx="5669280" cy="502920"/>
           </a:xfrm>
           <a:prstGeom prst="roundRect">
             <a:avLst>
-              <a:gd name="adj" fmla="val 10345"/>
+              <a:gd name="adj" fmla="val 7273"/>
             </a:avLst>
           </a:prstGeom>
           <a:solidFill>
-            <a:srgbClr val="4FB0C6"/>
+            <a:srgbClr val="0E1116"/>
           </a:solidFill>
-          <a:ln/>
-        </p:spPr>
-        <p:txBody>
-          <a:bodyPr wrap="square" rtlCol="0" anchor="ctr"/>
-          <a:lstStyle/>
-          <a:p>
-            <a:pPr algn="ctr" indent="0" marL="0">
-              <a:buNone/>
-            </a:pPr>
-            <a:r>
-              <a:rPr lang="en-US" sz="1600" b="1" dirty="0">
-                <a:solidFill>
-                  <a:srgbClr val="13161C"/>
+          <a:ln w="12700">
+            <a:solidFill>
+              <a:srgbClr val="2C3440"/>
+            </a:solidFill>
+            <a:prstDash val="solid"/>
+          </a:ln>
+        </p:spPr>
+      </p:sp>
+      <p:sp>
+        <p:nvSpPr>
+          <p:cNvPr id="12" name="Text 10"/>
+          <p:cNvSpPr/>
+          <p:nvPr/>
+        </p:nvSpPr>
+        <p:spPr>
+          <a:xfrm>
+            <a:off x="4389120" y="3172968"/>
+            <a:ext cx="5303520" cy="502920"/>
+          </a:xfrm>
+          <a:prstGeom prst="rect">
+            <a:avLst/>
+          </a:prstGeom>
+          <a:noFill/>
+          <a:ln/>
+        </p:spPr>
+        <p:txBody>
+          <a:bodyPr wrap="square" lIns="0" tIns="0" rIns="0" bIns="0" rtlCol="0" anchor="ctr"/>
+          <a:lstStyle/>
+          <a:p>
+            <a:pPr indent="0" marL="0">
+              <a:buNone/>
+            </a:pPr>
+            <a:r>
+              <a:rPr lang="en-US" sz="1200" dirty="0">
+                <a:solidFill>
+                  <a:srgbClr val="E8EDF2"/>
                 </a:solidFill>
                 <a:latin typeface="Courier New" pitchFamily="34" charset="0"/>
                 <a:ea typeface="Courier New" pitchFamily="34" charset="-122"/>
                 <a:cs typeface="Courier New" pitchFamily="34" charset="-120"/>
               </a:rPr>
-              <a:t>1</a:t>
-            </a:r>
-            <a:endParaRPr lang="en-US" sz="1600" dirty="0"/>
-          </a:p>
-        </p:txBody>
-      </p:sp>
-      <p:sp>
-        <p:nvSpPr>
-          <p:cNvPr id="10" name="Text 8"/>
-          <p:cNvSpPr/>
-          <p:nvPr/>
-        </p:nvSpPr>
-        <p:spPr>
-          <a:xfrm>
-            <a:off x="5288280" y="1691640"/>
-            <a:ext cx="2407920" cy="384048"/>
+              <a:t>./cuda_memtest --stress --num_iterations 100 --num_passes 1</a:t>
+            </a:r>
+            <a:endParaRPr lang="en-US" sz="1200" dirty="0"/>
+          </a:p>
+        </p:txBody>
+      </p:sp>
+      <p:sp>
+        <p:nvSpPr>
+          <p:cNvPr id="13" name="Text 11"/>
+          <p:cNvSpPr/>
+          <p:nvPr/>
+        </p:nvSpPr>
+        <p:spPr>
+          <a:xfrm>
+            <a:off x="4206240" y="3703320"/>
+            <a:ext cx="7132320" cy="365760"/>
           </a:xfrm>
           <a:prstGeom prst="rect">
             <a:avLst/>
@@ -5683,46 +7236,7 @@
               <a:buNone/>
             </a:pPr>
             <a:r>
-              <a:rPr lang="en-US" sz="1350" b="1" dirty="0">
-                <a:solidFill>
-                  <a:srgbClr val="E8EDF2"/>
-                </a:solidFill>
-                <a:latin typeface="Malgun Gothic" pitchFamily="34" charset="0"/>
-                <a:ea typeface="Malgun Gothic" pitchFamily="34" charset="-122"/>
-                <a:cs typeface="Malgun Gothic" pitchFamily="34" charset="-120"/>
-              </a:rPr>
-              <a:t>Own address</a:t>
-            </a:r>
-            <a:endParaRPr lang="en-US" sz="1350" dirty="0"/>
-          </a:p>
-        </p:txBody>
-      </p:sp>
-      <p:sp>
-        <p:nvSpPr>
-          <p:cNvPr id="11" name="Text 9"/>
-          <p:cNvSpPr/>
-          <p:nvPr/>
-        </p:nvSpPr>
-        <p:spPr>
-          <a:xfrm>
-            <a:off x="5288280" y="2020824"/>
-            <a:ext cx="2407920" cy="310896"/>
-          </a:xfrm>
-          <a:prstGeom prst="rect">
-            <a:avLst/>
-          </a:prstGeom>
-          <a:noFill/>
-          <a:ln/>
-        </p:spPr>
-        <p:txBody>
-          <a:bodyPr wrap="square" lIns="0" tIns="0" rIns="0" bIns="0" rtlCol="0" anchor="ctr"/>
-          <a:lstStyle/>
-          <a:p>
-            <a:pPr indent="0" marL="0">
-              <a:buNone/>
-            </a:pPr>
-            <a:r>
-              <a:rPr lang="en-US" sz="1150" dirty="0">
+              <a:rPr lang="en-US" sz="1300" dirty="0">
                 <a:solidFill>
                   <a:srgbClr val="9AA6B2"/>
                 </a:solidFill>
@@ -5730,26 +7244,26 @@
                 <a:ea typeface="Malgun Gothic" pitchFamily="34" charset="-122"/>
                 <a:cs typeface="Malgun Gothic" pitchFamily="34" charset="-120"/>
               </a:rPr>
-              <a:t>주소 검사</a:t>
-            </a:r>
-            <a:endParaRPr lang="en-US" sz="1150" dirty="0"/>
-          </a:p>
-        </p:txBody>
-      </p:sp>
-      <p:sp>
-        <p:nvSpPr>
-          <p:cNvPr id="12" name="Shape 10"/>
-          <p:cNvSpPr/>
-          <p:nvPr/>
-        </p:nvSpPr>
-        <p:spPr>
-          <a:xfrm>
-            <a:off x="8107680" y="1600200"/>
-            <a:ext cx="3505200" cy="786384"/>
+              <a:t>GPU 메모리를 실제로 검사</a:t>
+            </a:r>
+            <a:endParaRPr lang="en-US" sz="1300" dirty="0"/>
+          </a:p>
+        </p:txBody>
+      </p:sp>
+      <p:sp>
+        <p:nvSpPr>
+          <p:cNvPr id="14" name="Shape 12"/>
+          <p:cNvSpPr/>
+          <p:nvPr/>
+        </p:nvSpPr>
+        <p:spPr>
+          <a:xfrm>
+            <a:off x="548640" y="4343400"/>
+            <a:ext cx="11064240" cy="1234440"/>
           </a:xfrm>
           <a:prstGeom prst="roundRect">
             <a:avLst>
-              <a:gd name="adj" fmla="val 6977"/>
+              <a:gd name="adj" fmla="val 5926"/>
             </a:avLst>
           </a:prstGeom>
           <a:solidFill>
@@ -5760,57 +7274,119 @@
       </p:sp>
       <p:sp>
         <p:nvSpPr>
-          <p:cNvPr id="13" name="Text 11"/>
-          <p:cNvSpPr/>
-          <p:nvPr/>
-        </p:nvSpPr>
-        <p:spPr>
-          <a:xfrm>
-            <a:off x="8290560" y="1728216"/>
-            <a:ext cx="658368" cy="530352"/>
+          <p:cNvPr id="15" name="Text 13"/>
+          <p:cNvSpPr/>
+          <p:nvPr/>
+        </p:nvSpPr>
+        <p:spPr>
+          <a:xfrm>
+            <a:off x="822960" y="4507992"/>
+            <a:ext cx="3291840" cy="914400"/>
+          </a:xfrm>
+          <a:prstGeom prst="rect">
+            <a:avLst/>
+          </a:prstGeom>
+          <a:noFill/>
+          <a:ln/>
+        </p:spPr>
+        <p:txBody>
+          <a:bodyPr wrap="square" lIns="0" tIns="0" rIns="0" bIns="0" rtlCol="0" anchor="ctr"/>
+          <a:lstStyle/>
+          <a:p>
+            <a:pPr indent="0" marL="0">
+              <a:buNone/>
+            </a:pPr>
+            <a:r>
+              <a:rPr lang="en-US" sz="1700" b="1" dirty="0">
+                <a:solidFill>
+                  <a:srgbClr val="E0A458"/>
+                </a:solidFill>
+                <a:latin typeface="Malgun Gothic" pitchFamily="34" charset="0"/>
+                <a:ea typeface="Malgun Gothic" pitchFamily="34" charset="-122"/>
+                <a:cs typeface="Malgun Gothic" pitchFamily="34" charset="-120"/>
+              </a:rPr>
+              <a:t>상태 점검 스크립트</a:t>
+            </a:r>
+            <a:endParaRPr lang="en-US" sz="1700" dirty="0"/>
+          </a:p>
+        </p:txBody>
+      </p:sp>
+      <p:sp>
+        <p:nvSpPr>
+          <p:cNvPr id="16" name="Shape 14"/>
+          <p:cNvSpPr/>
+          <p:nvPr/>
+        </p:nvSpPr>
+        <p:spPr>
+          <a:xfrm>
+            <a:off x="4206240" y="4544568"/>
+            <a:ext cx="5669280" cy="502920"/>
           </a:xfrm>
           <a:prstGeom prst="roundRect">
             <a:avLst>
-              <a:gd name="adj" fmla="val 10345"/>
+              <a:gd name="adj" fmla="val 7273"/>
             </a:avLst>
           </a:prstGeom>
           <a:solidFill>
-            <a:srgbClr val="4FB0C6"/>
+            <a:srgbClr val="0E1116"/>
           </a:solidFill>
-          <a:ln/>
-        </p:spPr>
-        <p:txBody>
-          <a:bodyPr wrap="square" rtlCol="0" anchor="ctr"/>
-          <a:lstStyle/>
-          <a:p>
-            <a:pPr algn="ctr" indent="0" marL="0">
-              <a:buNone/>
-            </a:pPr>
-            <a:r>
-              <a:rPr lang="en-US" sz="1600" b="1" dirty="0">
-                <a:solidFill>
-                  <a:srgbClr val="13161C"/>
+          <a:ln w="12700">
+            <a:solidFill>
+              <a:srgbClr val="2C3440"/>
+            </a:solidFill>
+            <a:prstDash val="solid"/>
+          </a:ln>
+        </p:spPr>
+      </p:sp>
+      <p:sp>
+        <p:nvSpPr>
+          <p:cNvPr id="17" name="Text 15"/>
+          <p:cNvSpPr/>
+          <p:nvPr/>
+        </p:nvSpPr>
+        <p:spPr>
+          <a:xfrm>
+            <a:off x="4389120" y="4544568"/>
+            <a:ext cx="5303520" cy="502920"/>
+          </a:xfrm>
+          <a:prstGeom prst="rect">
+            <a:avLst/>
+          </a:prstGeom>
+          <a:noFill/>
+          <a:ln/>
+        </p:spPr>
+        <p:txBody>
+          <a:bodyPr wrap="square" lIns="0" tIns="0" rIns="0" bIns="0" rtlCol="0" anchor="ctr"/>
+          <a:lstStyle/>
+          <a:p>
+            <a:pPr indent="0" marL="0">
+              <a:buNone/>
+            </a:pPr>
+            <a:r>
+              <a:rPr lang="en-US" sz="1200" dirty="0">
+                <a:solidFill>
+                  <a:srgbClr val="E8EDF2"/>
                 </a:solidFill>
                 <a:latin typeface="Courier New" pitchFamily="34" charset="0"/>
                 <a:ea typeface="Courier New" pitchFamily="34" charset="-122"/>
                 <a:cs typeface="Courier New" pitchFamily="34" charset="-120"/>
               </a:rPr>
-              <a:t>2</a:t>
-            </a:r>
-            <a:endParaRPr lang="en-US" sz="1600" dirty="0"/>
-          </a:p>
-        </p:txBody>
-      </p:sp>
-      <p:sp>
-        <p:nvSpPr>
-          <p:cNvPr id="14" name="Text 12"/>
-          <p:cNvSpPr/>
-          <p:nvPr/>
-        </p:nvSpPr>
-        <p:spPr>
-          <a:xfrm>
-            <a:off x="9067800" y="1691640"/>
-            <a:ext cx="2407920" cy="384048"/>
+              <a:t>./sanity_check.sh 0</a:t>
+            </a:r>
+            <a:endParaRPr lang="en-US" sz="1200" dirty="0"/>
+          </a:p>
+        </p:txBody>
+      </p:sp>
+      <p:sp>
+        <p:nvSpPr>
+          <p:cNvPr id="18" name="Text 16"/>
+          <p:cNvSpPr/>
+          <p:nvPr/>
+        </p:nvSpPr>
+        <p:spPr>
+          <a:xfrm>
+            <a:off x="4206240" y="5074920"/>
+            <a:ext cx="7132320" cy="365760"/>
           </a:xfrm>
           <a:prstGeom prst="rect">
             <a:avLst/>
@@ -5826,46 +7402,7 @@
               <a:buNone/>
             </a:pPr>
             <a:r>
-              <a:rPr lang="en-US" sz="1350" b="1" dirty="0">
-                <a:solidFill>
-                  <a:srgbClr val="E8EDF2"/>
-                </a:solidFill>
-                <a:latin typeface="Malgun Gothic" pitchFamily="34" charset="0"/>
-                <a:ea typeface="Malgun Gothic" pitchFamily="34" charset="-122"/>
-                <a:cs typeface="Malgun Gothic" pitchFamily="34" charset="-120"/>
-              </a:rPr>
-              <a:t>Moving inv. (0/1)</a:t>
-            </a:r>
-            <a:endParaRPr lang="en-US" sz="1350" dirty="0"/>
-          </a:p>
-        </p:txBody>
-      </p:sp>
-      <p:sp>
-        <p:nvSpPr>
-          <p:cNvPr id="15" name="Text 13"/>
-          <p:cNvSpPr/>
-          <p:nvPr/>
-        </p:nvSpPr>
-        <p:spPr>
-          <a:xfrm>
-            <a:off x="9067800" y="2020824"/>
-            <a:ext cx="2407920" cy="310896"/>
-          </a:xfrm>
-          <a:prstGeom prst="rect">
-            <a:avLst/>
-          </a:prstGeom>
-          <a:noFill/>
-          <a:ln/>
-        </p:spPr>
-        <p:txBody>
-          <a:bodyPr wrap="square" lIns="0" tIns="0" rIns="0" bIns="0" rtlCol="0" anchor="ctr"/>
-          <a:lstStyle/>
-          <a:p>
-            <a:pPr indent="0" marL="0">
-              <a:buNone/>
-            </a:pPr>
-            <a:r>
-              <a:rPr lang="en-US" sz="1150" dirty="0">
+              <a:rPr lang="en-US" sz="1300" dirty="0">
                 <a:solidFill>
                   <a:srgbClr val="9AA6B2"/>
                 </a:solidFill>
@@ -5873,142 +7410,38 @@
                 <a:ea typeface="Malgun Gothic" pitchFamily="34" charset="-122"/>
                 <a:cs typeface="Malgun Gothic" pitchFamily="34" charset="-120"/>
               </a:rPr>
-              <a:t>고착 오류</a:t>
-            </a:r>
-            <a:endParaRPr lang="en-US" sz="1150" dirty="0"/>
-          </a:p>
-        </p:txBody>
-      </p:sp>
-      <p:sp>
-        <p:nvSpPr>
-          <p:cNvPr id="16" name="Shape 14"/>
-          <p:cNvSpPr/>
-          <p:nvPr/>
-        </p:nvSpPr>
-        <p:spPr>
-          <a:xfrm>
-            <a:off x="548640" y="2532888"/>
-            <a:ext cx="3505200" cy="786384"/>
-          </a:xfrm>
-          <a:prstGeom prst="roundRect">
-            <a:avLst>
-              <a:gd name="adj" fmla="val 6977"/>
-            </a:avLst>
-          </a:prstGeom>
-          <a:solidFill>
-            <a:srgbClr val="1E232C"/>
-          </a:solidFill>
-          <a:ln/>
-        </p:spPr>
-      </p:sp>
-      <p:sp>
-        <p:nvSpPr>
-          <p:cNvPr id="17" name="Text 15"/>
-          <p:cNvSpPr/>
-          <p:nvPr/>
-        </p:nvSpPr>
-        <p:spPr>
-          <a:xfrm>
-            <a:off x="731520" y="2660904"/>
-            <a:ext cx="658368" cy="530352"/>
-          </a:xfrm>
-          <a:prstGeom prst="roundRect">
-            <a:avLst>
-              <a:gd name="adj" fmla="val 10345"/>
-            </a:avLst>
-          </a:prstGeom>
-          <a:solidFill>
-            <a:srgbClr val="4FB0C6"/>
-          </a:solidFill>
-          <a:ln/>
-        </p:spPr>
-        <p:txBody>
-          <a:bodyPr wrap="square" rtlCol="0" anchor="ctr"/>
+              <a:t>특정 GPU 건강 빠르게 점검</a:t>
+            </a:r>
+            <a:endParaRPr lang="en-US" sz="1300" dirty="0"/>
+          </a:p>
+        </p:txBody>
+      </p:sp>
+      <p:sp>
+        <p:nvSpPr>
+          <p:cNvPr id="19" name="Text 17"/>
+          <p:cNvSpPr/>
+          <p:nvPr/>
+        </p:nvSpPr>
+        <p:spPr>
+          <a:xfrm>
+            <a:off x="548640" y="5852160"/>
+            <a:ext cx="11064240" cy="365760"/>
+          </a:xfrm>
+          <a:prstGeom prst="rect">
+            <a:avLst/>
+          </a:prstGeom>
+          <a:noFill/>
+          <a:ln/>
+        </p:spPr>
+        <p:txBody>
+          <a:bodyPr wrap="square" lIns="0" tIns="0" rIns="0" bIns="0" rtlCol="0" anchor="ctr"/>
           <a:lstStyle/>
           <a:p>
             <a:pPr algn="ctr" indent="0" marL="0">
               <a:buNone/>
             </a:pPr>
             <a:r>
-              <a:rPr lang="en-US" sz="1600" b="1" dirty="0">
-                <a:solidFill>
-                  <a:srgbClr val="13161C"/>
-                </a:solidFill>
-                <a:latin typeface="Courier New" pitchFamily="34" charset="0"/>
-                <a:ea typeface="Courier New" pitchFamily="34" charset="-122"/>
-                <a:cs typeface="Courier New" pitchFamily="34" charset="-120"/>
-              </a:rPr>
-              <a:t>3</a:t>
-            </a:r>
-            <a:endParaRPr lang="en-US" sz="1600" dirty="0"/>
-          </a:p>
-        </p:txBody>
-      </p:sp>
-      <p:sp>
-        <p:nvSpPr>
-          <p:cNvPr id="18" name="Text 16"/>
-          <p:cNvSpPr/>
-          <p:nvPr/>
-        </p:nvSpPr>
-        <p:spPr>
-          <a:xfrm>
-            <a:off x="1508760" y="2624328"/>
-            <a:ext cx="2407920" cy="384048"/>
-          </a:xfrm>
-          <a:prstGeom prst="rect">
-            <a:avLst/>
-          </a:prstGeom>
-          <a:noFill/>
-          <a:ln/>
-        </p:spPr>
-        <p:txBody>
-          <a:bodyPr wrap="square" lIns="0" tIns="0" rIns="0" bIns="0" rtlCol="0" anchor="ctr"/>
-          <a:lstStyle/>
-          <a:p>
-            <a:pPr indent="0" marL="0">
-              <a:buNone/>
-            </a:pPr>
-            <a:r>
-              <a:rPr lang="en-US" sz="1350" b="1" dirty="0">
-                <a:solidFill>
-                  <a:srgbClr val="E8EDF2"/>
-                </a:solidFill>
-                <a:latin typeface="Malgun Gothic" pitchFamily="34" charset="0"/>
-                <a:ea typeface="Malgun Gothic" pitchFamily="34" charset="-122"/>
-                <a:cs typeface="Malgun Gothic" pitchFamily="34" charset="-120"/>
-              </a:rPr>
-              <a:t>Moving inv. (8bit)</a:t>
-            </a:r>
-            <a:endParaRPr lang="en-US" sz="1350" dirty="0"/>
-          </a:p>
-        </p:txBody>
-      </p:sp>
-      <p:sp>
-        <p:nvSpPr>
-          <p:cNvPr id="19" name="Text 17"/>
-          <p:cNvSpPr/>
-          <p:nvPr/>
-        </p:nvSpPr>
-        <p:spPr>
-          <a:xfrm>
-            <a:off x="1508760" y="2953512"/>
-            <a:ext cx="2407920" cy="310896"/>
-          </a:xfrm>
-          <a:prstGeom prst="rect">
-            <a:avLst/>
-          </a:prstGeom>
-          <a:noFill/>
-          <a:ln/>
-        </p:spPr>
-        <p:txBody>
-          <a:bodyPr wrap="square" lIns="0" tIns="0" rIns="0" bIns="0" rtlCol="0" anchor="ctr"/>
-          <a:lstStyle/>
-          <a:p>
-            <a:pPr indent="0" marL="0">
-              <a:buNone/>
-            </a:pPr>
-            <a:r>
-              <a:rPr lang="en-US" sz="1150" dirty="0">
+              <a:rPr lang="en-US" sz="1400" i="1" dirty="0">
                 <a:solidFill>
                   <a:srgbClr val="9AA6B2"/>
                 </a:solidFill>
@@ -6016,1049 +7449,9 @@
                 <a:ea typeface="Malgun Gothic" pitchFamily="34" charset="-122"/>
                 <a:cs typeface="Malgun Gothic" pitchFamily="34" charset="-120"/>
               </a:rPr>
-              <a:t>고착 오류</a:t>
-            </a:r>
-            <a:endParaRPr lang="en-US" sz="1150" dirty="0"/>
-          </a:p>
-        </p:txBody>
-      </p:sp>
-      <p:sp>
-        <p:nvSpPr>
-          <p:cNvPr id="20" name="Shape 18"/>
-          <p:cNvSpPr/>
-          <p:nvPr/>
-        </p:nvSpPr>
-        <p:spPr>
-          <a:xfrm>
-            <a:off x="4328160" y="2532888"/>
-            <a:ext cx="3505200" cy="786384"/>
-          </a:xfrm>
-          <a:prstGeom prst="roundRect">
-            <a:avLst>
-              <a:gd name="adj" fmla="val 6977"/>
-            </a:avLst>
-          </a:prstGeom>
-          <a:solidFill>
-            <a:srgbClr val="1E232C"/>
-          </a:solidFill>
-          <a:ln/>
-        </p:spPr>
-      </p:sp>
-      <p:sp>
-        <p:nvSpPr>
-          <p:cNvPr id="21" name="Text 19"/>
-          <p:cNvSpPr/>
-          <p:nvPr/>
-        </p:nvSpPr>
-        <p:spPr>
-          <a:xfrm>
-            <a:off x="4511040" y="2660904"/>
-            <a:ext cx="658368" cy="530352"/>
-          </a:xfrm>
-          <a:prstGeom prst="roundRect">
-            <a:avLst>
-              <a:gd name="adj" fmla="val 10345"/>
-            </a:avLst>
-          </a:prstGeom>
-          <a:solidFill>
-            <a:srgbClr val="4FB0C6"/>
-          </a:solidFill>
-          <a:ln/>
-        </p:spPr>
-        <p:txBody>
-          <a:bodyPr wrap="square" rtlCol="0" anchor="ctr"/>
-          <a:lstStyle/>
-          <a:p>
-            <a:pPr algn="ctr" indent="0" marL="0">
-              <a:buNone/>
-            </a:pPr>
-            <a:r>
-              <a:rPr lang="en-US" sz="1600" b="1" dirty="0">
-                <a:solidFill>
-                  <a:srgbClr val="13161C"/>
-                </a:solidFill>
-                <a:latin typeface="Courier New" pitchFamily="34" charset="0"/>
-                <a:ea typeface="Courier New" pitchFamily="34" charset="-122"/>
-                <a:cs typeface="Courier New" pitchFamily="34" charset="-120"/>
-              </a:rPr>
-              <a:t>4</a:t>
-            </a:r>
-            <a:endParaRPr lang="en-US" sz="1600" dirty="0"/>
-          </a:p>
-        </p:txBody>
-      </p:sp>
-      <p:sp>
-        <p:nvSpPr>
-          <p:cNvPr id="22" name="Text 20"/>
-          <p:cNvSpPr/>
-          <p:nvPr/>
-        </p:nvSpPr>
-        <p:spPr>
-          <a:xfrm>
-            <a:off x="5288280" y="2624328"/>
-            <a:ext cx="2407920" cy="384048"/>
-          </a:xfrm>
-          <a:prstGeom prst="rect">
-            <a:avLst/>
-          </a:prstGeom>
-          <a:noFill/>
-          <a:ln/>
-        </p:spPr>
-        <p:txBody>
-          <a:bodyPr wrap="square" lIns="0" tIns="0" rIns="0" bIns="0" rtlCol="0" anchor="ctr"/>
-          <a:lstStyle/>
-          <a:p>
-            <a:pPr indent="0" marL="0">
-              <a:buNone/>
-            </a:pPr>
-            <a:r>
-              <a:rPr lang="en-US" sz="1350" b="1" dirty="0">
-                <a:solidFill>
-                  <a:srgbClr val="E8EDF2"/>
-                </a:solidFill>
-                <a:latin typeface="Malgun Gothic" pitchFamily="34" charset="0"/>
-                <a:ea typeface="Malgun Gothic" pitchFamily="34" charset="-122"/>
-                <a:cs typeface="Malgun Gothic" pitchFamily="34" charset="-120"/>
-              </a:rPr>
-              <a:t>Moving inv. (random)</a:t>
-            </a:r>
-            <a:endParaRPr lang="en-US" sz="1350" dirty="0"/>
-          </a:p>
-        </p:txBody>
-      </p:sp>
-      <p:sp>
-        <p:nvSpPr>
-          <p:cNvPr id="23" name="Text 21"/>
-          <p:cNvSpPr/>
-          <p:nvPr/>
-        </p:nvSpPr>
-        <p:spPr>
-          <a:xfrm>
-            <a:off x="5288280" y="2953512"/>
-            <a:ext cx="2407920" cy="310896"/>
-          </a:xfrm>
-          <a:prstGeom prst="rect">
-            <a:avLst/>
-          </a:prstGeom>
-          <a:noFill/>
-          <a:ln/>
-        </p:spPr>
-        <p:txBody>
-          <a:bodyPr wrap="square" lIns="0" tIns="0" rIns="0" bIns="0" rtlCol="0" anchor="ctr"/>
-          <a:lstStyle/>
-          <a:p>
-            <a:pPr indent="0" marL="0">
-              <a:buNone/>
-            </a:pPr>
-            <a:r>
-              <a:rPr lang="en-US" sz="1150" dirty="0">
-                <a:solidFill>
-                  <a:srgbClr val="9AA6B2"/>
-                </a:solidFill>
-                <a:latin typeface="Malgun Gothic" pitchFamily="34" charset="0"/>
-                <a:ea typeface="Malgun Gothic" pitchFamily="34" charset="-122"/>
-                <a:cs typeface="Malgun Gothic" pitchFamily="34" charset="-120"/>
-              </a:rPr>
-              <a:t>데이터 민감</a:t>
-            </a:r>
-            <a:endParaRPr lang="en-US" sz="1150" dirty="0"/>
-          </a:p>
-        </p:txBody>
-      </p:sp>
-      <p:sp>
-        <p:nvSpPr>
-          <p:cNvPr id="24" name="Shape 22"/>
-          <p:cNvSpPr/>
-          <p:nvPr/>
-        </p:nvSpPr>
-        <p:spPr>
-          <a:xfrm>
-            <a:off x="8107680" y="2532888"/>
-            <a:ext cx="3505200" cy="786384"/>
-          </a:xfrm>
-          <a:prstGeom prst="roundRect">
-            <a:avLst>
-              <a:gd name="adj" fmla="val 6977"/>
-            </a:avLst>
-          </a:prstGeom>
-          <a:solidFill>
-            <a:srgbClr val="1E232C"/>
-          </a:solidFill>
-          <a:ln/>
-        </p:spPr>
-      </p:sp>
-      <p:sp>
-        <p:nvSpPr>
-          <p:cNvPr id="25" name="Text 23"/>
-          <p:cNvSpPr/>
-          <p:nvPr/>
-        </p:nvSpPr>
-        <p:spPr>
-          <a:xfrm>
-            <a:off x="8290560" y="2660904"/>
-            <a:ext cx="658368" cy="530352"/>
-          </a:xfrm>
-          <a:prstGeom prst="roundRect">
-            <a:avLst>
-              <a:gd name="adj" fmla="val 10345"/>
-            </a:avLst>
-          </a:prstGeom>
-          <a:solidFill>
-            <a:srgbClr val="4FB0C6"/>
-          </a:solidFill>
-          <a:ln/>
-        </p:spPr>
-        <p:txBody>
-          <a:bodyPr wrap="square" rtlCol="0" anchor="ctr"/>
-          <a:lstStyle/>
-          <a:p>
-            <a:pPr algn="ctr" indent="0" marL="0">
-              <a:buNone/>
-            </a:pPr>
-            <a:r>
-              <a:rPr lang="en-US" sz="1600" b="1" dirty="0">
-                <a:solidFill>
-                  <a:srgbClr val="13161C"/>
-                </a:solidFill>
-                <a:latin typeface="Courier New" pitchFamily="34" charset="0"/>
-                <a:ea typeface="Courier New" pitchFamily="34" charset="-122"/>
-                <a:cs typeface="Courier New" pitchFamily="34" charset="-120"/>
-              </a:rPr>
-              <a:t>5</a:t>
-            </a:r>
-            <a:endParaRPr lang="en-US" sz="1600" dirty="0"/>
-          </a:p>
-        </p:txBody>
-      </p:sp>
-      <p:sp>
-        <p:nvSpPr>
-          <p:cNvPr id="26" name="Text 24"/>
-          <p:cNvSpPr/>
-          <p:nvPr/>
-        </p:nvSpPr>
-        <p:spPr>
-          <a:xfrm>
-            <a:off x="9067800" y="2624328"/>
-            <a:ext cx="2407920" cy="384048"/>
-          </a:xfrm>
-          <a:prstGeom prst="rect">
-            <a:avLst/>
-          </a:prstGeom>
-          <a:noFill/>
-          <a:ln/>
-        </p:spPr>
-        <p:txBody>
-          <a:bodyPr wrap="square" lIns="0" tIns="0" rIns="0" bIns="0" rtlCol="0" anchor="ctr"/>
-          <a:lstStyle/>
-          <a:p>
-            <a:pPr indent="0" marL="0">
-              <a:buNone/>
-            </a:pPr>
-            <a:r>
-              <a:rPr lang="en-US" sz="1350" b="1" dirty="0">
-                <a:solidFill>
-                  <a:srgbClr val="E8EDF2"/>
-                </a:solidFill>
-                <a:latin typeface="Malgun Gothic" pitchFamily="34" charset="0"/>
-                <a:ea typeface="Malgun Gothic" pitchFamily="34" charset="-122"/>
-                <a:cs typeface="Malgun Gothic" pitchFamily="34" charset="-120"/>
-              </a:rPr>
-              <a:t>Block move</a:t>
-            </a:r>
-            <a:endParaRPr lang="en-US" sz="1350" dirty="0"/>
-          </a:p>
-        </p:txBody>
-      </p:sp>
-      <p:sp>
-        <p:nvSpPr>
-          <p:cNvPr id="27" name="Text 25"/>
-          <p:cNvSpPr/>
-          <p:nvPr/>
-        </p:nvSpPr>
-        <p:spPr>
-          <a:xfrm>
-            <a:off x="9067800" y="2953512"/>
-            <a:ext cx="2407920" cy="310896"/>
-          </a:xfrm>
-          <a:prstGeom prst="rect">
-            <a:avLst/>
-          </a:prstGeom>
-          <a:noFill/>
-          <a:ln/>
-        </p:spPr>
-        <p:txBody>
-          <a:bodyPr wrap="square" lIns="0" tIns="0" rIns="0" bIns="0" rtlCol="0" anchor="ctr"/>
-          <a:lstStyle/>
-          <a:p>
-            <a:pPr indent="0" marL="0">
-              <a:buNone/>
-            </a:pPr>
-            <a:r>
-              <a:rPr lang="en-US" sz="1150" dirty="0">
-                <a:solidFill>
-                  <a:srgbClr val="9AA6B2"/>
-                </a:solidFill>
-                <a:latin typeface="Malgun Gothic" pitchFamily="34" charset="0"/>
-                <a:ea typeface="Malgun Gothic" pitchFamily="34" charset="-122"/>
-                <a:cs typeface="Malgun Gothic" pitchFamily="34" charset="-120"/>
-              </a:rPr>
-              <a:t>데이터 민감</a:t>
-            </a:r>
-            <a:endParaRPr lang="en-US" sz="1150" dirty="0"/>
-          </a:p>
-        </p:txBody>
-      </p:sp>
-      <p:sp>
-        <p:nvSpPr>
-          <p:cNvPr id="28" name="Shape 26"/>
-          <p:cNvSpPr/>
-          <p:nvPr/>
-        </p:nvSpPr>
-        <p:spPr>
-          <a:xfrm>
-            <a:off x="548640" y="3465576"/>
-            <a:ext cx="3505200" cy="786384"/>
-          </a:xfrm>
-          <a:prstGeom prst="roundRect">
-            <a:avLst>
-              <a:gd name="adj" fmla="val 6977"/>
-            </a:avLst>
-          </a:prstGeom>
-          <a:solidFill>
-            <a:srgbClr val="1E232C"/>
-          </a:solidFill>
-          <a:ln/>
-        </p:spPr>
-      </p:sp>
-      <p:sp>
-        <p:nvSpPr>
-          <p:cNvPr id="29" name="Text 27"/>
-          <p:cNvSpPr/>
-          <p:nvPr/>
-        </p:nvSpPr>
-        <p:spPr>
-          <a:xfrm>
-            <a:off x="731520" y="3593592"/>
-            <a:ext cx="658368" cy="530352"/>
-          </a:xfrm>
-          <a:prstGeom prst="roundRect">
-            <a:avLst>
-              <a:gd name="adj" fmla="val 10345"/>
-            </a:avLst>
-          </a:prstGeom>
-          <a:solidFill>
-            <a:srgbClr val="4FB0C6"/>
-          </a:solidFill>
-          <a:ln/>
-        </p:spPr>
-        <p:txBody>
-          <a:bodyPr wrap="square" rtlCol="0" anchor="ctr"/>
-          <a:lstStyle/>
-          <a:p>
-            <a:pPr algn="ctr" indent="0" marL="0">
-              <a:buNone/>
-            </a:pPr>
-            <a:r>
-              <a:rPr lang="en-US" sz="1600" b="1" dirty="0">
-                <a:solidFill>
-                  <a:srgbClr val="13161C"/>
-                </a:solidFill>
-                <a:latin typeface="Courier New" pitchFamily="34" charset="0"/>
-                <a:ea typeface="Courier New" pitchFamily="34" charset="-122"/>
-                <a:cs typeface="Courier New" pitchFamily="34" charset="-120"/>
-              </a:rPr>
-              <a:t>6</a:t>
-            </a:r>
-            <a:endParaRPr lang="en-US" sz="1600" dirty="0"/>
-          </a:p>
-        </p:txBody>
-      </p:sp>
-      <p:sp>
-        <p:nvSpPr>
-          <p:cNvPr id="30" name="Text 28"/>
-          <p:cNvSpPr/>
-          <p:nvPr/>
-        </p:nvSpPr>
-        <p:spPr>
-          <a:xfrm>
-            <a:off x="1508760" y="3557016"/>
-            <a:ext cx="2407920" cy="384048"/>
-          </a:xfrm>
-          <a:prstGeom prst="rect">
-            <a:avLst/>
-          </a:prstGeom>
-          <a:noFill/>
-          <a:ln/>
-        </p:spPr>
-        <p:txBody>
-          <a:bodyPr wrap="square" lIns="0" tIns="0" rIns="0" bIns="0" rtlCol="0" anchor="ctr"/>
-          <a:lstStyle/>
-          <a:p>
-            <a:pPr indent="0" marL="0">
-              <a:buNone/>
-            </a:pPr>
-            <a:r>
-              <a:rPr lang="en-US" sz="1350" b="1" dirty="0">
-                <a:solidFill>
-                  <a:srgbClr val="E8EDF2"/>
-                </a:solidFill>
-                <a:latin typeface="Malgun Gothic" pitchFamily="34" charset="0"/>
-                <a:ea typeface="Malgun Gothic" pitchFamily="34" charset="-122"/>
-                <a:cs typeface="Malgun Gothic" pitchFamily="34" charset="-120"/>
-              </a:rPr>
-              <a:t>Moving inv. (shift)</a:t>
-            </a:r>
-            <a:endParaRPr lang="en-US" sz="1350" dirty="0"/>
-          </a:p>
-        </p:txBody>
-      </p:sp>
-      <p:sp>
-        <p:nvSpPr>
-          <p:cNvPr id="31" name="Text 29"/>
-          <p:cNvSpPr/>
-          <p:nvPr/>
-        </p:nvSpPr>
-        <p:spPr>
-          <a:xfrm>
-            <a:off x="1508760" y="3886200"/>
-            <a:ext cx="2407920" cy="310896"/>
-          </a:xfrm>
-          <a:prstGeom prst="rect">
-            <a:avLst/>
-          </a:prstGeom>
-          <a:noFill/>
-          <a:ln/>
-        </p:spPr>
-        <p:txBody>
-          <a:bodyPr wrap="square" lIns="0" tIns="0" rIns="0" bIns="0" rtlCol="0" anchor="ctr"/>
-          <a:lstStyle/>
-          <a:p>
-            <a:pPr indent="0" marL="0">
-              <a:buNone/>
-            </a:pPr>
-            <a:r>
-              <a:rPr lang="en-US" sz="1150" dirty="0">
-                <a:solidFill>
-                  <a:srgbClr val="9AA6B2"/>
-                </a:solidFill>
-                <a:latin typeface="Malgun Gothic" pitchFamily="34" charset="0"/>
-                <a:ea typeface="Malgun Gothic" pitchFamily="34" charset="-122"/>
-                <a:cs typeface="Malgun Gothic" pitchFamily="34" charset="-120"/>
-              </a:rPr>
-              <a:t>데이터 민감</a:t>
-            </a:r>
-            <a:endParaRPr lang="en-US" sz="1150" dirty="0"/>
-          </a:p>
-        </p:txBody>
-      </p:sp>
-      <p:sp>
-        <p:nvSpPr>
-          <p:cNvPr id="32" name="Shape 30"/>
-          <p:cNvSpPr/>
-          <p:nvPr/>
-        </p:nvSpPr>
-        <p:spPr>
-          <a:xfrm>
-            <a:off x="4328160" y="3465576"/>
-            <a:ext cx="3505200" cy="786384"/>
-          </a:xfrm>
-          <a:prstGeom prst="roundRect">
-            <a:avLst>
-              <a:gd name="adj" fmla="val 6977"/>
-            </a:avLst>
-          </a:prstGeom>
-          <a:solidFill>
-            <a:srgbClr val="1E232C"/>
-          </a:solidFill>
-          <a:ln/>
-        </p:spPr>
-      </p:sp>
-      <p:sp>
-        <p:nvSpPr>
-          <p:cNvPr id="33" name="Text 31"/>
-          <p:cNvSpPr/>
-          <p:nvPr/>
-        </p:nvSpPr>
-        <p:spPr>
-          <a:xfrm>
-            <a:off x="4511040" y="3593592"/>
-            <a:ext cx="658368" cy="530352"/>
-          </a:xfrm>
-          <a:prstGeom prst="roundRect">
-            <a:avLst>
-              <a:gd name="adj" fmla="val 10345"/>
-            </a:avLst>
-          </a:prstGeom>
-          <a:solidFill>
-            <a:srgbClr val="4FB0C6"/>
-          </a:solidFill>
-          <a:ln/>
-        </p:spPr>
-        <p:txBody>
-          <a:bodyPr wrap="square" rtlCol="0" anchor="ctr"/>
-          <a:lstStyle/>
-          <a:p>
-            <a:pPr algn="ctr" indent="0" marL="0">
-              <a:buNone/>
-            </a:pPr>
-            <a:r>
-              <a:rPr lang="en-US" sz="1600" b="1" dirty="0">
-                <a:solidFill>
-                  <a:srgbClr val="13161C"/>
-                </a:solidFill>
-                <a:latin typeface="Courier New" pitchFamily="34" charset="0"/>
-                <a:ea typeface="Courier New" pitchFamily="34" charset="-122"/>
-                <a:cs typeface="Courier New" pitchFamily="34" charset="-120"/>
-              </a:rPr>
-              <a:t>7</a:t>
-            </a:r>
-            <a:endParaRPr lang="en-US" sz="1600" dirty="0"/>
-          </a:p>
-        </p:txBody>
-      </p:sp>
-      <p:sp>
-        <p:nvSpPr>
-          <p:cNvPr id="34" name="Text 32"/>
-          <p:cNvSpPr/>
-          <p:nvPr/>
-        </p:nvSpPr>
-        <p:spPr>
-          <a:xfrm>
-            <a:off x="5288280" y="3557016"/>
-            <a:ext cx="2407920" cy="384048"/>
-          </a:xfrm>
-          <a:prstGeom prst="rect">
-            <a:avLst/>
-          </a:prstGeom>
-          <a:noFill/>
-          <a:ln/>
-        </p:spPr>
-        <p:txBody>
-          <a:bodyPr wrap="square" lIns="0" tIns="0" rIns="0" bIns="0" rtlCol="0" anchor="ctr"/>
-          <a:lstStyle/>
-          <a:p>
-            <a:pPr indent="0" marL="0">
-              <a:buNone/>
-            </a:pPr>
-            <a:r>
-              <a:rPr lang="en-US" sz="1350" b="1" dirty="0">
-                <a:solidFill>
-                  <a:srgbClr val="E8EDF2"/>
-                </a:solidFill>
-                <a:latin typeface="Malgun Gothic" pitchFamily="34" charset="0"/>
-                <a:ea typeface="Malgun Gothic" pitchFamily="34" charset="-122"/>
-                <a:cs typeface="Malgun Gothic" pitchFamily="34" charset="-120"/>
-              </a:rPr>
-              <a:t>Random sequence</a:t>
-            </a:r>
-            <a:endParaRPr lang="en-US" sz="1350" dirty="0"/>
-          </a:p>
-        </p:txBody>
-      </p:sp>
-      <p:sp>
-        <p:nvSpPr>
-          <p:cNvPr id="35" name="Text 33"/>
-          <p:cNvSpPr/>
-          <p:nvPr/>
-        </p:nvSpPr>
-        <p:spPr>
-          <a:xfrm>
-            <a:off x="5288280" y="3886200"/>
-            <a:ext cx="2407920" cy="310896"/>
-          </a:xfrm>
-          <a:prstGeom prst="rect">
-            <a:avLst/>
-          </a:prstGeom>
-          <a:noFill/>
-          <a:ln/>
-        </p:spPr>
-        <p:txBody>
-          <a:bodyPr wrap="square" lIns="0" tIns="0" rIns="0" bIns="0" rtlCol="0" anchor="ctr"/>
-          <a:lstStyle/>
-          <a:p>
-            <a:pPr indent="0" marL="0">
-              <a:buNone/>
-            </a:pPr>
-            <a:r>
-              <a:rPr lang="en-US" sz="1150" dirty="0">
-                <a:solidFill>
-                  <a:srgbClr val="9AA6B2"/>
-                </a:solidFill>
-                <a:latin typeface="Malgun Gothic" pitchFamily="34" charset="0"/>
-                <a:ea typeface="Malgun Gothic" pitchFamily="34" charset="-122"/>
-                <a:cs typeface="Malgun Gothic" pitchFamily="34" charset="-120"/>
-              </a:rPr>
-              <a:t>데이터 민감</a:t>
-            </a:r>
-            <a:endParaRPr lang="en-US" sz="1150" dirty="0"/>
-          </a:p>
-        </p:txBody>
-      </p:sp>
-      <p:sp>
-        <p:nvSpPr>
-          <p:cNvPr id="36" name="Shape 34"/>
-          <p:cNvSpPr/>
-          <p:nvPr/>
-        </p:nvSpPr>
-        <p:spPr>
-          <a:xfrm>
-            <a:off x="8107680" y="3465576"/>
-            <a:ext cx="3505200" cy="786384"/>
-          </a:xfrm>
-          <a:prstGeom prst="roundRect">
-            <a:avLst>
-              <a:gd name="adj" fmla="val 6977"/>
-            </a:avLst>
-          </a:prstGeom>
-          <a:solidFill>
-            <a:srgbClr val="1E232C"/>
-          </a:solidFill>
-          <a:ln/>
-        </p:spPr>
-      </p:sp>
-      <p:sp>
-        <p:nvSpPr>
-          <p:cNvPr id="37" name="Text 35"/>
-          <p:cNvSpPr/>
-          <p:nvPr/>
-        </p:nvSpPr>
-        <p:spPr>
-          <a:xfrm>
-            <a:off x="8290560" y="3593592"/>
-            <a:ext cx="658368" cy="530352"/>
-          </a:xfrm>
-          <a:prstGeom prst="roundRect">
-            <a:avLst>
-              <a:gd name="adj" fmla="val 10345"/>
-            </a:avLst>
-          </a:prstGeom>
-          <a:solidFill>
-            <a:srgbClr val="4FB0C6"/>
-          </a:solidFill>
-          <a:ln/>
-        </p:spPr>
-        <p:txBody>
-          <a:bodyPr wrap="square" rtlCol="0" anchor="ctr"/>
-          <a:lstStyle/>
-          <a:p>
-            <a:pPr algn="ctr" indent="0" marL="0">
-              <a:buNone/>
-            </a:pPr>
-            <a:r>
-              <a:rPr lang="en-US" sz="1600" b="1" dirty="0">
-                <a:solidFill>
-                  <a:srgbClr val="13161C"/>
-                </a:solidFill>
-                <a:latin typeface="Courier New" pitchFamily="34" charset="0"/>
-                <a:ea typeface="Courier New" pitchFamily="34" charset="-122"/>
-                <a:cs typeface="Courier New" pitchFamily="34" charset="-120"/>
-              </a:rPr>
-              <a:t>8</a:t>
-            </a:r>
-            <a:endParaRPr lang="en-US" sz="1600" dirty="0"/>
-          </a:p>
-        </p:txBody>
-      </p:sp>
-      <p:sp>
-        <p:nvSpPr>
-          <p:cNvPr id="38" name="Text 36"/>
-          <p:cNvSpPr/>
-          <p:nvPr/>
-        </p:nvSpPr>
-        <p:spPr>
-          <a:xfrm>
-            <a:off x="9067800" y="3557016"/>
-            <a:ext cx="2407920" cy="384048"/>
-          </a:xfrm>
-          <a:prstGeom prst="rect">
-            <a:avLst/>
-          </a:prstGeom>
-          <a:noFill/>
-          <a:ln/>
-        </p:spPr>
-        <p:txBody>
-          <a:bodyPr wrap="square" lIns="0" tIns="0" rIns="0" bIns="0" rtlCol="0" anchor="ctr"/>
-          <a:lstStyle/>
-          <a:p>
-            <a:pPr indent="0" marL="0">
-              <a:buNone/>
-            </a:pPr>
-            <a:r>
-              <a:rPr lang="en-US" sz="1350" b="1" dirty="0">
-                <a:solidFill>
-                  <a:srgbClr val="E8EDF2"/>
-                </a:solidFill>
-                <a:latin typeface="Malgun Gothic" pitchFamily="34" charset="0"/>
-                <a:ea typeface="Malgun Gothic" pitchFamily="34" charset="-122"/>
-                <a:cs typeface="Malgun Gothic" pitchFamily="34" charset="-120"/>
-              </a:rPr>
-              <a:t>Modulo 20</a:t>
-            </a:r>
-            <a:endParaRPr lang="en-US" sz="1350" dirty="0"/>
-          </a:p>
-        </p:txBody>
-      </p:sp>
-      <p:sp>
-        <p:nvSpPr>
-          <p:cNvPr id="39" name="Text 37"/>
-          <p:cNvSpPr/>
-          <p:nvPr/>
-        </p:nvSpPr>
-        <p:spPr>
-          <a:xfrm>
-            <a:off x="9067800" y="3886200"/>
-            <a:ext cx="2407920" cy="310896"/>
-          </a:xfrm>
-          <a:prstGeom prst="rect">
-            <a:avLst/>
-          </a:prstGeom>
-          <a:noFill/>
-          <a:ln/>
-        </p:spPr>
-        <p:txBody>
-          <a:bodyPr wrap="square" lIns="0" tIns="0" rIns="0" bIns="0" rtlCol="0" anchor="ctr"/>
-          <a:lstStyle/>
-          <a:p>
-            <a:pPr indent="0" marL="0">
-              <a:buNone/>
-            </a:pPr>
-            <a:r>
-              <a:rPr lang="en-US" sz="1150" dirty="0">
-                <a:solidFill>
-                  <a:srgbClr val="9AA6B2"/>
-                </a:solidFill>
-                <a:latin typeface="Malgun Gothic" pitchFamily="34" charset="0"/>
-                <a:ea typeface="Malgun Gothic" pitchFamily="34" charset="-122"/>
-                <a:cs typeface="Malgun Gothic" pitchFamily="34" charset="-120"/>
-              </a:rPr>
-              <a:t>데이터 민감</a:t>
-            </a:r>
-            <a:endParaRPr lang="en-US" sz="1150" dirty="0"/>
-          </a:p>
-        </p:txBody>
-      </p:sp>
-      <p:sp>
-        <p:nvSpPr>
-          <p:cNvPr id="40" name="Shape 38"/>
-          <p:cNvSpPr/>
-          <p:nvPr/>
-        </p:nvSpPr>
-        <p:spPr>
-          <a:xfrm>
-            <a:off x="548640" y="4398264"/>
-            <a:ext cx="3505200" cy="786384"/>
-          </a:xfrm>
-          <a:prstGeom prst="roundRect">
-            <a:avLst>
-              <a:gd name="adj" fmla="val 6977"/>
-            </a:avLst>
-          </a:prstGeom>
-          <a:solidFill>
-            <a:srgbClr val="1E232C"/>
-          </a:solidFill>
-          <a:ln/>
-        </p:spPr>
-      </p:sp>
-      <p:sp>
-        <p:nvSpPr>
-          <p:cNvPr id="41" name="Text 39"/>
-          <p:cNvSpPr/>
-          <p:nvPr/>
-        </p:nvSpPr>
-        <p:spPr>
-          <a:xfrm>
-            <a:off x="731520" y="4526280"/>
-            <a:ext cx="658368" cy="530352"/>
-          </a:xfrm>
-          <a:prstGeom prst="roundRect">
-            <a:avLst>
-              <a:gd name="adj" fmla="val 10345"/>
-            </a:avLst>
-          </a:prstGeom>
-          <a:solidFill>
-            <a:srgbClr val="E0A458"/>
-          </a:solidFill>
-          <a:ln/>
-        </p:spPr>
-        <p:txBody>
-          <a:bodyPr wrap="square" rtlCol="0" anchor="ctr"/>
-          <a:lstStyle/>
-          <a:p>
-            <a:pPr algn="ctr" indent="0" marL="0">
-              <a:buNone/>
-            </a:pPr>
-            <a:r>
-              <a:rPr lang="en-US" sz="1600" b="1" dirty="0">
-                <a:solidFill>
-                  <a:srgbClr val="13161C"/>
-                </a:solidFill>
-                <a:latin typeface="Courier New" pitchFamily="34" charset="0"/>
-                <a:ea typeface="Courier New" pitchFamily="34" charset="-122"/>
-                <a:cs typeface="Courier New" pitchFamily="34" charset="-120"/>
-              </a:rPr>
-              <a:t>9</a:t>
-            </a:r>
-            <a:endParaRPr lang="en-US" sz="1600" dirty="0"/>
-          </a:p>
-        </p:txBody>
-      </p:sp>
-      <p:sp>
-        <p:nvSpPr>
-          <p:cNvPr id="42" name="Text 40"/>
-          <p:cNvSpPr/>
-          <p:nvPr/>
-        </p:nvSpPr>
-        <p:spPr>
-          <a:xfrm>
-            <a:off x="1508760" y="4489704"/>
-            <a:ext cx="2407920" cy="384048"/>
-          </a:xfrm>
-          <a:prstGeom prst="rect">
-            <a:avLst/>
-          </a:prstGeom>
-          <a:noFill/>
-          <a:ln/>
-        </p:spPr>
-        <p:txBody>
-          <a:bodyPr wrap="square" lIns="0" tIns="0" rIns="0" bIns="0" rtlCol="0" anchor="ctr"/>
-          <a:lstStyle/>
-          <a:p>
-            <a:pPr indent="0" marL="0">
-              <a:buNone/>
-            </a:pPr>
-            <a:r>
-              <a:rPr lang="en-US" sz="1350" b="1" dirty="0">
-                <a:solidFill>
-                  <a:srgbClr val="E8EDF2"/>
-                </a:solidFill>
-                <a:latin typeface="Malgun Gothic" pitchFamily="34" charset="0"/>
-                <a:ea typeface="Malgun Gothic" pitchFamily="34" charset="-122"/>
-                <a:cs typeface="Malgun Gothic" pitchFamily="34" charset="-120"/>
-              </a:rPr>
-              <a:t>Bit fade (3h)</a:t>
-            </a:r>
-            <a:endParaRPr lang="en-US" sz="1350" dirty="0"/>
-          </a:p>
-        </p:txBody>
-      </p:sp>
-      <p:sp>
-        <p:nvSpPr>
-          <p:cNvPr id="43" name="Text 41"/>
-          <p:cNvSpPr/>
-          <p:nvPr/>
-        </p:nvSpPr>
-        <p:spPr>
-          <a:xfrm>
-            <a:off x="1508760" y="4818888"/>
-            <a:ext cx="2407920" cy="310896"/>
-          </a:xfrm>
-          <a:prstGeom prst="rect">
-            <a:avLst/>
-          </a:prstGeom>
-          <a:noFill/>
-          <a:ln/>
-        </p:spPr>
-        <p:txBody>
-          <a:bodyPr wrap="square" lIns="0" tIns="0" rIns="0" bIns="0" rtlCol="0" anchor="ctr"/>
-          <a:lstStyle/>
-          <a:p>
-            <a:pPr indent="0" marL="0">
-              <a:buNone/>
-            </a:pPr>
-            <a:r>
-              <a:rPr lang="en-US" sz="1150" dirty="0">
-                <a:solidFill>
-                  <a:srgbClr val="9AA6B2"/>
-                </a:solidFill>
-                <a:latin typeface="Malgun Gothic" pitchFamily="34" charset="0"/>
-                <a:ea typeface="Malgun Gothic" pitchFamily="34" charset="-122"/>
-                <a:cs typeface="Malgun Gothic" pitchFamily="34" charset="-120"/>
-              </a:rPr>
-              <a:t>데이터 보존</a:t>
-            </a:r>
-            <a:endParaRPr lang="en-US" sz="1150" dirty="0"/>
-          </a:p>
-        </p:txBody>
-      </p:sp>
-      <p:sp>
-        <p:nvSpPr>
-          <p:cNvPr id="44" name="Shape 42"/>
-          <p:cNvSpPr/>
-          <p:nvPr/>
-        </p:nvSpPr>
-        <p:spPr>
-          <a:xfrm>
-            <a:off x="4328160" y="4398264"/>
-            <a:ext cx="3505200" cy="786384"/>
-          </a:xfrm>
-          <a:prstGeom prst="roundRect">
-            <a:avLst>
-              <a:gd name="adj" fmla="val 6977"/>
-            </a:avLst>
-          </a:prstGeom>
-          <a:solidFill>
-            <a:srgbClr val="1E232C"/>
-          </a:solidFill>
-          <a:ln/>
-        </p:spPr>
-      </p:sp>
-      <p:sp>
-        <p:nvSpPr>
-          <p:cNvPr id="45" name="Text 43"/>
-          <p:cNvSpPr/>
-          <p:nvPr/>
-        </p:nvSpPr>
-        <p:spPr>
-          <a:xfrm>
-            <a:off x="4511040" y="4526280"/>
-            <a:ext cx="658368" cy="530352"/>
-          </a:xfrm>
-          <a:prstGeom prst="roundRect">
-            <a:avLst>
-              <a:gd name="adj" fmla="val 10345"/>
-            </a:avLst>
-          </a:prstGeom>
-          <a:solidFill>
-            <a:srgbClr val="E0A458"/>
-          </a:solidFill>
-          <a:ln/>
-        </p:spPr>
-        <p:txBody>
-          <a:bodyPr wrap="square" rtlCol="0" anchor="ctr"/>
-          <a:lstStyle/>
-          <a:p>
-            <a:pPr algn="ctr" indent="0" marL="0">
-              <a:buNone/>
-            </a:pPr>
-            <a:r>
-              <a:rPr lang="en-US" sz="1600" b="1" dirty="0">
-                <a:solidFill>
-                  <a:srgbClr val="13161C"/>
-                </a:solidFill>
-                <a:latin typeface="Courier New" pitchFamily="34" charset="0"/>
-                <a:ea typeface="Courier New" pitchFamily="34" charset="-122"/>
-                <a:cs typeface="Courier New" pitchFamily="34" charset="-120"/>
-              </a:rPr>
-              <a:t>10</a:t>
-            </a:r>
-            <a:endParaRPr lang="en-US" sz="1600" dirty="0"/>
-          </a:p>
-        </p:txBody>
-      </p:sp>
-      <p:sp>
-        <p:nvSpPr>
-          <p:cNvPr id="46" name="Text 44"/>
-          <p:cNvSpPr/>
-          <p:nvPr/>
-        </p:nvSpPr>
-        <p:spPr>
-          <a:xfrm>
-            <a:off x="5288280" y="4489704"/>
-            <a:ext cx="2407920" cy="384048"/>
-          </a:xfrm>
-          <a:prstGeom prst="rect">
-            <a:avLst/>
-          </a:prstGeom>
-          <a:noFill/>
-          <a:ln/>
-        </p:spPr>
-        <p:txBody>
-          <a:bodyPr wrap="square" lIns="0" tIns="0" rIns="0" bIns="0" rtlCol="0" anchor="ctr"/>
-          <a:lstStyle/>
-          <a:p>
-            <a:pPr indent="0" marL="0">
-              <a:buNone/>
-            </a:pPr>
-            <a:r>
-              <a:rPr lang="en-US" sz="1350" b="1" dirty="0">
-                <a:solidFill>
-                  <a:srgbClr val="E8EDF2"/>
-                </a:solidFill>
-                <a:latin typeface="Malgun Gothic" pitchFamily="34" charset="0"/>
-                <a:ea typeface="Malgun Gothic" pitchFamily="34" charset="-122"/>
-                <a:cs typeface="Malgun Gothic" pitchFamily="34" charset="-120"/>
-              </a:rPr>
-              <a:t>Memory stress</a:t>
-            </a:r>
-            <a:endParaRPr lang="en-US" sz="1350" dirty="0"/>
-          </a:p>
-        </p:txBody>
-      </p:sp>
-      <p:sp>
-        <p:nvSpPr>
-          <p:cNvPr id="47" name="Text 45"/>
-          <p:cNvSpPr/>
-          <p:nvPr/>
-        </p:nvSpPr>
-        <p:spPr>
-          <a:xfrm>
-            <a:off x="5288280" y="4818888"/>
-            <a:ext cx="2407920" cy="310896"/>
-          </a:xfrm>
-          <a:prstGeom prst="rect">
-            <a:avLst/>
-          </a:prstGeom>
-          <a:noFill/>
-          <a:ln/>
-        </p:spPr>
-        <p:txBody>
-          <a:bodyPr wrap="square" lIns="0" tIns="0" rIns="0" bIns="0" rtlCol="0" anchor="ctr"/>
-          <a:lstStyle/>
-          <a:p>
-            <a:pPr indent="0" marL="0">
-              <a:buNone/>
-            </a:pPr>
-            <a:r>
-              <a:rPr lang="en-US" sz="1150" dirty="0">
-                <a:solidFill>
-                  <a:srgbClr val="9AA6B2"/>
-                </a:solidFill>
-                <a:latin typeface="Malgun Gothic" pitchFamily="34" charset="0"/>
-                <a:ea typeface="Malgun Gothic" pitchFamily="34" charset="-122"/>
-                <a:cs typeface="Malgun Gothic" pitchFamily="34" charset="-120"/>
-              </a:rPr>
-              <a:t>스트레스·소프트</a:t>
-            </a:r>
-            <a:endParaRPr lang="en-US" sz="1150" dirty="0"/>
-          </a:p>
-        </p:txBody>
-      </p:sp>
-      <p:sp>
-        <p:nvSpPr>
-          <p:cNvPr id="48" name="Text 46"/>
-          <p:cNvSpPr/>
-          <p:nvPr/>
-        </p:nvSpPr>
-        <p:spPr>
-          <a:xfrm>
-            <a:off x="548640" y="5943600"/>
-            <a:ext cx="11064240" cy="457200"/>
-          </a:xfrm>
-          <a:prstGeom prst="rect">
-            <a:avLst/>
-          </a:prstGeom>
-          <a:noFill/>
-          <a:ln/>
-        </p:spPr>
-        <p:txBody>
-          <a:bodyPr wrap="square" lIns="0" tIns="0" rIns="0" bIns="0" rtlCol="0" anchor="ctr"/>
-          <a:lstStyle/>
-          <a:p>
-            <a:pPr algn="ctr" indent="0" marL="0">
-              <a:buNone/>
-            </a:pPr>
-            <a:r>
-              <a:rPr lang="en-US" sz="1300" i="1" dirty="0">
-                <a:solidFill>
-                  <a:srgbClr val="9AA6B2"/>
-                </a:solidFill>
-                <a:latin typeface="Malgun Gothic" pitchFamily="34" charset="0"/>
-                <a:ea typeface="Malgun Gothic" pitchFamily="34" charset="-122"/>
-                <a:cs typeface="Malgun Gothic" pitchFamily="34" charset="-120"/>
-              </a:rPr>
-              <a:t>Test 9(bit fade)는 3시간 걸려 기본 비활성. Test 10(스트레스)은 소프트 오류·급성 하드 오류에 특히 유용.</a:t>
-            </a:r>
-            <a:endParaRPr lang="en-US" sz="1300" dirty="0"/>
+              <a:t>오류 없이 끝나면 성공입니다 — 건강한 GPU는 '아무 일도 안 일어난 것처럼' 조용히 끝납니다.</a:t>
+            </a:r>
+            <a:endParaRPr lang="en-US" sz="1400" dirty="0"/>
           </a:p>
         </p:txBody>
       </p:sp>
@@ -7131,7 +7524,7 @@
                 <a:ea typeface="Courier New" pitchFamily="34" charset="-122"/>
                 <a:cs typeface="Courier New" pitchFamily="34" charset="-120"/>
               </a:rPr>
-              <a:t>7</a:t>
+              <a:t>6</a:t>
             </a:r>
             <a:endParaRPr lang="en-US" sz="2200" dirty="0"/>
           </a:p>
@@ -7170,7 +7563,7 @@
                 <a:ea typeface="Malgun Gothic" pitchFamily="34" charset="-122"/>
                 <a:cs typeface="Malgun Gothic" pitchFamily="34" charset="-120"/>
               </a:rPr>
-              <a:t>프로그램의 큰 흐름</a:t>
+              <a:t>11개 테스트 한눈에</a:t>
             </a:r>
             <a:endParaRPr lang="en-US" sz="3000" dirty="0"/>
           </a:p>
@@ -7184,12 +7577,12 @@
         </p:nvSpPr>
         <p:spPr>
           <a:xfrm>
-            <a:off x="548640" y="1828800"/>
-            <a:ext cx="2560320" cy="2377440"/>
+            <a:off x="548640" y="1600200"/>
+            <a:ext cx="3505200" cy="786384"/>
           </a:xfrm>
           <a:prstGeom prst="roundRect">
             <a:avLst>
-              <a:gd name="adj" fmla="val 3077"/>
+              <a:gd name="adj" fmla="val 6977"/>
             </a:avLst>
           </a:prstGeom>
           <a:solidFill>
@@ -7206,16 +7599,16 @@
         </p:nvSpPr>
         <p:spPr>
           <a:xfrm>
-            <a:off x="731520" y="2011680"/>
-            <a:ext cx="548640" cy="548640"/>
+            <a:off x="731520" y="1728216"/>
+            <a:ext cx="658368" cy="530352"/>
           </a:xfrm>
           <a:prstGeom prst="roundRect">
             <a:avLst>
-              <a:gd name="adj" fmla="val 50000"/>
+              <a:gd name="adj" fmla="val 10345"/>
             </a:avLst>
           </a:prstGeom>
           <a:solidFill>
-            <a:srgbClr val="8CC63F"/>
+            <a:srgbClr val="4FB0C6"/>
           </a:solidFill>
           <a:ln/>
         </p:spPr>
@@ -7227,7 +7620,7 @@
               <a:buNone/>
             </a:pPr>
             <a:r>
-              <a:rPr lang="en-US" sz="1800" b="1" dirty="0">
+              <a:rPr lang="en-US" sz="1600" b="1" dirty="0">
                 <a:solidFill>
                   <a:srgbClr val="13161C"/>
                 </a:solidFill>
@@ -7235,9 +7628,9 @@
                 <a:ea typeface="Courier New" pitchFamily="34" charset="-122"/>
                 <a:cs typeface="Courier New" pitchFamily="34" charset="-120"/>
               </a:rPr>
-              <a:t>1</a:t>
-            </a:r>
-            <a:endParaRPr lang="en-US" sz="1800" dirty="0"/>
+              <a:t>0</a:t>
+            </a:r>
+            <a:endParaRPr lang="en-US" sz="1600" dirty="0"/>
           </a:p>
         </p:txBody>
       </p:sp>
@@ -7249,8 +7642,8 @@
         </p:nvSpPr>
         <p:spPr>
           <a:xfrm>
-            <a:off x="731520" y="2697480"/>
-            <a:ext cx="2194560" cy="457200"/>
+            <a:off x="1508760" y="1691640"/>
+            <a:ext cx="2407920" cy="384048"/>
           </a:xfrm>
           <a:prstGeom prst="rect">
             <a:avLst/>
@@ -7266,30 +7659,134 @@
               <a:buNone/>
             </a:pPr>
             <a:r>
-              <a:rPr lang="en-US" sz="1400" b="1" dirty="0">
-                <a:solidFill>
-                  <a:srgbClr val="8CC63F"/>
+              <a:rPr lang="en-US" sz="1350" b="1" dirty="0">
+                <a:solidFill>
+                  <a:srgbClr val="E8EDF2"/>
+                </a:solidFill>
+                <a:latin typeface="Malgun Gothic" pitchFamily="34" charset="0"/>
+                <a:ea typeface="Malgun Gothic" pitchFamily="34" charset="-122"/>
+                <a:cs typeface="Malgun Gothic" pitchFamily="34" charset="-120"/>
+              </a:rPr>
+              <a:t>Walking 1 bit</a:t>
+            </a:r>
+            <a:endParaRPr lang="en-US" sz="1350" dirty="0"/>
+          </a:p>
+        </p:txBody>
+      </p:sp>
+      <p:sp>
+        <p:nvSpPr>
+          <p:cNvPr id="7" name="Text 5"/>
+          <p:cNvSpPr/>
+          <p:nvPr/>
+        </p:nvSpPr>
+        <p:spPr>
+          <a:xfrm>
+            <a:off x="1508760" y="2020824"/>
+            <a:ext cx="2407920" cy="310896"/>
+          </a:xfrm>
+          <a:prstGeom prst="rect">
+            <a:avLst/>
+          </a:prstGeom>
+          <a:noFill/>
+          <a:ln/>
+        </p:spPr>
+        <p:txBody>
+          <a:bodyPr wrap="square" lIns="0" tIns="0" rIns="0" bIns="0" rtlCol="0" anchor="ctr"/>
+          <a:lstStyle/>
+          <a:p>
+            <a:pPr indent="0" marL="0">
+              <a:buNone/>
+            </a:pPr>
+            <a:r>
+              <a:rPr lang="en-US" sz="1150" dirty="0">
+                <a:solidFill>
+                  <a:srgbClr val="9AA6B2"/>
+                </a:solidFill>
+                <a:latin typeface="Malgun Gothic" pitchFamily="34" charset="0"/>
+                <a:ea typeface="Malgun Gothic" pitchFamily="34" charset="-122"/>
+                <a:cs typeface="Malgun Gothic" pitchFamily="34" charset="-120"/>
+              </a:rPr>
+              <a:t>주소 배선</a:t>
+            </a:r>
+            <a:endParaRPr lang="en-US" sz="1150" dirty="0"/>
+          </a:p>
+        </p:txBody>
+      </p:sp>
+      <p:sp>
+        <p:nvSpPr>
+          <p:cNvPr id="8" name="Shape 6"/>
+          <p:cNvSpPr/>
+          <p:nvPr/>
+        </p:nvSpPr>
+        <p:spPr>
+          <a:xfrm>
+            <a:off x="4328160" y="1600200"/>
+            <a:ext cx="3505200" cy="786384"/>
+          </a:xfrm>
+          <a:prstGeom prst="roundRect">
+            <a:avLst>
+              <a:gd name="adj" fmla="val 6977"/>
+            </a:avLst>
+          </a:prstGeom>
+          <a:solidFill>
+            <a:srgbClr val="1E232C"/>
+          </a:solidFill>
+          <a:ln/>
+        </p:spPr>
+      </p:sp>
+      <p:sp>
+        <p:nvSpPr>
+          <p:cNvPr id="9" name="Text 7"/>
+          <p:cNvSpPr/>
+          <p:nvPr/>
+        </p:nvSpPr>
+        <p:spPr>
+          <a:xfrm>
+            <a:off x="4511040" y="1728216"/>
+            <a:ext cx="658368" cy="530352"/>
+          </a:xfrm>
+          <a:prstGeom prst="roundRect">
+            <a:avLst>
+              <a:gd name="adj" fmla="val 10345"/>
+            </a:avLst>
+          </a:prstGeom>
+          <a:solidFill>
+            <a:srgbClr val="4FB0C6"/>
+          </a:solidFill>
+          <a:ln/>
+        </p:spPr>
+        <p:txBody>
+          <a:bodyPr wrap="square" rtlCol="0" anchor="ctr"/>
+          <a:lstStyle/>
+          <a:p>
+            <a:pPr algn="ctr" indent="0" marL="0">
+              <a:buNone/>
+            </a:pPr>
+            <a:r>
+              <a:rPr lang="en-US" sz="1600" b="1" dirty="0">
+                <a:solidFill>
+                  <a:srgbClr val="13161C"/>
                 </a:solidFill>
                 <a:latin typeface="Courier New" pitchFamily="34" charset="0"/>
                 <a:ea typeface="Courier New" pitchFamily="34" charset="-122"/>
                 <a:cs typeface="Courier New" pitchFamily="34" charset="-120"/>
               </a:rPr>
-              <a:t>main()</a:t>
-            </a:r>
-            <a:endParaRPr lang="en-US" sz="1400" dirty="0"/>
-          </a:p>
-        </p:txBody>
-      </p:sp>
-      <p:sp>
-        <p:nvSpPr>
-          <p:cNvPr id="7" name="Text 5"/>
-          <p:cNvSpPr/>
-          <p:nvPr/>
-        </p:nvSpPr>
-        <p:spPr>
-          <a:xfrm>
-            <a:off x="731520" y="3108960"/>
-            <a:ext cx="2194560" cy="365760"/>
+              <a:t>1</a:t>
+            </a:r>
+            <a:endParaRPr lang="en-US" sz="1600" dirty="0"/>
+          </a:p>
+        </p:txBody>
+      </p:sp>
+      <p:sp>
+        <p:nvSpPr>
+          <p:cNvPr id="10" name="Text 8"/>
+          <p:cNvSpPr/>
+          <p:nvPr/>
+        </p:nvSpPr>
+        <p:spPr>
+          <a:xfrm>
+            <a:off x="5288280" y="1691640"/>
+            <a:ext cx="2407920" cy="384048"/>
           </a:xfrm>
           <a:prstGeom prst="rect">
             <a:avLst/>
@@ -7305,7 +7802,7 @@
               <a:buNone/>
             </a:pPr>
             <a:r>
-              <a:rPr lang="en-US" sz="1400" b="1" dirty="0">
+              <a:rPr lang="en-US" sz="1350" b="1" dirty="0">
                 <a:solidFill>
                   <a:srgbClr val="E8EDF2"/>
                 </a:solidFill>
@@ -7313,37 +7810,34 @@
                 <a:ea typeface="Malgun Gothic" pitchFamily="34" charset="-122"/>
                 <a:cs typeface="Malgun Gothic" pitchFamily="34" charset="-120"/>
               </a:rPr>
-              <a:t>GPU 개수 확인</a:t>
-            </a:r>
-            <a:endParaRPr lang="en-US" sz="1400" dirty="0"/>
-          </a:p>
-        </p:txBody>
-      </p:sp>
-      <p:sp>
-        <p:nvSpPr>
-          <p:cNvPr id="8" name="Text 6"/>
-          <p:cNvSpPr/>
-          <p:nvPr/>
-        </p:nvSpPr>
-        <p:spPr>
-          <a:xfrm>
-            <a:off x="731520" y="3474720"/>
-            <a:ext cx="2194560" cy="640080"/>
-          </a:xfrm>
-          <a:prstGeom prst="rect">
-            <a:avLst/>
-          </a:prstGeom>
-          <a:noFill/>
-          <a:ln/>
-        </p:spPr>
-        <p:txBody>
-          <a:bodyPr wrap="square" lIns="0" tIns="0" rIns="0" bIns="0" rtlCol="0" anchor="t"/>
+              <a:t>Own address</a:t>
+            </a:r>
+            <a:endParaRPr lang="en-US" sz="1350" dirty="0"/>
+          </a:p>
+        </p:txBody>
+      </p:sp>
+      <p:sp>
+        <p:nvSpPr>
+          <p:cNvPr id="11" name="Text 9"/>
+          <p:cNvSpPr/>
+          <p:nvPr/>
+        </p:nvSpPr>
+        <p:spPr>
+          <a:xfrm>
+            <a:off x="5288280" y="2020824"/>
+            <a:ext cx="2407920" cy="310896"/>
+          </a:xfrm>
+          <a:prstGeom prst="rect">
+            <a:avLst/>
+          </a:prstGeom>
+          <a:noFill/>
+          <a:ln/>
+        </p:spPr>
+        <p:txBody>
+          <a:bodyPr wrap="square" lIns="0" tIns="0" rIns="0" bIns="0" rtlCol="0" anchor="ctr"/>
           <a:lstStyle/>
           <a:p>
             <a:pPr indent="0" marL="0">
-              <a:lnSpc>
-                <a:spcPct val="110000"/>
-              </a:lnSpc>
               <a:buNone/>
             </a:pPr>
             <a:r>
@@ -7355,7 +7849,7 @@
                 <a:ea typeface="Malgun Gothic" pitchFamily="34" charset="-122"/>
                 <a:cs typeface="Malgun Gothic" pitchFamily="34" charset="-120"/>
               </a:rPr>
-              <a:t>cudaGetDeviceCount (cuda_memtest.cpp:299)</a:t>
+              <a:t>주소 검사</a:t>
             </a:r>
             <a:endParaRPr lang="en-US" sz="1150" dirty="0"/>
           </a:p>
@@ -7363,57 +7857,161 @@
       </p:sp>
       <p:sp>
         <p:nvSpPr>
-          <p:cNvPr id="9" name="Text 7"/>
-          <p:cNvSpPr/>
-          <p:nvPr/>
-        </p:nvSpPr>
-        <p:spPr>
-          <a:xfrm>
-            <a:off x="3118104" y="2743200"/>
-            <a:ext cx="256032" cy="548640"/>
-          </a:xfrm>
-          <a:prstGeom prst="rect">
-            <a:avLst/>
-          </a:prstGeom>
-          <a:noFill/>
-          <a:ln/>
-        </p:spPr>
-        <p:txBody>
-          <a:bodyPr wrap="square" lIns="0" tIns="0" rIns="0" bIns="0" rtlCol="0" anchor="ctr"/>
+          <p:cNvPr id="12" name="Shape 10"/>
+          <p:cNvSpPr/>
+          <p:nvPr/>
+        </p:nvSpPr>
+        <p:spPr>
+          <a:xfrm>
+            <a:off x="8107680" y="1600200"/>
+            <a:ext cx="3505200" cy="786384"/>
+          </a:xfrm>
+          <a:prstGeom prst="roundRect">
+            <a:avLst>
+              <a:gd name="adj" fmla="val 6977"/>
+            </a:avLst>
+          </a:prstGeom>
+          <a:solidFill>
+            <a:srgbClr val="1E232C"/>
+          </a:solidFill>
+          <a:ln/>
+        </p:spPr>
+      </p:sp>
+      <p:sp>
+        <p:nvSpPr>
+          <p:cNvPr id="13" name="Text 11"/>
+          <p:cNvSpPr/>
+          <p:nvPr/>
+        </p:nvSpPr>
+        <p:spPr>
+          <a:xfrm>
+            <a:off x="8290560" y="1728216"/>
+            <a:ext cx="658368" cy="530352"/>
+          </a:xfrm>
+          <a:prstGeom prst="roundRect">
+            <a:avLst>
+              <a:gd name="adj" fmla="val 10345"/>
+            </a:avLst>
+          </a:prstGeom>
+          <a:solidFill>
+            <a:srgbClr val="4FB0C6"/>
+          </a:solidFill>
+          <a:ln/>
+        </p:spPr>
+        <p:txBody>
+          <a:bodyPr wrap="square" rtlCol="0" anchor="ctr"/>
           <a:lstStyle/>
           <a:p>
             <a:pPr algn="ctr" indent="0" marL="0">
               <a:buNone/>
             </a:pPr>
             <a:r>
-              <a:rPr lang="en-US" sz="2000" b="1" dirty="0">
-                <a:solidFill>
-                  <a:srgbClr val="9AA6B2"/>
+              <a:rPr lang="en-US" sz="1600" b="1" dirty="0">
+                <a:solidFill>
+                  <a:srgbClr val="13161C"/>
                 </a:solidFill>
                 <a:latin typeface="Courier New" pitchFamily="34" charset="0"/>
                 <a:ea typeface="Courier New" pitchFamily="34" charset="-122"/>
                 <a:cs typeface="Courier New" pitchFamily="34" charset="-120"/>
               </a:rPr>
-              <a:t>→</a:t>
-            </a:r>
-            <a:endParaRPr lang="en-US" sz="2000" dirty="0"/>
-          </a:p>
-        </p:txBody>
-      </p:sp>
-      <p:sp>
-        <p:nvSpPr>
-          <p:cNvPr id="10" name="Shape 8"/>
-          <p:cNvSpPr/>
-          <p:nvPr/>
-        </p:nvSpPr>
-        <p:spPr>
-          <a:xfrm>
-            <a:off x="3383280" y="1828800"/>
-            <a:ext cx="2560320" cy="2377440"/>
+              <a:t>2</a:t>
+            </a:r>
+            <a:endParaRPr lang="en-US" sz="1600" dirty="0"/>
+          </a:p>
+        </p:txBody>
+      </p:sp>
+      <p:sp>
+        <p:nvSpPr>
+          <p:cNvPr id="14" name="Text 12"/>
+          <p:cNvSpPr/>
+          <p:nvPr/>
+        </p:nvSpPr>
+        <p:spPr>
+          <a:xfrm>
+            <a:off x="9067800" y="1691640"/>
+            <a:ext cx="2407920" cy="384048"/>
+          </a:xfrm>
+          <a:prstGeom prst="rect">
+            <a:avLst/>
+          </a:prstGeom>
+          <a:noFill/>
+          <a:ln/>
+        </p:spPr>
+        <p:txBody>
+          <a:bodyPr wrap="square" lIns="0" tIns="0" rIns="0" bIns="0" rtlCol="0" anchor="ctr"/>
+          <a:lstStyle/>
+          <a:p>
+            <a:pPr indent="0" marL="0">
+              <a:buNone/>
+            </a:pPr>
+            <a:r>
+              <a:rPr lang="en-US" sz="1350" b="1" dirty="0">
+                <a:solidFill>
+                  <a:srgbClr val="E8EDF2"/>
+                </a:solidFill>
+                <a:latin typeface="Malgun Gothic" pitchFamily="34" charset="0"/>
+                <a:ea typeface="Malgun Gothic" pitchFamily="34" charset="-122"/>
+                <a:cs typeface="Malgun Gothic" pitchFamily="34" charset="-120"/>
+              </a:rPr>
+              <a:t>Moving inv. (0/1)</a:t>
+            </a:r>
+            <a:endParaRPr lang="en-US" sz="1350" dirty="0"/>
+          </a:p>
+        </p:txBody>
+      </p:sp>
+      <p:sp>
+        <p:nvSpPr>
+          <p:cNvPr id="15" name="Text 13"/>
+          <p:cNvSpPr/>
+          <p:nvPr/>
+        </p:nvSpPr>
+        <p:spPr>
+          <a:xfrm>
+            <a:off x="9067800" y="2020824"/>
+            <a:ext cx="2407920" cy="310896"/>
+          </a:xfrm>
+          <a:prstGeom prst="rect">
+            <a:avLst/>
+          </a:prstGeom>
+          <a:noFill/>
+          <a:ln/>
+        </p:spPr>
+        <p:txBody>
+          <a:bodyPr wrap="square" lIns="0" tIns="0" rIns="0" bIns="0" rtlCol="0" anchor="ctr"/>
+          <a:lstStyle/>
+          <a:p>
+            <a:pPr indent="0" marL="0">
+              <a:buNone/>
+            </a:pPr>
+            <a:r>
+              <a:rPr lang="en-US" sz="1150" dirty="0">
+                <a:solidFill>
+                  <a:srgbClr val="9AA6B2"/>
+                </a:solidFill>
+                <a:latin typeface="Malgun Gothic" pitchFamily="34" charset="0"/>
+                <a:ea typeface="Malgun Gothic" pitchFamily="34" charset="-122"/>
+                <a:cs typeface="Malgun Gothic" pitchFamily="34" charset="-120"/>
+              </a:rPr>
+              <a:t>고착 오류</a:t>
+            </a:r>
+            <a:endParaRPr lang="en-US" sz="1150" dirty="0"/>
+          </a:p>
+        </p:txBody>
+      </p:sp>
+      <p:sp>
+        <p:nvSpPr>
+          <p:cNvPr id="16" name="Shape 14"/>
+          <p:cNvSpPr/>
+          <p:nvPr/>
+        </p:nvSpPr>
+        <p:spPr>
+          <a:xfrm>
+            <a:off x="548640" y="2532888"/>
+            <a:ext cx="3505200" cy="786384"/>
           </a:xfrm>
           <a:prstGeom prst="roundRect">
             <a:avLst>
-              <a:gd name="adj" fmla="val 3077"/>
+              <a:gd name="adj" fmla="val 6977"/>
             </a:avLst>
           </a:prstGeom>
           <a:solidFill>
@@ -7424,18 +8022,18 @@
       </p:sp>
       <p:sp>
         <p:nvSpPr>
-          <p:cNvPr id="11" name="Text 9"/>
-          <p:cNvSpPr/>
-          <p:nvPr/>
-        </p:nvSpPr>
-        <p:spPr>
-          <a:xfrm>
-            <a:off x="3566160" y="2011680"/>
-            <a:ext cx="548640" cy="548640"/>
+          <p:cNvPr id="17" name="Text 15"/>
+          <p:cNvSpPr/>
+          <p:nvPr/>
+        </p:nvSpPr>
+        <p:spPr>
+          <a:xfrm>
+            <a:off x="731520" y="2660904"/>
+            <a:ext cx="658368" cy="530352"/>
           </a:xfrm>
           <a:prstGeom prst="roundRect">
             <a:avLst>
-              <a:gd name="adj" fmla="val 50000"/>
+              <a:gd name="adj" fmla="val 10345"/>
             </a:avLst>
           </a:prstGeom>
           <a:solidFill>
@@ -7451,7 +8049,7 @@
               <a:buNone/>
             </a:pPr>
             <a:r>
-              <a:rPr lang="en-US" sz="1800" b="1" dirty="0">
+              <a:rPr lang="en-US" sz="1600" b="1" dirty="0">
                 <a:solidFill>
                   <a:srgbClr val="13161C"/>
                 </a:solidFill>
@@ -7459,22 +8057,22 @@
                 <a:ea typeface="Courier New" pitchFamily="34" charset="-122"/>
                 <a:cs typeface="Courier New" pitchFamily="34" charset="-120"/>
               </a:rPr>
-              <a:t>2</a:t>
-            </a:r>
-            <a:endParaRPr lang="en-US" sz="1800" dirty="0"/>
-          </a:p>
-        </p:txBody>
-      </p:sp>
-      <p:sp>
-        <p:nvSpPr>
-          <p:cNvPr id="12" name="Text 10"/>
-          <p:cNvSpPr/>
-          <p:nvPr/>
-        </p:nvSpPr>
-        <p:spPr>
-          <a:xfrm>
-            <a:off x="3566160" y="2697480"/>
-            <a:ext cx="2194560" cy="457200"/>
+              <a:t>3</a:t>
+            </a:r>
+            <a:endParaRPr lang="en-US" sz="1600" dirty="0"/>
+          </a:p>
+        </p:txBody>
+      </p:sp>
+      <p:sp>
+        <p:nvSpPr>
+          <p:cNvPr id="18" name="Text 16"/>
+          <p:cNvSpPr/>
+          <p:nvPr/>
+        </p:nvSpPr>
+        <p:spPr>
+          <a:xfrm>
+            <a:off x="1508760" y="2624328"/>
+            <a:ext cx="2407920" cy="384048"/>
           </a:xfrm>
           <a:prstGeom prst="rect">
             <a:avLst/>
@@ -7490,30 +8088,134 @@
               <a:buNone/>
             </a:pPr>
             <a:r>
-              <a:rPr lang="en-US" sz="1400" b="1" dirty="0">
-                <a:solidFill>
-                  <a:srgbClr val="4FB0C6"/>
+              <a:rPr lang="en-US" sz="1350" b="1" dirty="0">
+                <a:solidFill>
+                  <a:srgbClr val="E8EDF2"/>
+                </a:solidFill>
+                <a:latin typeface="Malgun Gothic" pitchFamily="34" charset="0"/>
+                <a:ea typeface="Malgun Gothic" pitchFamily="34" charset="-122"/>
+                <a:cs typeface="Malgun Gothic" pitchFamily="34" charset="-120"/>
+              </a:rPr>
+              <a:t>Moving inv. (8bit)</a:t>
+            </a:r>
+            <a:endParaRPr lang="en-US" sz="1350" dirty="0"/>
+          </a:p>
+        </p:txBody>
+      </p:sp>
+      <p:sp>
+        <p:nvSpPr>
+          <p:cNvPr id="19" name="Text 17"/>
+          <p:cNvSpPr/>
+          <p:nvPr/>
+        </p:nvSpPr>
+        <p:spPr>
+          <a:xfrm>
+            <a:off x="1508760" y="2953512"/>
+            <a:ext cx="2407920" cy="310896"/>
+          </a:xfrm>
+          <a:prstGeom prst="rect">
+            <a:avLst/>
+          </a:prstGeom>
+          <a:noFill/>
+          <a:ln/>
+        </p:spPr>
+        <p:txBody>
+          <a:bodyPr wrap="square" lIns="0" tIns="0" rIns="0" bIns="0" rtlCol="0" anchor="ctr"/>
+          <a:lstStyle/>
+          <a:p>
+            <a:pPr indent="0" marL="0">
+              <a:buNone/>
+            </a:pPr>
+            <a:r>
+              <a:rPr lang="en-US" sz="1150" dirty="0">
+                <a:solidFill>
+                  <a:srgbClr val="9AA6B2"/>
+                </a:solidFill>
+                <a:latin typeface="Malgun Gothic" pitchFamily="34" charset="0"/>
+                <a:ea typeface="Malgun Gothic" pitchFamily="34" charset="-122"/>
+                <a:cs typeface="Malgun Gothic" pitchFamily="34" charset="-120"/>
+              </a:rPr>
+              <a:t>고착 오류</a:t>
+            </a:r>
+            <a:endParaRPr lang="en-US" sz="1150" dirty="0"/>
+          </a:p>
+        </p:txBody>
+      </p:sp>
+      <p:sp>
+        <p:nvSpPr>
+          <p:cNvPr id="20" name="Shape 18"/>
+          <p:cNvSpPr/>
+          <p:nvPr/>
+        </p:nvSpPr>
+        <p:spPr>
+          <a:xfrm>
+            <a:off x="4328160" y="2532888"/>
+            <a:ext cx="3505200" cy="786384"/>
+          </a:xfrm>
+          <a:prstGeom prst="roundRect">
+            <a:avLst>
+              <a:gd name="adj" fmla="val 6977"/>
+            </a:avLst>
+          </a:prstGeom>
+          <a:solidFill>
+            <a:srgbClr val="1E232C"/>
+          </a:solidFill>
+          <a:ln/>
+        </p:spPr>
+      </p:sp>
+      <p:sp>
+        <p:nvSpPr>
+          <p:cNvPr id="21" name="Text 19"/>
+          <p:cNvSpPr/>
+          <p:nvPr/>
+        </p:nvSpPr>
+        <p:spPr>
+          <a:xfrm>
+            <a:off x="4511040" y="2660904"/>
+            <a:ext cx="658368" cy="530352"/>
+          </a:xfrm>
+          <a:prstGeom prst="roundRect">
+            <a:avLst>
+              <a:gd name="adj" fmla="val 10345"/>
+            </a:avLst>
+          </a:prstGeom>
+          <a:solidFill>
+            <a:srgbClr val="4FB0C6"/>
+          </a:solidFill>
+          <a:ln/>
+        </p:spPr>
+        <p:txBody>
+          <a:bodyPr wrap="square" rtlCol="0" anchor="ctr"/>
+          <a:lstStyle/>
+          <a:p>
+            <a:pPr algn="ctr" indent="0" marL="0">
+              <a:buNone/>
+            </a:pPr>
+            <a:r>
+              <a:rPr lang="en-US" sz="1600" b="1" dirty="0">
+                <a:solidFill>
+                  <a:srgbClr val="13161C"/>
                 </a:solidFill>
                 <a:latin typeface="Courier New" pitchFamily="34" charset="0"/>
                 <a:ea typeface="Courier New" pitchFamily="34" charset="-122"/>
                 <a:cs typeface="Courier New" pitchFamily="34" charset="-120"/>
               </a:rPr>
-              <a:t>thread_func</a:t>
-            </a:r>
-            <a:endParaRPr lang="en-US" sz="1400" dirty="0"/>
-          </a:p>
-        </p:txBody>
-      </p:sp>
-      <p:sp>
-        <p:nvSpPr>
-          <p:cNvPr id="13" name="Text 11"/>
-          <p:cNvSpPr/>
-          <p:nvPr/>
-        </p:nvSpPr>
-        <p:spPr>
-          <a:xfrm>
-            <a:off x="3566160" y="3108960"/>
-            <a:ext cx="2194560" cy="365760"/>
+              <a:t>4</a:t>
+            </a:r>
+            <a:endParaRPr lang="en-US" sz="1600" dirty="0"/>
+          </a:p>
+        </p:txBody>
+      </p:sp>
+      <p:sp>
+        <p:nvSpPr>
+          <p:cNvPr id="22" name="Text 20"/>
+          <p:cNvSpPr/>
+          <p:nvPr/>
+        </p:nvSpPr>
+        <p:spPr>
+          <a:xfrm>
+            <a:off x="5288280" y="2624328"/>
+            <a:ext cx="2407920" cy="384048"/>
           </a:xfrm>
           <a:prstGeom prst="rect">
             <a:avLst/>
@@ -7529,7 +8231,7 @@
               <a:buNone/>
             </a:pPr>
             <a:r>
-              <a:rPr lang="en-US" sz="1400" b="1" dirty="0">
+              <a:rPr lang="en-US" sz="1350" b="1" dirty="0">
                 <a:solidFill>
                   <a:srgbClr val="E8EDF2"/>
                 </a:solidFill>
@@ -7537,37 +8239,34 @@
                 <a:ea typeface="Malgun Gothic" pitchFamily="34" charset="-122"/>
                 <a:cs typeface="Malgun Gothic" pitchFamily="34" charset="-120"/>
               </a:rPr>
-              <a:t>GPU마다 스레드</a:t>
-            </a:r>
-            <a:endParaRPr lang="en-US" sz="1400" dirty="0"/>
-          </a:p>
-        </p:txBody>
-      </p:sp>
-      <p:sp>
-        <p:nvSpPr>
-          <p:cNvPr id="14" name="Text 12"/>
-          <p:cNvSpPr/>
-          <p:nvPr/>
-        </p:nvSpPr>
-        <p:spPr>
-          <a:xfrm>
-            <a:off x="3566160" y="3474720"/>
-            <a:ext cx="2194560" cy="640080"/>
-          </a:xfrm>
-          <a:prstGeom prst="rect">
-            <a:avLst/>
-          </a:prstGeom>
-          <a:noFill/>
-          <a:ln/>
-        </p:spPr>
-        <p:txBody>
-          <a:bodyPr wrap="square" lIns="0" tIns="0" rIns="0" bIns="0" rtlCol="0" anchor="t"/>
+              <a:t>Moving inv. (random)</a:t>
+            </a:r>
+            <a:endParaRPr lang="en-US" sz="1350" dirty="0"/>
+          </a:p>
+        </p:txBody>
+      </p:sp>
+      <p:sp>
+        <p:nvSpPr>
+          <p:cNvPr id="23" name="Text 21"/>
+          <p:cNvSpPr/>
+          <p:nvPr/>
+        </p:nvSpPr>
+        <p:spPr>
+          <a:xfrm>
+            <a:off x="5288280" y="2953512"/>
+            <a:ext cx="2407920" cy="310896"/>
+          </a:xfrm>
+          <a:prstGeom prst="rect">
+            <a:avLst/>
+          </a:prstGeom>
+          <a:noFill/>
+          <a:ln/>
+        </p:spPr>
+        <p:txBody>
+          <a:bodyPr wrap="square" lIns="0" tIns="0" rIns="0" bIns="0" rtlCol="0" anchor="ctr"/>
           <a:lstStyle/>
           <a:p>
             <a:pPr indent="0" marL="0">
-              <a:lnSpc>
-                <a:spcPct val="110000"/>
-              </a:lnSpc>
               <a:buNone/>
             </a:pPr>
             <a:r>
@@ -7579,7 +8278,7 @@
                 <a:ea typeface="Malgun Gothic" pitchFamily="34" charset="-122"/>
                 <a:cs typeface="Malgun Gothic" pitchFamily="34" charset="-120"/>
               </a:rPr>
-              <a:t>각 GPU를 cudaSetDevice로 선택</a:t>
+              <a:t>데이터 민감</a:t>
             </a:r>
             <a:endParaRPr lang="en-US" sz="1150" dirty="0"/>
           </a:p>
@@ -7587,57 +8286,161 @@
       </p:sp>
       <p:sp>
         <p:nvSpPr>
-          <p:cNvPr id="15" name="Text 13"/>
-          <p:cNvSpPr/>
-          <p:nvPr/>
-        </p:nvSpPr>
-        <p:spPr>
-          <a:xfrm>
-            <a:off x="5952744" y="2743200"/>
-            <a:ext cx="256032" cy="548640"/>
-          </a:xfrm>
-          <a:prstGeom prst="rect">
-            <a:avLst/>
-          </a:prstGeom>
-          <a:noFill/>
-          <a:ln/>
-        </p:spPr>
-        <p:txBody>
-          <a:bodyPr wrap="square" lIns="0" tIns="0" rIns="0" bIns="0" rtlCol="0" anchor="ctr"/>
+          <p:cNvPr id="24" name="Shape 22"/>
+          <p:cNvSpPr/>
+          <p:nvPr/>
+        </p:nvSpPr>
+        <p:spPr>
+          <a:xfrm>
+            <a:off x="8107680" y="2532888"/>
+            <a:ext cx="3505200" cy="786384"/>
+          </a:xfrm>
+          <a:prstGeom prst="roundRect">
+            <a:avLst>
+              <a:gd name="adj" fmla="val 6977"/>
+            </a:avLst>
+          </a:prstGeom>
+          <a:solidFill>
+            <a:srgbClr val="1E232C"/>
+          </a:solidFill>
+          <a:ln/>
+        </p:spPr>
+      </p:sp>
+      <p:sp>
+        <p:nvSpPr>
+          <p:cNvPr id="25" name="Text 23"/>
+          <p:cNvSpPr/>
+          <p:nvPr/>
+        </p:nvSpPr>
+        <p:spPr>
+          <a:xfrm>
+            <a:off x="8290560" y="2660904"/>
+            <a:ext cx="658368" cy="530352"/>
+          </a:xfrm>
+          <a:prstGeom prst="roundRect">
+            <a:avLst>
+              <a:gd name="adj" fmla="val 10345"/>
+            </a:avLst>
+          </a:prstGeom>
+          <a:solidFill>
+            <a:srgbClr val="4FB0C6"/>
+          </a:solidFill>
+          <a:ln/>
+        </p:spPr>
+        <p:txBody>
+          <a:bodyPr wrap="square" rtlCol="0" anchor="ctr"/>
           <a:lstStyle/>
           <a:p>
             <a:pPr algn="ctr" indent="0" marL="0">
               <a:buNone/>
             </a:pPr>
             <a:r>
-              <a:rPr lang="en-US" sz="2000" b="1" dirty="0">
-                <a:solidFill>
-                  <a:srgbClr val="9AA6B2"/>
+              <a:rPr lang="en-US" sz="1600" b="1" dirty="0">
+                <a:solidFill>
+                  <a:srgbClr val="13161C"/>
                 </a:solidFill>
                 <a:latin typeface="Courier New" pitchFamily="34" charset="0"/>
                 <a:ea typeface="Courier New" pitchFamily="34" charset="-122"/>
                 <a:cs typeface="Courier New" pitchFamily="34" charset="-120"/>
               </a:rPr>
-              <a:t>→</a:t>
-            </a:r>
-            <a:endParaRPr lang="en-US" sz="2000" dirty="0"/>
-          </a:p>
-        </p:txBody>
-      </p:sp>
-      <p:sp>
-        <p:nvSpPr>
-          <p:cNvPr id="16" name="Shape 14"/>
-          <p:cNvSpPr/>
-          <p:nvPr/>
-        </p:nvSpPr>
-        <p:spPr>
-          <a:xfrm>
-            <a:off x="6217920" y="1828800"/>
-            <a:ext cx="2560320" cy="2377440"/>
+              <a:t>5</a:t>
+            </a:r>
+            <a:endParaRPr lang="en-US" sz="1600" dirty="0"/>
+          </a:p>
+        </p:txBody>
+      </p:sp>
+      <p:sp>
+        <p:nvSpPr>
+          <p:cNvPr id="26" name="Text 24"/>
+          <p:cNvSpPr/>
+          <p:nvPr/>
+        </p:nvSpPr>
+        <p:spPr>
+          <a:xfrm>
+            <a:off x="9067800" y="2624328"/>
+            <a:ext cx="2407920" cy="384048"/>
+          </a:xfrm>
+          <a:prstGeom prst="rect">
+            <a:avLst/>
+          </a:prstGeom>
+          <a:noFill/>
+          <a:ln/>
+        </p:spPr>
+        <p:txBody>
+          <a:bodyPr wrap="square" lIns="0" tIns="0" rIns="0" bIns="0" rtlCol="0" anchor="ctr"/>
+          <a:lstStyle/>
+          <a:p>
+            <a:pPr indent="0" marL="0">
+              <a:buNone/>
+            </a:pPr>
+            <a:r>
+              <a:rPr lang="en-US" sz="1350" b="1" dirty="0">
+                <a:solidFill>
+                  <a:srgbClr val="E8EDF2"/>
+                </a:solidFill>
+                <a:latin typeface="Malgun Gothic" pitchFamily="34" charset="0"/>
+                <a:ea typeface="Malgun Gothic" pitchFamily="34" charset="-122"/>
+                <a:cs typeface="Malgun Gothic" pitchFamily="34" charset="-120"/>
+              </a:rPr>
+              <a:t>Block move</a:t>
+            </a:r>
+            <a:endParaRPr lang="en-US" sz="1350" dirty="0"/>
+          </a:p>
+        </p:txBody>
+      </p:sp>
+      <p:sp>
+        <p:nvSpPr>
+          <p:cNvPr id="27" name="Text 25"/>
+          <p:cNvSpPr/>
+          <p:nvPr/>
+        </p:nvSpPr>
+        <p:spPr>
+          <a:xfrm>
+            <a:off x="9067800" y="2953512"/>
+            <a:ext cx="2407920" cy="310896"/>
+          </a:xfrm>
+          <a:prstGeom prst="rect">
+            <a:avLst/>
+          </a:prstGeom>
+          <a:noFill/>
+          <a:ln/>
+        </p:spPr>
+        <p:txBody>
+          <a:bodyPr wrap="square" lIns="0" tIns="0" rIns="0" bIns="0" rtlCol="0" anchor="ctr"/>
+          <a:lstStyle/>
+          <a:p>
+            <a:pPr indent="0" marL="0">
+              <a:buNone/>
+            </a:pPr>
+            <a:r>
+              <a:rPr lang="en-US" sz="1150" dirty="0">
+                <a:solidFill>
+                  <a:srgbClr val="9AA6B2"/>
+                </a:solidFill>
+                <a:latin typeface="Malgun Gothic" pitchFamily="34" charset="0"/>
+                <a:ea typeface="Malgun Gothic" pitchFamily="34" charset="-122"/>
+                <a:cs typeface="Malgun Gothic" pitchFamily="34" charset="-120"/>
+              </a:rPr>
+              <a:t>데이터 민감</a:t>
+            </a:r>
+            <a:endParaRPr lang="en-US" sz="1150" dirty="0"/>
+          </a:p>
+        </p:txBody>
+      </p:sp>
+      <p:sp>
+        <p:nvSpPr>
+          <p:cNvPr id="28" name="Shape 26"/>
+          <p:cNvSpPr/>
+          <p:nvPr/>
+        </p:nvSpPr>
+        <p:spPr>
+          <a:xfrm>
+            <a:off x="548640" y="3465576"/>
+            <a:ext cx="3505200" cy="786384"/>
           </a:xfrm>
           <a:prstGeom prst="roundRect">
             <a:avLst>
-              <a:gd name="adj" fmla="val 3077"/>
+              <a:gd name="adj" fmla="val 6977"/>
             </a:avLst>
           </a:prstGeom>
           <a:solidFill>
@@ -7648,18 +8451,447 @@
       </p:sp>
       <p:sp>
         <p:nvSpPr>
-          <p:cNvPr id="17" name="Text 15"/>
-          <p:cNvSpPr/>
-          <p:nvPr/>
-        </p:nvSpPr>
-        <p:spPr>
-          <a:xfrm>
-            <a:off x="6400800" y="2011680"/>
-            <a:ext cx="548640" cy="548640"/>
+          <p:cNvPr id="29" name="Text 27"/>
+          <p:cNvSpPr/>
+          <p:nvPr/>
+        </p:nvSpPr>
+        <p:spPr>
+          <a:xfrm>
+            <a:off x="731520" y="3593592"/>
+            <a:ext cx="658368" cy="530352"/>
           </a:xfrm>
           <a:prstGeom prst="roundRect">
             <a:avLst>
-              <a:gd name="adj" fmla="val 50000"/>
+              <a:gd name="adj" fmla="val 10345"/>
+            </a:avLst>
+          </a:prstGeom>
+          <a:solidFill>
+            <a:srgbClr val="4FB0C6"/>
+          </a:solidFill>
+          <a:ln/>
+        </p:spPr>
+        <p:txBody>
+          <a:bodyPr wrap="square" rtlCol="0" anchor="ctr"/>
+          <a:lstStyle/>
+          <a:p>
+            <a:pPr algn="ctr" indent="0" marL="0">
+              <a:buNone/>
+            </a:pPr>
+            <a:r>
+              <a:rPr lang="en-US" sz="1600" b="1" dirty="0">
+                <a:solidFill>
+                  <a:srgbClr val="13161C"/>
+                </a:solidFill>
+                <a:latin typeface="Courier New" pitchFamily="34" charset="0"/>
+                <a:ea typeface="Courier New" pitchFamily="34" charset="-122"/>
+                <a:cs typeface="Courier New" pitchFamily="34" charset="-120"/>
+              </a:rPr>
+              <a:t>6</a:t>
+            </a:r>
+            <a:endParaRPr lang="en-US" sz="1600" dirty="0"/>
+          </a:p>
+        </p:txBody>
+      </p:sp>
+      <p:sp>
+        <p:nvSpPr>
+          <p:cNvPr id="30" name="Text 28"/>
+          <p:cNvSpPr/>
+          <p:nvPr/>
+        </p:nvSpPr>
+        <p:spPr>
+          <a:xfrm>
+            <a:off x="1508760" y="3557016"/>
+            <a:ext cx="2407920" cy="384048"/>
+          </a:xfrm>
+          <a:prstGeom prst="rect">
+            <a:avLst/>
+          </a:prstGeom>
+          <a:noFill/>
+          <a:ln/>
+        </p:spPr>
+        <p:txBody>
+          <a:bodyPr wrap="square" lIns="0" tIns="0" rIns="0" bIns="0" rtlCol="0" anchor="ctr"/>
+          <a:lstStyle/>
+          <a:p>
+            <a:pPr indent="0" marL="0">
+              <a:buNone/>
+            </a:pPr>
+            <a:r>
+              <a:rPr lang="en-US" sz="1350" b="1" dirty="0">
+                <a:solidFill>
+                  <a:srgbClr val="E8EDF2"/>
+                </a:solidFill>
+                <a:latin typeface="Malgun Gothic" pitchFamily="34" charset="0"/>
+                <a:ea typeface="Malgun Gothic" pitchFamily="34" charset="-122"/>
+                <a:cs typeface="Malgun Gothic" pitchFamily="34" charset="-120"/>
+              </a:rPr>
+              <a:t>Moving inv. (shift)</a:t>
+            </a:r>
+            <a:endParaRPr lang="en-US" sz="1350" dirty="0"/>
+          </a:p>
+        </p:txBody>
+      </p:sp>
+      <p:sp>
+        <p:nvSpPr>
+          <p:cNvPr id="31" name="Text 29"/>
+          <p:cNvSpPr/>
+          <p:nvPr/>
+        </p:nvSpPr>
+        <p:spPr>
+          <a:xfrm>
+            <a:off x="1508760" y="3886200"/>
+            <a:ext cx="2407920" cy="310896"/>
+          </a:xfrm>
+          <a:prstGeom prst="rect">
+            <a:avLst/>
+          </a:prstGeom>
+          <a:noFill/>
+          <a:ln/>
+        </p:spPr>
+        <p:txBody>
+          <a:bodyPr wrap="square" lIns="0" tIns="0" rIns="0" bIns="0" rtlCol="0" anchor="ctr"/>
+          <a:lstStyle/>
+          <a:p>
+            <a:pPr indent="0" marL="0">
+              <a:buNone/>
+            </a:pPr>
+            <a:r>
+              <a:rPr lang="en-US" sz="1150" dirty="0">
+                <a:solidFill>
+                  <a:srgbClr val="9AA6B2"/>
+                </a:solidFill>
+                <a:latin typeface="Malgun Gothic" pitchFamily="34" charset="0"/>
+                <a:ea typeface="Malgun Gothic" pitchFamily="34" charset="-122"/>
+                <a:cs typeface="Malgun Gothic" pitchFamily="34" charset="-120"/>
+              </a:rPr>
+              <a:t>데이터 민감</a:t>
+            </a:r>
+            <a:endParaRPr lang="en-US" sz="1150" dirty="0"/>
+          </a:p>
+        </p:txBody>
+      </p:sp>
+      <p:sp>
+        <p:nvSpPr>
+          <p:cNvPr id="32" name="Shape 30"/>
+          <p:cNvSpPr/>
+          <p:nvPr/>
+        </p:nvSpPr>
+        <p:spPr>
+          <a:xfrm>
+            <a:off x="4328160" y="3465576"/>
+            <a:ext cx="3505200" cy="786384"/>
+          </a:xfrm>
+          <a:prstGeom prst="roundRect">
+            <a:avLst>
+              <a:gd name="adj" fmla="val 6977"/>
+            </a:avLst>
+          </a:prstGeom>
+          <a:solidFill>
+            <a:srgbClr val="1E232C"/>
+          </a:solidFill>
+          <a:ln/>
+        </p:spPr>
+      </p:sp>
+      <p:sp>
+        <p:nvSpPr>
+          <p:cNvPr id="33" name="Text 31"/>
+          <p:cNvSpPr/>
+          <p:nvPr/>
+        </p:nvSpPr>
+        <p:spPr>
+          <a:xfrm>
+            <a:off x="4511040" y="3593592"/>
+            <a:ext cx="658368" cy="530352"/>
+          </a:xfrm>
+          <a:prstGeom prst="roundRect">
+            <a:avLst>
+              <a:gd name="adj" fmla="val 10345"/>
+            </a:avLst>
+          </a:prstGeom>
+          <a:solidFill>
+            <a:srgbClr val="4FB0C6"/>
+          </a:solidFill>
+          <a:ln/>
+        </p:spPr>
+        <p:txBody>
+          <a:bodyPr wrap="square" rtlCol="0" anchor="ctr"/>
+          <a:lstStyle/>
+          <a:p>
+            <a:pPr algn="ctr" indent="0" marL="0">
+              <a:buNone/>
+            </a:pPr>
+            <a:r>
+              <a:rPr lang="en-US" sz="1600" b="1" dirty="0">
+                <a:solidFill>
+                  <a:srgbClr val="13161C"/>
+                </a:solidFill>
+                <a:latin typeface="Courier New" pitchFamily="34" charset="0"/>
+                <a:ea typeface="Courier New" pitchFamily="34" charset="-122"/>
+                <a:cs typeface="Courier New" pitchFamily="34" charset="-120"/>
+              </a:rPr>
+              <a:t>7</a:t>
+            </a:r>
+            <a:endParaRPr lang="en-US" sz="1600" dirty="0"/>
+          </a:p>
+        </p:txBody>
+      </p:sp>
+      <p:sp>
+        <p:nvSpPr>
+          <p:cNvPr id="34" name="Text 32"/>
+          <p:cNvSpPr/>
+          <p:nvPr/>
+        </p:nvSpPr>
+        <p:spPr>
+          <a:xfrm>
+            <a:off x="5288280" y="3557016"/>
+            <a:ext cx="2407920" cy="384048"/>
+          </a:xfrm>
+          <a:prstGeom prst="rect">
+            <a:avLst/>
+          </a:prstGeom>
+          <a:noFill/>
+          <a:ln/>
+        </p:spPr>
+        <p:txBody>
+          <a:bodyPr wrap="square" lIns="0" tIns="0" rIns="0" bIns="0" rtlCol="0" anchor="ctr"/>
+          <a:lstStyle/>
+          <a:p>
+            <a:pPr indent="0" marL="0">
+              <a:buNone/>
+            </a:pPr>
+            <a:r>
+              <a:rPr lang="en-US" sz="1350" b="1" dirty="0">
+                <a:solidFill>
+                  <a:srgbClr val="E8EDF2"/>
+                </a:solidFill>
+                <a:latin typeface="Malgun Gothic" pitchFamily="34" charset="0"/>
+                <a:ea typeface="Malgun Gothic" pitchFamily="34" charset="-122"/>
+                <a:cs typeface="Malgun Gothic" pitchFamily="34" charset="-120"/>
+              </a:rPr>
+              <a:t>Random sequence</a:t>
+            </a:r>
+            <a:endParaRPr lang="en-US" sz="1350" dirty="0"/>
+          </a:p>
+        </p:txBody>
+      </p:sp>
+      <p:sp>
+        <p:nvSpPr>
+          <p:cNvPr id="35" name="Text 33"/>
+          <p:cNvSpPr/>
+          <p:nvPr/>
+        </p:nvSpPr>
+        <p:spPr>
+          <a:xfrm>
+            <a:off x="5288280" y="3886200"/>
+            <a:ext cx="2407920" cy="310896"/>
+          </a:xfrm>
+          <a:prstGeom prst="rect">
+            <a:avLst/>
+          </a:prstGeom>
+          <a:noFill/>
+          <a:ln/>
+        </p:spPr>
+        <p:txBody>
+          <a:bodyPr wrap="square" lIns="0" tIns="0" rIns="0" bIns="0" rtlCol="0" anchor="ctr"/>
+          <a:lstStyle/>
+          <a:p>
+            <a:pPr indent="0" marL="0">
+              <a:buNone/>
+            </a:pPr>
+            <a:r>
+              <a:rPr lang="en-US" sz="1150" dirty="0">
+                <a:solidFill>
+                  <a:srgbClr val="9AA6B2"/>
+                </a:solidFill>
+                <a:latin typeface="Malgun Gothic" pitchFamily="34" charset="0"/>
+                <a:ea typeface="Malgun Gothic" pitchFamily="34" charset="-122"/>
+                <a:cs typeface="Malgun Gothic" pitchFamily="34" charset="-120"/>
+              </a:rPr>
+              <a:t>데이터 민감</a:t>
+            </a:r>
+            <a:endParaRPr lang="en-US" sz="1150" dirty="0"/>
+          </a:p>
+        </p:txBody>
+      </p:sp>
+      <p:sp>
+        <p:nvSpPr>
+          <p:cNvPr id="36" name="Shape 34"/>
+          <p:cNvSpPr/>
+          <p:nvPr/>
+        </p:nvSpPr>
+        <p:spPr>
+          <a:xfrm>
+            <a:off x="8107680" y="3465576"/>
+            <a:ext cx="3505200" cy="786384"/>
+          </a:xfrm>
+          <a:prstGeom prst="roundRect">
+            <a:avLst>
+              <a:gd name="adj" fmla="val 6977"/>
+            </a:avLst>
+          </a:prstGeom>
+          <a:solidFill>
+            <a:srgbClr val="1E232C"/>
+          </a:solidFill>
+          <a:ln/>
+        </p:spPr>
+      </p:sp>
+      <p:sp>
+        <p:nvSpPr>
+          <p:cNvPr id="37" name="Text 35"/>
+          <p:cNvSpPr/>
+          <p:nvPr/>
+        </p:nvSpPr>
+        <p:spPr>
+          <a:xfrm>
+            <a:off x="8290560" y="3593592"/>
+            <a:ext cx="658368" cy="530352"/>
+          </a:xfrm>
+          <a:prstGeom prst="roundRect">
+            <a:avLst>
+              <a:gd name="adj" fmla="val 10345"/>
+            </a:avLst>
+          </a:prstGeom>
+          <a:solidFill>
+            <a:srgbClr val="4FB0C6"/>
+          </a:solidFill>
+          <a:ln/>
+        </p:spPr>
+        <p:txBody>
+          <a:bodyPr wrap="square" rtlCol="0" anchor="ctr"/>
+          <a:lstStyle/>
+          <a:p>
+            <a:pPr algn="ctr" indent="0" marL="0">
+              <a:buNone/>
+            </a:pPr>
+            <a:r>
+              <a:rPr lang="en-US" sz="1600" b="1" dirty="0">
+                <a:solidFill>
+                  <a:srgbClr val="13161C"/>
+                </a:solidFill>
+                <a:latin typeface="Courier New" pitchFamily="34" charset="0"/>
+                <a:ea typeface="Courier New" pitchFamily="34" charset="-122"/>
+                <a:cs typeface="Courier New" pitchFamily="34" charset="-120"/>
+              </a:rPr>
+              <a:t>8</a:t>
+            </a:r>
+            <a:endParaRPr lang="en-US" sz="1600" dirty="0"/>
+          </a:p>
+        </p:txBody>
+      </p:sp>
+      <p:sp>
+        <p:nvSpPr>
+          <p:cNvPr id="38" name="Text 36"/>
+          <p:cNvSpPr/>
+          <p:nvPr/>
+        </p:nvSpPr>
+        <p:spPr>
+          <a:xfrm>
+            <a:off x="9067800" y="3557016"/>
+            <a:ext cx="2407920" cy="384048"/>
+          </a:xfrm>
+          <a:prstGeom prst="rect">
+            <a:avLst/>
+          </a:prstGeom>
+          <a:noFill/>
+          <a:ln/>
+        </p:spPr>
+        <p:txBody>
+          <a:bodyPr wrap="square" lIns="0" tIns="0" rIns="0" bIns="0" rtlCol="0" anchor="ctr"/>
+          <a:lstStyle/>
+          <a:p>
+            <a:pPr indent="0" marL="0">
+              <a:buNone/>
+            </a:pPr>
+            <a:r>
+              <a:rPr lang="en-US" sz="1350" b="1" dirty="0">
+                <a:solidFill>
+                  <a:srgbClr val="E8EDF2"/>
+                </a:solidFill>
+                <a:latin typeface="Malgun Gothic" pitchFamily="34" charset="0"/>
+                <a:ea typeface="Malgun Gothic" pitchFamily="34" charset="-122"/>
+                <a:cs typeface="Malgun Gothic" pitchFamily="34" charset="-120"/>
+              </a:rPr>
+              <a:t>Modulo 20</a:t>
+            </a:r>
+            <a:endParaRPr lang="en-US" sz="1350" dirty="0"/>
+          </a:p>
+        </p:txBody>
+      </p:sp>
+      <p:sp>
+        <p:nvSpPr>
+          <p:cNvPr id="39" name="Text 37"/>
+          <p:cNvSpPr/>
+          <p:nvPr/>
+        </p:nvSpPr>
+        <p:spPr>
+          <a:xfrm>
+            <a:off x="9067800" y="3886200"/>
+            <a:ext cx="2407920" cy="310896"/>
+          </a:xfrm>
+          <a:prstGeom prst="rect">
+            <a:avLst/>
+          </a:prstGeom>
+          <a:noFill/>
+          <a:ln/>
+        </p:spPr>
+        <p:txBody>
+          <a:bodyPr wrap="square" lIns="0" tIns="0" rIns="0" bIns="0" rtlCol="0" anchor="ctr"/>
+          <a:lstStyle/>
+          <a:p>
+            <a:pPr indent="0" marL="0">
+              <a:buNone/>
+            </a:pPr>
+            <a:r>
+              <a:rPr lang="en-US" sz="1150" dirty="0">
+                <a:solidFill>
+                  <a:srgbClr val="9AA6B2"/>
+                </a:solidFill>
+                <a:latin typeface="Malgun Gothic" pitchFamily="34" charset="0"/>
+                <a:ea typeface="Malgun Gothic" pitchFamily="34" charset="-122"/>
+                <a:cs typeface="Malgun Gothic" pitchFamily="34" charset="-120"/>
+              </a:rPr>
+              <a:t>데이터 민감</a:t>
+            </a:r>
+            <a:endParaRPr lang="en-US" sz="1150" dirty="0"/>
+          </a:p>
+        </p:txBody>
+      </p:sp>
+      <p:sp>
+        <p:nvSpPr>
+          <p:cNvPr id="40" name="Shape 38"/>
+          <p:cNvSpPr/>
+          <p:nvPr/>
+        </p:nvSpPr>
+        <p:spPr>
+          <a:xfrm>
+            <a:off x="548640" y="4398264"/>
+            <a:ext cx="3505200" cy="786384"/>
+          </a:xfrm>
+          <a:prstGeom prst="roundRect">
+            <a:avLst>
+              <a:gd name="adj" fmla="val 6977"/>
+            </a:avLst>
+          </a:prstGeom>
+          <a:solidFill>
+            <a:srgbClr val="1E232C"/>
+          </a:solidFill>
+          <a:ln/>
+        </p:spPr>
+      </p:sp>
+      <p:sp>
+        <p:nvSpPr>
+          <p:cNvPr id="41" name="Text 39"/>
+          <p:cNvSpPr/>
+          <p:nvPr/>
+        </p:nvSpPr>
+        <p:spPr>
+          <a:xfrm>
+            <a:off x="731520" y="4526280"/>
+            <a:ext cx="658368" cy="530352"/>
+          </a:xfrm>
+          <a:prstGeom prst="roundRect">
+            <a:avLst>
+              <a:gd name="adj" fmla="val 10345"/>
             </a:avLst>
           </a:prstGeom>
           <a:solidFill>
@@ -7675,7 +8907,7 @@
               <a:buNone/>
             </a:pPr>
             <a:r>
-              <a:rPr lang="en-US" sz="1800" b="1" dirty="0">
+              <a:rPr lang="en-US" sz="1600" b="1" dirty="0">
                 <a:solidFill>
                   <a:srgbClr val="13161C"/>
                 </a:solidFill>
@@ -7683,22 +8915,22 @@
                 <a:ea typeface="Courier New" pitchFamily="34" charset="-122"/>
                 <a:cs typeface="Courier New" pitchFamily="34" charset="-120"/>
               </a:rPr>
-              <a:t>3</a:t>
-            </a:r>
-            <a:endParaRPr lang="en-US" sz="1800" dirty="0"/>
-          </a:p>
-        </p:txBody>
-      </p:sp>
-      <p:sp>
-        <p:nvSpPr>
-          <p:cNvPr id="18" name="Text 16"/>
-          <p:cNvSpPr/>
-          <p:nvPr/>
-        </p:nvSpPr>
-        <p:spPr>
-          <a:xfrm>
-            <a:off x="6400800" y="2697480"/>
-            <a:ext cx="2194560" cy="457200"/>
+              <a:t>9</a:t>
+            </a:r>
+            <a:endParaRPr lang="en-US" sz="1600" dirty="0"/>
+          </a:p>
+        </p:txBody>
+      </p:sp>
+      <p:sp>
+        <p:nvSpPr>
+          <p:cNvPr id="42" name="Text 40"/>
+          <p:cNvSpPr/>
+          <p:nvPr/>
+        </p:nvSpPr>
+        <p:spPr>
+          <a:xfrm>
+            <a:off x="1508760" y="4489704"/>
+            <a:ext cx="2407920" cy="384048"/>
           </a:xfrm>
           <a:prstGeom prst="rect">
             <a:avLst/>
@@ -7714,30 +8946,134 @@
               <a:buNone/>
             </a:pPr>
             <a:r>
-              <a:rPr lang="en-US" sz="1400" b="1" dirty="0">
-                <a:solidFill>
-                  <a:srgbClr val="E0A458"/>
+              <a:rPr lang="en-US" sz="1350" b="1" dirty="0">
+                <a:solidFill>
+                  <a:srgbClr val="E8EDF2"/>
+                </a:solidFill>
+                <a:latin typeface="Malgun Gothic" pitchFamily="34" charset="0"/>
+                <a:ea typeface="Malgun Gothic" pitchFamily="34" charset="-122"/>
+                <a:cs typeface="Malgun Gothic" pitchFamily="34" charset="-120"/>
+              </a:rPr>
+              <a:t>Bit fade (3h)</a:t>
+            </a:r>
+            <a:endParaRPr lang="en-US" sz="1350" dirty="0"/>
+          </a:p>
+        </p:txBody>
+      </p:sp>
+      <p:sp>
+        <p:nvSpPr>
+          <p:cNvPr id="43" name="Text 41"/>
+          <p:cNvSpPr/>
+          <p:nvPr/>
+        </p:nvSpPr>
+        <p:spPr>
+          <a:xfrm>
+            <a:off x="1508760" y="4818888"/>
+            <a:ext cx="2407920" cy="310896"/>
+          </a:xfrm>
+          <a:prstGeom prst="rect">
+            <a:avLst/>
+          </a:prstGeom>
+          <a:noFill/>
+          <a:ln/>
+        </p:spPr>
+        <p:txBody>
+          <a:bodyPr wrap="square" lIns="0" tIns="0" rIns="0" bIns="0" rtlCol="0" anchor="ctr"/>
+          <a:lstStyle/>
+          <a:p>
+            <a:pPr indent="0" marL="0">
+              <a:buNone/>
+            </a:pPr>
+            <a:r>
+              <a:rPr lang="en-US" sz="1150" dirty="0">
+                <a:solidFill>
+                  <a:srgbClr val="9AA6B2"/>
+                </a:solidFill>
+                <a:latin typeface="Malgun Gothic" pitchFamily="34" charset="0"/>
+                <a:ea typeface="Malgun Gothic" pitchFamily="34" charset="-122"/>
+                <a:cs typeface="Malgun Gothic" pitchFamily="34" charset="-120"/>
+              </a:rPr>
+              <a:t>데이터 보존</a:t>
+            </a:r>
+            <a:endParaRPr lang="en-US" sz="1150" dirty="0"/>
+          </a:p>
+        </p:txBody>
+      </p:sp>
+      <p:sp>
+        <p:nvSpPr>
+          <p:cNvPr id="44" name="Shape 42"/>
+          <p:cNvSpPr/>
+          <p:nvPr/>
+        </p:nvSpPr>
+        <p:spPr>
+          <a:xfrm>
+            <a:off x="4328160" y="4398264"/>
+            <a:ext cx="3505200" cy="786384"/>
+          </a:xfrm>
+          <a:prstGeom prst="roundRect">
+            <a:avLst>
+              <a:gd name="adj" fmla="val 6977"/>
+            </a:avLst>
+          </a:prstGeom>
+          <a:solidFill>
+            <a:srgbClr val="1E232C"/>
+          </a:solidFill>
+          <a:ln/>
+        </p:spPr>
+      </p:sp>
+      <p:sp>
+        <p:nvSpPr>
+          <p:cNvPr id="45" name="Text 43"/>
+          <p:cNvSpPr/>
+          <p:nvPr/>
+        </p:nvSpPr>
+        <p:spPr>
+          <a:xfrm>
+            <a:off x="4511040" y="4526280"/>
+            <a:ext cx="658368" cy="530352"/>
+          </a:xfrm>
+          <a:prstGeom prst="roundRect">
+            <a:avLst>
+              <a:gd name="adj" fmla="val 10345"/>
+            </a:avLst>
+          </a:prstGeom>
+          <a:solidFill>
+            <a:srgbClr val="E0A458"/>
+          </a:solidFill>
+          <a:ln/>
+        </p:spPr>
+        <p:txBody>
+          <a:bodyPr wrap="square" rtlCol="0" anchor="ctr"/>
+          <a:lstStyle/>
+          <a:p>
+            <a:pPr algn="ctr" indent="0" marL="0">
+              <a:buNone/>
+            </a:pPr>
+            <a:r>
+              <a:rPr lang="en-US" sz="1600" b="1" dirty="0">
+                <a:solidFill>
+                  <a:srgbClr val="13161C"/>
                 </a:solidFill>
                 <a:latin typeface="Courier New" pitchFamily="34" charset="0"/>
                 <a:ea typeface="Courier New" pitchFamily="34" charset="-122"/>
                 <a:cs typeface="Courier New" pitchFamily="34" charset="-120"/>
               </a:rPr>
-              <a:t>run_tests</a:t>
-            </a:r>
-            <a:endParaRPr lang="en-US" sz="1400" dirty="0"/>
-          </a:p>
-        </p:txBody>
-      </p:sp>
-      <p:sp>
-        <p:nvSpPr>
-          <p:cNvPr id="19" name="Text 17"/>
-          <p:cNvSpPr/>
-          <p:nvPr/>
-        </p:nvSpPr>
-        <p:spPr>
-          <a:xfrm>
-            <a:off x="6400800" y="3108960"/>
-            <a:ext cx="2194560" cy="365760"/>
+              <a:t>10</a:t>
+            </a:r>
+            <a:endParaRPr lang="en-US" sz="1600" dirty="0"/>
+          </a:p>
+        </p:txBody>
+      </p:sp>
+      <p:sp>
+        <p:nvSpPr>
+          <p:cNvPr id="46" name="Text 44"/>
+          <p:cNvSpPr/>
+          <p:nvPr/>
+        </p:nvSpPr>
+        <p:spPr>
+          <a:xfrm>
+            <a:off x="5288280" y="4489704"/>
+            <a:ext cx="2407920" cy="384048"/>
           </a:xfrm>
           <a:prstGeom prst="rect">
             <a:avLst/>
@@ -7753,7 +9089,7 @@
               <a:buNone/>
             </a:pPr>
             <a:r>
-              <a:rPr lang="en-US" sz="1400" b="1" dirty="0">
+              <a:rPr lang="en-US" sz="1350" b="1" dirty="0">
                 <a:solidFill>
                   <a:srgbClr val="E8EDF2"/>
                 </a:solidFill>
@@ -7761,37 +9097,34 @@
                 <a:ea typeface="Malgun Gothic" pitchFamily="34" charset="-122"/>
                 <a:cs typeface="Malgun Gothic" pitchFamily="34" charset="-120"/>
               </a:rPr>
-              <a:t>테스트 실행</a:t>
-            </a:r>
-            <a:endParaRPr lang="en-US" sz="1400" dirty="0"/>
-          </a:p>
-        </p:txBody>
-      </p:sp>
-      <p:sp>
-        <p:nvSpPr>
-          <p:cNvPr id="20" name="Text 18"/>
-          <p:cNvSpPr/>
-          <p:nvPr/>
-        </p:nvSpPr>
-        <p:spPr>
-          <a:xfrm>
-            <a:off x="6400800" y="3474720"/>
-            <a:ext cx="2194560" cy="640080"/>
-          </a:xfrm>
-          <a:prstGeom prst="rect">
-            <a:avLst/>
-          </a:prstGeom>
-          <a:noFill/>
-          <a:ln/>
-        </p:spPr>
-        <p:txBody>
-          <a:bodyPr wrap="square" lIns="0" tIns="0" rIns="0" bIns="0" rtlCol="0" anchor="t"/>
+              <a:t>Memory stress</a:t>
+            </a:r>
+            <a:endParaRPr lang="en-US" sz="1350" dirty="0"/>
+          </a:p>
+        </p:txBody>
+      </p:sp>
+      <p:sp>
+        <p:nvSpPr>
+          <p:cNvPr id="47" name="Text 45"/>
+          <p:cNvSpPr/>
+          <p:nvPr/>
+        </p:nvSpPr>
+        <p:spPr>
+          <a:xfrm>
+            <a:off x="5288280" y="4818888"/>
+            <a:ext cx="2407920" cy="310896"/>
+          </a:xfrm>
+          <a:prstGeom prst="rect">
+            <a:avLst/>
+          </a:prstGeom>
+          <a:noFill/>
+          <a:ln/>
+        </p:spPr>
+        <p:txBody>
+          <a:bodyPr wrap="square" lIns="0" tIns="0" rIns="0" bIns="0" rtlCol="0" anchor="ctr"/>
           <a:lstStyle/>
           <a:p>
             <a:pPr indent="0" marL="0">
-              <a:lnSpc>
-                <a:spcPct val="110000"/>
-              </a:lnSpc>
               <a:buNone/>
             </a:pPr>
             <a:r>
@@ -7803,7 +9136,7 @@
                 <a:ea typeface="Malgun Gothic" pitchFamily="34" charset="-122"/>
                 <a:cs typeface="Malgun Gothic" pitchFamily="34" charset="-120"/>
               </a:rPr>
-              <a:t>cuda_memtests[] 배열을 순회</a:t>
+              <a:t>스트레스·소프트</a:t>
             </a:r>
             <a:endParaRPr lang="en-US" sz="1150" dirty="0"/>
           </a:p>
@@ -7811,14 +9144,14 @@
       </p:sp>
       <p:sp>
         <p:nvSpPr>
-          <p:cNvPr id="21" name="Text 19"/>
-          <p:cNvSpPr/>
-          <p:nvPr/>
-        </p:nvSpPr>
-        <p:spPr>
-          <a:xfrm>
-            <a:off x="8787384" y="2743200"/>
-            <a:ext cx="256032" cy="548640"/>
+          <p:cNvPr id="48" name="Text 46"/>
+          <p:cNvSpPr/>
+          <p:nvPr/>
+        </p:nvSpPr>
+        <p:spPr>
+          <a:xfrm>
+            <a:off x="548640" y="5943600"/>
+            <a:ext cx="11064240" cy="457200"/>
           </a:xfrm>
           <a:prstGeom prst="rect">
             <a:avLst/>
@@ -7834,241 +9167,17 @@
               <a:buNone/>
             </a:pPr>
             <a:r>
-              <a:rPr lang="en-US" sz="2000" b="1" dirty="0">
+              <a:rPr lang="en-US" sz="1300" i="1" dirty="0">
                 <a:solidFill>
                   <a:srgbClr val="9AA6B2"/>
                 </a:solidFill>
-                <a:latin typeface="Courier New" pitchFamily="34" charset="0"/>
-                <a:ea typeface="Courier New" pitchFamily="34" charset="-122"/>
-                <a:cs typeface="Courier New" pitchFamily="34" charset="-120"/>
-              </a:rPr>
-              <a:t>→</a:t>
-            </a:r>
-            <a:endParaRPr lang="en-US" sz="2000" dirty="0"/>
-          </a:p>
-        </p:txBody>
-      </p:sp>
-      <p:sp>
-        <p:nvSpPr>
-          <p:cNvPr id="22" name="Shape 20"/>
-          <p:cNvSpPr/>
-          <p:nvPr/>
-        </p:nvSpPr>
-        <p:spPr>
-          <a:xfrm>
-            <a:off x="9052560" y="1828800"/>
-            <a:ext cx="2560320" cy="2377440"/>
-          </a:xfrm>
-          <a:prstGeom prst="roundRect">
-            <a:avLst>
-              <a:gd name="adj" fmla="val 3077"/>
-            </a:avLst>
-          </a:prstGeom>
-          <a:solidFill>
-            <a:srgbClr val="1E232C"/>
-          </a:solidFill>
-          <a:ln/>
-        </p:spPr>
-      </p:sp>
-      <p:sp>
-        <p:nvSpPr>
-          <p:cNvPr id="23" name="Text 21"/>
-          <p:cNvSpPr/>
-          <p:nvPr/>
-        </p:nvSpPr>
-        <p:spPr>
-          <a:xfrm>
-            <a:off x="9235440" y="2011680"/>
-            <a:ext cx="548640" cy="548640"/>
-          </a:xfrm>
-          <a:prstGeom prst="roundRect">
-            <a:avLst>
-              <a:gd name="adj" fmla="val 50000"/>
-            </a:avLst>
-          </a:prstGeom>
-          <a:solidFill>
-            <a:srgbClr val="8CC63F"/>
-          </a:solidFill>
-          <a:ln/>
-        </p:spPr>
-        <p:txBody>
-          <a:bodyPr wrap="square" rtlCol="0" anchor="ctr"/>
-          <a:lstStyle/>
-          <a:p>
-            <a:pPr algn="ctr" indent="0" marL="0">
-              <a:buNone/>
-            </a:pPr>
-            <a:r>
-              <a:rPr lang="en-US" sz="1800" b="1" dirty="0">
-                <a:solidFill>
-                  <a:srgbClr val="13161C"/>
-                </a:solidFill>
-                <a:latin typeface="Courier New" pitchFamily="34" charset="0"/>
-                <a:ea typeface="Courier New" pitchFamily="34" charset="-122"/>
-                <a:cs typeface="Courier New" pitchFamily="34" charset="-120"/>
-              </a:rPr>
-              <a:t>4</a:t>
-            </a:r>
-            <a:endParaRPr lang="en-US" sz="1800" dirty="0"/>
-          </a:p>
-        </p:txBody>
-      </p:sp>
-      <p:sp>
-        <p:nvSpPr>
-          <p:cNvPr id="24" name="Text 22"/>
-          <p:cNvSpPr/>
-          <p:nvPr/>
-        </p:nvSpPr>
-        <p:spPr>
-          <a:xfrm>
-            <a:off x="9235440" y="2697480"/>
-            <a:ext cx="2194560" cy="457200"/>
-          </a:xfrm>
-          <a:prstGeom prst="rect">
-            <a:avLst/>
-          </a:prstGeom>
-          <a:noFill/>
-          <a:ln/>
-        </p:spPr>
-        <p:txBody>
-          <a:bodyPr wrap="square" lIns="0" tIns="0" rIns="0" bIns="0" rtlCol="0" anchor="ctr"/>
-          <a:lstStyle/>
-          <a:p>
-            <a:pPr indent="0" marL="0">
-              <a:buNone/>
-            </a:pPr>
-            <a:r>
-              <a:rPr lang="en-US" sz="1400" b="1" dirty="0">
-                <a:solidFill>
-                  <a:srgbClr val="8CC63F"/>
-                </a:solidFill>
-                <a:latin typeface="Courier New" pitchFamily="34" charset="0"/>
-                <a:ea typeface="Courier New" pitchFamily="34" charset="-122"/>
-                <a:cs typeface="Courier New" pitchFamily="34" charset="-120"/>
-              </a:rPr>
-              <a:t>각 테스트</a:t>
-            </a:r>
-            <a:endParaRPr lang="en-US" sz="1400" dirty="0"/>
-          </a:p>
-        </p:txBody>
-      </p:sp>
-      <p:sp>
-        <p:nvSpPr>
-          <p:cNvPr id="25" name="Text 23"/>
-          <p:cNvSpPr/>
-          <p:nvPr/>
-        </p:nvSpPr>
-        <p:spPr>
-          <a:xfrm>
-            <a:off x="9235440" y="3108960"/>
-            <a:ext cx="2194560" cy="365760"/>
-          </a:xfrm>
-          <a:prstGeom prst="rect">
-            <a:avLst/>
-          </a:prstGeom>
-          <a:noFill/>
-          <a:ln/>
-        </p:spPr>
-        <p:txBody>
-          <a:bodyPr wrap="square" lIns="0" tIns="0" rIns="0" bIns="0" rtlCol="0" anchor="ctr"/>
-          <a:lstStyle/>
-          <a:p>
-            <a:pPr indent="0" marL="0">
-              <a:buNone/>
-            </a:pPr>
-            <a:r>
-              <a:rPr lang="en-US" sz="1400" b="1" dirty="0">
-                <a:solidFill>
-                  <a:srgbClr val="E8EDF2"/>
-                </a:solidFill>
-                <a:latin typeface="Malgun Gothic" pitchFamily="34" charset="0"/>
-                <a:ea typeface="Malgun Gothic" pitchFamily="34" charset="-122"/>
-                <a:cs typeface="Malgun Gothic" pitchFamily="34" charset="-120"/>
-              </a:rPr>
-              <a:t>커널 실행</a:t>
-            </a:r>
-            <a:endParaRPr lang="en-US" sz="1400" dirty="0"/>
-          </a:p>
-        </p:txBody>
-      </p:sp>
-      <p:sp>
-        <p:nvSpPr>
-          <p:cNvPr id="26" name="Text 24"/>
-          <p:cNvSpPr/>
-          <p:nvPr/>
-        </p:nvSpPr>
-        <p:spPr>
-          <a:xfrm>
-            <a:off x="9235440" y="3474720"/>
-            <a:ext cx="2194560" cy="640080"/>
-          </a:xfrm>
-          <a:prstGeom prst="rect">
-            <a:avLst/>
-          </a:prstGeom>
-          <a:noFill/>
-          <a:ln/>
-        </p:spPr>
-        <p:txBody>
-          <a:bodyPr wrap="square" lIns="0" tIns="0" rIns="0" bIns="0" rtlCol="0" anchor="t"/>
-          <a:lstStyle/>
-          <a:p>
-            <a:pPr indent="0" marL="0">
-              <a:lnSpc>
-                <a:spcPct val="110000"/>
-              </a:lnSpc>
-              <a:buNone/>
-            </a:pPr>
-            <a:r>
-              <a:rPr lang="en-US" sz="1150" dirty="0">
-                <a:solidFill>
-                  <a:srgbClr val="9AA6B2"/>
-                </a:solidFill>
-                <a:latin typeface="Malgun Gothic" pitchFamily="34" charset="0"/>
-                <a:ea typeface="Malgun Gothic" pitchFamily="34" charset="-122"/>
-                <a:cs typeface="Malgun Gothic" pitchFamily="34" charset="-120"/>
-              </a:rPr>
-              <a:t>write → read → check (세션 1~2)</a:t>
-            </a:r>
-            <a:endParaRPr lang="en-US" sz="1150" dirty="0"/>
-          </a:p>
-        </p:txBody>
-      </p:sp>
-      <p:sp>
-        <p:nvSpPr>
-          <p:cNvPr id="27" name="Text 25"/>
-          <p:cNvSpPr/>
-          <p:nvPr/>
-        </p:nvSpPr>
-        <p:spPr>
-          <a:xfrm>
-            <a:off x="548640" y="4754880"/>
-            <a:ext cx="11064240" cy="457200"/>
-          </a:xfrm>
-          <a:prstGeom prst="rect">
-            <a:avLst/>
-          </a:prstGeom>
-          <a:noFill/>
-          <a:ln/>
-        </p:spPr>
-        <p:txBody>
-          <a:bodyPr wrap="square" lIns="0" tIns="0" rIns="0" bIns="0" rtlCol="0" anchor="ctr"/>
-          <a:lstStyle/>
-          <a:p>
-            <a:pPr algn="ctr" indent="0" marL="0">
-              <a:buNone/>
-            </a:pPr>
-            <a:r>
-              <a:rPr lang="en-US" sz="1500" dirty="0">
-                <a:solidFill>
-                  <a:srgbClr val="E8EDF2"/>
-                </a:solidFill>
-                <a:latin typeface="Malgun Gothic" pitchFamily="34" charset="0"/>
-                <a:ea typeface="Malgun Gothic" pitchFamily="34" charset="-122"/>
-                <a:cs typeface="Malgun Gothic" pitchFamily="34" charset="-120"/>
-              </a:rPr>
-              <a:t>이 흐름의 각 단계를 앞으로 5회에 걸쳐 안쪽까지 파고듭니다. 오늘은 지도만 봐 두세요.</a:t>
-            </a:r>
-            <a:endParaRPr lang="en-US" sz="1500" dirty="0"/>
+                <a:latin typeface="Malgun Gothic" pitchFamily="34" charset="0"/>
+                <a:ea typeface="Malgun Gothic" pitchFamily="34" charset="-122"/>
+                <a:cs typeface="Malgun Gothic" pitchFamily="34" charset="-120"/>
+              </a:rPr>
+              <a:t>Test 9(bit fade)는 3시간 걸려 기본 비활성. Test 10(스트레스)은 소프트 오류·급성 하드 오류에 특히 유용.</a:t>
+            </a:r>
+            <a:endParaRPr lang="en-US" sz="1300" dirty="0"/>
           </a:p>
         </p:txBody>
       </p:sp>
@@ -8141,7 +9250,7 @@
                 <a:ea typeface="Courier New" pitchFamily="34" charset="-122"/>
                 <a:cs typeface="Courier New" pitchFamily="34" charset="-120"/>
               </a:rPr>
-              <a:t>8</a:t>
+              <a:t>7</a:t>
             </a:r>
             <a:endParaRPr lang="en-US" sz="2200" dirty="0"/>
           </a:p>
@@ -8180,7 +9289,7 @@
                 <a:ea typeface="Malgun Gothic" pitchFamily="34" charset="-122"/>
                 <a:cs typeface="Malgun Gothic" pitchFamily="34" charset="-120"/>
               </a:rPr>
-              <a:t>실습 미리보기 · Lab 0</a:t>
+              <a:t>프로그램의 큰 흐름</a:t>
             </a:r>
             <a:endParaRPr lang="en-US" sz="3000" dirty="0"/>
           </a:p>
@@ -8194,12 +9303,12 @@
         </p:nvSpPr>
         <p:spPr>
           <a:xfrm>
-            <a:off x="548640" y="1554480"/>
-            <a:ext cx="5303520" cy="1965960"/>
+            <a:off x="548640" y="1828800"/>
+            <a:ext cx="2560320" cy="2377440"/>
           </a:xfrm>
           <a:prstGeom prst="roundRect">
             <a:avLst>
-              <a:gd name="adj" fmla="val 3721"/>
+              <a:gd name="adj" fmla="val 3077"/>
             </a:avLst>
           </a:prstGeom>
           <a:solidFill>
@@ -8216,16 +9325,16 @@
         </p:nvSpPr>
         <p:spPr>
           <a:xfrm>
-            <a:off x="804672" y="1755648"/>
-            <a:ext cx="1188720" cy="502920"/>
+            <a:off x="731520" y="2011680"/>
+            <a:ext cx="548640" cy="548640"/>
           </a:xfrm>
           <a:prstGeom prst="roundRect">
             <a:avLst>
-              <a:gd name="adj" fmla="val 14545"/>
+              <a:gd name="adj" fmla="val 50000"/>
             </a:avLst>
           </a:prstGeom>
           <a:solidFill>
-            <a:srgbClr val="4FB0C6"/>
+            <a:srgbClr val="8CC63F"/>
           </a:solidFill>
           <a:ln/>
         </p:spPr>
@@ -8237,7 +9346,7 @@
               <a:buNone/>
             </a:pPr>
             <a:r>
-              <a:rPr lang="en-US" sz="1700" b="1" dirty="0">
+              <a:rPr lang="en-US" sz="1800" b="1" dirty="0">
                 <a:solidFill>
                   <a:srgbClr val="13161C"/>
                 </a:solidFill>
@@ -8245,9 +9354,9 @@
                 <a:ea typeface="Courier New" pitchFamily="34" charset="-122"/>
                 <a:cs typeface="Courier New" pitchFamily="34" charset="-120"/>
               </a:rPr>
-              <a:t>Ex 0</a:t>
-            </a:r>
-            <a:endParaRPr lang="en-US" sz="1700" dirty="0"/>
+              <a:t>1</a:t>
+            </a:r>
+            <a:endParaRPr lang="en-US" sz="1800" dirty="0"/>
           </a:p>
         </p:txBody>
       </p:sp>
@@ -8259,24 +9368,63 @@
         </p:nvSpPr>
         <p:spPr>
           <a:xfrm>
-            <a:off x="2148840" y="1773936"/>
-            <a:ext cx="3474720" cy="822960"/>
-          </a:xfrm>
-          <a:prstGeom prst="rect">
-            <a:avLst/>
-          </a:prstGeom>
-          <a:noFill/>
-          <a:ln/>
-        </p:spPr>
-        <p:txBody>
-          <a:bodyPr wrap="square" lIns="0" tIns="0" rIns="0" bIns="0" rtlCol="0" anchor="t"/>
+            <a:off x="731520" y="2697480"/>
+            <a:ext cx="2194560" cy="457200"/>
+          </a:xfrm>
+          <a:prstGeom prst="rect">
+            <a:avLst/>
+          </a:prstGeom>
+          <a:noFill/>
+          <a:ln/>
+        </p:spPr>
+        <p:txBody>
+          <a:bodyPr wrap="square" lIns="0" tIns="0" rIns="0" bIns="0" rtlCol="0" anchor="ctr"/>
           <a:lstStyle/>
           <a:p>
             <a:pPr indent="0" marL="0">
               <a:buNone/>
             </a:pPr>
             <a:r>
-              <a:rPr lang="en-US" sz="1700" b="1" dirty="0">
+              <a:rPr lang="en-US" sz="1400" b="1" dirty="0">
+                <a:solidFill>
+                  <a:srgbClr val="8CC63F"/>
+                </a:solidFill>
+                <a:latin typeface="Courier New" pitchFamily="34" charset="0"/>
+                <a:ea typeface="Courier New" pitchFamily="34" charset="-122"/>
+                <a:cs typeface="Courier New" pitchFamily="34" charset="-120"/>
+              </a:rPr>
+              <a:t>main()</a:t>
+            </a:r>
+            <a:endParaRPr lang="en-US" sz="1400" dirty="0"/>
+          </a:p>
+        </p:txBody>
+      </p:sp>
+      <p:sp>
+        <p:nvSpPr>
+          <p:cNvPr id="7" name="Text 5"/>
+          <p:cNvSpPr/>
+          <p:nvPr/>
+        </p:nvSpPr>
+        <p:spPr>
+          <a:xfrm>
+            <a:off x="731520" y="3108960"/>
+            <a:ext cx="2194560" cy="365760"/>
+          </a:xfrm>
+          <a:prstGeom prst="rect">
+            <a:avLst/>
+          </a:prstGeom>
+          <a:noFill/>
+          <a:ln/>
+        </p:spPr>
+        <p:txBody>
+          <a:bodyPr wrap="square" lIns="0" tIns="0" rIns="0" bIns="0" rtlCol="0" anchor="ctr"/>
+          <a:lstStyle/>
+          <a:p>
+            <a:pPr indent="0" marL="0">
+              <a:buNone/>
+            </a:pPr>
+            <a:r>
+              <a:rPr lang="en-US" sz="1400" b="1" dirty="0">
                 <a:solidFill>
                   <a:srgbClr val="E8EDF2"/>
                 </a:solidFill>
@@ -8284,22 +9432,22 @@
                 <a:ea typeface="Malgun Gothic" pitchFamily="34" charset="-122"/>
                 <a:cs typeface="Malgun Gothic" pitchFamily="34" charset="-120"/>
               </a:rPr>
-              <a:t>내 환경 점검</a:t>
-            </a:r>
-            <a:endParaRPr lang="en-US" sz="1700" dirty="0"/>
-          </a:p>
-        </p:txBody>
-      </p:sp>
-      <p:sp>
-        <p:nvSpPr>
-          <p:cNvPr id="7" name="Text 5"/>
-          <p:cNvSpPr/>
-          <p:nvPr/>
-        </p:nvSpPr>
-        <p:spPr>
-          <a:xfrm>
-            <a:off x="804672" y="2651760"/>
-            <a:ext cx="4791456" cy="731520"/>
+              <a:t>GPU 개수 확인</a:t>
+            </a:r>
+            <a:endParaRPr lang="en-US" sz="1400" dirty="0"/>
+          </a:p>
+        </p:txBody>
+      </p:sp>
+      <p:sp>
+        <p:nvSpPr>
+          <p:cNvPr id="8" name="Text 6"/>
+          <p:cNvSpPr/>
+          <p:nvPr/>
+        </p:nvSpPr>
+        <p:spPr>
+          <a:xfrm>
+            <a:off x="731520" y="3474720"/>
+            <a:ext cx="2194560" cy="640080"/>
           </a:xfrm>
           <a:prstGeom prst="rect">
             <a:avLst/>
@@ -8318,7 +9466,7 @@
               <a:buNone/>
             </a:pPr>
             <a:r>
-              <a:rPr lang="en-US" sz="1400" dirty="0">
+              <a:rPr lang="en-US" sz="1150" dirty="0">
                 <a:solidFill>
                   <a:srgbClr val="9AA6B2"/>
                 </a:solidFill>
@@ -8326,26 +9474,65 @@
                 <a:ea typeface="Malgun Gothic" pitchFamily="34" charset="-122"/>
                 <a:cs typeface="Malgun Gothic" pitchFamily="34" charset="-120"/>
               </a:rPr>
-              <a:t>nvidia-smi · nvcc · cmake 버전 확인</a:t>
-            </a:r>
-            <a:endParaRPr lang="en-US" sz="1400" dirty="0"/>
-          </a:p>
-        </p:txBody>
-      </p:sp>
-      <p:sp>
-        <p:nvSpPr>
-          <p:cNvPr id="8" name="Shape 6"/>
-          <p:cNvSpPr/>
-          <p:nvPr/>
-        </p:nvSpPr>
-        <p:spPr>
-          <a:xfrm>
-            <a:off x="6309360" y="1554480"/>
-            <a:ext cx="5303520" cy="1965960"/>
+              <a:t>cudaGetDeviceCount (cuda_memtest.cpp:299)</a:t>
+            </a:r>
+            <a:endParaRPr lang="en-US" sz="1150" dirty="0"/>
+          </a:p>
+        </p:txBody>
+      </p:sp>
+      <p:sp>
+        <p:nvSpPr>
+          <p:cNvPr id="9" name="Text 7"/>
+          <p:cNvSpPr/>
+          <p:nvPr/>
+        </p:nvSpPr>
+        <p:spPr>
+          <a:xfrm>
+            <a:off x="3118104" y="2743200"/>
+            <a:ext cx="256032" cy="548640"/>
+          </a:xfrm>
+          <a:prstGeom prst="rect">
+            <a:avLst/>
+          </a:prstGeom>
+          <a:noFill/>
+          <a:ln/>
+        </p:spPr>
+        <p:txBody>
+          <a:bodyPr wrap="square" lIns="0" tIns="0" rIns="0" bIns="0" rtlCol="0" anchor="ctr"/>
+          <a:lstStyle/>
+          <a:p>
+            <a:pPr algn="ctr" indent="0" marL="0">
+              <a:buNone/>
+            </a:pPr>
+            <a:r>
+              <a:rPr lang="en-US" sz="2000" b="1" dirty="0">
+                <a:solidFill>
+                  <a:srgbClr val="9AA6B2"/>
+                </a:solidFill>
+                <a:latin typeface="Courier New" pitchFamily="34" charset="0"/>
+                <a:ea typeface="Courier New" pitchFamily="34" charset="-122"/>
+                <a:cs typeface="Courier New" pitchFamily="34" charset="-120"/>
+              </a:rPr>
+              <a:t>→</a:t>
+            </a:r>
+            <a:endParaRPr lang="en-US" sz="2000" dirty="0"/>
+          </a:p>
+        </p:txBody>
+      </p:sp>
+      <p:sp>
+        <p:nvSpPr>
+          <p:cNvPr id="10" name="Shape 8"/>
+          <p:cNvSpPr/>
+          <p:nvPr/>
+        </p:nvSpPr>
+        <p:spPr>
+          <a:xfrm>
+            <a:off x="3383280" y="1828800"/>
+            <a:ext cx="2560320" cy="2377440"/>
           </a:xfrm>
           <a:prstGeom prst="roundRect">
             <a:avLst>
-              <a:gd name="adj" fmla="val 3721"/>
+              <a:gd name="adj" fmla="val 3077"/>
             </a:avLst>
           </a:prstGeom>
           <a:solidFill>
@@ -8356,22 +9543,22 @@
       </p:sp>
       <p:sp>
         <p:nvSpPr>
-          <p:cNvPr id="9" name="Text 7"/>
-          <p:cNvSpPr/>
-          <p:nvPr/>
-        </p:nvSpPr>
-        <p:spPr>
-          <a:xfrm>
-            <a:off x="6565392" y="1755648"/>
-            <a:ext cx="1188720" cy="502920"/>
+          <p:cNvPr id="11" name="Text 9"/>
+          <p:cNvSpPr/>
+          <p:nvPr/>
+        </p:nvSpPr>
+        <p:spPr>
+          <a:xfrm>
+            <a:off x="3566160" y="2011680"/>
+            <a:ext cx="548640" cy="548640"/>
           </a:xfrm>
           <a:prstGeom prst="roundRect">
             <a:avLst>
-              <a:gd name="adj" fmla="val 14545"/>
+              <a:gd name="adj" fmla="val 50000"/>
             </a:avLst>
           </a:prstGeom>
           <a:solidFill>
-            <a:srgbClr val="8CC63F"/>
+            <a:srgbClr val="4FB0C6"/>
           </a:solidFill>
           <a:ln/>
         </p:spPr>
@@ -8383,7 +9570,7 @@
               <a:buNone/>
             </a:pPr>
             <a:r>
-              <a:rPr lang="en-US" sz="1700" b="1" dirty="0">
+              <a:rPr lang="en-US" sz="1800" b="1" dirty="0">
                 <a:solidFill>
                   <a:srgbClr val="13161C"/>
                 </a:solidFill>
@@ -8391,38 +9578,77 @@
                 <a:ea typeface="Courier New" pitchFamily="34" charset="-122"/>
                 <a:cs typeface="Courier New" pitchFamily="34" charset="-120"/>
               </a:rPr>
-              <a:t>Ex 1</a:t>
-            </a:r>
-            <a:endParaRPr lang="en-US" sz="1700" dirty="0"/>
-          </a:p>
-        </p:txBody>
-      </p:sp>
-      <p:sp>
-        <p:nvSpPr>
-          <p:cNvPr id="10" name="Text 8"/>
-          <p:cNvSpPr/>
-          <p:nvPr/>
-        </p:nvSpPr>
-        <p:spPr>
-          <a:xfrm>
-            <a:off x="7909560" y="1773936"/>
-            <a:ext cx="3474720" cy="822960"/>
-          </a:xfrm>
-          <a:prstGeom prst="rect">
-            <a:avLst/>
-          </a:prstGeom>
-          <a:noFill/>
-          <a:ln/>
-        </p:spPr>
-        <p:txBody>
-          <a:bodyPr wrap="square" lIns="0" tIns="0" rIns="0" bIns="0" rtlCol="0" anchor="t"/>
+              <a:t>2</a:t>
+            </a:r>
+            <a:endParaRPr lang="en-US" sz="1800" dirty="0"/>
+          </a:p>
+        </p:txBody>
+      </p:sp>
+      <p:sp>
+        <p:nvSpPr>
+          <p:cNvPr id="12" name="Text 10"/>
+          <p:cNvSpPr/>
+          <p:nvPr/>
+        </p:nvSpPr>
+        <p:spPr>
+          <a:xfrm>
+            <a:off x="3566160" y="2697480"/>
+            <a:ext cx="2194560" cy="457200"/>
+          </a:xfrm>
+          <a:prstGeom prst="rect">
+            <a:avLst/>
+          </a:prstGeom>
+          <a:noFill/>
+          <a:ln/>
+        </p:spPr>
+        <p:txBody>
+          <a:bodyPr wrap="square" lIns="0" tIns="0" rIns="0" bIns="0" rtlCol="0" anchor="ctr"/>
           <a:lstStyle/>
           <a:p>
             <a:pPr indent="0" marL="0">
               <a:buNone/>
             </a:pPr>
             <a:r>
-              <a:rPr lang="en-US" sz="1700" b="1" dirty="0">
+              <a:rPr lang="en-US" sz="1400" b="1" dirty="0">
+                <a:solidFill>
+                  <a:srgbClr val="4FB0C6"/>
+                </a:solidFill>
+                <a:latin typeface="Courier New" pitchFamily="34" charset="0"/>
+                <a:ea typeface="Courier New" pitchFamily="34" charset="-122"/>
+                <a:cs typeface="Courier New" pitchFamily="34" charset="-120"/>
+              </a:rPr>
+              <a:t>thread_func</a:t>
+            </a:r>
+            <a:endParaRPr lang="en-US" sz="1400" dirty="0"/>
+          </a:p>
+        </p:txBody>
+      </p:sp>
+      <p:sp>
+        <p:nvSpPr>
+          <p:cNvPr id="13" name="Text 11"/>
+          <p:cNvSpPr/>
+          <p:nvPr/>
+        </p:nvSpPr>
+        <p:spPr>
+          <a:xfrm>
+            <a:off x="3566160" y="3108960"/>
+            <a:ext cx="2194560" cy="365760"/>
+          </a:xfrm>
+          <a:prstGeom prst="rect">
+            <a:avLst/>
+          </a:prstGeom>
+          <a:noFill/>
+          <a:ln/>
+        </p:spPr>
+        <p:txBody>
+          <a:bodyPr wrap="square" lIns="0" tIns="0" rIns="0" bIns="0" rtlCol="0" anchor="ctr"/>
+          <a:lstStyle/>
+          <a:p>
+            <a:pPr indent="0" marL="0">
+              <a:buNone/>
+            </a:pPr>
+            <a:r>
+              <a:rPr lang="en-US" sz="1400" b="1" dirty="0">
                 <a:solidFill>
                   <a:srgbClr val="E8EDF2"/>
                 </a:solidFill>
@@ -8430,22 +9656,22 @@
                 <a:ea typeface="Malgun Gothic" pitchFamily="34" charset="-122"/>
                 <a:cs typeface="Malgun Gothic" pitchFamily="34" charset="-120"/>
               </a:rPr>
-              <a:t>빌드하기</a:t>
-            </a:r>
-            <a:endParaRPr lang="en-US" sz="1700" dirty="0"/>
-          </a:p>
-        </p:txBody>
-      </p:sp>
-      <p:sp>
-        <p:nvSpPr>
-          <p:cNvPr id="11" name="Text 9"/>
-          <p:cNvSpPr/>
-          <p:nvPr/>
-        </p:nvSpPr>
-        <p:spPr>
-          <a:xfrm>
-            <a:off x="6565392" y="2651760"/>
-            <a:ext cx="4791456" cy="731520"/>
+              <a:t>GPU마다 스레드</a:t>
+            </a:r>
+            <a:endParaRPr lang="en-US" sz="1400" dirty="0"/>
+          </a:p>
+        </p:txBody>
+      </p:sp>
+      <p:sp>
+        <p:nvSpPr>
+          <p:cNvPr id="14" name="Text 12"/>
+          <p:cNvSpPr/>
+          <p:nvPr/>
+        </p:nvSpPr>
+        <p:spPr>
+          <a:xfrm>
+            <a:off x="3566160" y="3474720"/>
+            <a:ext cx="2194560" cy="640080"/>
           </a:xfrm>
           <a:prstGeom prst="rect">
             <a:avLst/>
@@ -8464,7 +9690,7 @@
               <a:buNone/>
             </a:pPr>
             <a:r>
-              <a:rPr lang="en-US" sz="1400" dirty="0">
+              <a:rPr lang="en-US" sz="1150" dirty="0">
                 <a:solidFill>
                   <a:srgbClr val="9AA6B2"/>
                 </a:solidFill>
@@ -8472,26 +9698,65 @@
                 <a:ea typeface="Malgun Gothic" pitchFamily="34" charset="-122"/>
                 <a:cs typeface="Malgun Gothic" pitchFamily="34" charset="-120"/>
               </a:rPr>
-              <a:t>cmake + make로 cuda_memtest 생성</a:t>
-            </a:r>
-            <a:endParaRPr lang="en-US" sz="1400" dirty="0"/>
-          </a:p>
-        </p:txBody>
-      </p:sp>
-      <p:sp>
-        <p:nvSpPr>
-          <p:cNvPr id="12" name="Shape 10"/>
-          <p:cNvSpPr/>
-          <p:nvPr/>
-        </p:nvSpPr>
-        <p:spPr>
-          <a:xfrm>
-            <a:off x="548640" y="3840480"/>
-            <a:ext cx="5303520" cy="1965960"/>
+              <a:t>각 GPU를 cudaSetDevice로 선택</a:t>
+            </a:r>
+            <a:endParaRPr lang="en-US" sz="1150" dirty="0"/>
+          </a:p>
+        </p:txBody>
+      </p:sp>
+      <p:sp>
+        <p:nvSpPr>
+          <p:cNvPr id="15" name="Text 13"/>
+          <p:cNvSpPr/>
+          <p:nvPr/>
+        </p:nvSpPr>
+        <p:spPr>
+          <a:xfrm>
+            <a:off x="5952744" y="2743200"/>
+            <a:ext cx="256032" cy="548640"/>
+          </a:xfrm>
+          <a:prstGeom prst="rect">
+            <a:avLst/>
+          </a:prstGeom>
+          <a:noFill/>
+          <a:ln/>
+        </p:spPr>
+        <p:txBody>
+          <a:bodyPr wrap="square" lIns="0" tIns="0" rIns="0" bIns="0" rtlCol="0" anchor="ctr"/>
+          <a:lstStyle/>
+          <a:p>
+            <a:pPr algn="ctr" indent="0" marL="0">
+              <a:buNone/>
+            </a:pPr>
+            <a:r>
+              <a:rPr lang="en-US" sz="2000" b="1" dirty="0">
+                <a:solidFill>
+                  <a:srgbClr val="9AA6B2"/>
+                </a:solidFill>
+                <a:latin typeface="Courier New" pitchFamily="34" charset="0"/>
+                <a:ea typeface="Courier New" pitchFamily="34" charset="-122"/>
+                <a:cs typeface="Courier New" pitchFamily="34" charset="-120"/>
+              </a:rPr>
+              <a:t>→</a:t>
+            </a:r>
+            <a:endParaRPr lang="en-US" sz="2000" dirty="0"/>
+          </a:p>
+        </p:txBody>
+      </p:sp>
+      <p:sp>
+        <p:nvSpPr>
+          <p:cNvPr id="16" name="Shape 14"/>
+          <p:cNvSpPr/>
+          <p:nvPr/>
+        </p:nvSpPr>
+        <p:spPr>
+          <a:xfrm>
+            <a:off x="6217920" y="1828800"/>
+            <a:ext cx="2560320" cy="2377440"/>
           </a:xfrm>
           <a:prstGeom prst="roundRect">
             <a:avLst>
-              <a:gd name="adj" fmla="val 3721"/>
+              <a:gd name="adj" fmla="val 3077"/>
             </a:avLst>
           </a:prstGeom>
           <a:solidFill>
@@ -8502,18 +9767,18 @@
       </p:sp>
       <p:sp>
         <p:nvSpPr>
-          <p:cNvPr id="13" name="Text 11"/>
-          <p:cNvSpPr/>
-          <p:nvPr/>
-        </p:nvSpPr>
-        <p:spPr>
-          <a:xfrm>
-            <a:off x="804672" y="4041648"/>
-            <a:ext cx="1188720" cy="502920"/>
+          <p:cNvPr id="17" name="Text 15"/>
+          <p:cNvSpPr/>
+          <p:nvPr/>
+        </p:nvSpPr>
+        <p:spPr>
+          <a:xfrm>
+            <a:off x="6400800" y="2011680"/>
+            <a:ext cx="548640" cy="548640"/>
           </a:xfrm>
           <a:prstGeom prst="roundRect">
             <a:avLst>
-              <a:gd name="adj" fmla="val 14545"/>
+              <a:gd name="adj" fmla="val 50000"/>
             </a:avLst>
           </a:prstGeom>
           <a:solidFill>
@@ -8529,7 +9794,7 @@
               <a:buNone/>
             </a:pPr>
             <a:r>
-              <a:rPr lang="en-US" sz="1700" b="1" dirty="0">
+              <a:rPr lang="en-US" sz="1800" b="1" dirty="0">
                 <a:solidFill>
                   <a:srgbClr val="13161C"/>
                 </a:solidFill>
@@ -8537,38 +9802,77 @@
                 <a:ea typeface="Courier New" pitchFamily="34" charset="-122"/>
                 <a:cs typeface="Courier New" pitchFamily="34" charset="-120"/>
               </a:rPr>
-              <a:t>Ex 2</a:t>
-            </a:r>
-            <a:endParaRPr lang="en-US" sz="1700" dirty="0"/>
-          </a:p>
-        </p:txBody>
-      </p:sp>
-      <p:sp>
-        <p:nvSpPr>
-          <p:cNvPr id="14" name="Text 12"/>
-          <p:cNvSpPr/>
-          <p:nvPr/>
-        </p:nvSpPr>
-        <p:spPr>
-          <a:xfrm>
-            <a:off x="2148840" y="4059936"/>
-            <a:ext cx="3474720" cy="822960"/>
-          </a:xfrm>
-          <a:prstGeom prst="rect">
-            <a:avLst/>
-          </a:prstGeom>
-          <a:noFill/>
-          <a:ln/>
-        </p:spPr>
-        <p:txBody>
-          <a:bodyPr wrap="square" lIns="0" tIns="0" rIns="0" bIns="0" rtlCol="0" anchor="t"/>
+              <a:t>3</a:t>
+            </a:r>
+            <a:endParaRPr lang="en-US" sz="1800" dirty="0"/>
+          </a:p>
+        </p:txBody>
+      </p:sp>
+      <p:sp>
+        <p:nvSpPr>
+          <p:cNvPr id="18" name="Text 16"/>
+          <p:cNvSpPr/>
+          <p:nvPr/>
+        </p:nvSpPr>
+        <p:spPr>
+          <a:xfrm>
+            <a:off x="6400800" y="2697480"/>
+            <a:ext cx="2194560" cy="457200"/>
+          </a:xfrm>
+          <a:prstGeom prst="rect">
+            <a:avLst/>
+          </a:prstGeom>
+          <a:noFill/>
+          <a:ln/>
+        </p:spPr>
+        <p:txBody>
+          <a:bodyPr wrap="square" lIns="0" tIns="0" rIns="0" bIns="0" rtlCol="0" anchor="ctr"/>
           <a:lstStyle/>
           <a:p>
             <a:pPr indent="0" marL="0">
               <a:buNone/>
             </a:pPr>
             <a:r>
-              <a:rPr lang="en-US" sz="1700" b="1" dirty="0">
+              <a:rPr lang="en-US" sz="1400" b="1" dirty="0">
+                <a:solidFill>
+                  <a:srgbClr val="E0A458"/>
+                </a:solidFill>
+                <a:latin typeface="Courier New" pitchFamily="34" charset="0"/>
+                <a:ea typeface="Courier New" pitchFamily="34" charset="-122"/>
+                <a:cs typeface="Courier New" pitchFamily="34" charset="-120"/>
+              </a:rPr>
+              <a:t>run_tests</a:t>
+            </a:r>
+            <a:endParaRPr lang="en-US" sz="1400" dirty="0"/>
+          </a:p>
+        </p:txBody>
+      </p:sp>
+      <p:sp>
+        <p:nvSpPr>
+          <p:cNvPr id="19" name="Text 17"/>
+          <p:cNvSpPr/>
+          <p:nvPr/>
+        </p:nvSpPr>
+        <p:spPr>
+          <a:xfrm>
+            <a:off x="6400800" y="3108960"/>
+            <a:ext cx="2194560" cy="365760"/>
+          </a:xfrm>
+          <a:prstGeom prst="rect">
+            <a:avLst/>
+          </a:prstGeom>
+          <a:noFill/>
+          <a:ln/>
+        </p:spPr>
+        <p:txBody>
+          <a:bodyPr wrap="square" lIns="0" tIns="0" rIns="0" bIns="0" rtlCol="0" anchor="ctr"/>
+          <a:lstStyle/>
+          <a:p>
+            <a:pPr indent="0" marL="0">
+              <a:buNone/>
+            </a:pPr>
+            <a:r>
+              <a:rPr lang="en-US" sz="1400" b="1" dirty="0">
                 <a:solidFill>
                   <a:srgbClr val="E8EDF2"/>
                 </a:solidFill>
@@ -8576,22 +9880,22 @@
                 <a:ea typeface="Malgun Gothic" pitchFamily="34" charset="-122"/>
                 <a:cs typeface="Malgun Gothic" pitchFamily="34" charset="-120"/>
               </a:rPr>
-              <a:t>테스트 목록 보기</a:t>
-            </a:r>
-            <a:endParaRPr lang="en-US" sz="1700" dirty="0"/>
-          </a:p>
-        </p:txBody>
-      </p:sp>
-      <p:sp>
-        <p:nvSpPr>
-          <p:cNvPr id="15" name="Text 13"/>
-          <p:cNvSpPr/>
-          <p:nvPr/>
-        </p:nvSpPr>
-        <p:spPr>
-          <a:xfrm>
-            <a:off x="804672" y="4937760"/>
-            <a:ext cx="4791456" cy="731520"/>
+              <a:t>테스트 실행</a:t>
+            </a:r>
+            <a:endParaRPr lang="en-US" sz="1400" dirty="0"/>
+          </a:p>
+        </p:txBody>
+      </p:sp>
+      <p:sp>
+        <p:nvSpPr>
+          <p:cNvPr id="20" name="Text 18"/>
+          <p:cNvSpPr/>
+          <p:nvPr/>
+        </p:nvSpPr>
+        <p:spPr>
+          <a:xfrm>
+            <a:off x="6400800" y="3474720"/>
+            <a:ext cx="2194560" cy="640080"/>
           </a:xfrm>
           <a:prstGeom prst="rect">
             <a:avLst/>
@@ -8610,7 +9914,7 @@
               <a:buNone/>
             </a:pPr>
             <a:r>
-              <a:rPr lang="en-US" sz="1400" dirty="0">
+              <a:rPr lang="en-US" sz="1150" dirty="0">
                 <a:solidFill>
                   <a:srgbClr val="9AA6B2"/>
                 </a:solidFill>
@@ -8618,26 +9922,65 @@
                 <a:ea typeface="Malgun Gothic" pitchFamily="34" charset="-122"/>
                 <a:cs typeface="Malgun Gothic" pitchFamily="34" charset="-120"/>
               </a:rPr>
-              <a:t>--list_tests 로 11개 테스트 확인</a:t>
-            </a:r>
-            <a:endParaRPr lang="en-US" sz="1400" dirty="0"/>
-          </a:p>
-        </p:txBody>
-      </p:sp>
-      <p:sp>
-        <p:nvSpPr>
-          <p:cNvPr id="16" name="Shape 14"/>
-          <p:cNvSpPr/>
-          <p:nvPr/>
-        </p:nvSpPr>
-        <p:spPr>
-          <a:xfrm>
-            <a:off x="6309360" y="3840480"/>
-            <a:ext cx="5303520" cy="1965960"/>
+              <a:t>cuda_memtests[] 배열을 순회</a:t>
+            </a:r>
+            <a:endParaRPr lang="en-US" sz="1150" dirty="0"/>
+          </a:p>
+        </p:txBody>
+      </p:sp>
+      <p:sp>
+        <p:nvSpPr>
+          <p:cNvPr id="21" name="Text 19"/>
+          <p:cNvSpPr/>
+          <p:nvPr/>
+        </p:nvSpPr>
+        <p:spPr>
+          <a:xfrm>
+            <a:off x="8787384" y="2743200"/>
+            <a:ext cx="256032" cy="548640"/>
+          </a:xfrm>
+          <a:prstGeom prst="rect">
+            <a:avLst/>
+          </a:prstGeom>
+          <a:noFill/>
+          <a:ln/>
+        </p:spPr>
+        <p:txBody>
+          <a:bodyPr wrap="square" lIns="0" tIns="0" rIns="0" bIns="0" rtlCol="0" anchor="ctr"/>
+          <a:lstStyle/>
+          <a:p>
+            <a:pPr algn="ctr" indent="0" marL="0">
+              <a:buNone/>
+            </a:pPr>
+            <a:r>
+              <a:rPr lang="en-US" sz="2000" b="1" dirty="0">
+                <a:solidFill>
+                  <a:srgbClr val="9AA6B2"/>
+                </a:solidFill>
+                <a:latin typeface="Courier New" pitchFamily="34" charset="0"/>
+                <a:ea typeface="Courier New" pitchFamily="34" charset="-122"/>
+                <a:cs typeface="Courier New" pitchFamily="34" charset="-120"/>
+              </a:rPr>
+              <a:t>→</a:t>
+            </a:r>
+            <a:endParaRPr lang="en-US" sz="2000" dirty="0"/>
+          </a:p>
+        </p:txBody>
+      </p:sp>
+      <p:sp>
+        <p:nvSpPr>
+          <p:cNvPr id="22" name="Shape 20"/>
+          <p:cNvSpPr/>
+          <p:nvPr/>
+        </p:nvSpPr>
+        <p:spPr>
+          <a:xfrm>
+            <a:off x="9052560" y="1828800"/>
+            <a:ext cx="2560320" cy="2377440"/>
           </a:xfrm>
           <a:prstGeom prst="roundRect">
             <a:avLst>
-              <a:gd name="adj" fmla="val 3721"/>
+              <a:gd name="adj" fmla="val 3077"/>
             </a:avLst>
           </a:prstGeom>
           <a:solidFill>
@@ -8648,18 +9991,18 @@
       </p:sp>
       <p:sp>
         <p:nvSpPr>
-          <p:cNvPr id="17" name="Text 15"/>
-          <p:cNvSpPr/>
-          <p:nvPr/>
-        </p:nvSpPr>
-        <p:spPr>
-          <a:xfrm>
-            <a:off x="6565392" y="4041648"/>
-            <a:ext cx="1188720" cy="502920"/>
+          <p:cNvPr id="23" name="Text 21"/>
+          <p:cNvSpPr/>
+          <p:nvPr/>
+        </p:nvSpPr>
+        <p:spPr>
+          <a:xfrm>
+            <a:off x="9235440" y="2011680"/>
+            <a:ext cx="548640" cy="548640"/>
           </a:xfrm>
           <a:prstGeom prst="roundRect">
             <a:avLst>
-              <a:gd name="adj" fmla="val 14545"/>
+              <a:gd name="adj" fmla="val 50000"/>
             </a:avLst>
           </a:prstGeom>
           <a:solidFill>
@@ -8675,7 +10018,7 @@
               <a:buNone/>
             </a:pPr>
             <a:r>
-              <a:rPr lang="en-US" sz="1700" b="1" dirty="0">
+              <a:rPr lang="en-US" sz="1800" b="1" dirty="0">
                 <a:solidFill>
                   <a:srgbClr val="13161C"/>
                 </a:solidFill>
@@ -8683,38 +10026,77 @@
                 <a:ea typeface="Courier New" pitchFamily="34" charset="-122"/>
                 <a:cs typeface="Courier New" pitchFamily="34" charset="-120"/>
               </a:rPr>
-              <a:t>Ex 3</a:t>
-            </a:r>
-            <a:endParaRPr lang="en-US" sz="1700" dirty="0"/>
-          </a:p>
-        </p:txBody>
-      </p:sp>
-      <p:sp>
-        <p:nvSpPr>
-          <p:cNvPr id="18" name="Text 16"/>
-          <p:cNvSpPr/>
-          <p:nvPr/>
-        </p:nvSpPr>
-        <p:spPr>
-          <a:xfrm>
-            <a:off x="7909560" y="4059936"/>
-            <a:ext cx="3474720" cy="822960"/>
-          </a:xfrm>
-          <a:prstGeom prst="rect">
-            <a:avLst/>
-          </a:prstGeom>
-          <a:noFill/>
-          <a:ln/>
-        </p:spPr>
-        <p:txBody>
-          <a:bodyPr wrap="square" lIns="0" tIns="0" rIns="0" bIns="0" rtlCol="0" anchor="t"/>
+              <a:t>4</a:t>
+            </a:r>
+            <a:endParaRPr lang="en-US" sz="1800" dirty="0"/>
+          </a:p>
+        </p:txBody>
+      </p:sp>
+      <p:sp>
+        <p:nvSpPr>
+          <p:cNvPr id="24" name="Text 22"/>
+          <p:cNvSpPr/>
+          <p:nvPr/>
+        </p:nvSpPr>
+        <p:spPr>
+          <a:xfrm>
+            <a:off x="9235440" y="2697480"/>
+            <a:ext cx="2194560" cy="457200"/>
+          </a:xfrm>
+          <a:prstGeom prst="rect">
+            <a:avLst/>
+          </a:prstGeom>
+          <a:noFill/>
+          <a:ln/>
+        </p:spPr>
+        <p:txBody>
+          <a:bodyPr wrap="square" lIns="0" tIns="0" rIns="0" bIns="0" rtlCol="0" anchor="ctr"/>
           <a:lstStyle/>
           <a:p>
             <a:pPr indent="0" marL="0">
               <a:buNone/>
             </a:pPr>
             <a:r>
-              <a:rPr lang="en-US" sz="1700" b="1" dirty="0">
+              <a:rPr lang="en-US" sz="1400" b="1" dirty="0">
+                <a:solidFill>
+                  <a:srgbClr val="8CC63F"/>
+                </a:solidFill>
+                <a:latin typeface="Courier New" pitchFamily="34" charset="0"/>
+                <a:ea typeface="Courier New" pitchFamily="34" charset="-122"/>
+                <a:cs typeface="Courier New" pitchFamily="34" charset="-120"/>
+              </a:rPr>
+              <a:t>각 테스트</a:t>
+            </a:r>
+            <a:endParaRPr lang="en-US" sz="1400" dirty="0"/>
+          </a:p>
+        </p:txBody>
+      </p:sp>
+      <p:sp>
+        <p:nvSpPr>
+          <p:cNvPr id="25" name="Text 23"/>
+          <p:cNvSpPr/>
+          <p:nvPr/>
+        </p:nvSpPr>
+        <p:spPr>
+          <a:xfrm>
+            <a:off x="9235440" y="3108960"/>
+            <a:ext cx="2194560" cy="365760"/>
+          </a:xfrm>
+          <a:prstGeom prst="rect">
+            <a:avLst/>
+          </a:prstGeom>
+          <a:noFill/>
+          <a:ln/>
+        </p:spPr>
+        <p:txBody>
+          <a:bodyPr wrap="square" lIns="0" tIns="0" rIns="0" bIns="0" rtlCol="0" anchor="ctr"/>
+          <a:lstStyle/>
+          <a:p>
+            <a:pPr indent="0" marL="0">
+              <a:buNone/>
+            </a:pPr>
+            <a:r>
+              <a:rPr lang="en-US" sz="1400" b="1" dirty="0">
                 <a:solidFill>
                   <a:srgbClr val="E8EDF2"/>
                 </a:solidFill>
@@ -8722,22 +10104,22 @@
                 <a:ea typeface="Malgun Gothic" pitchFamily="34" charset="-122"/>
                 <a:cs typeface="Malgun Gothic" pitchFamily="34" charset="-120"/>
               </a:rPr>
-              <a:t>첫 실행</a:t>
-            </a:r>
-            <a:endParaRPr lang="en-US" sz="1700" dirty="0"/>
-          </a:p>
-        </p:txBody>
-      </p:sp>
-      <p:sp>
-        <p:nvSpPr>
-          <p:cNvPr id="19" name="Text 17"/>
-          <p:cNvSpPr/>
-          <p:nvPr/>
-        </p:nvSpPr>
-        <p:spPr>
-          <a:xfrm>
-            <a:off x="6565392" y="4937760"/>
-            <a:ext cx="4791456" cy="731520"/>
+              <a:t>커널 실행</a:t>
+            </a:r>
+            <a:endParaRPr lang="en-US" sz="1400" dirty="0"/>
+          </a:p>
+        </p:txBody>
+      </p:sp>
+      <p:sp>
+        <p:nvSpPr>
+          <p:cNvPr id="26" name="Text 24"/>
+          <p:cNvSpPr/>
+          <p:nvPr/>
+        </p:nvSpPr>
+        <p:spPr>
+          <a:xfrm>
+            <a:off x="9235440" y="3474720"/>
+            <a:ext cx="2194560" cy="640080"/>
           </a:xfrm>
           <a:prstGeom prst="rect">
             <a:avLst/>
@@ -8756,7 +10138,7 @@
               <a:buNone/>
             </a:pPr>
             <a:r>
-              <a:rPr lang="en-US" sz="1400" dirty="0">
+              <a:rPr lang="en-US" sz="1150" dirty="0">
                 <a:solidFill>
                   <a:srgbClr val="9AA6B2"/>
                 </a:solidFill>
@@ -8764,22 +10146,22 @@
                 <a:ea typeface="Malgun Gothic" pitchFamily="34" charset="-122"/>
                 <a:cs typeface="Malgun Gothic" pitchFamily="34" charset="-120"/>
               </a:rPr>
-              <a:t>--stress 로 GPU 메모리 실제 검사</a:t>
-            </a:r>
-            <a:endParaRPr lang="en-US" sz="1400" dirty="0"/>
-          </a:p>
-        </p:txBody>
-      </p:sp>
-      <p:sp>
-        <p:nvSpPr>
-          <p:cNvPr id="20" name="Text 18"/>
-          <p:cNvSpPr/>
-          <p:nvPr/>
-        </p:nvSpPr>
-        <p:spPr>
-          <a:xfrm>
-            <a:off x="548640" y="5943600"/>
-            <a:ext cx="11064240" cy="365760"/>
+              <a:t>write → read → check (세션 1~2)</a:t>
+            </a:r>
+            <a:endParaRPr lang="en-US" sz="1150" dirty="0"/>
+          </a:p>
+        </p:txBody>
+      </p:sp>
+      <p:sp>
+        <p:nvSpPr>
+          <p:cNvPr id="27" name="Text 25"/>
+          <p:cNvSpPr/>
+          <p:nvPr/>
+        </p:nvSpPr>
+        <p:spPr>
+          <a:xfrm>
+            <a:off x="548640" y="4754880"/>
+            <a:ext cx="11064240" cy="457200"/>
           </a:xfrm>
           <a:prstGeom prst="rect">
             <a:avLst/>
@@ -8795,17 +10177,17 @@
               <a:buNone/>
             </a:pPr>
             <a:r>
-              <a:rPr lang="en-US" sz="1300" i="1" dirty="0">
-                <a:solidFill>
-                  <a:srgbClr val="9AA6B2"/>
-                </a:solidFill>
-                <a:latin typeface="Malgun Gothic" pitchFamily="34" charset="0"/>
-                <a:ea typeface="Malgun Gothic" pitchFamily="34" charset="-122"/>
-                <a:cs typeface="Malgun Gothic" pitchFamily="34" charset="-120"/>
-              </a:rPr>
-              <a:t>GPU가 없다면 Google Colab(런타임→GPU)으로 진행할 수 있습니다.</a:t>
-            </a:r>
-            <a:endParaRPr lang="en-US" sz="1300" dirty="0"/>
+              <a:rPr lang="en-US" sz="1500" dirty="0">
+                <a:solidFill>
+                  <a:srgbClr val="E8EDF2"/>
+                </a:solidFill>
+                <a:latin typeface="Malgun Gothic" pitchFamily="34" charset="0"/>
+                <a:ea typeface="Malgun Gothic" pitchFamily="34" charset="-122"/>
+                <a:cs typeface="Malgun Gothic" pitchFamily="34" charset="-120"/>
+              </a:rPr>
+              <a:t>이 흐름의 각 단계를 앞으로 5회에 걸쳐 안쪽까지 파고듭니다. 오늘은 지도만 봐 두세요.</a:t>
+            </a:r>
+            <a:endParaRPr lang="en-US" sz="1500" dirty="0"/>
           </a:p>
         </p:txBody>
       </p:sp>

--- a/seminar/slides/세션0_환경구축과_큰그림.pptx
+++ b/seminar/slides/세션0_환경구축과_큰그림.pptx
@@ -16,9 +16,10 @@
     <p:sldId id="264" r:id="rId10"/>
     <p:sldId id="265" r:id="rId11"/>
     <p:sldId id="266" r:id="rId12"/>
+    <p:sldId id="267" r:id="rId13"/>
   </p:sldIdLst>
   <p:notesMasterIdLst>
-    <p:notesMasterId r:id="rId13"/>
+    <p:notesMasterId r:id="rId14"/>
   </p:notesMasterIdLst>
   <p:sldSz cx="12192000" cy="6858000"/>
   <p:notesSz cx="6858000" cy="12192000"/>
@@ -600,7 +601,7 @@
           <a:p>
             <a:r>
               <a:rPr lang="en-US" dirty="0"/>
-              <a:t>세션 0의 핵심 목표: 전원 빌드·실행 성공. 환경 문제를 여기서 다 해결.</a:t>
+              <a:t>전체 코드 지도. main→thread_func→run_tests→커널. 각 단계가 앞으로의 세션에 대응.</a:t>
             </a:r>
             <a:endParaRPr lang="en-US" dirty="0"/>
           </a:p>
@@ -688,7 +689,7 @@
           <a:p>
             <a:r>
               <a:rPr lang="en-US" dirty="0"/>
-              <a:t>환경 준비 완료 → 세션 1부터 코드. kernel_move_inv_write로 시작.</a:t>
+              <a:t>세션 0의 핵심 목표: 전원 빌드·실행 성공. 환경 문제를 여기서 다 해결.</a:t>
             </a:r>
             <a:endParaRPr lang="en-US" dirty="0"/>
           </a:p>
@@ -712,6 +713,94 @@
             <a:fld id="{F7021451-1387-4CA6-816F-3879F97B5CBC}" type="slidenum">
               <a:rPr lang="en-US"/>
               <a:t>11</a:t>
+            </a:fld>
+            <a:endParaRPr lang="en-US"/>
+          </a:p>
+        </p:txBody>
+      </p:sp>
+    </p:spTree>
+    <p:extLst>
+      <p:ext uri="{BB962C8B-B14F-4D97-AF65-F5344CB8AC3E}">
+        <p14:creationId xmlns:p14="http://schemas.microsoft.com/office/powerpoint/2010/main" val="1024086991"/>
+      </p:ext>
+    </p:extLst>
+  </p:cSld>
+  <p:clrMapOvr>
+    <a:masterClrMapping/>
+  </p:clrMapOvr>
+</p:notes>
+</file>
+
+<file path=ppt/notesSlides/notesSlide12.xml><?xml version="1.0" encoding="utf-8"?>
+<p:notes xmlns:a="http://schemas.openxmlformats.org/drawingml/2006/main" xmlns:r="http://schemas.openxmlformats.org/officeDocument/2006/relationships" xmlns:p="http://schemas.openxmlformats.org/presentationml/2006/main">
+  <p:cSld>
+    <p:spTree>
+      <p:nvGrpSpPr>
+        <p:cNvPr id="1" name=""/>
+        <p:cNvGrpSpPr/>
+        <p:nvPr/>
+      </p:nvGrpSpPr>
+      <p:grpSpPr>
+        <a:xfrm>
+          <a:off x="0" y="0"/>
+          <a:ext cx="0" cy="0"/>
+          <a:chOff x="0" y="0"/>
+          <a:chExt cx="0" cy="0"/>
+        </a:xfrm>
+      </p:grpSpPr>
+      <p:sp>
+        <p:nvSpPr>
+          <p:cNvPr id="2" name="Slide Image Placeholder 1"/>
+          <p:cNvSpPr>
+            <a:spLocks noGrp="1" noRot="1" noChangeAspect="1"/>
+          </p:cNvSpPr>
+          <p:nvPr>
+            <p:ph type="sldImg"/>
+          </p:nvPr>
+        </p:nvSpPr>
+        <p:spPr/>
+      </p:sp>
+      <p:sp>
+        <p:nvSpPr>
+          <p:cNvPr id="3" name="Notes Placeholder 2"/>
+          <p:cNvSpPr>
+            <a:spLocks noGrp="1"/>
+          </p:cNvSpPr>
+          <p:nvPr>
+            <p:ph type="body" idx="1"/>
+          </p:nvPr>
+        </p:nvSpPr>
+        <p:spPr/>
+        <p:txBody>
+          <a:bodyPr/>
+          <a:lstStyle/>
+          <a:p>
+            <a:r>
+              <a:rPr lang="en-US" dirty="0"/>
+              <a:t>환경 준비 완료 → 세션 1부터 코드. kernel_move_inv_write로 시작.</a:t>
+            </a:r>
+            <a:endParaRPr lang="en-US" dirty="0"/>
+          </a:p>
+        </p:txBody>
+      </p:sp>
+      <p:sp>
+        <p:nvSpPr>
+          <p:cNvPr id="4" name="Slide Number Placeholder 3"/>
+          <p:cNvSpPr>
+            <a:spLocks noGrp="1"/>
+          </p:cNvSpPr>
+          <p:nvPr>
+            <p:ph type="sldNum" sz="quarter" idx="10"/>
+          </p:nvPr>
+        </p:nvSpPr>
+        <p:spPr/>
+        <p:txBody>
+          <a:bodyPr/>
+          <a:lstStyle/>
+          <a:p>
+            <a:fld id="{F7021451-1387-4CA6-816F-3879F97B5CBC}" type="slidenum">
+              <a:rPr lang="en-US"/>
+              <a:t>12</a:t>
             </a:fld>
             <a:endParaRPr lang="en-US"/>
           </a:p>
@@ -1040,7 +1129,7 @@
           <a:p>
             <a:r>
               <a:rPr lang="en-US" dirty="0"/>
-              <a:t>하드/소프트 오류 구분은 세미나 전체의 배경. doc/의 SAAHPC 2009 논문(한국어 EPUB)을 안내.</a:t>
+              <a:t>SW 스택: 내 코드→런타임→드라이버→HW. CMake가 런타임(CUDAToolkit)을 링크. cudaMalloc 한 줄이 아래로 내려간다.</a:t>
             </a:r>
             <a:endParaRPr lang="en-US" dirty="0"/>
           </a:p>
@@ -1128,7 +1217,7 @@
           <a:p>
             <a:r>
               <a:rPr lang="en-US" dirty="0"/>
-              <a:t>아키텍처 번호를 왜 지정하는지(세대별 기계어)를 짚어주세요. 빌드 실패의 흔한 원인.</a:t>
+              <a:t>하드/소프트 오류 구분은 세미나 전체의 배경. doc/의 SAAHPC 2009 논문(한국어 EPUB)을 안내.</a:t>
             </a:r>
             <a:endParaRPr lang="en-US" dirty="0"/>
           </a:p>
@@ -1216,7 +1305,7 @@
           <a:p>
             <a:r>
               <a:rPr lang="en-US" dirty="0"/>
-              <a:t>'아무 일도 안 일어나는데요?'가 정상. 세션 2에서 일부러 오류를 주입해 검출을 봅니다.</a:t>
+              <a:t>아키텍처 번호를 왜 지정하는지(세대별 기계어)를 짚어주세요. 빌드 실패의 흔한 원인.</a:t>
             </a:r>
             <a:endParaRPr lang="en-US" dirty="0"/>
           </a:p>
@@ -1304,7 +1393,7 @@
           <a:p>
             <a:r>
               <a:rPr lang="en-US" dirty="0"/>
-              <a:t>각 테스트가 서로 다른 종류의 오류를 노림. 세부 알고리즘은 세션 2~3에서 다룹니다.</a:t>
+              <a:t>'아무 일도 안 일어나는데요?'가 정상. 세션 2에서 일부러 오류를 주입해 검출을 봅니다.</a:t>
             </a:r>
             <a:endParaRPr lang="en-US" dirty="0"/>
           </a:p>
@@ -1392,7 +1481,7 @@
           <a:p>
             <a:r>
               <a:rPr lang="en-US" dirty="0"/>
-              <a:t>전체 코드 지도. main→thread_func→run_tests→커널. 각 단계가 앞으로의 세션에 대응.</a:t>
+              <a:t>각 테스트가 서로 다른 종류의 오류를 노림. 세부 알고리즘은 세션 2~3에서 다룹니다.</a:t>
             </a:r>
             <a:endParaRPr lang="en-US" dirty="0"/>
           </a:p>
@@ -2099,7 +2188,7 @@
                 <a:ea typeface="Courier New" pitchFamily="34" charset="-122"/>
                 <a:cs typeface="Courier New" pitchFamily="34" charset="-120"/>
               </a:rPr>
-              <a:t>8</a:t>
+              <a:t>7</a:t>
             </a:r>
             <a:endParaRPr lang="en-US" sz="2200" dirty="0"/>
           </a:p>
@@ -2138,7 +2227,7 @@
                 <a:ea typeface="Malgun Gothic" pitchFamily="34" charset="-122"/>
                 <a:cs typeface="Malgun Gothic" pitchFamily="34" charset="-120"/>
               </a:rPr>
-              <a:t>실습 미리보기 · Lab 0</a:t>
+              <a:t>프로그램의 큰 흐름</a:t>
             </a:r>
             <a:endParaRPr lang="en-US" sz="3000" dirty="0"/>
           </a:p>
@@ -2152,12 +2241,12 @@
         </p:nvSpPr>
         <p:spPr>
           <a:xfrm>
-            <a:off x="548640" y="1554480"/>
-            <a:ext cx="5303520" cy="1965960"/>
+            <a:off x="548640" y="1828800"/>
+            <a:ext cx="2560320" cy="2377440"/>
           </a:xfrm>
           <a:prstGeom prst="roundRect">
             <a:avLst>
-              <a:gd name="adj" fmla="val 3721"/>
+              <a:gd name="adj" fmla="val 3077"/>
             </a:avLst>
           </a:prstGeom>
           <a:solidFill>
@@ -2174,12 +2263,236 @@
         </p:nvSpPr>
         <p:spPr>
           <a:xfrm>
-            <a:off x="804672" y="1755648"/>
-            <a:ext cx="1188720" cy="502920"/>
+            <a:off x="731520" y="2011680"/>
+            <a:ext cx="548640" cy="548640"/>
           </a:xfrm>
           <a:prstGeom prst="roundRect">
             <a:avLst>
-              <a:gd name="adj" fmla="val 14545"/>
+              <a:gd name="adj" fmla="val 50000"/>
+            </a:avLst>
+          </a:prstGeom>
+          <a:solidFill>
+            <a:srgbClr val="8CC63F"/>
+          </a:solidFill>
+          <a:ln/>
+        </p:spPr>
+        <p:txBody>
+          <a:bodyPr wrap="square" rtlCol="0" anchor="ctr"/>
+          <a:lstStyle/>
+          <a:p>
+            <a:pPr algn="ctr" indent="0" marL="0">
+              <a:buNone/>
+            </a:pPr>
+            <a:r>
+              <a:rPr lang="en-US" sz="1800" b="1" dirty="0">
+                <a:solidFill>
+                  <a:srgbClr val="13161C"/>
+                </a:solidFill>
+                <a:latin typeface="Courier New" pitchFamily="34" charset="0"/>
+                <a:ea typeface="Courier New" pitchFamily="34" charset="-122"/>
+                <a:cs typeface="Courier New" pitchFamily="34" charset="-120"/>
+              </a:rPr>
+              <a:t>1</a:t>
+            </a:r>
+            <a:endParaRPr lang="en-US" sz="1800" dirty="0"/>
+          </a:p>
+        </p:txBody>
+      </p:sp>
+      <p:sp>
+        <p:nvSpPr>
+          <p:cNvPr id="6" name="Text 4"/>
+          <p:cNvSpPr/>
+          <p:nvPr/>
+        </p:nvSpPr>
+        <p:spPr>
+          <a:xfrm>
+            <a:off x="731520" y="2697480"/>
+            <a:ext cx="2194560" cy="457200"/>
+          </a:xfrm>
+          <a:prstGeom prst="rect">
+            <a:avLst/>
+          </a:prstGeom>
+          <a:noFill/>
+          <a:ln/>
+        </p:spPr>
+        <p:txBody>
+          <a:bodyPr wrap="square" lIns="0" tIns="0" rIns="0" bIns="0" rtlCol="0" anchor="ctr"/>
+          <a:lstStyle/>
+          <a:p>
+            <a:pPr indent="0" marL="0">
+              <a:buNone/>
+            </a:pPr>
+            <a:r>
+              <a:rPr lang="en-US" sz="1400" b="1" dirty="0">
+                <a:solidFill>
+                  <a:srgbClr val="8CC63F"/>
+                </a:solidFill>
+                <a:latin typeface="Courier New" pitchFamily="34" charset="0"/>
+                <a:ea typeface="Courier New" pitchFamily="34" charset="-122"/>
+                <a:cs typeface="Courier New" pitchFamily="34" charset="-120"/>
+              </a:rPr>
+              <a:t>main()</a:t>
+            </a:r>
+            <a:endParaRPr lang="en-US" sz="1400" dirty="0"/>
+          </a:p>
+        </p:txBody>
+      </p:sp>
+      <p:sp>
+        <p:nvSpPr>
+          <p:cNvPr id="7" name="Text 5"/>
+          <p:cNvSpPr/>
+          <p:nvPr/>
+        </p:nvSpPr>
+        <p:spPr>
+          <a:xfrm>
+            <a:off x="731520" y="3108960"/>
+            <a:ext cx="2194560" cy="365760"/>
+          </a:xfrm>
+          <a:prstGeom prst="rect">
+            <a:avLst/>
+          </a:prstGeom>
+          <a:noFill/>
+          <a:ln/>
+        </p:spPr>
+        <p:txBody>
+          <a:bodyPr wrap="square" lIns="0" tIns="0" rIns="0" bIns="0" rtlCol="0" anchor="ctr"/>
+          <a:lstStyle/>
+          <a:p>
+            <a:pPr indent="0" marL="0">
+              <a:buNone/>
+            </a:pPr>
+            <a:r>
+              <a:rPr lang="en-US" sz="1400" b="1" dirty="0">
+                <a:solidFill>
+                  <a:srgbClr val="E8EDF2"/>
+                </a:solidFill>
+                <a:latin typeface="Malgun Gothic" pitchFamily="34" charset="0"/>
+                <a:ea typeface="Malgun Gothic" pitchFamily="34" charset="-122"/>
+                <a:cs typeface="Malgun Gothic" pitchFamily="34" charset="-120"/>
+              </a:rPr>
+              <a:t>GPU 개수 확인</a:t>
+            </a:r>
+            <a:endParaRPr lang="en-US" sz="1400" dirty="0"/>
+          </a:p>
+        </p:txBody>
+      </p:sp>
+      <p:sp>
+        <p:nvSpPr>
+          <p:cNvPr id="8" name="Text 6"/>
+          <p:cNvSpPr/>
+          <p:nvPr/>
+        </p:nvSpPr>
+        <p:spPr>
+          <a:xfrm>
+            <a:off x="731520" y="3474720"/>
+            <a:ext cx="2194560" cy="640080"/>
+          </a:xfrm>
+          <a:prstGeom prst="rect">
+            <a:avLst/>
+          </a:prstGeom>
+          <a:noFill/>
+          <a:ln/>
+        </p:spPr>
+        <p:txBody>
+          <a:bodyPr wrap="square" lIns="0" tIns="0" rIns="0" bIns="0" rtlCol="0" anchor="t"/>
+          <a:lstStyle/>
+          <a:p>
+            <a:pPr indent="0" marL="0">
+              <a:lnSpc>
+                <a:spcPct val="110000"/>
+              </a:lnSpc>
+              <a:buNone/>
+            </a:pPr>
+            <a:r>
+              <a:rPr lang="en-US" sz="1150" dirty="0">
+                <a:solidFill>
+                  <a:srgbClr val="9AA6B2"/>
+                </a:solidFill>
+                <a:latin typeface="Malgun Gothic" pitchFamily="34" charset="0"/>
+                <a:ea typeface="Malgun Gothic" pitchFamily="34" charset="-122"/>
+                <a:cs typeface="Malgun Gothic" pitchFamily="34" charset="-120"/>
+              </a:rPr>
+              <a:t>cudaGetDeviceCount (cuda_memtest.cpp:299)</a:t>
+            </a:r>
+            <a:endParaRPr lang="en-US" sz="1150" dirty="0"/>
+          </a:p>
+        </p:txBody>
+      </p:sp>
+      <p:sp>
+        <p:nvSpPr>
+          <p:cNvPr id="9" name="Text 7"/>
+          <p:cNvSpPr/>
+          <p:nvPr/>
+        </p:nvSpPr>
+        <p:spPr>
+          <a:xfrm>
+            <a:off x="3118104" y="2743200"/>
+            <a:ext cx="256032" cy="548640"/>
+          </a:xfrm>
+          <a:prstGeom prst="rect">
+            <a:avLst/>
+          </a:prstGeom>
+          <a:noFill/>
+          <a:ln/>
+        </p:spPr>
+        <p:txBody>
+          <a:bodyPr wrap="square" lIns="0" tIns="0" rIns="0" bIns="0" rtlCol="0" anchor="ctr"/>
+          <a:lstStyle/>
+          <a:p>
+            <a:pPr algn="ctr" indent="0" marL="0">
+              <a:buNone/>
+            </a:pPr>
+            <a:r>
+              <a:rPr lang="en-US" sz="2000" b="1" dirty="0">
+                <a:solidFill>
+                  <a:srgbClr val="9AA6B2"/>
+                </a:solidFill>
+                <a:latin typeface="Courier New" pitchFamily="34" charset="0"/>
+                <a:ea typeface="Courier New" pitchFamily="34" charset="-122"/>
+                <a:cs typeface="Courier New" pitchFamily="34" charset="-120"/>
+              </a:rPr>
+              <a:t>→</a:t>
+            </a:r>
+            <a:endParaRPr lang="en-US" sz="2000" dirty="0"/>
+          </a:p>
+        </p:txBody>
+      </p:sp>
+      <p:sp>
+        <p:nvSpPr>
+          <p:cNvPr id="10" name="Shape 8"/>
+          <p:cNvSpPr/>
+          <p:nvPr/>
+        </p:nvSpPr>
+        <p:spPr>
+          <a:xfrm>
+            <a:off x="3383280" y="1828800"/>
+            <a:ext cx="2560320" cy="2377440"/>
+          </a:xfrm>
+          <a:prstGeom prst="roundRect">
+            <a:avLst>
+              <a:gd name="adj" fmla="val 3077"/>
+            </a:avLst>
+          </a:prstGeom>
+          <a:solidFill>
+            <a:srgbClr val="1E232C"/>
+          </a:solidFill>
+          <a:ln/>
+        </p:spPr>
+      </p:sp>
+      <p:sp>
+        <p:nvSpPr>
+          <p:cNvPr id="11" name="Text 9"/>
+          <p:cNvSpPr/>
+          <p:nvPr/>
+        </p:nvSpPr>
+        <p:spPr>
+          <a:xfrm>
+            <a:off x="3566160" y="2011680"/>
+            <a:ext cx="548640" cy="548640"/>
+          </a:xfrm>
+          <a:prstGeom prst="roundRect">
+            <a:avLst>
+              <a:gd name="adj" fmla="val 50000"/>
             </a:avLst>
           </a:prstGeom>
           <a:solidFill>
@@ -2195,7 +2508,7 @@
               <a:buNone/>
             </a:pPr>
             <a:r>
-              <a:rPr lang="en-US" sz="1700" b="1" dirty="0">
+              <a:rPr lang="en-US" sz="1800" b="1" dirty="0">
                 <a:solidFill>
                   <a:srgbClr val="13161C"/>
                 </a:solidFill>
@@ -2203,38 +2516,77 @@
                 <a:ea typeface="Courier New" pitchFamily="34" charset="-122"/>
                 <a:cs typeface="Courier New" pitchFamily="34" charset="-120"/>
               </a:rPr>
-              <a:t>Ex 0</a:t>
-            </a:r>
-            <a:endParaRPr lang="en-US" sz="1700" dirty="0"/>
-          </a:p>
-        </p:txBody>
-      </p:sp>
-      <p:sp>
-        <p:nvSpPr>
-          <p:cNvPr id="6" name="Text 4"/>
-          <p:cNvSpPr/>
-          <p:nvPr/>
-        </p:nvSpPr>
-        <p:spPr>
-          <a:xfrm>
-            <a:off x="2148840" y="1773936"/>
-            <a:ext cx="3474720" cy="822960"/>
-          </a:xfrm>
-          <a:prstGeom prst="rect">
-            <a:avLst/>
-          </a:prstGeom>
-          <a:noFill/>
-          <a:ln/>
-        </p:spPr>
-        <p:txBody>
-          <a:bodyPr wrap="square" lIns="0" tIns="0" rIns="0" bIns="0" rtlCol="0" anchor="t"/>
-          <a:lstStyle/>
-          <a:p>
-            <a:pPr indent="0" marL="0">
-              <a:buNone/>
-            </a:pPr>
-            <a:r>
-              <a:rPr lang="en-US" sz="1700" b="1" dirty="0">
+              <a:t>2</a:t>
+            </a:r>
+            <a:endParaRPr lang="en-US" sz="1800" dirty="0"/>
+          </a:p>
+        </p:txBody>
+      </p:sp>
+      <p:sp>
+        <p:nvSpPr>
+          <p:cNvPr id="12" name="Text 10"/>
+          <p:cNvSpPr/>
+          <p:nvPr/>
+        </p:nvSpPr>
+        <p:spPr>
+          <a:xfrm>
+            <a:off x="3566160" y="2697480"/>
+            <a:ext cx="2194560" cy="457200"/>
+          </a:xfrm>
+          <a:prstGeom prst="rect">
+            <a:avLst/>
+          </a:prstGeom>
+          <a:noFill/>
+          <a:ln/>
+        </p:spPr>
+        <p:txBody>
+          <a:bodyPr wrap="square" lIns="0" tIns="0" rIns="0" bIns="0" rtlCol="0" anchor="ctr"/>
+          <a:lstStyle/>
+          <a:p>
+            <a:pPr indent="0" marL="0">
+              <a:buNone/>
+            </a:pPr>
+            <a:r>
+              <a:rPr lang="en-US" sz="1400" b="1" dirty="0">
+                <a:solidFill>
+                  <a:srgbClr val="4FB0C6"/>
+                </a:solidFill>
+                <a:latin typeface="Courier New" pitchFamily="34" charset="0"/>
+                <a:ea typeface="Courier New" pitchFamily="34" charset="-122"/>
+                <a:cs typeface="Courier New" pitchFamily="34" charset="-120"/>
+              </a:rPr>
+              <a:t>thread_func</a:t>
+            </a:r>
+            <a:endParaRPr lang="en-US" sz="1400" dirty="0"/>
+          </a:p>
+        </p:txBody>
+      </p:sp>
+      <p:sp>
+        <p:nvSpPr>
+          <p:cNvPr id="13" name="Text 11"/>
+          <p:cNvSpPr/>
+          <p:nvPr/>
+        </p:nvSpPr>
+        <p:spPr>
+          <a:xfrm>
+            <a:off x="3566160" y="3108960"/>
+            <a:ext cx="2194560" cy="365760"/>
+          </a:xfrm>
+          <a:prstGeom prst="rect">
+            <a:avLst/>
+          </a:prstGeom>
+          <a:noFill/>
+          <a:ln/>
+        </p:spPr>
+        <p:txBody>
+          <a:bodyPr wrap="square" lIns="0" tIns="0" rIns="0" bIns="0" rtlCol="0" anchor="ctr"/>
+          <a:lstStyle/>
+          <a:p>
+            <a:pPr indent="0" marL="0">
+              <a:buNone/>
+            </a:pPr>
+            <a:r>
+              <a:rPr lang="en-US" sz="1400" b="1" dirty="0">
                 <a:solidFill>
                   <a:srgbClr val="E8EDF2"/>
                 </a:solidFill>
@@ -2242,22 +2594,22 @@
                 <a:ea typeface="Malgun Gothic" pitchFamily="34" charset="-122"/>
                 <a:cs typeface="Malgun Gothic" pitchFamily="34" charset="-120"/>
               </a:rPr>
-              <a:t>내 환경 점검</a:t>
-            </a:r>
-            <a:endParaRPr lang="en-US" sz="1700" dirty="0"/>
-          </a:p>
-        </p:txBody>
-      </p:sp>
-      <p:sp>
-        <p:nvSpPr>
-          <p:cNvPr id="7" name="Text 5"/>
-          <p:cNvSpPr/>
-          <p:nvPr/>
-        </p:nvSpPr>
-        <p:spPr>
-          <a:xfrm>
-            <a:off x="804672" y="2651760"/>
-            <a:ext cx="4791456" cy="731520"/>
+              <a:t>GPU마다 스레드</a:t>
+            </a:r>
+            <a:endParaRPr lang="en-US" sz="1400" dirty="0"/>
+          </a:p>
+        </p:txBody>
+      </p:sp>
+      <p:sp>
+        <p:nvSpPr>
+          <p:cNvPr id="14" name="Text 12"/>
+          <p:cNvSpPr/>
+          <p:nvPr/>
+        </p:nvSpPr>
+        <p:spPr>
+          <a:xfrm>
+            <a:off x="3566160" y="3474720"/>
+            <a:ext cx="2194560" cy="640080"/>
           </a:xfrm>
           <a:prstGeom prst="rect">
             <a:avLst/>
@@ -2276,7 +2628,7 @@
               <a:buNone/>
             </a:pPr>
             <a:r>
-              <a:rPr lang="en-US" sz="1400" dirty="0">
+              <a:rPr lang="en-US" sz="1150" dirty="0">
                 <a:solidFill>
                   <a:srgbClr val="9AA6B2"/>
                 </a:solidFill>
@@ -2284,26 +2636,65 @@
                 <a:ea typeface="Malgun Gothic" pitchFamily="34" charset="-122"/>
                 <a:cs typeface="Malgun Gothic" pitchFamily="34" charset="-120"/>
               </a:rPr>
-              <a:t>nvidia-smi · nvcc · cmake 버전 확인</a:t>
-            </a:r>
-            <a:endParaRPr lang="en-US" sz="1400" dirty="0"/>
-          </a:p>
-        </p:txBody>
-      </p:sp>
-      <p:sp>
-        <p:nvSpPr>
-          <p:cNvPr id="8" name="Shape 6"/>
-          <p:cNvSpPr/>
-          <p:nvPr/>
-        </p:nvSpPr>
-        <p:spPr>
-          <a:xfrm>
-            <a:off x="6309360" y="1554480"/>
-            <a:ext cx="5303520" cy="1965960"/>
+              <a:t>각 GPU를 cudaSetDevice로 선택</a:t>
+            </a:r>
+            <a:endParaRPr lang="en-US" sz="1150" dirty="0"/>
+          </a:p>
+        </p:txBody>
+      </p:sp>
+      <p:sp>
+        <p:nvSpPr>
+          <p:cNvPr id="15" name="Text 13"/>
+          <p:cNvSpPr/>
+          <p:nvPr/>
+        </p:nvSpPr>
+        <p:spPr>
+          <a:xfrm>
+            <a:off x="5952744" y="2743200"/>
+            <a:ext cx="256032" cy="548640"/>
+          </a:xfrm>
+          <a:prstGeom prst="rect">
+            <a:avLst/>
+          </a:prstGeom>
+          <a:noFill/>
+          <a:ln/>
+        </p:spPr>
+        <p:txBody>
+          <a:bodyPr wrap="square" lIns="0" tIns="0" rIns="0" bIns="0" rtlCol="0" anchor="ctr"/>
+          <a:lstStyle/>
+          <a:p>
+            <a:pPr algn="ctr" indent="0" marL="0">
+              <a:buNone/>
+            </a:pPr>
+            <a:r>
+              <a:rPr lang="en-US" sz="2000" b="1" dirty="0">
+                <a:solidFill>
+                  <a:srgbClr val="9AA6B2"/>
+                </a:solidFill>
+                <a:latin typeface="Courier New" pitchFamily="34" charset="0"/>
+                <a:ea typeface="Courier New" pitchFamily="34" charset="-122"/>
+                <a:cs typeface="Courier New" pitchFamily="34" charset="-120"/>
+              </a:rPr>
+              <a:t>→</a:t>
+            </a:r>
+            <a:endParaRPr lang="en-US" sz="2000" dirty="0"/>
+          </a:p>
+        </p:txBody>
+      </p:sp>
+      <p:sp>
+        <p:nvSpPr>
+          <p:cNvPr id="16" name="Shape 14"/>
+          <p:cNvSpPr/>
+          <p:nvPr/>
+        </p:nvSpPr>
+        <p:spPr>
+          <a:xfrm>
+            <a:off x="6217920" y="1828800"/>
+            <a:ext cx="2560320" cy="2377440"/>
           </a:xfrm>
           <a:prstGeom prst="roundRect">
             <a:avLst>
-              <a:gd name="adj" fmla="val 3721"/>
+              <a:gd name="adj" fmla="val 3077"/>
             </a:avLst>
           </a:prstGeom>
           <a:solidFill>
@@ -2314,18 +2705,242 @@
       </p:sp>
       <p:sp>
         <p:nvSpPr>
-          <p:cNvPr id="9" name="Text 7"/>
-          <p:cNvSpPr/>
-          <p:nvPr/>
-        </p:nvSpPr>
-        <p:spPr>
-          <a:xfrm>
-            <a:off x="6565392" y="1755648"/>
-            <a:ext cx="1188720" cy="502920"/>
+          <p:cNvPr id="17" name="Text 15"/>
+          <p:cNvSpPr/>
+          <p:nvPr/>
+        </p:nvSpPr>
+        <p:spPr>
+          <a:xfrm>
+            <a:off x="6400800" y="2011680"/>
+            <a:ext cx="548640" cy="548640"/>
           </a:xfrm>
           <a:prstGeom prst="roundRect">
             <a:avLst>
-              <a:gd name="adj" fmla="val 14545"/>
+              <a:gd name="adj" fmla="val 50000"/>
+            </a:avLst>
+          </a:prstGeom>
+          <a:solidFill>
+            <a:srgbClr val="E0A458"/>
+          </a:solidFill>
+          <a:ln/>
+        </p:spPr>
+        <p:txBody>
+          <a:bodyPr wrap="square" rtlCol="0" anchor="ctr"/>
+          <a:lstStyle/>
+          <a:p>
+            <a:pPr algn="ctr" indent="0" marL="0">
+              <a:buNone/>
+            </a:pPr>
+            <a:r>
+              <a:rPr lang="en-US" sz="1800" b="1" dirty="0">
+                <a:solidFill>
+                  <a:srgbClr val="13161C"/>
+                </a:solidFill>
+                <a:latin typeface="Courier New" pitchFamily="34" charset="0"/>
+                <a:ea typeface="Courier New" pitchFamily="34" charset="-122"/>
+                <a:cs typeface="Courier New" pitchFamily="34" charset="-120"/>
+              </a:rPr>
+              <a:t>3</a:t>
+            </a:r>
+            <a:endParaRPr lang="en-US" sz="1800" dirty="0"/>
+          </a:p>
+        </p:txBody>
+      </p:sp>
+      <p:sp>
+        <p:nvSpPr>
+          <p:cNvPr id="18" name="Text 16"/>
+          <p:cNvSpPr/>
+          <p:nvPr/>
+        </p:nvSpPr>
+        <p:spPr>
+          <a:xfrm>
+            <a:off x="6400800" y="2697480"/>
+            <a:ext cx="2194560" cy="457200"/>
+          </a:xfrm>
+          <a:prstGeom prst="rect">
+            <a:avLst/>
+          </a:prstGeom>
+          <a:noFill/>
+          <a:ln/>
+        </p:spPr>
+        <p:txBody>
+          <a:bodyPr wrap="square" lIns="0" tIns="0" rIns="0" bIns="0" rtlCol="0" anchor="ctr"/>
+          <a:lstStyle/>
+          <a:p>
+            <a:pPr indent="0" marL="0">
+              <a:buNone/>
+            </a:pPr>
+            <a:r>
+              <a:rPr lang="en-US" sz="1400" b="1" dirty="0">
+                <a:solidFill>
+                  <a:srgbClr val="E0A458"/>
+                </a:solidFill>
+                <a:latin typeface="Courier New" pitchFamily="34" charset="0"/>
+                <a:ea typeface="Courier New" pitchFamily="34" charset="-122"/>
+                <a:cs typeface="Courier New" pitchFamily="34" charset="-120"/>
+              </a:rPr>
+              <a:t>run_tests</a:t>
+            </a:r>
+            <a:endParaRPr lang="en-US" sz="1400" dirty="0"/>
+          </a:p>
+        </p:txBody>
+      </p:sp>
+      <p:sp>
+        <p:nvSpPr>
+          <p:cNvPr id="19" name="Text 17"/>
+          <p:cNvSpPr/>
+          <p:nvPr/>
+        </p:nvSpPr>
+        <p:spPr>
+          <a:xfrm>
+            <a:off x="6400800" y="3108960"/>
+            <a:ext cx="2194560" cy="365760"/>
+          </a:xfrm>
+          <a:prstGeom prst="rect">
+            <a:avLst/>
+          </a:prstGeom>
+          <a:noFill/>
+          <a:ln/>
+        </p:spPr>
+        <p:txBody>
+          <a:bodyPr wrap="square" lIns="0" tIns="0" rIns="0" bIns="0" rtlCol="0" anchor="ctr"/>
+          <a:lstStyle/>
+          <a:p>
+            <a:pPr indent="0" marL="0">
+              <a:buNone/>
+            </a:pPr>
+            <a:r>
+              <a:rPr lang="en-US" sz="1400" b="1" dirty="0">
+                <a:solidFill>
+                  <a:srgbClr val="E8EDF2"/>
+                </a:solidFill>
+                <a:latin typeface="Malgun Gothic" pitchFamily="34" charset="0"/>
+                <a:ea typeface="Malgun Gothic" pitchFamily="34" charset="-122"/>
+                <a:cs typeface="Malgun Gothic" pitchFamily="34" charset="-120"/>
+              </a:rPr>
+              <a:t>테스트 실행</a:t>
+            </a:r>
+            <a:endParaRPr lang="en-US" sz="1400" dirty="0"/>
+          </a:p>
+        </p:txBody>
+      </p:sp>
+      <p:sp>
+        <p:nvSpPr>
+          <p:cNvPr id="20" name="Text 18"/>
+          <p:cNvSpPr/>
+          <p:nvPr/>
+        </p:nvSpPr>
+        <p:spPr>
+          <a:xfrm>
+            <a:off x="6400800" y="3474720"/>
+            <a:ext cx="2194560" cy="640080"/>
+          </a:xfrm>
+          <a:prstGeom prst="rect">
+            <a:avLst/>
+          </a:prstGeom>
+          <a:noFill/>
+          <a:ln/>
+        </p:spPr>
+        <p:txBody>
+          <a:bodyPr wrap="square" lIns="0" tIns="0" rIns="0" bIns="0" rtlCol="0" anchor="t"/>
+          <a:lstStyle/>
+          <a:p>
+            <a:pPr indent="0" marL="0">
+              <a:lnSpc>
+                <a:spcPct val="110000"/>
+              </a:lnSpc>
+              <a:buNone/>
+            </a:pPr>
+            <a:r>
+              <a:rPr lang="en-US" sz="1150" dirty="0">
+                <a:solidFill>
+                  <a:srgbClr val="9AA6B2"/>
+                </a:solidFill>
+                <a:latin typeface="Malgun Gothic" pitchFamily="34" charset="0"/>
+                <a:ea typeface="Malgun Gothic" pitchFamily="34" charset="-122"/>
+                <a:cs typeface="Malgun Gothic" pitchFamily="34" charset="-120"/>
+              </a:rPr>
+              <a:t>cuda_memtests[] 배열을 순회</a:t>
+            </a:r>
+            <a:endParaRPr lang="en-US" sz="1150" dirty="0"/>
+          </a:p>
+        </p:txBody>
+      </p:sp>
+      <p:sp>
+        <p:nvSpPr>
+          <p:cNvPr id="21" name="Text 19"/>
+          <p:cNvSpPr/>
+          <p:nvPr/>
+        </p:nvSpPr>
+        <p:spPr>
+          <a:xfrm>
+            <a:off x="8787384" y="2743200"/>
+            <a:ext cx="256032" cy="548640"/>
+          </a:xfrm>
+          <a:prstGeom prst="rect">
+            <a:avLst/>
+          </a:prstGeom>
+          <a:noFill/>
+          <a:ln/>
+        </p:spPr>
+        <p:txBody>
+          <a:bodyPr wrap="square" lIns="0" tIns="0" rIns="0" bIns="0" rtlCol="0" anchor="ctr"/>
+          <a:lstStyle/>
+          <a:p>
+            <a:pPr algn="ctr" indent="0" marL="0">
+              <a:buNone/>
+            </a:pPr>
+            <a:r>
+              <a:rPr lang="en-US" sz="2000" b="1" dirty="0">
+                <a:solidFill>
+                  <a:srgbClr val="9AA6B2"/>
+                </a:solidFill>
+                <a:latin typeface="Courier New" pitchFamily="34" charset="0"/>
+                <a:ea typeface="Courier New" pitchFamily="34" charset="-122"/>
+                <a:cs typeface="Courier New" pitchFamily="34" charset="-120"/>
+              </a:rPr>
+              <a:t>→</a:t>
+            </a:r>
+            <a:endParaRPr lang="en-US" sz="2000" dirty="0"/>
+          </a:p>
+        </p:txBody>
+      </p:sp>
+      <p:sp>
+        <p:nvSpPr>
+          <p:cNvPr id="22" name="Shape 20"/>
+          <p:cNvSpPr/>
+          <p:nvPr/>
+        </p:nvSpPr>
+        <p:spPr>
+          <a:xfrm>
+            <a:off x="9052560" y="1828800"/>
+            <a:ext cx="2560320" cy="2377440"/>
+          </a:xfrm>
+          <a:prstGeom prst="roundRect">
+            <a:avLst>
+              <a:gd name="adj" fmla="val 3077"/>
+            </a:avLst>
+          </a:prstGeom>
+          <a:solidFill>
+            <a:srgbClr val="1E232C"/>
+          </a:solidFill>
+          <a:ln/>
+        </p:spPr>
+      </p:sp>
+      <p:sp>
+        <p:nvSpPr>
+          <p:cNvPr id="23" name="Text 21"/>
+          <p:cNvSpPr/>
+          <p:nvPr/>
+        </p:nvSpPr>
+        <p:spPr>
+          <a:xfrm>
+            <a:off x="9235440" y="2011680"/>
+            <a:ext cx="548640" cy="548640"/>
+          </a:xfrm>
+          <a:prstGeom prst="roundRect">
+            <a:avLst>
+              <a:gd name="adj" fmla="val 50000"/>
             </a:avLst>
           </a:prstGeom>
           <a:solidFill>
@@ -2341,7 +2956,7 @@
               <a:buNone/>
             </a:pPr>
             <a:r>
-              <a:rPr lang="en-US" sz="1700" b="1" dirty="0">
+              <a:rPr lang="en-US" sz="1800" b="1" dirty="0">
                 <a:solidFill>
                   <a:srgbClr val="13161C"/>
                 </a:solidFill>
@@ -2349,38 +2964,77 @@
                 <a:ea typeface="Courier New" pitchFamily="34" charset="-122"/>
                 <a:cs typeface="Courier New" pitchFamily="34" charset="-120"/>
               </a:rPr>
-              <a:t>Ex 1</a:t>
-            </a:r>
-            <a:endParaRPr lang="en-US" sz="1700" dirty="0"/>
-          </a:p>
-        </p:txBody>
-      </p:sp>
-      <p:sp>
-        <p:nvSpPr>
-          <p:cNvPr id="10" name="Text 8"/>
-          <p:cNvSpPr/>
-          <p:nvPr/>
-        </p:nvSpPr>
-        <p:spPr>
-          <a:xfrm>
-            <a:off x="7909560" y="1773936"/>
-            <a:ext cx="3474720" cy="822960"/>
-          </a:xfrm>
-          <a:prstGeom prst="rect">
-            <a:avLst/>
-          </a:prstGeom>
-          <a:noFill/>
-          <a:ln/>
-        </p:spPr>
-        <p:txBody>
-          <a:bodyPr wrap="square" lIns="0" tIns="0" rIns="0" bIns="0" rtlCol="0" anchor="t"/>
-          <a:lstStyle/>
-          <a:p>
-            <a:pPr indent="0" marL="0">
-              <a:buNone/>
-            </a:pPr>
-            <a:r>
-              <a:rPr lang="en-US" sz="1700" b="1" dirty="0">
+              <a:t>4</a:t>
+            </a:r>
+            <a:endParaRPr lang="en-US" sz="1800" dirty="0"/>
+          </a:p>
+        </p:txBody>
+      </p:sp>
+      <p:sp>
+        <p:nvSpPr>
+          <p:cNvPr id="24" name="Text 22"/>
+          <p:cNvSpPr/>
+          <p:nvPr/>
+        </p:nvSpPr>
+        <p:spPr>
+          <a:xfrm>
+            <a:off x="9235440" y="2697480"/>
+            <a:ext cx="2194560" cy="457200"/>
+          </a:xfrm>
+          <a:prstGeom prst="rect">
+            <a:avLst/>
+          </a:prstGeom>
+          <a:noFill/>
+          <a:ln/>
+        </p:spPr>
+        <p:txBody>
+          <a:bodyPr wrap="square" lIns="0" tIns="0" rIns="0" bIns="0" rtlCol="0" anchor="ctr"/>
+          <a:lstStyle/>
+          <a:p>
+            <a:pPr indent="0" marL="0">
+              <a:buNone/>
+            </a:pPr>
+            <a:r>
+              <a:rPr lang="en-US" sz="1400" b="1" dirty="0">
+                <a:solidFill>
+                  <a:srgbClr val="8CC63F"/>
+                </a:solidFill>
+                <a:latin typeface="Courier New" pitchFamily="34" charset="0"/>
+                <a:ea typeface="Courier New" pitchFamily="34" charset="-122"/>
+                <a:cs typeface="Courier New" pitchFamily="34" charset="-120"/>
+              </a:rPr>
+              <a:t>각 테스트</a:t>
+            </a:r>
+            <a:endParaRPr lang="en-US" sz="1400" dirty="0"/>
+          </a:p>
+        </p:txBody>
+      </p:sp>
+      <p:sp>
+        <p:nvSpPr>
+          <p:cNvPr id="25" name="Text 23"/>
+          <p:cNvSpPr/>
+          <p:nvPr/>
+        </p:nvSpPr>
+        <p:spPr>
+          <a:xfrm>
+            <a:off x="9235440" y="3108960"/>
+            <a:ext cx="2194560" cy="365760"/>
+          </a:xfrm>
+          <a:prstGeom prst="rect">
+            <a:avLst/>
+          </a:prstGeom>
+          <a:noFill/>
+          <a:ln/>
+        </p:spPr>
+        <p:txBody>
+          <a:bodyPr wrap="square" lIns="0" tIns="0" rIns="0" bIns="0" rtlCol="0" anchor="ctr"/>
+          <a:lstStyle/>
+          <a:p>
+            <a:pPr indent="0" marL="0">
+              <a:buNone/>
+            </a:pPr>
+            <a:r>
+              <a:rPr lang="en-US" sz="1400" b="1" dirty="0">
                 <a:solidFill>
                   <a:srgbClr val="E8EDF2"/>
                 </a:solidFill>
@@ -2388,22 +3042,22 @@
                 <a:ea typeface="Malgun Gothic" pitchFamily="34" charset="-122"/>
                 <a:cs typeface="Malgun Gothic" pitchFamily="34" charset="-120"/>
               </a:rPr>
-              <a:t>빌드하기</a:t>
-            </a:r>
-            <a:endParaRPr lang="en-US" sz="1700" dirty="0"/>
-          </a:p>
-        </p:txBody>
-      </p:sp>
-      <p:sp>
-        <p:nvSpPr>
-          <p:cNvPr id="11" name="Text 9"/>
-          <p:cNvSpPr/>
-          <p:nvPr/>
-        </p:nvSpPr>
-        <p:spPr>
-          <a:xfrm>
-            <a:off x="6565392" y="2651760"/>
-            <a:ext cx="4791456" cy="731520"/>
+              <a:t>커널 실행</a:t>
+            </a:r>
+            <a:endParaRPr lang="en-US" sz="1400" dirty="0"/>
+          </a:p>
+        </p:txBody>
+      </p:sp>
+      <p:sp>
+        <p:nvSpPr>
+          <p:cNvPr id="26" name="Text 24"/>
+          <p:cNvSpPr/>
+          <p:nvPr/>
+        </p:nvSpPr>
+        <p:spPr>
+          <a:xfrm>
+            <a:off x="9235440" y="3474720"/>
+            <a:ext cx="2194560" cy="640080"/>
           </a:xfrm>
           <a:prstGeom prst="rect">
             <a:avLst/>
@@ -2422,7 +3076,7 @@
               <a:buNone/>
             </a:pPr>
             <a:r>
-              <a:rPr lang="en-US" sz="1400" dirty="0">
+              <a:rPr lang="en-US" sz="1150" dirty="0">
                 <a:solidFill>
                   <a:srgbClr val="9AA6B2"/>
                 </a:solidFill>
@@ -2430,103 +3084,38 @@
                 <a:ea typeface="Malgun Gothic" pitchFamily="34" charset="-122"/>
                 <a:cs typeface="Malgun Gothic" pitchFamily="34" charset="-120"/>
               </a:rPr>
-              <a:t>cmake + make로 cuda_memtest 생성</a:t>
-            </a:r>
-            <a:endParaRPr lang="en-US" sz="1400" dirty="0"/>
-          </a:p>
-        </p:txBody>
-      </p:sp>
-      <p:sp>
-        <p:nvSpPr>
-          <p:cNvPr id="12" name="Shape 10"/>
-          <p:cNvSpPr/>
-          <p:nvPr/>
-        </p:nvSpPr>
-        <p:spPr>
-          <a:xfrm>
-            <a:off x="548640" y="3840480"/>
-            <a:ext cx="5303520" cy="1965960"/>
-          </a:xfrm>
-          <a:prstGeom prst="roundRect">
-            <a:avLst>
-              <a:gd name="adj" fmla="val 3721"/>
-            </a:avLst>
-          </a:prstGeom>
-          <a:solidFill>
-            <a:srgbClr val="1E232C"/>
-          </a:solidFill>
-          <a:ln/>
-        </p:spPr>
-      </p:sp>
-      <p:sp>
-        <p:nvSpPr>
-          <p:cNvPr id="13" name="Text 11"/>
-          <p:cNvSpPr/>
-          <p:nvPr/>
-        </p:nvSpPr>
-        <p:spPr>
-          <a:xfrm>
-            <a:off x="804672" y="4041648"/>
-            <a:ext cx="1188720" cy="502920"/>
-          </a:xfrm>
-          <a:prstGeom prst="roundRect">
-            <a:avLst>
-              <a:gd name="adj" fmla="val 14545"/>
-            </a:avLst>
-          </a:prstGeom>
-          <a:solidFill>
-            <a:srgbClr val="E0A458"/>
-          </a:solidFill>
-          <a:ln/>
-        </p:spPr>
-        <p:txBody>
-          <a:bodyPr wrap="square" rtlCol="0" anchor="ctr"/>
+              <a:t>write → read → check (세션 1~2)</a:t>
+            </a:r>
+            <a:endParaRPr lang="en-US" sz="1150" dirty="0"/>
+          </a:p>
+        </p:txBody>
+      </p:sp>
+      <p:sp>
+        <p:nvSpPr>
+          <p:cNvPr id="27" name="Text 25"/>
+          <p:cNvSpPr/>
+          <p:nvPr/>
+        </p:nvSpPr>
+        <p:spPr>
+          <a:xfrm>
+            <a:off x="548640" y="4754880"/>
+            <a:ext cx="11064240" cy="457200"/>
+          </a:xfrm>
+          <a:prstGeom prst="rect">
+            <a:avLst/>
+          </a:prstGeom>
+          <a:noFill/>
+          <a:ln/>
+        </p:spPr>
+        <p:txBody>
+          <a:bodyPr wrap="square" lIns="0" tIns="0" rIns="0" bIns="0" rtlCol="0" anchor="ctr"/>
           <a:lstStyle/>
           <a:p>
             <a:pPr algn="ctr" indent="0" marL="0">
               <a:buNone/>
             </a:pPr>
             <a:r>
-              <a:rPr lang="en-US" sz="1700" b="1" dirty="0">
-                <a:solidFill>
-                  <a:srgbClr val="13161C"/>
-                </a:solidFill>
-                <a:latin typeface="Courier New" pitchFamily="34" charset="0"/>
-                <a:ea typeface="Courier New" pitchFamily="34" charset="-122"/>
-                <a:cs typeface="Courier New" pitchFamily="34" charset="-120"/>
-              </a:rPr>
-              <a:t>Ex 2</a:t>
-            </a:r>
-            <a:endParaRPr lang="en-US" sz="1700" dirty="0"/>
-          </a:p>
-        </p:txBody>
-      </p:sp>
-      <p:sp>
-        <p:nvSpPr>
-          <p:cNvPr id="14" name="Text 12"/>
-          <p:cNvSpPr/>
-          <p:nvPr/>
-        </p:nvSpPr>
-        <p:spPr>
-          <a:xfrm>
-            <a:off x="2148840" y="4059936"/>
-            <a:ext cx="3474720" cy="822960"/>
-          </a:xfrm>
-          <a:prstGeom prst="rect">
-            <a:avLst/>
-          </a:prstGeom>
-          <a:noFill/>
-          <a:ln/>
-        </p:spPr>
-        <p:txBody>
-          <a:bodyPr wrap="square" lIns="0" tIns="0" rIns="0" bIns="0" rtlCol="0" anchor="t"/>
-          <a:lstStyle/>
-          <a:p>
-            <a:pPr indent="0" marL="0">
-              <a:buNone/>
-            </a:pPr>
-            <a:r>
-              <a:rPr lang="en-US" sz="1700" b="1" dirty="0">
+              <a:rPr lang="en-US" sz="1500" dirty="0">
                 <a:solidFill>
                   <a:srgbClr val="E8EDF2"/>
                 </a:solidFill>
@@ -2534,236 +3123,9 @@
                 <a:ea typeface="Malgun Gothic" pitchFamily="34" charset="-122"/>
                 <a:cs typeface="Malgun Gothic" pitchFamily="34" charset="-120"/>
               </a:rPr>
-              <a:t>테스트 목록 보기</a:t>
-            </a:r>
-            <a:endParaRPr lang="en-US" sz="1700" dirty="0"/>
-          </a:p>
-        </p:txBody>
-      </p:sp>
-      <p:sp>
-        <p:nvSpPr>
-          <p:cNvPr id="15" name="Text 13"/>
-          <p:cNvSpPr/>
-          <p:nvPr/>
-        </p:nvSpPr>
-        <p:spPr>
-          <a:xfrm>
-            <a:off x="804672" y="4937760"/>
-            <a:ext cx="4791456" cy="731520"/>
-          </a:xfrm>
-          <a:prstGeom prst="rect">
-            <a:avLst/>
-          </a:prstGeom>
-          <a:noFill/>
-          <a:ln/>
-        </p:spPr>
-        <p:txBody>
-          <a:bodyPr wrap="square" lIns="0" tIns="0" rIns="0" bIns="0" rtlCol="0" anchor="t"/>
-          <a:lstStyle/>
-          <a:p>
-            <a:pPr indent="0" marL="0">
-              <a:lnSpc>
-                <a:spcPct val="110000"/>
-              </a:lnSpc>
-              <a:buNone/>
-            </a:pPr>
-            <a:r>
-              <a:rPr lang="en-US" sz="1400" dirty="0">
-                <a:solidFill>
-                  <a:srgbClr val="9AA6B2"/>
-                </a:solidFill>
-                <a:latin typeface="Malgun Gothic" pitchFamily="34" charset="0"/>
-                <a:ea typeface="Malgun Gothic" pitchFamily="34" charset="-122"/>
-                <a:cs typeface="Malgun Gothic" pitchFamily="34" charset="-120"/>
-              </a:rPr>
-              <a:t>--list_tests 로 11개 테스트 확인</a:t>
-            </a:r>
-            <a:endParaRPr lang="en-US" sz="1400" dirty="0"/>
-          </a:p>
-        </p:txBody>
-      </p:sp>
-      <p:sp>
-        <p:nvSpPr>
-          <p:cNvPr id="16" name="Shape 14"/>
-          <p:cNvSpPr/>
-          <p:nvPr/>
-        </p:nvSpPr>
-        <p:spPr>
-          <a:xfrm>
-            <a:off x="6309360" y="3840480"/>
-            <a:ext cx="5303520" cy="1965960"/>
-          </a:xfrm>
-          <a:prstGeom prst="roundRect">
-            <a:avLst>
-              <a:gd name="adj" fmla="val 3721"/>
-            </a:avLst>
-          </a:prstGeom>
-          <a:solidFill>
-            <a:srgbClr val="1E232C"/>
-          </a:solidFill>
-          <a:ln/>
-        </p:spPr>
-      </p:sp>
-      <p:sp>
-        <p:nvSpPr>
-          <p:cNvPr id="17" name="Text 15"/>
-          <p:cNvSpPr/>
-          <p:nvPr/>
-        </p:nvSpPr>
-        <p:spPr>
-          <a:xfrm>
-            <a:off x="6565392" y="4041648"/>
-            <a:ext cx="1188720" cy="502920"/>
-          </a:xfrm>
-          <a:prstGeom prst="roundRect">
-            <a:avLst>
-              <a:gd name="adj" fmla="val 14545"/>
-            </a:avLst>
-          </a:prstGeom>
-          <a:solidFill>
-            <a:srgbClr val="8CC63F"/>
-          </a:solidFill>
-          <a:ln/>
-        </p:spPr>
-        <p:txBody>
-          <a:bodyPr wrap="square" rtlCol="0" anchor="ctr"/>
-          <a:lstStyle/>
-          <a:p>
-            <a:pPr algn="ctr" indent="0" marL="0">
-              <a:buNone/>
-            </a:pPr>
-            <a:r>
-              <a:rPr lang="en-US" sz="1700" b="1" dirty="0">
-                <a:solidFill>
-                  <a:srgbClr val="13161C"/>
-                </a:solidFill>
-                <a:latin typeface="Courier New" pitchFamily="34" charset="0"/>
-                <a:ea typeface="Courier New" pitchFamily="34" charset="-122"/>
-                <a:cs typeface="Courier New" pitchFamily="34" charset="-120"/>
-              </a:rPr>
-              <a:t>Ex 3</a:t>
-            </a:r>
-            <a:endParaRPr lang="en-US" sz="1700" dirty="0"/>
-          </a:p>
-        </p:txBody>
-      </p:sp>
-      <p:sp>
-        <p:nvSpPr>
-          <p:cNvPr id="18" name="Text 16"/>
-          <p:cNvSpPr/>
-          <p:nvPr/>
-        </p:nvSpPr>
-        <p:spPr>
-          <a:xfrm>
-            <a:off x="7909560" y="4059936"/>
-            <a:ext cx="3474720" cy="822960"/>
-          </a:xfrm>
-          <a:prstGeom prst="rect">
-            <a:avLst/>
-          </a:prstGeom>
-          <a:noFill/>
-          <a:ln/>
-        </p:spPr>
-        <p:txBody>
-          <a:bodyPr wrap="square" lIns="0" tIns="0" rIns="0" bIns="0" rtlCol="0" anchor="t"/>
-          <a:lstStyle/>
-          <a:p>
-            <a:pPr indent="0" marL="0">
-              <a:buNone/>
-            </a:pPr>
-            <a:r>
-              <a:rPr lang="en-US" sz="1700" b="1" dirty="0">
-                <a:solidFill>
-                  <a:srgbClr val="E8EDF2"/>
-                </a:solidFill>
-                <a:latin typeface="Malgun Gothic" pitchFamily="34" charset="0"/>
-                <a:ea typeface="Malgun Gothic" pitchFamily="34" charset="-122"/>
-                <a:cs typeface="Malgun Gothic" pitchFamily="34" charset="-120"/>
-              </a:rPr>
-              <a:t>첫 실행</a:t>
-            </a:r>
-            <a:endParaRPr lang="en-US" sz="1700" dirty="0"/>
-          </a:p>
-        </p:txBody>
-      </p:sp>
-      <p:sp>
-        <p:nvSpPr>
-          <p:cNvPr id="19" name="Text 17"/>
-          <p:cNvSpPr/>
-          <p:nvPr/>
-        </p:nvSpPr>
-        <p:spPr>
-          <a:xfrm>
-            <a:off x="6565392" y="4937760"/>
-            <a:ext cx="4791456" cy="731520"/>
-          </a:xfrm>
-          <a:prstGeom prst="rect">
-            <a:avLst/>
-          </a:prstGeom>
-          <a:noFill/>
-          <a:ln/>
-        </p:spPr>
-        <p:txBody>
-          <a:bodyPr wrap="square" lIns="0" tIns="0" rIns="0" bIns="0" rtlCol="0" anchor="t"/>
-          <a:lstStyle/>
-          <a:p>
-            <a:pPr indent="0" marL="0">
-              <a:lnSpc>
-                <a:spcPct val="110000"/>
-              </a:lnSpc>
-              <a:buNone/>
-            </a:pPr>
-            <a:r>
-              <a:rPr lang="en-US" sz="1400" dirty="0">
-                <a:solidFill>
-                  <a:srgbClr val="9AA6B2"/>
-                </a:solidFill>
-                <a:latin typeface="Malgun Gothic" pitchFamily="34" charset="0"/>
-                <a:ea typeface="Malgun Gothic" pitchFamily="34" charset="-122"/>
-                <a:cs typeface="Malgun Gothic" pitchFamily="34" charset="-120"/>
-              </a:rPr>
-              <a:t>--stress 로 GPU 메모리 실제 검사</a:t>
-            </a:r>
-            <a:endParaRPr lang="en-US" sz="1400" dirty="0"/>
-          </a:p>
-        </p:txBody>
-      </p:sp>
-      <p:sp>
-        <p:nvSpPr>
-          <p:cNvPr id="20" name="Text 18"/>
-          <p:cNvSpPr/>
-          <p:nvPr/>
-        </p:nvSpPr>
-        <p:spPr>
-          <a:xfrm>
-            <a:off x="548640" y="5943600"/>
-            <a:ext cx="11064240" cy="365760"/>
-          </a:xfrm>
-          <a:prstGeom prst="rect">
-            <a:avLst/>
-          </a:prstGeom>
-          <a:noFill/>
-          <a:ln/>
-        </p:spPr>
-        <p:txBody>
-          <a:bodyPr wrap="square" lIns="0" tIns="0" rIns="0" bIns="0" rtlCol="0" anchor="ctr"/>
-          <a:lstStyle/>
-          <a:p>
-            <a:pPr algn="ctr" indent="0" marL="0">
-              <a:buNone/>
-            </a:pPr>
-            <a:r>
-              <a:rPr lang="en-US" sz="1300" i="1" dirty="0">
-                <a:solidFill>
-                  <a:srgbClr val="9AA6B2"/>
-                </a:solidFill>
-                <a:latin typeface="Malgun Gothic" pitchFamily="34" charset="0"/>
-                <a:ea typeface="Malgun Gothic" pitchFamily="34" charset="-122"/>
-                <a:cs typeface="Malgun Gothic" pitchFamily="34" charset="-120"/>
-              </a:rPr>
-              <a:t>GPU가 없다면 Google Colab(런타임→GPU)으로 진행할 수 있습니다.</a:t>
-            </a:r>
-            <a:endParaRPr lang="en-US" sz="1300" dirty="0"/>
+              <a:t>이 흐름의 각 단계를 앞으로 5회에 걸쳐 안쪽까지 파고듭니다. 오늘은 지도만 봐 두세요.</a:t>
+            </a:r>
+            <a:endParaRPr lang="en-US" sz="1500" dirty="0"/>
           </a:p>
         </p:txBody>
       </p:sp>
@@ -2807,6 +3169,743 @@
         </p:nvSpPr>
         <p:spPr>
           <a:xfrm>
+            <a:off x="548640" y="411480"/>
+            <a:ext cx="640080" cy="640080"/>
+          </a:xfrm>
+          <a:prstGeom prst="roundRect">
+            <a:avLst>
+              <a:gd name="adj" fmla="val 12857"/>
+            </a:avLst>
+          </a:prstGeom>
+          <a:solidFill>
+            <a:srgbClr val="8CC63F"/>
+          </a:solidFill>
+          <a:ln/>
+        </p:spPr>
+        <p:txBody>
+          <a:bodyPr wrap="square" rtlCol="0" anchor="ctr"/>
+          <a:lstStyle/>
+          <a:p>
+            <a:pPr algn="ctr" indent="0" marL="0">
+              <a:buNone/>
+            </a:pPr>
+            <a:r>
+              <a:rPr lang="en-US" sz="2200" b="1" dirty="0">
+                <a:solidFill>
+                  <a:srgbClr val="13161C"/>
+                </a:solidFill>
+                <a:latin typeface="Courier New" pitchFamily="34" charset="0"/>
+                <a:ea typeface="Courier New" pitchFamily="34" charset="-122"/>
+                <a:cs typeface="Courier New" pitchFamily="34" charset="-120"/>
+              </a:rPr>
+              <a:t>8</a:t>
+            </a:r>
+            <a:endParaRPr lang="en-US" sz="2200" dirty="0"/>
+          </a:p>
+        </p:txBody>
+      </p:sp>
+      <p:sp>
+        <p:nvSpPr>
+          <p:cNvPr id="3" name="Text 1"/>
+          <p:cNvSpPr/>
+          <p:nvPr/>
+        </p:nvSpPr>
+        <p:spPr>
+          <a:xfrm>
+            <a:off x="1325880" y="384048"/>
+            <a:ext cx="10287000" cy="694944"/>
+          </a:xfrm>
+          <a:prstGeom prst="rect">
+            <a:avLst/>
+          </a:prstGeom>
+          <a:noFill/>
+          <a:ln/>
+        </p:spPr>
+        <p:txBody>
+          <a:bodyPr wrap="square" lIns="0" tIns="0" rIns="0" bIns="0" rtlCol="0" anchor="ctr"/>
+          <a:lstStyle/>
+          <a:p>
+            <a:pPr algn="l" indent="0" marL="0">
+              <a:buNone/>
+            </a:pPr>
+            <a:r>
+              <a:rPr lang="en-US" sz="3000" b="1" dirty="0">
+                <a:solidFill>
+                  <a:srgbClr val="E8EDF2"/>
+                </a:solidFill>
+                <a:latin typeface="Malgun Gothic" pitchFamily="34" charset="0"/>
+                <a:ea typeface="Malgun Gothic" pitchFamily="34" charset="-122"/>
+                <a:cs typeface="Malgun Gothic" pitchFamily="34" charset="-120"/>
+              </a:rPr>
+              <a:t>실습 미리보기 · Lab 0</a:t>
+            </a:r>
+            <a:endParaRPr lang="en-US" sz="3000" dirty="0"/>
+          </a:p>
+        </p:txBody>
+      </p:sp>
+      <p:sp>
+        <p:nvSpPr>
+          <p:cNvPr id="4" name="Shape 2"/>
+          <p:cNvSpPr/>
+          <p:nvPr/>
+        </p:nvSpPr>
+        <p:spPr>
+          <a:xfrm>
+            <a:off x="548640" y="1554480"/>
+            <a:ext cx="5303520" cy="1965960"/>
+          </a:xfrm>
+          <a:prstGeom prst="roundRect">
+            <a:avLst>
+              <a:gd name="adj" fmla="val 3721"/>
+            </a:avLst>
+          </a:prstGeom>
+          <a:solidFill>
+            <a:srgbClr val="1E232C"/>
+          </a:solidFill>
+          <a:ln/>
+        </p:spPr>
+      </p:sp>
+      <p:sp>
+        <p:nvSpPr>
+          <p:cNvPr id="5" name="Text 3"/>
+          <p:cNvSpPr/>
+          <p:nvPr/>
+        </p:nvSpPr>
+        <p:spPr>
+          <a:xfrm>
+            <a:off x="804672" y="1755648"/>
+            <a:ext cx="1188720" cy="502920"/>
+          </a:xfrm>
+          <a:prstGeom prst="roundRect">
+            <a:avLst>
+              <a:gd name="adj" fmla="val 14545"/>
+            </a:avLst>
+          </a:prstGeom>
+          <a:solidFill>
+            <a:srgbClr val="4FB0C6"/>
+          </a:solidFill>
+          <a:ln/>
+        </p:spPr>
+        <p:txBody>
+          <a:bodyPr wrap="square" rtlCol="0" anchor="ctr"/>
+          <a:lstStyle/>
+          <a:p>
+            <a:pPr algn="ctr" indent="0" marL="0">
+              <a:buNone/>
+            </a:pPr>
+            <a:r>
+              <a:rPr lang="en-US" sz="1700" b="1" dirty="0">
+                <a:solidFill>
+                  <a:srgbClr val="13161C"/>
+                </a:solidFill>
+                <a:latin typeface="Courier New" pitchFamily="34" charset="0"/>
+                <a:ea typeface="Courier New" pitchFamily="34" charset="-122"/>
+                <a:cs typeface="Courier New" pitchFamily="34" charset="-120"/>
+              </a:rPr>
+              <a:t>Ex 0</a:t>
+            </a:r>
+            <a:endParaRPr lang="en-US" sz="1700" dirty="0"/>
+          </a:p>
+        </p:txBody>
+      </p:sp>
+      <p:sp>
+        <p:nvSpPr>
+          <p:cNvPr id="6" name="Text 4"/>
+          <p:cNvSpPr/>
+          <p:nvPr/>
+        </p:nvSpPr>
+        <p:spPr>
+          <a:xfrm>
+            <a:off x="2148840" y="1773936"/>
+            <a:ext cx="3474720" cy="822960"/>
+          </a:xfrm>
+          <a:prstGeom prst="rect">
+            <a:avLst/>
+          </a:prstGeom>
+          <a:noFill/>
+          <a:ln/>
+        </p:spPr>
+        <p:txBody>
+          <a:bodyPr wrap="square" lIns="0" tIns="0" rIns="0" bIns="0" rtlCol="0" anchor="t"/>
+          <a:lstStyle/>
+          <a:p>
+            <a:pPr indent="0" marL="0">
+              <a:buNone/>
+            </a:pPr>
+            <a:r>
+              <a:rPr lang="en-US" sz="1700" b="1" dirty="0">
+                <a:solidFill>
+                  <a:srgbClr val="E8EDF2"/>
+                </a:solidFill>
+                <a:latin typeface="Malgun Gothic" pitchFamily="34" charset="0"/>
+                <a:ea typeface="Malgun Gothic" pitchFamily="34" charset="-122"/>
+                <a:cs typeface="Malgun Gothic" pitchFamily="34" charset="-120"/>
+              </a:rPr>
+              <a:t>내 환경 점검</a:t>
+            </a:r>
+            <a:endParaRPr lang="en-US" sz="1700" dirty="0"/>
+          </a:p>
+        </p:txBody>
+      </p:sp>
+      <p:sp>
+        <p:nvSpPr>
+          <p:cNvPr id="7" name="Text 5"/>
+          <p:cNvSpPr/>
+          <p:nvPr/>
+        </p:nvSpPr>
+        <p:spPr>
+          <a:xfrm>
+            <a:off x="804672" y="2651760"/>
+            <a:ext cx="4791456" cy="731520"/>
+          </a:xfrm>
+          <a:prstGeom prst="rect">
+            <a:avLst/>
+          </a:prstGeom>
+          <a:noFill/>
+          <a:ln/>
+        </p:spPr>
+        <p:txBody>
+          <a:bodyPr wrap="square" lIns="0" tIns="0" rIns="0" bIns="0" rtlCol="0" anchor="t"/>
+          <a:lstStyle/>
+          <a:p>
+            <a:pPr indent="0" marL="0">
+              <a:lnSpc>
+                <a:spcPct val="110000"/>
+              </a:lnSpc>
+              <a:buNone/>
+            </a:pPr>
+            <a:r>
+              <a:rPr lang="en-US" sz="1400" dirty="0">
+                <a:solidFill>
+                  <a:srgbClr val="9AA6B2"/>
+                </a:solidFill>
+                <a:latin typeface="Malgun Gothic" pitchFamily="34" charset="0"/>
+                <a:ea typeface="Malgun Gothic" pitchFamily="34" charset="-122"/>
+                <a:cs typeface="Malgun Gothic" pitchFamily="34" charset="-120"/>
+              </a:rPr>
+              <a:t>nvidia-smi · nvcc · cmake 버전 확인</a:t>
+            </a:r>
+            <a:endParaRPr lang="en-US" sz="1400" dirty="0"/>
+          </a:p>
+        </p:txBody>
+      </p:sp>
+      <p:sp>
+        <p:nvSpPr>
+          <p:cNvPr id="8" name="Shape 6"/>
+          <p:cNvSpPr/>
+          <p:nvPr/>
+        </p:nvSpPr>
+        <p:spPr>
+          <a:xfrm>
+            <a:off x="6309360" y="1554480"/>
+            <a:ext cx="5303520" cy="1965960"/>
+          </a:xfrm>
+          <a:prstGeom prst="roundRect">
+            <a:avLst>
+              <a:gd name="adj" fmla="val 3721"/>
+            </a:avLst>
+          </a:prstGeom>
+          <a:solidFill>
+            <a:srgbClr val="1E232C"/>
+          </a:solidFill>
+          <a:ln/>
+        </p:spPr>
+      </p:sp>
+      <p:sp>
+        <p:nvSpPr>
+          <p:cNvPr id="9" name="Text 7"/>
+          <p:cNvSpPr/>
+          <p:nvPr/>
+        </p:nvSpPr>
+        <p:spPr>
+          <a:xfrm>
+            <a:off x="6565392" y="1755648"/>
+            <a:ext cx="1188720" cy="502920"/>
+          </a:xfrm>
+          <a:prstGeom prst="roundRect">
+            <a:avLst>
+              <a:gd name="adj" fmla="val 14545"/>
+            </a:avLst>
+          </a:prstGeom>
+          <a:solidFill>
+            <a:srgbClr val="8CC63F"/>
+          </a:solidFill>
+          <a:ln/>
+        </p:spPr>
+        <p:txBody>
+          <a:bodyPr wrap="square" rtlCol="0" anchor="ctr"/>
+          <a:lstStyle/>
+          <a:p>
+            <a:pPr algn="ctr" indent="0" marL="0">
+              <a:buNone/>
+            </a:pPr>
+            <a:r>
+              <a:rPr lang="en-US" sz="1700" b="1" dirty="0">
+                <a:solidFill>
+                  <a:srgbClr val="13161C"/>
+                </a:solidFill>
+                <a:latin typeface="Courier New" pitchFamily="34" charset="0"/>
+                <a:ea typeface="Courier New" pitchFamily="34" charset="-122"/>
+                <a:cs typeface="Courier New" pitchFamily="34" charset="-120"/>
+              </a:rPr>
+              <a:t>Ex 1</a:t>
+            </a:r>
+            <a:endParaRPr lang="en-US" sz="1700" dirty="0"/>
+          </a:p>
+        </p:txBody>
+      </p:sp>
+      <p:sp>
+        <p:nvSpPr>
+          <p:cNvPr id="10" name="Text 8"/>
+          <p:cNvSpPr/>
+          <p:nvPr/>
+        </p:nvSpPr>
+        <p:spPr>
+          <a:xfrm>
+            <a:off x="7909560" y="1773936"/>
+            <a:ext cx="3474720" cy="822960"/>
+          </a:xfrm>
+          <a:prstGeom prst="rect">
+            <a:avLst/>
+          </a:prstGeom>
+          <a:noFill/>
+          <a:ln/>
+        </p:spPr>
+        <p:txBody>
+          <a:bodyPr wrap="square" lIns="0" tIns="0" rIns="0" bIns="0" rtlCol="0" anchor="t"/>
+          <a:lstStyle/>
+          <a:p>
+            <a:pPr indent="0" marL="0">
+              <a:buNone/>
+            </a:pPr>
+            <a:r>
+              <a:rPr lang="en-US" sz="1700" b="1" dirty="0">
+                <a:solidFill>
+                  <a:srgbClr val="E8EDF2"/>
+                </a:solidFill>
+                <a:latin typeface="Malgun Gothic" pitchFamily="34" charset="0"/>
+                <a:ea typeface="Malgun Gothic" pitchFamily="34" charset="-122"/>
+                <a:cs typeface="Malgun Gothic" pitchFamily="34" charset="-120"/>
+              </a:rPr>
+              <a:t>빌드하기</a:t>
+            </a:r>
+            <a:endParaRPr lang="en-US" sz="1700" dirty="0"/>
+          </a:p>
+        </p:txBody>
+      </p:sp>
+      <p:sp>
+        <p:nvSpPr>
+          <p:cNvPr id="11" name="Text 9"/>
+          <p:cNvSpPr/>
+          <p:nvPr/>
+        </p:nvSpPr>
+        <p:spPr>
+          <a:xfrm>
+            <a:off x="6565392" y="2651760"/>
+            <a:ext cx="4791456" cy="731520"/>
+          </a:xfrm>
+          <a:prstGeom prst="rect">
+            <a:avLst/>
+          </a:prstGeom>
+          <a:noFill/>
+          <a:ln/>
+        </p:spPr>
+        <p:txBody>
+          <a:bodyPr wrap="square" lIns="0" tIns="0" rIns="0" bIns="0" rtlCol="0" anchor="t"/>
+          <a:lstStyle/>
+          <a:p>
+            <a:pPr indent="0" marL="0">
+              <a:lnSpc>
+                <a:spcPct val="110000"/>
+              </a:lnSpc>
+              <a:buNone/>
+            </a:pPr>
+            <a:r>
+              <a:rPr lang="en-US" sz="1400" dirty="0">
+                <a:solidFill>
+                  <a:srgbClr val="9AA6B2"/>
+                </a:solidFill>
+                <a:latin typeface="Malgun Gothic" pitchFamily="34" charset="0"/>
+                <a:ea typeface="Malgun Gothic" pitchFamily="34" charset="-122"/>
+                <a:cs typeface="Malgun Gothic" pitchFamily="34" charset="-120"/>
+              </a:rPr>
+              <a:t>cmake + make로 cuda_memtest 생성</a:t>
+            </a:r>
+            <a:endParaRPr lang="en-US" sz="1400" dirty="0"/>
+          </a:p>
+        </p:txBody>
+      </p:sp>
+      <p:sp>
+        <p:nvSpPr>
+          <p:cNvPr id="12" name="Shape 10"/>
+          <p:cNvSpPr/>
+          <p:nvPr/>
+        </p:nvSpPr>
+        <p:spPr>
+          <a:xfrm>
+            <a:off x="548640" y="3840480"/>
+            <a:ext cx="5303520" cy="1965960"/>
+          </a:xfrm>
+          <a:prstGeom prst="roundRect">
+            <a:avLst>
+              <a:gd name="adj" fmla="val 3721"/>
+            </a:avLst>
+          </a:prstGeom>
+          <a:solidFill>
+            <a:srgbClr val="1E232C"/>
+          </a:solidFill>
+          <a:ln/>
+        </p:spPr>
+      </p:sp>
+      <p:sp>
+        <p:nvSpPr>
+          <p:cNvPr id="13" name="Text 11"/>
+          <p:cNvSpPr/>
+          <p:nvPr/>
+        </p:nvSpPr>
+        <p:spPr>
+          <a:xfrm>
+            <a:off x="804672" y="4041648"/>
+            <a:ext cx="1188720" cy="502920"/>
+          </a:xfrm>
+          <a:prstGeom prst="roundRect">
+            <a:avLst>
+              <a:gd name="adj" fmla="val 14545"/>
+            </a:avLst>
+          </a:prstGeom>
+          <a:solidFill>
+            <a:srgbClr val="E0A458"/>
+          </a:solidFill>
+          <a:ln/>
+        </p:spPr>
+        <p:txBody>
+          <a:bodyPr wrap="square" rtlCol="0" anchor="ctr"/>
+          <a:lstStyle/>
+          <a:p>
+            <a:pPr algn="ctr" indent="0" marL="0">
+              <a:buNone/>
+            </a:pPr>
+            <a:r>
+              <a:rPr lang="en-US" sz="1700" b="1" dirty="0">
+                <a:solidFill>
+                  <a:srgbClr val="13161C"/>
+                </a:solidFill>
+                <a:latin typeface="Courier New" pitchFamily="34" charset="0"/>
+                <a:ea typeface="Courier New" pitchFamily="34" charset="-122"/>
+                <a:cs typeface="Courier New" pitchFamily="34" charset="-120"/>
+              </a:rPr>
+              <a:t>Ex 2</a:t>
+            </a:r>
+            <a:endParaRPr lang="en-US" sz="1700" dirty="0"/>
+          </a:p>
+        </p:txBody>
+      </p:sp>
+      <p:sp>
+        <p:nvSpPr>
+          <p:cNvPr id="14" name="Text 12"/>
+          <p:cNvSpPr/>
+          <p:nvPr/>
+        </p:nvSpPr>
+        <p:spPr>
+          <a:xfrm>
+            <a:off x="2148840" y="4059936"/>
+            <a:ext cx="3474720" cy="822960"/>
+          </a:xfrm>
+          <a:prstGeom prst="rect">
+            <a:avLst/>
+          </a:prstGeom>
+          <a:noFill/>
+          <a:ln/>
+        </p:spPr>
+        <p:txBody>
+          <a:bodyPr wrap="square" lIns="0" tIns="0" rIns="0" bIns="0" rtlCol="0" anchor="t"/>
+          <a:lstStyle/>
+          <a:p>
+            <a:pPr indent="0" marL="0">
+              <a:buNone/>
+            </a:pPr>
+            <a:r>
+              <a:rPr lang="en-US" sz="1700" b="1" dirty="0">
+                <a:solidFill>
+                  <a:srgbClr val="E8EDF2"/>
+                </a:solidFill>
+                <a:latin typeface="Malgun Gothic" pitchFamily="34" charset="0"/>
+                <a:ea typeface="Malgun Gothic" pitchFamily="34" charset="-122"/>
+                <a:cs typeface="Malgun Gothic" pitchFamily="34" charset="-120"/>
+              </a:rPr>
+              <a:t>테스트 목록 보기</a:t>
+            </a:r>
+            <a:endParaRPr lang="en-US" sz="1700" dirty="0"/>
+          </a:p>
+        </p:txBody>
+      </p:sp>
+      <p:sp>
+        <p:nvSpPr>
+          <p:cNvPr id="15" name="Text 13"/>
+          <p:cNvSpPr/>
+          <p:nvPr/>
+        </p:nvSpPr>
+        <p:spPr>
+          <a:xfrm>
+            <a:off x="804672" y="4937760"/>
+            <a:ext cx="4791456" cy="731520"/>
+          </a:xfrm>
+          <a:prstGeom prst="rect">
+            <a:avLst/>
+          </a:prstGeom>
+          <a:noFill/>
+          <a:ln/>
+        </p:spPr>
+        <p:txBody>
+          <a:bodyPr wrap="square" lIns="0" tIns="0" rIns="0" bIns="0" rtlCol="0" anchor="t"/>
+          <a:lstStyle/>
+          <a:p>
+            <a:pPr indent="0" marL="0">
+              <a:lnSpc>
+                <a:spcPct val="110000"/>
+              </a:lnSpc>
+              <a:buNone/>
+            </a:pPr>
+            <a:r>
+              <a:rPr lang="en-US" sz="1400" dirty="0">
+                <a:solidFill>
+                  <a:srgbClr val="9AA6B2"/>
+                </a:solidFill>
+                <a:latin typeface="Malgun Gothic" pitchFamily="34" charset="0"/>
+                <a:ea typeface="Malgun Gothic" pitchFamily="34" charset="-122"/>
+                <a:cs typeface="Malgun Gothic" pitchFamily="34" charset="-120"/>
+              </a:rPr>
+              <a:t>--list_tests 로 11개 테스트 확인</a:t>
+            </a:r>
+            <a:endParaRPr lang="en-US" sz="1400" dirty="0"/>
+          </a:p>
+        </p:txBody>
+      </p:sp>
+      <p:sp>
+        <p:nvSpPr>
+          <p:cNvPr id="16" name="Shape 14"/>
+          <p:cNvSpPr/>
+          <p:nvPr/>
+        </p:nvSpPr>
+        <p:spPr>
+          <a:xfrm>
+            <a:off x="6309360" y="3840480"/>
+            <a:ext cx="5303520" cy="1965960"/>
+          </a:xfrm>
+          <a:prstGeom prst="roundRect">
+            <a:avLst>
+              <a:gd name="adj" fmla="val 3721"/>
+            </a:avLst>
+          </a:prstGeom>
+          <a:solidFill>
+            <a:srgbClr val="1E232C"/>
+          </a:solidFill>
+          <a:ln/>
+        </p:spPr>
+      </p:sp>
+      <p:sp>
+        <p:nvSpPr>
+          <p:cNvPr id="17" name="Text 15"/>
+          <p:cNvSpPr/>
+          <p:nvPr/>
+        </p:nvSpPr>
+        <p:spPr>
+          <a:xfrm>
+            <a:off x="6565392" y="4041648"/>
+            <a:ext cx="1188720" cy="502920"/>
+          </a:xfrm>
+          <a:prstGeom prst="roundRect">
+            <a:avLst>
+              <a:gd name="adj" fmla="val 14545"/>
+            </a:avLst>
+          </a:prstGeom>
+          <a:solidFill>
+            <a:srgbClr val="8CC63F"/>
+          </a:solidFill>
+          <a:ln/>
+        </p:spPr>
+        <p:txBody>
+          <a:bodyPr wrap="square" rtlCol="0" anchor="ctr"/>
+          <a:lstStyle/>
+          <a:p>
+            <a:pPr algn="ctr" indent="0" marL="0">
+              <a:buNone/>
+            </a:pPr>
+            <a:r>
+              <a:rPr lang="en-US" sz="1700" b="1" dirty="0">
+                <a:solidFill>
+                  <a:srgbClr val="13161C"/>
+                </a:solidFill>
+                <a:latin typeface="Courier New" pitchFamily="34" charset="0"/>
+                <a:ea typeface="Courier New" pitchFamily="34" charset="-122"/>
+                <a:cs typeface="Courier New" pitchFamily="34" charset="-120"/>
+              </a:rPr>
+              <a:t>Ex 3</a:t>
+            </a:r>
+            <a:endParaRPr lang="en-US" sz="1700" dirty="0"/>
+          </a:p>
+        </p:txBody>
+      </p:sp>
+      <p:sp>
+        <p:nvSpPr>
+          <p:cNvPr id="18" name="Text 16"/>
+          <p:cNvSpPr/>
+          <p:nvPr/>
+        </p:nvSpPr>
+        <p:spPr>
+          <a:xfrm>
+            <a:off x="7909560" y="4059936"/>
+            <a:ext cx="3474720" cy="822960"/>
+          </a:xfrm>
+          <a:prstGeom prst="rect">
+            <a:avLst/>
+          </a:prstGeom>
+          <a:noFill/>
+          <a:ln/>
+        </p:spPr>
+        <p:txBody>
+          <a:bodyPr wrap="square" lIns="0" tIns="0" rIns="0" bIns="0" rtlCol="0" anchor="t"/>
+          <a:lstStyle/>
+          <a:p>
+            <a:pPr indent="0" marL="0">
+              <a:buNone/>
+            </a:pPr>
+            <a:r>
+              <a:rPr lang="en-US" sz="1700" b="1" dirty="0">
+                <a:solidFill>
+                  <a:srgbClr val="E8EDF2"/>
+                </a:solidFill>
+                <a:latin typeface="Malgun Gothic" pitchFamily="34" charset="0"/>
+                <a:ea typeface="Malgun Gothic" pitchFamily="34" charset="-122"/>
+                <a:cs typeface="Malgun Gothic" pitchFamily="34" charset="-120"/>
+              </a:rPr>
+              <a:t>첫 실행</a:t>
+            </a:r>
+            <a:endParaRPr lang="en-US" sz="1700" dirty="0"/>
+          </a:p>
+        </p:txBody>
+      </p:sp>
+      <p:sp>
+        <p:nvSpPr>
+          <p:cNvPr id="19" name="Text 17"/>
+          <p:cNvSpPr/>
+          <p:nvPr/>
+        </p:nvSpPr>
+        <p:spPr>
+          <a:xfrm>
+            <a:off x="6565392" y="4937760"/>
+            <a:ext cx="4791456" cy="731520"/>
+          </a:xfrm>
+          <a:prstGeom prst="rect">
+            <a:avLst/>
+          </a:prstGeom>
+          <a:noFill/>
+          <a:ln/>
+        </p:spPr>
+        <p:txBody>
+          <a:bodyPr wrap="square" lIns="0" tIns="0" rIns="0" bIns="0" rtlCol="0" anchor="t"/>
+          <a:lstStyle/>
+          <a:p>
+            <a:pPr indent="0" marL="0">
+              <a:lnSpc>
+                <a:spcPct val="110000"/>
+              </a:lnSpc>
+              <a:buNone/>
+            </a:pPr>
+            <a:r>
+              <a:rPr lang="en-US" sz="1400" dirty="0">
+                <a:solidFill>
+                  <a:srgbClr val="9AA6B2"/>
+                </a:solidFill>
+                <a:latin typeface="Malgun Gothic" pitchFamily="34" charset="0"/>
+                <a:ea typeface="Malgun Gothic" pitchFamily="34" charset="-122"/>
+                <a:cs typeface="Malgun Gothic" pitchFamily="34" charset="-120"/>
+              </a:rPr>
+              <a:t>--stress 로 GPU 메모리 실제 검사</a:t>
+            </a:r>
+            <a:endParaRPr lang="en-US" sz="1400" dirty="0"/>
+          </a:p>
+        </p:txBody>
+      </p:sp>
+      <p:sp>
+        <p:nvSpPr>
+          <p:cNvPr id="20" name="Text 18"/>
+          <p:cNvSpPr/>
+          <p:nvPr/>
+        </p:nvSpPr>
+        <p:spPr>
+          <a:xfrm>
+            <a:off x="548640" y="5943600"/>
+            <a:ext cx="11064240" cy="365760"/>
+          </a:xfrm>
+          <a:prstGeom prst="rect">
+            <a:avLst/>
+          </a:prstGeom>
+          <a:noFill/>
+          <a:ln/>
+        </p:spPr>
+        <p:txBody>
+          <a:bodyPr wrap="square" lIns="0" tIns="0" rIns="0" bIns="0" rtlCol="0" anchor="ctr"/>
+          <a:lstStyle/>
+          <a:p>
+            <a:pPr algn="ctr" indent="0" marL="0">
+              <a:buNone/>
+            </a:pPr>
+            <a:r>
+              <a:rPr lang="en-US" sz="1300" i="1" dirty="0">
+                <a:solidFill>
+                  <a:srgbClr val="9AA6B2"/>
+                </a:solidFill>
+                <a:latin typeface="Malgun Gothic" pitchFamily="34" charset="0"/>
+                <a:ea typeface="Malgun Gothic" pitchFamily="34" charset="-122"/>
+                <a:cs typeface="Malgun Gothic" pitchFamily="34" charset="-120"/>
+              </a:rPr>
+              <a:t>GPU가 없다면 Google Colab(런타임→GPU)으로 진행할 수 있습니다.</a:t>
+            </a:r>
+            <a:endParaRPr lang="en-US" sz="1300" dirty="0"/>
+          </a:p>
+        </p:txBody>
+      </p:sp>
+    </p:spTree>
+  </p:cSld>
+  <p:clrMapOvr>
+    <a:masterClrMapping/>
+  </p:clrMapOvr>
+</p:sld>
+</file>
+
+<file path=ppt/slides/slide12.xml><?xml version="1.0" encoding="utf-8"?>
+<p:sld xmlns:a="http://schemas.openxmlformats.org/drawingml/2006/main" xmlns:r="http://schemas.openxmlformats.org/officeDocument/2006/relationships" xmlns:p="http://schemas.openxmlformats.org/presentationml/2006/main">
+  <p:cSld name="Slide 12">
+    <p:bg>
+      <p:bgPr>
+        <a:solidFill>
+          <a:srgbClr val="13161C"/>
+        </a:solidFill>
+      </p:bgPr>
+    </p:bg>
+    <p:spTree>
+      <p:nvGrpSpPr>
+        <p:cNvPr id="1" name=""/>
+        <p:cNvGrpSpPr/>
+        <p:nvPr/>
+      </p:nvGrpSpPr>
+      <p:grpSpPr>
+        <a:xfrm>
+          <a:off x="0" y="0"/>
+          <a:ext cx="0" cy="0"/>
+          <a:chOff x="0" y="0"/>
+          <a:chExt cx="0" cy="0"/>
+        </a:xfrm>
+      </p:grpSpPr>
+      <p:sp>
+        <p:nvSpPr>
+          <p:cNvPr id="2" name="Text 0"/>
+          <p:cNvSpPr/>
+          <p:nvPr/>
+        </p:nvSpPr>
+        <p:spPr>
+          <a:xfrm>
             <a:off x="548640" y="1463040"/>
             <a:ext cx="9144000" cy="457200"/>
           </a:xfrm>
@@ -5844,7 +6943,7 @@
                 <a:ea typeface="Courier New" pitchFamily="34" charset="-122"/>
                 <a:cs typeface="Courier New" pitchFamily="34" charset="-120"/>
               </a:rPr>
-              <a:t>3</a:t>
+              <a:t>2</a:t>
             </a:r>
             <a:endParaRPr lang="en-US" sz="2200" dirty="0"/>
           </a:p>
@@ -5883,7 +6982,7 @@
                 <a:ea typeface="Malgun Gothic" pitchFamily="34" charset="-122"/>
                 <a:cs typeface="Malgun Gothic" pitchFamily="34" charset="-120"/>
               </a:rPr>
-              <a:t>cuda_memtest가 푸는 문제</a:t>
+              <a:t>CUDA 소프트웨어 스택(software stack)</a:t>
             </a:r>
             <a:endParaRPr lang="en-US" sz="3000" dirty="0"/>
           </a:p>
@@ -5897,24 +6996,24 @@
         </p:nvSpPr>
         <p:spPr>
           <a:xfrm>
-            <a:off x="548640" y="1463040"/>
-            <a:ext cx="11064240" cy="457200"/>
-          </a:xfrm>
-          <a:prstGeom prst="rect">
-            <a:avLst/>
-          </a:prstGeom>
-          <a:noFill/>
-          <a:ln/>
-        </p:spPr>
-        <p:txBody>
-          <a:bodyPr wrap="square" lIns="0" tIns="0" rIns="0" bIns="0" rtlCol="0" anchor="ctr"/>
-          <a:lstStyle/>
-          <a:p>
-            <a:pPr indent="0" marL="0">
-              <a:buNone/>
-            </a:pPr>
-            <a:r>
-              <a:rPr lang="en-US" sz="1700" dirty="0">
+            <a:off x="548640" y="1371600"/>
+            <a:ext cx="11064240" cy="411480"/>
+          </a:xfrm>
+          <a:prstGeom prst="rect">
+            <a:avLst/>
+          </a:prstGeom>
+          <a:noFill/>
+          <a:ln/>
+        </p:spPr>
+        <p:txBody>
+          <a:bodyPr wrap="square" lIns="0" tIns="0" rIns="0" bIns="0" rtlCol="0" anchor="ctr"/>
+          <a:lstStyle/>
+          <a:p>
+            <a:pPr indent="0" marL="0">
+              <a:buNone/>
+            </a:pPr>
+            <a:r>
+              <a:rPr lang="en-US" sz="1500" dirty="0">
                 <a:solidFill>
                   <a:srgbClr val="9AA6B2"/>
                 </a:solidFill>
@@ -5922,9 +7021,9 @@
                 <a:ea typeface="Malgun Gothic" pitchFamily="34" charset="-122"/>
                 <a:cs typeface="Malgun Gothic" pitchFamily="34" charset="-120"/>
               </a:rPr>
-              <a:t>GPU 메모리도 고장 납니다. 이 도구는 그 고장을 찾아냅니다.</a:t>
-            </a:r>
-            <a:endParaRPr lang="en-US" sz="1700" dirty="0"/>
+              <a:t>내 코드는 여러 계층 위에서 동작합니다. cudaMalloc 한 줄이 아래로 내려가 GPU까지 도달합니다.</a:t>
+            </a:r>
+            <a:endParaRPr lang="en-US" sz="1500" dirty="0"/>
           </a:p>
         </p:txBody>
       </p:sp>
@@ -5936,18 +7035,23 @@
         </p:nvSpPr>
         <p:spPr>
           <a:xfrm>
-            <a:off x="548640" y="2148840"/>
-            <a:ext cx="5349240" cy="2377440"/>
+            <a:off x="548640" y="1920240"/>
+            <a:ext cx="7680960" cy="932688"/>
           </a:xfrm>
           <a:prstGeom prst="roundRect">
             <a:avLst>
-              <a:gd name="adj" fmla="val 3077"/>
+              <a:gd name="adj" fmla="val 5882"/>
             </a:avLst>
           </a:prstGeom>
           <a:solidFill>
             <a:srgbClr val="1E232C"/>
           </a:solidFill>
-          <a:ln/>
+          <a:ln w="19050">
+            <a:solidFill>
+              <a:srgbClr val="8CC63F"/>
+            </a:solidFill>
+            <a:prstDash val="solid"/>
+          </a:ln>
         </p:spPr>
       </p:sp>
       <p:sp>
@@ -5958,24 +7062,24 @@
         </p:nvSpPr>
         <p:spPr>
           <a:xfrm>
-            <a:off x="822960" y="2377440"/>
-            <a:ext cx="4800600" cy="457200"/>
-          </a:xfrm>
-          <a:prstGeom prst="rect">
-            <a:avLst/>
-          </a:prstGeom>
-          <a:noFill/>
-          <a:ln/>
-        </p:spPr>
-        <p:txBody>
-          <a:bodyPr wrap="square" lIns="0" tIns="0" rIns="0" bIns="0" rtlCol="0" anchor="ctr"/>
-          <a:lstStyle/>
-          <a:p>
-            <a:pPr indent="0" marL="0">
-              <a:buNone/>
-            </a:pPr>
-            <a:r>
-              <a:rPr lang="en-US" sz="2000" b="1" dirty="0">
+            <a:off x="822960" y="2048256"/>
+            <a:ext cx="7132320" cy="384048"/>
+          </a:xfrm>
+          <a:prstGeom prst="rect">
+            <a:avLst/>
+          </a:prstGeom>
+          <a:noFill/>
+          <a:ln/>
+        </p:spPr>
+        <p:txBody>
+          <a:bodyPr wrap="square" lIns="0" tIns="0" rIns="0" bIns="0" rtlCol="0" anchor="ctr"/>
+          <a:lstStyle/>
+          <a:p>
+            <a:pPr indent="0" marL="0">
+              <a:buNone/>
+            </a:pPr>
+            <a:r>
+              <a:rPr lang="en-US" sz="1600" b="1" dirty="0">
                 <a:solidFill>
                   <a:srgbClr val="8CC63F"/>
                 </a:solidFill>
@@ -5983,9 +7087,9 @@
                 <a:ea typeface="Malgun Gothic" pitchFamily="34" charset="-122"/>
                 <a:cs typeface="Malgun Gothic" pitchFamily="34" charset="-120"/>
               </a:rPr>
-              <a:t>하드 오류(hard error)</a:t>
-            </a:r>
-            <a:endParaRPr lang="en-US" sz="2000" dirty="0"/>
+              <a:t>애플리케이션(Application)</a:t>
+            </a:r>
+            <a:endParaRPr lang="en-US" sz="1600" dirty="0"/>
           </a:p>
         </p:txBody>
       </p:sp>
@@ -5997,78 +7101,60 @@
         </p:nvSpPr>
         <p:spPr>
           <a:xfrm>
-            <a:off x="822960" y="2834640"/>
-            <a:ext cx="4800600" cy="411480"/>
-          </a:xfrm>
-          <a:prstGeom prst="rect">
-            <a:avLst/>
-          </a:prstGeom>
-          <a:noFill/>
-          <a:ln/>
-        </p:spPr>
-        <p:txBody>
-          <a:bodyPr wrap="square" lIns="0" tIns="0" rIns="0" bIns="0" rtlCol="0" anchor="ctr"/>
-          <a:lstStyle/>
-          <a:p>
-            <a:pPr indent="0" marL="0">
-              <a:buNone/>
-            </a:pPr>
-            <a:r>
-              <a:rPr lang="en-US" sz="1500" b="1" dirty="0">
-                <a:solidFill>
-                  <a:srgbClr val="9AA6B2"/>
-                </a:solidFill>
-                <a:latin typeface="Malgun Gothic" pitchFamily="34" charset="0"/>
-                <a:ea typeface="Malgun Gothic" pitchFamily="34" charset="-122"/>
-                <a:cs typeface="Malgun Gothic" pitchFamily="34" charset="-120"/>
-              </a:rPr>
-              <a:t>영구적 고장</a:t>
-            </a:r>
-            <a:endParaRPr lang="en-US" sz="1500" dirty="0"/>
-          </a:p>
-        </p:txBody>
-      </p:sp>
-      <p:sp>
-        <p:nvSpPr>
-          <p:cNvPr id="8" name="Text 6"/>
-          <p:cNvSpPr/>
-          <p:nvPr/>
-        </p:nvSpPr>
-        <p:spPr>
-          <a:xfrm>
-            <a:off x="822960" y="3337560"/>
-            <a:ext cx="4800600" cy="1005840"/>
-          </a:xfrm>
-          <a:prstGeom prst="rect">
-            <a:avLst/>
-          </a:prstGeom>
-          <a:noFill/>
-          <a:ln/>
-        </p:spPr>
-        <p:txBody>
-          <a:bodyPr wrap="square" lIns="0" tIns="0" rIns="0" bIns="0" rtlCol="0" anchor="t"/>
-          <a:lstStyle/>
-          <a:p>
-            <a:pPr indent="0" marL="0">
-              <a:lnSpc>
-                <a:spcPct val="120000"/>
-              </a:lnSpc>
-              <a:buNone/>
-            </a:pPr>
-            <a:r>
-              <a:rPr lang="en-US" sz="1500" dirty="0">
+            <a:off x="822960" y="2432304"/>
+            <a:ext cx="7132320" cy="329184"/>
+          </a:xfrm>
+          <a:prstGeom prst="rect">
+            <a:avLst/>
+          </a:prstGeom>
+          <a:noFill/>
+          <a:ln/>
+        </p:spPr>
+        <p:txBody>
+          <a:bodyPr wrap="square" lIns="0" tIns="0" rIns="0" bIns="0" rtlCol="0" anchor="ctr"/>
+          <a:lstStyle/>
+          <a:p>
+            <a:pPr indent="0" marL="0">
+              <a:buNone/>
+            </a:pPr>
+            <a:r>
+              <a:rPr lang="en-US" sz="1150" dirty="0">
                 <a:solidFill>
                   <a:srgbClr val="E8EDF2"/>
                 </a:solidFill>
-                <a:latin typeface="Malgun Gothic" pitchFamily="34" charset="0"/>
-                <a:ea typeface="Malgun Gothic" pitchFamily="34" charset="-122"/>
-                <a:cs typeface="Malgun Gothic" pitchFamily="34" charset="-120"/>
-              </a:rPr>
-              <a:t>제조 결함·노후화로 특정 비트가 항상 틀림. 재부팅해도 그대로.</a:t>
-            </a:r>
-            <a:endParaRPr lang="en-US" sz="1500" dirty="0"/>
-          </a:p>
-        </p:txBody>
+                <a:latin typeface="Courier New" pitchFamily="34" charset="0"/>
+                <a:ea typeface="Courier New" pitchFamily="34" charset="-122"/>
+                <a:cs typeface="Courier New" pitchFamily="34" charset="-120"/>
+              </a:rPr>
+              <a:t>cuda_memtest — main(), tests.cpp의 커널·테스트</a:t>
+            </a:r>
+            <a:endParaRPr lang="en-US" sz="1150" dirty="0"/>
+          </a:p>
+        </p:txBody>
+      </p:sp>
+      <p:sp>
+        <p:nvSpPr>
+          <p:cNvPr id="8" name="Shape 6"/>
+          <p:cNvSpPr/>
+          <p:nvPr/>
+        </p:nvSpPr>
+        <p:spPr>
+          <a:xfrm>
+            <a:off x="4389120" y="2852928"/>
+            <a:ext cx="0" cy="73152"/>
+          </a:xfrm>
+          <a:prstGeom prst="line">
+            <a:avLst/>
+          </a:prstGeom>
+          <a:noFill/>
+          <a:ln w="19050">
+            <a:solidFill>
+              <a:srgbClr val="9AA6B2"/>
+            </a:solidFill>
+            <a:prstDash val="solid"/>
+            <a:tailEnd type="triangle"/>
+          </a:ln>
+        </p:spPr>
       </p:sp>
       <p:sp>
         <p:nvSpPr>
@@ -6078,18 +7164,23 @@
         </p:nvSpPr>
         <p:spPr>
           <a:xfrm>
-            <a:off x="6263640" y="2148840"/>
-            <a:ext cx="5349240" cy="2377440"/>
+            <a:off x="548640" y="2907792"/>
+            <a:ext cx="7680960" cy="932688"/>
           </a:xfrm>
           <a:prstGeom prst="roundRect">
             <a:avLst>
-              <a:gd name="adj" fmla="val 3077"/>
+              <a:gd name="adj" fmla="val 5882"/>
             </a:avLst>
           </a:prstGeom>
           <a:solidFill>
             <a:srgbClr val="1E232C"/>
           </a:solidFill>
-          <a:ln/>
+          <a:ln w="19050">
+            <a:solidFill>
+              <a:srgbClr val="4FB0C6"/>
+            </a:solidFill>
+            <a:prstDash val="solid"/>
+          </a:ln>
         </p:spPr>
       </p:sp>
       <p:sp>
@@ -6100,24 +7191,24 @@
         </p:nvSpPr>
         <p:spPr>
           <a:xfrm>
-            <a:off x="6537960" y="2377440"/>
-            <a:ext cx="4800600" cy="457200"/>
-          </a:xfrm>
-          <a:prstGeom prst="rect">
-            <a:avLst/>
-          </a:prstGeom>
-          <a:noFill/>
-          <a:ln/>
-        </p:spPr>
-        <p:txBody>
-          <a:bodyPr wrap="square" lIns="0" tIns="0" rIns="0" bIns="0" rtlCol="0" anchor="ctr"/>
-          <a:lstStyle/>
-          <a:p>
-            <a:pPr indent="0" marL="0">
-              <a:buNone/>
-            </a:pPr>
-            <a:r>
-              <a:rPr lang="en-US" sz="2000" b="1" dirty="0">
+            <a:off x="822960" y="3035808"/>
+            <a:ext cx="7132320" cy="384048"/>
+          </a:xfrm>
+          <a:prstGeom prst="rect">
+            <a:avLst/>
+          </a:prstGeom>
+          <a:noFill/>
+          <a:ln/>
+        </p:spPr>
+        <p:txBody>
+          <a:bodyPr wrap="square" lIns="0" tIns="0" rIns="0" bIns="0" rtlCol="0" anchor="ctr"/>
+          <a:lstStyle/>
+          <a:p>
+            <a:pPr indent="0" marL="0">
+              <a:buNone/>
+            </a:pPr>
+            <a:r>
+              <a:rPr lang="en-US" sz="1600" b="1" dirty="0">
                 <a:solidFill>
                   <a:srgbClr val="4FB0C6"/>
                 </a:solidFill>
@@ -6125,9 +7216,9 @@
                 <a:ea typeface="Malgun Gothic" pitchFamily="34" charset="-122"/>
                 <a:cs typeface="Malgun Gothic" pitchFamily="34" charset="-120"/>
               </a:rPr>
-              <a:t>소프트 오류(soft error)</a:t>
-            </a:r>
-            <a:endParaRPr lang="en-US" sz="2000" dirty="0"/>
+              <a:t>CUDA 런타임 API(Runtime)</a:t>
+            </a:r>
+            <a:endParaRPr lang="en-US" sz="1600" dirty="0"/>
           </a:p>
         </p:txBody>
       </p:sp>
@@ -6139,78 +7230,60 @@
         </p:nvSpPr>
         <p:spPr>
           <a:xfrm>
-            <a:off x="6537960" y="2834640"/>
-            <a:ext cx="4800600" cy="411480"/>
-          </a:xfrm>
-          <a:prstGeom prst="rect">
-            <a:avLst/>
-          </a:prstGeom>
-          <a:noFill/>
-          <a:ln/>
-        </p:spPr>
-        <p:txBody>
-          <a:bodyPr wrap="square" lIns="0" tIns="0" rIns="0" bIns="0" rtlCol="0" anchor="ctr"/>
-          <a:lstStyle/>
-          <a:p>
-            <a:pPr indent="0" marL="0">
-              <a:buNone/>
-            </a:pPr>
-            <a:r>
-              <a:rPr lang="en-US" sz="1500" b="1" dirty="0">
-                <a:solidFill>
-                  <a:srgbClr val="9AA6B2"/>
-                </a:solidFill>
-                <a:latin typeface="Malgun Gothic" pitchFamily="34" charset="0"/>
-                <a:ea typeface="Malgun Gothic" pitchFamily="34" charset="-122"/>
-                <a:cs typeface="Malgun Gothic" pitchFamily="34" charset="-120"/>
-              </a:rPr>
-              <a:t>일시적 뒤집힘</a:t>
-            </a:r>
-            <a:endParaRPr lang="en-US" sz="1500" dirty="0"/>
-          </a:p>
-        </p:txBody>
-      </p:sp>
-      <p:sp>
-        <p:nvSpPr>
-          <p:cNvPr id="12" name="Text 10"/>
-          <p:cNvSpPr/>
-          <p:nvPr/>
-        </p:nvSpPr>
-        <p:spPr>
-          <a:xfrm>
-            <a:off x="6537960" y="3337560"/>
-            <a:ext cx="4800600" cy="1005840"/>
-          </a:xfrm>
-          <a:prstGeom prst="rect">
-            <a:avLst/>
-          </a:prstGeom>
-          <a:noFill/>
-          <a:ln/>
-        </p:spPr>
-        <p:txBody>
-          <a:bodyPr wrap="square" lIns="0" tIns="0" rIns="0" bIns="0" rtlCol="0" anchor="t"/>
-          <a:lstStyle/>
-          <a:p>
-            <a:pPr indent="0" marL="0">
-              <a:lnSpc>
-                <a:spcPct val="120000"/>
-              </a:lnSpc>
-              <a:buNone/>
-            </a:pPr>
-            <a:r>
-              <a:rPr lang="en-US" sz="1500" dirty="0">
+            <a:off x="822960" y="3419856"/>
+            <a:ext cx="7132320" cy="329184"/>
+          </a:xfrm>
+          <a:prstGeom prst="rect">
+            <a:avLst/>
+          </a:prstGeom>
+          <a:noFill/>
+          <a:ln/>
+        </p:spPr>
+        <p:txBody>
+          <a:bodyPr wrap="square" lIns="0" tIns="0" rIns="0" bIns="0" rtlCol="0" anchor="ctr"/>
+          <a:lstStyle/>
+          <a:p>
+            <a:pPr indent="0" marL="0">
+              <a:buNone/>
+            </a:pPr>
+            <a:r>
+              <a:rPr lang="en-US" sz="1150" dirty="0">
                 <a:solidFill>
                   <a:srgbClr val="E8EDF2"/>
                 </a:solidFill>
-                <a:latin typeface="Malgun Gothic" pitchFamily="34" charset="0"/>
-                <a:ea typeface="Malgun Gothic" pitchFamily="34" charset="-122"/>
-                <a:cs typeface="Malgun Gothic" pitchFamily="34" charset="-120"/>
-              </a:rPr>
-              <a:t>우주 방사선 등으로 비트가 잠깐 뒤집힘. 다시 쓰면 정상.</a:t>
-            </a:r>
-            <a:endParaRPr lang="en-US" sz="1500" dirty="0"/>
-          </a:p>
-        </p:txBody>
+                <a:latin typeface="Courier New" pitchFamily="34" charset="0"/>
+                <a:ea typeface="Courier New" pitchFamily="34" charset="-122"/>
+                <a:cs typeface="Courier New" pitchFamily="34" charset="-120"/>
+              </a:rPr>
+              <a:t>cudaMalloc · cudaMemcpy · cudaSetDevice · &lt;&lt;&lt;&gt;&gt;&gt;</a:t>
+            </a:r>
+            <a:endParaRPr lang="en-US" sz="1150" dirty="0"/>
+          </a:p>
+        </p:txBody>
+      </p:sp>
+      <p:sp>
+        <p:nvSpPr>
+          <p:cNvPr id="12" name="Shape 10"/>
+          <p:cNvSpPr/>
+          <p:nvPr/>
+        </p:nvSpPr>
+        <p:spPr>
+          <a:xfrm>
+            <a:off x="4389120" y="3840480"/>
+            <a:ext cx="0" cy="73152"/>
+          </a:xfrm>
+          <a:prstGeom prst="line">
+            <a:avLst/>
+          </a:prstGeom>
+          <a:noFill/>
+          <a:ln w="19050">
+            <a:solidFill>
+              <a:srgbClr val="9AA6B2"/>
+            </a:solidFill>
+            <a:prstDash val="solid"/>
+            <a:tailEnd type="triangle"/>
+          </a:ln>
+        </p:spPr>
       </p:sp>
       <p:sp>
         <p:nvSpPr>
@@ -6220,18 +7293,23 @@
         </p:nvSpPr>
         <p:spPr>
           <a:xfrm>
-            <a:off x="548640" y="4754880"/>
-            <a:ext cx="11064240" cy="1143000"/>
+            <a:off x="548640" y="3895344"/>
+            <a:ext cx="7680960" cy="932688"/>
           </a:xfrm>
           <a:prstGeom prst="roundRect">
             <a:avLst>
-              <a:gd name="adj" fmla="val 6400"/>
+              <a:gd name="adj" fmla="val 5882"/>
             </a:avLst>
           </a:prstGeom>
           <a:solidFill>
-            <a:srgbClr val="1A2418"/>
+            <a:srgbClr val="1E232C"/>
           </a:solidFill>
-          <a:ln/>
+          <a:ln w="19050">
+            <a:solidFill>
+              <a:srgbClr val="E0A458"/>
+            </a:solidFill>
+            <a:prstDash val="solid"/>
+          </a:ln>
         </p:spPr>
       </p:sp>
       <p:sp>
@@ -6242,24 +7320,24 @@
         </p:nvSpPr>
         <p:spPr>
           <a:xfrm>
-            <a:off x="822960" y="4937760"/>
-            <a:ext cx="10515600" cy="822960"/>
-          </a:xfrm>
-          <a:prstGeom prst="rect">
-            <a:avLst/>
-          </a:prstGeom>
-          <a:noFill/>
-          <a:ln/>
-        </p:spPr>
-        <p:txBody>
-          <a:bodyPr wrap="square" lIns="0" tIns="0" rIns="0" bIns="0" rtlCol="0" anchor="ctr"/>
-          <a:lstStyle/>
-          <a:p>
-            <a:pPr indent="0" marL="0">
-              <a:buNone/>
-            </a:pPr>
-            <a:r>
-              <a:rPr lang="en-US" sz="1500" b="1" dirty="0">
+            <a:off x="822960" y="4023360"/>
+            <a:ext cx="7132320" cy="384048"/>
+          </a:xfrm>
+          <a:prstGeom prst="rect">
+            <a:avLst/>
+          </a:prstGeom>
+          <a:noFill/>
+          <a:ln/>
+        </p:spPr>
+        <p:txBody>
+          <a:bodyPr wrap="square" lIns="0" tIns="0" rIns="0" bIns="0" rtlCol="0" anchor="ctr"/>
+          <a:lstStyle/>
+          <a:p>
+            <a:pPr indent="0" marL="0">
+              <a:buNone/>
+            </a:pPr>
+            <a:r>
+              <a:rPr lang="en-US" sz="1600" b="1" dirty="0">
                 <a:solidFill>
                   <a:srgbClr val="E0A458"/>
                 </a:solidFill>
@@ -6267,23 +7345,446 @@
                 <a:ea typeface="Malgun Gothic" pitchFamily="34" charset="-122"/>
                 <a:cs typeface="Malgun Gothic" pitchFamily="34" charset="-120"/>
               </a:rPr>
-              <a:t>실제 배경: </a:t>
-            </a:r>
-            <a:pPr indent="0" marL="0">
-              <a:buNone/>
-            </a:pPr>
-            <a:r>
-              <a:rPr lang="en-US" sz="1500" dirty="0">
+              <a:t>CUDA 드라이버 / GPU 드라이버</a:t>
+            </a:r>
+            <a:endParaRPr lang="en-US" sz="1600" dirty="0"/>
+          </a:p>
+        </p:txBody>
+      </p:sp>
+      <p:sp>
+        <p:nvSpPr>
+          <p:cNvPr id="15" name="Text 13"/>
+          <p:cNvSpPr/>
+          <p:nvPr/>
+        </p:nvSpPr>
+        <p:spPr>
+          <a:xfrm>
+            <a:off x="822960" y="4407408"/>
+            <a:ext cx="7132320" cy="329184"/>
+          </a:xfrm>
+          <a:prstGeom prst="rect">
+            <a:avLst/>
+          </a:prstGeom>
+          <a:noFill/>
+          <a:ln/>
+        </p:spPr>
+        <p:txBody>
+          <a:bodyPr wrap="square" lIns="0" tIns="0" rIns="0" bIns="0" rtlCol="0" anchor="ctr"/>
+          <a:lstStyle/>
+          <a:p>
+            <a:pPr indent="0" marL="0">
+              <a:buNone/>
+            </a:pPr>
+            <a:r>
+              <a:rPr lang="en-US" sz="1150" dirty="0">
                 <a:solidFill>
                   <a:srgbClr val="E8EDF2"/>
                 </a:solidFill>
-                <a:latin typeface="Malgun Gothic" pitchFamily="34" charset="0"/>
-                <a:ea typeface="Malgun Gothic" pitchFamily="34" charset="-122"/>
-                <a:cs typeface="Malgun Gothic" pitchFamily="34" charset="-120"/>
-              </a:rPr>
-              <a:t>이 도구는 NCSA의 대규모 GPU 클러스터(500+ Tesla GPU) 운영에서 나왔습니다. 원논문은 doc/ 폴더에 있고, 한국어 EPUB 번역본도 함께 제공됩니다.</a:t>
-            </a:r>
-            <a:endParaRPr lang="en-US" sz="1500" dirty="0"/>
+                <a:latin typeface="Courier New" pitchFamily="34" charset="0"/>
+                <a:ea typeface="Courier New" pitchFamily="34" charset="-122"/>
+                <a:cs typeface="Courier New" pitchFamily="34" charset="-120"/>
+              </a:rPr>
+              <a:t>커널을 GPU에 제출 · 메모리·스케줄 관리</a:t>
+            </a:r>
+            <a:endParaRPr lang="en-US" sz="1150" dirty="0"/>
+          </a:p>
+        </p:txBody>
+      </p:sp>
+      <p:sp>
+        <p:nvSpPr>
+          <p:cNvPr id="16" name="Shape 14"/>
+          <p:cNvSpPr/>
+          <p:nvPr/>
+        </p:nvSpPr>
+        <p:spPr>
+          <a:xfrm>
+            <a:off x="4389120" y="4828032"/>
+            <a:ext cx="0" cy="73152"/>
+          </a:xfrm>
+          <a:prstGeom prst="line">
+            <a:avLst/>
+          </a:prstGeom>
+          <a:noFill/>
+          <a:ln w="19050">
+            <a:solidFill>
+              <a:srgbClr val="9AA6B2"/>
+            </a:solidFill>
+            <a:prstDash val="solid"/>
+            <a:tailEnd type="triangle"/>
+          </a:ln>
+        </p:spPr>
+      </p:sp>
+      <p:sp>
+        <p:nvSpPr>
+          <p:cNvPr id="17" name="Shape 15"/>
+          <p:cNvSpPr/>
+          <p:nvPr/>
+        </p:nvSpPr>
+        <p:spPr>
+          <a:xfrm>
+            <a:off x="548640" y="4882896"/>
+            <a:ext cx="7680960" cy="932688"/>
+          </a:xfrm>
+          <a:prstGeom prst="roundRect">
+            <a:avLst>
+              <a:gd name="adj" fmla="val 5882"/>
+            </a:avLst>
+          </a:prstGeom>
+          <a:solidFill>
+            <a:srgbClr val="1E232C"/>
+          </a:solidFill>
+          <a:ln w="19050">
+            <a:solidFill>
+              <a:srgbClr val="9AA6B2"/>
+            </a:solidFill>
+            <a:prstDash val="solid"/>
+          </a:ln>
+        </p:spPr>
+      </p:sp>
+      <p:sp>
+        <p:nvSpPr>
+          <p:cNvPr id="18" name="Text 16"/>
+          <p:cNvSpPr/>
+          <p:nvPr/>
+        </p:nvSpPr>
+        <p:spPr>
+          <a:xfrm>
+            <a:off x="822960" y="5010912"/>
+            <a:ext cx="7132320" cy="384048"/>
+          </a:xfrm>
+          <a:prstGeom prst="rect">
+            <a:avLst/>
+          </a:prstGeom>
+          <a:noFill/>
+          <a:ln/>
+        </p:spPr>
+        <p:txBody>
+          <a:bodyPr wrap="square" lIns="0" tIns="0" rIns="0" bIns="0" rtlCol="0" anchor="ctr"/>
+          <a:lstStyle/>
+          <a:p>
+            <a:pPr indent="0" marL="0">
+              <a:buNone/>
+            </a:pPr>
+            <a:r>
+              <a:rPr lang="en-US" sz="1600" b="1" dirty="0">
+                <a:solidFill>
+                  <a:srgbClr val="9AA6B2"/>
+                </a:solidFill>
+                <a:latin typeface="Malgun Gothic" pitchFamily="34" charset="0"/>
+                <a:ea typeface="Malgun Gothic" pitchFamily="34" charset="-122"/>
+                <a:cs typeface="Malgun Gothic" pitchFamily="34" charset="-120"/>
+              </a:rPr>
+              <a:t>GPU 하드웨어(Hardware)</a:t>
+            </a:r>
+            <a:endParaRPr lang="en-US" sz="1600" dirty="0"/>
+          </a:p>
+        </p:txBody>
+      </p:sp>
+      <p:sp>
+        <p:nvSpPr>
+          <p:cNvPr id="19" name="Text 17"/>
+          <p:cNvSpPr/>
+          <p:nvPr/>
+        </p:nvSpPr>
+        <p:spPr>
+          <a:xfrm>
+            <a:off x="822960" y="5394960"/>
+            <a:ext cx="7132320" cy="329184"/>
+          </a:xfrm>
+          <a:prstGeom prst="rect">
+            <a:avLst/>
+          </a:prstGeom>
+          <a:noFill/>
+          <a:ln/>
+        </p:spPr>
+        <p:txBody>
+          <a:bodyPr wrap="square" lIns="0" tIns="0" rIns="0" bIns="0" rtlCol="0" anchor="ctr"/>
+          <a:lstStyle/>
+          <a:p>
+            <a:pPr indent="0" marL="0">
+              <a:buNone/>
+            </a:pPr>
+            <a:r>
+              <a:rPr lang="en-US" sz="1150" dirty="0">
+                <a:solidFill>
+                  <a:srgbClr val="E8EDF2"/>
+                </a:solidFill>
+                <a:latin typeface="Courier New" pitchFamily="34" charset="0"/>
+                <a:ea typeface="Courier New" pitchFamily="34" charset="-122"/>
+                <a:cs typeface="Courier New" pitchFamily="34" charset="-120"/>
+              </a:rPr>
+              <a:t>SM(스트리밍 멀티프로세서) · VRAM</a:t>
+            </a:r>
+            <a:endParaRPr lang="en-US" sz="1150" dirty="0"/>
+          </a:p>
+        </p:txBody>
+      </p:sp>
+      <p:sp>
+        <p:nvSpPr>
+          <p:cNvPr id="20" name="Text 18"/>
+          <p:cNvSpPr/>
+          <p:nvPr/>
+        </p:nvSpPr>
+        <p:spPr>
+          <a:xfrm>
+            <a:off x="8595360" y="2011680"/>
+            <a:ext cx="3017520" cy="749808"/>
+          </a:xfrm>
+          <a:prstGeom prst="rect">
+            <a:avLst/>
+          </a:prstGeom>
+          <a:noFill/>
+          <a:ln/>
+        </p:spPr>
+        <p:txBody>
+          <a:bodyPr wrap="square" lIns="0" tIns="0" rIns="0" bIns="0" rtlCol="0" anchor="ctr"/>
+          <a:lstStyle/>
+          <a:p>
+            <a:pPr indent="0" marL="0">
+              <a:lnSpc>
+                <a:spcPct val="105000"/>
+              </a:lnSpc>
+              <a:buNone/>
+            </a:pPr>
+            <a:r>
+              <a:rPr lang="en-US" sz="1250" dirty="0">
+                <a:solidFill>
+                  <a:srgbClr val="9AA6B2"/>
+                </a:solidFill>
+                <a:latin typeface="Malgun Gothic" pitchFamily="34" charset="0"/>
+                <a:ea typeface="Malgun Gothic" pitchFamily="34" charset="-122"/>
+                <a:cs typeface="Malgun Gothic" pitchFamily="34" charset="-120"/>
+              </a:rPr>
+              <a:t>우리가 짜는 코드</a:t>
+            </a:r>
+            <a:endParaRPr lang="en-US" sz="1250" dirty="0"/>
+          </a:p>
+        </p:txBody>
+      </p:sp>
+      <p:sp>
+        <p:nvSpPr>
+          <p:cNvPr id="21" name="Text 19"/>
+          <p:cNvSpPr/>
+          <p:nvPr/>
+        </p:nvSpPr>
+        <p:spPr>
+          <a:xfrm>
+            <a:off x="8595360" y="2999232"/>
+            <a:ext cx="3017520" cy="749808"/>
+          </a:xfrm>
+          <a:prstGeom prst="rect">
+            <a:avLst/>
+          </a:prstGeom>
+          <a:noFill/>
+          <a:ln/>
+        </p:spPr>
+        <p:txBody>
+          <a:bodyPr wrap="square" lIns="0" tIns="0" rIns="0" bIns="0" rtlCol="0" anchor="ctr"/>
+          <a:lstStyle/>
+          <a:p>
+            <a:pPr indent="0" marL="0">
+              <a:lnSpc>
+                <a:spcPct val="105000"/>
+              </a:lnSpc>
+              <a:buNone/>
+            </a:pPr>
+            <a:r>
+              <a:rPr lang="en-US" sz="1250" dirty="0">
+                <a:solidFill>
+                  <a:srgbClr val="9AA6B2"/>
+                </a:solidFill>
+                <a:latin typeface="Malgun Gothic" pitchFamily="34" charset="0"/>
+                <a:ea typeface="Malgun Gothic" pitchFamily="34" charset="-122"/>
+                <a:cs typeface="Malgun Gothic" pitchFamily="34" charset="-120"/>
+              </a:rPr>
+              <a:t>libcudart · CMake의 find_package(CUDAToolkit)이 링크</a:t>
+            </a:r>
+            <a:endParaRPr lang="en-US" sz="1250" dirty="0"/>
+          </a:p>
+        </p:txBody>
+      </p:sp>
+      <p:sp>
+        <p:nvSpPr>
+          <p:cNvPr id="22" name="Text 20"/>
+          <p:cNvSpPr/>
+          <p:nvPr/>
+        </p:nvSpPr>
+        <p:spPr>
+          <a:xfrm>
+            <a:off x="8595360" y="3986784"/>
+            <a:ext cx="3017520" cy="749808"/>
+          </a:xfrm>
+          <a:prstGeom prst="rect">
+            <a:avLst/>
+          </a:prstGeom>
+          <a:noFill/>
+          <a:ln/>
+        </p:spPr>
+        <p:txBody>
+          <a:bodyPr wrap="square" lIns="0" tIns="0" rIns="0" bIns="0" rtlCol="0" anchor="ctr"/>
+          <a:lstStyle/>
+          <a:p>
+            <a:pPr indent="0" marL="0">
+              <a:lnSpc>
+                <a:spcPct val="105000"/>
+              </a:lnSpc>
+              <a:buNone/>
+            </a:pPr>
+            <a:r>
+              <a:rPr lang="en-US" sz="1250" dirty="0">
+                <a:solidFill>
+                  <a:srgbClr val="9AA6B2"/>
+                </a:solidFill>
+                <a:latin typeface="Malgun Gothic" pitchFamily="34" charset="0"/>
+                <a:ea typeface="Malgun Gothic" pitchFamily="34" charset="-122"/>
+                <a:cs typeface="Malgun Gothic" pitchFamily="34" charset="-120"/>
+              </a:rPr>
+              <a:t>libcuda · 커널 모드 드라이버</a:t>
+            </a:r>
+            <a:endParaRPr lang="en-US" sz="1250" dirty="0"/>
+          </a:p>
+        </p:txBody>
+      </p:sp>
+      <p:sp>
+        <p:nvSpPr>
+          <p:cNvPr id="23" name="Text 21"/>
+          <p:cNvSpPr/>
+          <p:nvPr/>
+        </p:nvSpPr>
+        <p:spPr>
+          <a:xfrm>
+            <a:off x="8595360" y="4974336"/>
+            <a:ext cx="3017520" cy="749808"/>
+          </a:xfrm>
+          <a:prstGeom prst="rect">
+            <a:avLst/>
+          </a:prstGeom>
+          <a:noFill/>
+          <a:ln/>
+        </p:spPr>
+        <p:txBody>
+          <a:bodyPr wrap="square" lIns="0" tIns="0" rIns="0" bIns="0" rtlCol="0" anchor="ctr"/>
+          <a:lstStyle/>
+          <a:p>
+            <a:pPr indent="0" marL="0">
+              <a:lnSpc>
+                <a:spcPct val="105000"/>
+              </a:lnSpc>
+              <a:buNone/>
+            </a:pPr>
+            <a:r>
+              <a:rPr lang="en-US" sz="1250" dirty="0">
+                <a:solidFill>
+                  <a:srgbClr val="9AA6B2"/>
+                </a:solidFill>
+                <a:latin typeface="Malgun Gothic" pitchFamily="34" charset="0"/>
+                <a:ea typeface="Malgun Gothic" pitchFamily="34" charset="-122"/>
+                <a:cs typeface="Malgun Gothic" pitchFamily="34" charset="-120"/>
+              </a:rPr>
+              <a:t>실제 연산·저장이 일어나는 곳</a:t>
+            </a:r>
+            <a:endParaRPr lang="en-US" sz="1250" dirty="0"/>
+          </a:p>
+        </p:txBody>
+      </p:sp>
+      <p:sp>
+        <p:nvSpPr>
+          <p:cNvPr id="24" name="Text 22"/>
+          <p:cNvSpPr/>
+          <p:nvPr/>
+        </p:nvSpPr>
+        <p:spPr>
+          <a:xfrm>
+            <a:off x="8595360" y="5806440"/>
+            <a:ext cx="3017520" cy="457200"/>
+          </a:xfrm>
+          <a:prstGeom prst="rect">
+            <a:avLst/>
+          </a:prstGeom>
+          <a:noFill/>
+          <a:ln/>
+        </p:spPr>
+        <p:txBody>
+          <a:bodyPr wrap="square" lIns="0" tIns="0" rIns="0" bIns="0" rtlCol="0" anchor="ctr"/>
+          <a:lstStyle/>
+          <a:p>
+            <a:pPr indent="0" marL="0">
+              <a:lnSpc>
+                <a:spcPct val="105000"/>
+              </a:lnSpc>
+              <a:buNone/>
+            </a:pPr>
+            <a:r>
+              <a:rPr lang="en-US" sz="1150" i="1" dirty="0">
+                <a:solidFill>
+                  <a:srgbClr val="4FB0C6"/>
+                </a:solidFill>
+                <a:latin typeface="Malgun Gothic" pitchFamily="34" charset="0"/>
+                <a:ea typeface="Malgun Gothic" pitchFamily="34" charset="-122"/>
+                <a:cs typeface="Malgun Gothic" pitchFamily="34" charset="-120"/>
+              </a:rPr>
+              <a:t>cudaMalloc / &lt;&lt;&lt;&gt;&gt;&gt; 호출이</a:t>
+            </a:r>
+            <a:endParaRPr lang="en-US" sz="1150" dirty="0"/>
+          </a:p>
+          <a:p>
+            <a:pPr indent="0" marL="0">
+              <a:lnSpc>
+                <a:spcPct val="105000"/>
+              </a:lnSpc>
+              <a:buNone/>
+            </a:pPr>
+            <a:r>
+              <a:rPr lang="en-US" sz="1150" i="1" dirty="0">
+                <a:solidFill>
+                  <a:srgbClr val="4FB0C6"/>
+                </a:solidFill>
+                <a:latin typeface="Malgun Gothic" pitchFamily="34" charset="0"/>
+                <a:ea typeface="Malgun Gothic" pitchFamily="34" charset="-122"/>
+                <a:cs typeface="Malgun Gothic" pitchFamily="34" charset="-120"/>
+              </a:rPr>
+              <a:t>이 방향으로 내려갑니다 ↓</a:t>
+            </a:r>
+            <a:endParaRPr lang="en-US" sz="1150" dirty="0"/>
+          </a:p>
+        </p:txBody>
+      </p:sp>
+      <p:sp>
+        <p:nvSpPr>
+          <p:cNvPr id="25" name="Text 23"/>
+          <p:cNvSpPr/>
+          <p:nvPr/>
+        </p:nvSpPr>
+        <p:spPr>
+          <a:xfrm>
+            <a:off x="548640" y="5943600"/>
+            <a:ext cx="7680960" cy="365760"/>
+          </a:xfrm>
+          <a:prstGeom prst="rect">
+            <a:avLst/>
+          </a:prstGeom>
+          <a:noFill/>
+          <a:ln/>
+        </p:spPr>
+        <p:txBody>
+          <a:bodyPr wrap="square" lIns="0" tIns="0" rIns="0" bIns="0" rtlCol="0" anchor="ctr"/>
+          <a:lstStyle/>
+          <a:p>
+            <a:pPr indent="0" marL="0">
+              <a:buNone/>
+            </a:pPr>
+            <a:r>
+              <a:rPr lang="en-US" sz="1250" i="1" dirty="0">
+                <a:solidFill>
+                  <a:srgbClr val="9AA6B2"/>
+                </a:solidFill>
+                <a:latin typeface="Malgun Gothic" pitchFamily="34" charset="0"/>
+                <a:ea typeface="Malgun Gothic" pitchFamily="34" charset="-122"/>
+                <a:cs typeface="Malgun Gothic" pitchFamily="34" charset="-120"/>
+              </a:rPr>
+              <a:t>세션 1~4에서 만나는 cudaMalloc·cudaMemcpy·&lt;&lt;&lt;&gt;&gt;&gt;는 모두 '런타임 API' 계층입니다.</a:t>
+            </a:r>
+            <a:endParaRPr lang="en-US" sz="1250" dirty="0"/>
           </a:p>
         </p:txBody>
       </p:sp>
@@ -6356,7 +7857,7 @@
                 <a:ea typeface="Courier New" pitchFamily="34" charset="-122"/>
                 <a:cs typeface="Courier New" pitchFamily="34" charset="-120"/>
               </a:rPr>
-              <a:t>4</a:t>
+              <a:t>3</a:t>
             </a:r>
             <a:endParaRPr lang="en-US" sz="2200" dirty="0"/>
           </a:p>
@@ -6395,7 +7896,7 @@
                 <a:ea typeface="Malgun Gothic" pitchFamily="34" charset="-122"/>
                 <a:cs typeface="Malgun Gothic" pitchFamily="34" charset="-120"/>
               </a:rPr>
-              <a:t>빌드 시스템 · CMake</a:t>
+              <a:t>cuda_memtest가 푸는 문제</a:t>
             </a:r>
             <a:endParaRPr lang="en-US" sz="3000" dirty="0"/>
           </a:p>
@@ -6403,176 +7904,57 @@
       </p:sp>
       <p:sp>
         <p:nvSpPr>
-          <p:cNvPr id="4" name="Shape 2"/>
-          <p:cNvSpPr/>
-          <p:nvPr/>
-        </p:nvSpPr>
-        <p:spPr>
-          <a:xfrm>
-            <a:off x="548640" y="1554480"/>
-            <a:ext cx="11064240" cy="1828800"/>
+          <p:cNvPr id="4" name="Text 2"/>
+          <p:cNvSpPr/>
+          <p:nvPr/>
+        </p:nvSpPr>
+        <p:spPr>
+          <a:xfrm>
+            <a:off x="548640" y="1463040"/>
+            <a:ext cx="11064240" cy="457200"/>
+          </a:xfrm>
+          <a:prstGeom prst="rect">
+            <a:avLst/>
+          </a:prstGeom>
+          <a:noFill/>
+          <a:ln/>
+        </p:spPr>
+        <p:txBody>
+          <a:bodyPr wrap="square" lIns="0" tIns="0" rIns="0" bIns="0" rtlCol="0" anchor="ctr"/>
+          <a:lstStyle/>
+          <a:p>
+            <a:pPr indent="0" marL="0">
+              <a:buNone/>
+            </a:pPr>
+            <a:r>
+              <a:rPr lang="en-US" sz="1700" dirty="0">
+                <a:solidFill>
+                  <a:srgbClr val="9AA6B2"/>
+                </a:solidFill>
+                <a:latin typeface="Malgun Gothic" pitchFamily="34" charset="0"/>
+                <a:ea typeface="Malgun Gothic" pitchFamily="34" charset="-122"/>
+                <a:cs typeface="Malgun Gothic" pitchFamily="34" charset="-120"/>
+              </a:rPr>
+              <a:t>GPU 메모리도 고장 납니다. 이 도구는 그 고장을 찾아냅니다.</a:t>
+            </a:r>
+            <a:endParaRPr lang="en-US" sz="1700" dirty="0"/>
+          </a:p>
+        </p:txBody>
+      </p:sp>
+      <p:sp>
+        <p:nvSpPr>
+          <p:cNvPr id="5" name="Shape 3"/>
+          <p:cNvSpPr/>
+          <p:nvPr/>
+        </p:nvSpPr>
+        <p:spPr>
+          <a:xfrm>
+            <a:off x="548640" y="2148840"/>
+            <a:ext cx="5349240" cy="2377440"/>
           </a:xfrm>
           <a:prstGeom prst="roundRect">
             <a:avLst>
-              <a:gd name="adj" fmla="val 3000"/>
-            </a:avLst>
-          </a:prstGeom>
-          <a:solidFill>
-            <a:srgbClr val="0E1116"/>
-          </a:solidFill>
-          <a:ln w="12700">
-            <a:solidFill>
-              <a:srgbClr val="2C3440"/>
-            </a:solidFill>
-            <a:prstDash val="solid"/>
-          </a:ln>
-        </p:spPr>
-      </p:sp>
-      <p:sp>
-        <p:nvSpPr>
-          <p:cNvPr id="5" name="Text 3"/>
-          <p:cNvSpPr/>
-          <p:nvPr/>
-        </p:nvSpPr>
-        <p:spPr>
-          <a:xfrm>
-            <a:off x="749808" y="1700784"/>
-            <a:ext cx="10661904" cy="1536192"/>
-          </a:xfrm>
-          <a:prstGeom prst="rect">
-            <a:avLst/>
-          </a:prstGeom>
-          <a:noFill/>
-          <a:ln/>
-        </p:spPr>
-        <p:txBody>
-          <a:bodyPr wrap="square" lIns="0" tIns="0" rIns="0" bIns="0" rtlCol="0" anchor="t"/>
-          <a:lstStyle/>
-          <a:p>
-            <a:pPr algn="l" indent="0" marL="0">
-              <a:lnSpc>
-                <a:spcPct val="108000"/>
-              </a:lnSpc>
-              <a:buNone/>
-            </a:pPr>
-            <a:r>
-              <a:rPr lang="en-US" sz="1350" dirty="0">
-                <a:solidFill>
-                  <a:srgbClr val="E8EDF2"/>
-                </a:solidFill>
-                <a:latin typeface="Courier New" pitchFamily="34" charset="0"/>
-                <a:ea typeface="Courier New" pitchFamily="34" charset="-122"/>
-                <a:cs typeface="Courier New" pitchFamily="34" charset="-120"/>
-              </a:rPr>
-              <a:t>mkdir build &amp;&amp; cd build</a:t>
-            </a:r>
-            <a:endParaRPr lang="en-US" sz="1350" dirty="0"/>
-          </a:p>
-          <a:p>
-            <a:pPr algn="l" indent="0" marL="0">
-              <a:lnSpc>
-                <a:spcPct val="108000"/>
-              </a:lnSpc>
-              <a:buNone/>
-            </a:pPr>
-            <a:r>
-              <a:rPr lang="en-US" sz="1350" dirty="0">
-                <a:solidFill>
-                  <a:srgbClr val="8CC63F"/>
-                </a:solidFill>
-                <a:latin typeface="Courier New" pitchFamily="34" charset="0"/>
-                <a:ea typeface="Courier New" pitchFamily="34" charset="-122"/>
-                <a:cs typeface="Courier New" pitchFamily="34" charset="-120"/>
-              </a:rPr>
-              <a:t>cmake -DCMAKE_CUDA_ARCHITECTURES=86 ..   # 본인 GPU 번호로 교체</a:t>
-            </a:r>
-            <a:endParaRPr lang="en-US" sz="1350" dirty="0"/>
-          </a:p>
-          <a:p>
-            <a:pPr algn="l" indent="0" marL="0">
-              <a:lnSpc>
-                <a:spcPct val="108000"/>
-              </a:lnSpc>
-              <a:buNone/>
-            </a:pPr>
-            <a:r>
-              <a:rPr lang="en-US" sz="1350" dirty="0">
-                <a:solidFill>
-                  <a:srgbClr val="E8EDF2"/>
-                </a:solidFill>
-                <a:latin typeface="Courier New" pitchFamily="34" charset="0"/>
-                <a:ea typeface="Courier New" pitchFamily="34" charset="-122"/>
-                <a:cs typeface="Courier New" pitchFamily="34" charset="-120"/>
-              </a:rPr>
-              <a:t>make -j</a:t>
-            </a:r>
-            <a:endParaRPr lang="en-US" sz="1350" dirty="0"/>
-          </a:p>
-          <a:p>
-            <a:pPr algn="l" indent="0" marL="0">
-              <a:lnSpc>
-                <a:spcPct val="108000"/>
-              </a:lnSpc>
-              <a:buNone/>
-            </a:pPr>
-            <a:endParaRPr lang="en-US" sz="1350" dirty="0"/>
-          </a:p>
-          <a:p>
-            <a:pPr algn="l" indent="0" marL="0">
-              <a:lnSpc>
-                <a:spcPct val="108000"/>
-              </a:lnSpc>
-              <a:buNone/>
-            </a:pPr>
-            <a:r>
-              <a:rPr lang="en-US" sz="1350" dirty="0">
-                <a:solidFill>
-                  <a:srgbClr val="9AA6B2"/>
-                </a:solidFill>
-                <a:latin typeface="Courier New" pitchFamily="34" charset="0"/>
-                <a:ea typeface="Courier New" pitchFamily="34" charset="-122"/>
-                <a:cs typeface="Courier New" pitchFamily="34" charset="-120"/>
-              </a:rPr>
-              <a:t># AMD GPU면 HIP 백엔드</a:t>
-            </a:r>
-            <a:endParaRPr lang="en-US" sz="1350" dirty="0"/>
-          </a:p>
-          <a:p>
-            <a:pPr algn="l" indent="0" marL="0">
-              <a:lnSpc>
-                <a:spcPct val="108000"/>
-              </a:lnSpc>
-              <a:buNone/>
-            </a:pPr>
-            <a:r>
-              <a:rPr lang="en-US" sz="1350" dirty="0">
-                <a:solidFill>
-                  <a:srgbClr val="4FB0C6"/>
-                </a:solidFill>
-                <a:latin typeface="Courier New" pitchFamily="34" charset="0"/>
-                <a:ea typeface="Courier New" pitchFamily="34" charset="-122"/>
-                <a:cs typeface="Courier New" pitchFamily="34" charset="-120"/>
-              </a:rPr>
-              <a:t>cmake -DCUDA_MEMTEST_BACKEND=hip -DGPU_TARGETS=gfx90a ..</a:t>
-            </a:r>
-            <a:endParaRPr lang="en-US" sz="1350" dirty="0"/>
-          </a:p>
-        </p:txBody>
-      </p:sp>
-      <p:sp>
-        <p:nvSpPr>
-          <p:cNvPr id="6" name="Shape 4"/>
-          <p:cNvSpPr/>
-          <p:nvPr/>
-        </p:nvSpPr>
-        <p:spPr>
-          <a:xfrm>
-            <a:off x="548640" y="3703320"/>
-            <a:ext cx="5349240" cy="1737360"/>
-          </a:xfrm>
-          <a:prstGeom prst="roundRect">
-            <a:avLst>
-              <a:gd name="adj" fmla="val 4211"/>
+              <a:gd name="adj" fmla="val 3077"/>
             </a:avLst>
           </a:prstGeom>
           <a:solidFill>
@@ -6583,40 +7965,79 @@
       </p:sp>
       <p:sp>
         <p:nvSpPr>
+          <p:cNvPr id="6" name="Text 4"/>
+          <p:cNvSpPr/>
+          <p:nvPr/>
+        </p:nvSpPr>
+        <p:spPr>
+          <a:xfrm>
+            <a:off x="822960" y="2377440"/>
+            <a:ext cx="4800600" cy="457200"/>
+          </a:xfrm>
+          <a:prstGeom prst="rect">
+            <a:avLst/>
+          </a:prstGeom>
+          <a:noFill/>
+          <a:ln/>
+        </p:spPr>
+        <p:txBody>
+          <a:bodyPr wrap="square" lIns="0" tIns="0" rIns="0" bIns="0" rtlCol="0" anchor="ctr"/>
+          <a:lstStyle/>
+          <a:p>
+            <a:pPr indent="0" marL="0">
+              <a:buNone/>
+            </a:pPr>
+            <a:r>
+              <a:rPr lang="en-US" sz="2000" b="1" dirty="0">
+                <a:solidFill>
+                  <a:srgbClr val="8CC63F"/>
+                </a:solidFill>
+                <a:latin typeface="Malgun Gothic" pitchFamily="34" charset="0"/>
+                <a:ea typeface="Malgun Gothic" pitchFamily="34" charset="-122"/>
+                <a:cs typeface="Malgun Gothic" pitchFamily="34" charset="-120"/>
+              </a:rPr>
+              <a:t>하드 오류(hard error)</a:t>
+            </a:r>
+            <a:endParaRPr lang="en-US" sz="2000" dirty="0"/>
+          </a:p>
+        </p:txBody>
+      </p:sp>
+      <p:sp>
+        <p:nvSpPr>
           <p:cNvPr id="7" name="Text 5"/>
           <p:cNvSpPr/>
           <p:nvPr/>
         </p:nvSpPr>
         <p:spPr>
           <a:xfrm>
-            <a:off x="777240" y="3886200"/>
-            <a:ext cx="4892040" cy="640080"/>
-          </a:xfrm>
-          <a:prstGeom prst="rect">
-            <a:avLst/>
-          </a:prstGeom>
-          <a:noFill/>
-          <a:ln/>
-        </p:spPr>
-        <p:txBody>
-          <a:bodyPr wrap="square" lIns="0" tIns="0" rIns="0" bIns="0" rtlCol="0" anchor="t"/>
-          <a:lstStyle/>
-          <a:p>
-            <a:pPr indent="0" marL="0">
-              <a:buNone/>
-            </a:pPr>
-            <a:r>
-              <a:rPr lang="en-US" sz="1400" b="1" dirty="0">
-                <a:solidFill>
-                  <a:srgbClr val="8CC63F"/>
-                </a:solidFill>
-                <a:latin typeface="Courier New" pitchFamily="34" charset="0"/>
-                <a:ea typeface="Courier New" pitchFamily="34" charset="-122"/>
-                <a:cs typeface="Courier New" pitchFamily="34" charset="-120"/>
-              </a:rPr>
-              <a:t>CMAKE_CUDA_ARCHITECTURES</a:t>
-            </a:r>
-            <a:endParaRPr lang="en-US" sz="1400" dirty="0"/>
+            <a:off x="822960" y="2834640"/>
+            <a:ext cx="4800600" cy="411480"/>
+          </a:xfrm>
+          <a:prstGeom prst="rect">
+            <a:avLst/>
+          </a:prstGeom>
+          <a:noFill/>
+          <a:ln/>
+        </p:spPr>
+        <p:txBody>
+          <a:bodyPr wrap="square" lIns="0" tIns="0" rIns="0" bIns="0" rtlCol="0" anchor="ctr"/>
+          <a:lstStyle/>
+          <a:p>
+            <a:pPr indent="0" marL="0">
+              <a:buNone/>
+            </a:pPr>
+            <a:r>
+              <a:rPr lang="en-US" sz="1500" b="1" dirty="0">
+                <a:solidFill>
+                  <a:srgbClr val="9AA6B2"/>
+                </a:solidFill>
+                <a:latin typeface="Malgun Gothic" pitchFamily="34" charset="0"/>
+                <a:ea typeface="Malgun Gothic" pitchFamily="34" charset="-122"/>
+                <a:cs typeface="Malgun Gothic" pitchFamily="34" charset="-120"/>
+              </a:rPr>
+              <a:t>영구적 고장</a:t>
+            </a:r>
+            <a:endParaRPr lang="en-US" sz="1500" dirty="0"/>
           </a:p>
         </p:txBody>
       </p:sp>
@@ -6628,8 +8049,8 @@
         </p:nvSpPr>
         <p:spPr>
           <a:xfrm>
-            <a:off x="777240" y="4526280"/>
-            <a:ext cx="4892040" cy="822960"/>
+            <a:off x="822960" y="3337560"/>
+            <a:ext cx="4800600" cy="1005840"/>
           </a:xfrm>
           <a:prstGeom prst="rect">
             <a:avLst/>
@@ -6648,7 +8069,7 @@
               <a:buNone/>
             </a:pPr>
             <a:r>
-              <a:rPr lang="en-US" sz="1400" dirty="0">
+              <a:rPr lang="en-US" sz="1500" dirty="0">
                 <a:solidFill>
                   <a:srgbClr val="E8EDF2"/>
                 </a:solidFill>
@@ -6656,9 +8077,9 @@
                 <a:ea typeface="Malgun Gothic" pitchFamily="34" charset="-122"/>
                 <a:cs typeface="Malgun Gothic" pitchFamily="34" charset="-120"/>
               </a:rPr>
-              <a:t>GPU 세대(sm_XX)를 지정. 세대마다 기계어가 다름.</a:t>
-            </a:r>
-            <a:endParaRPr lang="en-US" sz="1400" dirty="0"/>
+              <a:t>제조 결함·노후화로 특정 비트가 항상 틀림. 재부팅해도 그대로.</a:t>
+            </a:r>
+            <a:endParaRPr lang="en-US" sz="1500" dirty="0"/>
           </a:p>
         </p:txBody>
       </p:sp>
@@ -6670,12 +8091,12 @@
         </p:nvSpPr>
         <p:spPr>
           <a:xfrm>
-            <a:off x="6263640" y="3703320"/>
-            <a:ext cx="5349240" cy="1737360"/>
+            <a:off x="6263640" y="2148840"/>
+            <a:ext cx="5349240" cy="2377440"/>
           </a:xfrm>
           <a:prstGeom prst="roundRect">
             <a:avLst>
-              <a:gd name="adj" fmla="val 4211"/>
+              <a:gd name="adj" fmla="val 3077"/>
             </a:avLst>
           </a:prstGeom>
           <a:solidFill>
@@ -6692,34 +8113,34 @@
         </p:nvSpPr>
         <p:spPr>
           <a:xfrm>
-            <a:off x="6492240" y="3886200"/>
-            <a:ext cx="4892040" cy="640080"/>
-          </a:xfrm>
-          <a:prstGeom prst="rect">
-            <a:avLst/>
-          </a:prstGeom>
-          <a:noFill/>
-          <a:ln/>
-        </p:spPr>
-        <p:txBody>
-          <a:bodyPr wrap="square" lIns="0" tIns="0" rIns="0" bIns="0" rtlCol="0" anchor="t"/>
-          <a:lstStyle/>
-          <a:p>
-            <a:pPr indent="0" marL="0">
-              <a:buNone/>
-            </a:pPr>
-            <a:r>
-              <a:rPr lang="en-US" sz="1400" b="1" dirty="0">
+            <a:off x="6537960" y="2377440"/>
+            <a:ext cx="4800600" cy="457200"/>
+          </a:xfrm>
+          <a:prstGeom prst="rect">
+            <a:avLst/>
+          </a:prstGeom>
+          <a:noFill/>
+          <a:ln/>
+        </p:spPr>
+        <p:txBody>
+          <a:bodyPr wrap="square" lIns="0" tIns="0" rIns="0" bIns="0" rtlCol="0" anchor="ctr"/>
+          <a:lstStyle/>
+          <a:p>
+            <a:pPr indent="0" marL="0">
+              <a:buNone/>
+            </a:pPr>
+            <a:r>
+              <a:rPr lang="en-US" sz="2000" b="1" dirty="0">
                 <a:solidFill>
                   <a:srgbClr val="4FB0C6"/>
                 </a:solidFill>
-                <a:latin typeface="Courier New" pitchFamily="34" charset="0"/>
-                <a:ea typeface="Courier New" pitchFamily="34" charset="-122"/>
-                <a:cs typeface="Courier New" pitchFamily="34" charset="-120"/>
-              </a:rPr>
-              <a:t>CUDA_MEMTEST_BACKEND</a:t>
-            </a:r>
-            <a:endParaRPr lang="en-US" sz="1400" dirty="0"/>
+                <a:latin typeface="Malgun Gothic" pitchFamily="34" charset="0"/>
+                <a:ea typeface="Malgun Gothic" pitchFamily="34" charset="-122"/>
+                <a:cs typeface="Malgun Gothic" pitchFamily="34" charset="-120"/>
+              </a:rPr>
+              <a:t>소프트 오류(soft error)</a:t>
+            </a:r>
+            <a:endParaRPr lang="en-US" sz="2000" dirty="0"/>
           </a:p>
         </p:txBody>
       </p:sp>
@@ -6731,8 +8152,47 @@
         </p:nvSpPr>
         <p:spPr>
           <a:xfrm>
-            <a:off x="6492240" y="4526280"/>
-            <a:ext cx="4892040" cy="822960"/>
+            <a:off x="6537960" y="2834640"/>
+            <a:ext cx="4800600" cy="411480"/>
+          </a:xfrm>
+          <a:prstGeom prst="rect">
+            <a:avLst/>
+          </a:prstGeom>
+          <a:noFill/>
+          <a:ln/>
+        </p:spPr>
+        <p:txBody>
+          <a:bodyPr wrap="square" lIns="0" tIns="0" rIns="0" bIns="0" rtlCol="0" anchor="ctr"/>
+          <a:lstStyle/>
+          <a:p>
+            <a:pPr indent="0" marL="0">
+              <a:buNone/>
+            </a:pPr>
+            <a:r>
+              <a:rPr lang="en-US" sz="1500" b="1" dirty="0">
+                <a:solidFill>
+                  <a:srgbClr val="9AA6B2"/>
+                </a:solidFill>
+                <a:latin typeface="Malgun Gothic" pitchFamily="34" charset="0"/>
+                <a:ea typeface="Malgun Gothic" pitchFamily="34" charset="-122"/>
+                <a:cs typeface="Malgun Gothic" pitchFamily="34" charset="-120"/>
+              </a:rPr>
+              <a:t>일시적 뒤집힘</a:t>
+            </a:r>
+            <a:endParaRPr lang="en-US" sz="1500" dirty="0"/>
+          </a:p>
+        </p:txBody>
+      </p:sp>
+      <p:sp>
+        <p:nvSpPr>
+          <p:cNvPr id="12" name="Text 10"/>
+          <p:cNvSpPr/>
+          <p:nvPr/>
+        </p:nvSpPr>
+        <p:spPr>
+          <a:xfrm>
+            <a:off x="6537960" y="3337560"/>
+            <a:ext cx="4800600" cy="1005840"/>
           </a:xfrm>
           <a:prstGeom prst="rect">
             <a:avLst/>
@@ -6751,7 +8211,7 @@
               <a:buNone/>
             </a:pPr>
             <a:r>
-              <a:rPr lang="en-US" sz="1400" dirty="0">
+              <a:rPr lang="en-US" sz="1500" dirty="0">
                 <a:solidFill>
                   <a:srgbClr val="E8EDF2"/>
                 </a:solidFill>
@@ -6759,48 +8219,84 @@
                 <a:ea typeface="Malgun Gothic" pitchFamily="34" charset="-122"/>
                 <a:cs typeface="Malgun Gothic" pitchFamily="34" charset="-120"/>
               </a:rPr>
-              <a:t>cuda / hip 백엔드 선택 (CMakeLists.txt:22).</a:t>
-            </a:r>
-            <a:endParaRPr lang="en-US" sz="1400" dirty="0"/>
-          </a:p>
-        </p:txBody>
-      </p:sp>
-      <p:sp>
-        <p:nvSpPr>
-          <p:cNvPr id="12" name="Text 10"/>
-          <p:cNvSpPr/>
-          <p:nvPr/>
-        </p:nvSpPr>
-        <p:spPr>
-          <a:xfrm>
-            <a:off x="548640" y="5623560"/>
-            <a:ext cx="11064240" cy="457200"/>
-          </a:xfrm>
-          <a:prstGeom prst="rect">
-            <a:avLst/>
-          </a:prstGeom>
-          <a:noFill/>
-          <a:ln/>
-        </p:spPr>
-        <p:txBody>
-          <a:bodyPr wrap="square" lIns="0" tIns="0" rIns="0" bIns="0" rtlCol="0" anchor="ctr"/>
-          <a:lstStyle/>
-          <a:p>
-            <a:pPr indent="0" marL="0">
-              <a:buNone/>
-            </a:pPr>
-            <a:r>
-              <a:rPr lang="en-US" sz="1300" i="1" dirty="0">
-                <a:solidFill>
-                  <a:srgbClr val="9AA6B2"/>
-                </a:solidFill>
-                <a:latin typeface="Malgun Gothic" pitchFamily="34" charset="0"/>
-                <a:ea typeface="Malgun Gothic" pitchFamily="34" charset="-122"/>
-                <a:cs typeface="Malgun Gothic" pitchFamily="34" charset="-120"/>
-              </a:rPr>
-              <a:t>본인 GPU의 sm_XX 번호: developer.nvidia.com/cuda-gpus  (예: T4→75, RTX30→86, RTX40→89, A100→80)</a:t>
-            </a:r>
-            <a:endParaRPr lang="en-US" sz="1300" dirty="0"/>
+              <a:t>우주 방사선 등으로 비트가 잠깐 뒤집힘. 다시 쓰면 정상.</a:t>
+            </a:r>
+            <a:endParaRPr lang="en-US" sz="1500" dirty="0"/>
+          </a:p>
+        </p:txBody>
+      </p:sp>
+      <p:sp>
+        <p:nvSpPr>
+          <p:cNvPr id="13" name="Shape 11"/>
+          <p:cNvSpPr/>
+          <p:nvPr/>
+        </p:nvSpPr>
+        <p:spPr>
+          <a:xfrm>
+            <a:off x="548640" y="4754880"/>
+            <a:ext cx="11064240" cy="1143000"/>
+          </a:xfrm>
+          <a:prstGeom prst="roundRect">
+            <a:avLst>
+              <a:gd name="adj" fmla="val 6400"/>
+            </a:avLst>
+          </a:prstGeom>
+          <a:solidFill>
+            <a:srgbClr val="1A2418"/>
+          </a:solidFill>
+          <a:ln/>
+        </p:spPr>
+      </p:sp>
+      <p:sp>
+        <p:nvSpPr>
+          <p:cNvPr id="14" name="Text 12"/>
+          <p:cNvSpPr/>
+          <p:nvPr/>
+        </p:nvSpPr>
+        <p:spPr>
+          <a:xfrm>
+            <a:off x="822960" y="4937760"/>
+            <a:ext cx="10515600" cy="822960"/>
+          </a:xfrm>
+          <a:prstGeom prst="rect">
+            <a:avLst/>
+          </a:prstGeom>
+          <a:noFill/>
+          <a:ln/>
+        </p:spPr>
+        <p:txBody>
+          <a:bodyPr wrap="square" lIns="0" tIns="0" rIns="0" bIns="0" rtlCol="0" anchor="ctr"/>
+          <a:lstStyle/>
+          <a:p>
+            <a:pPr indent="0" marL="0">
+              <a:buNone/>
+            </a:pPr>
+            <a:r>
+              <a:rPr lang="en-US" sz="1500" b="1" dirty="0">
+                <a:solidFill>
+                  <a:srgbClr val="E0A458"/>
+                </a:solidFill>
+                <a:latin typeface="Malgun Gothic" pitchFamily="34" charset="0"/>
+                <a:ea typeface="Malgun Gothic" pitchFamily="34" charset="-122"/>
+                <a:cs typeface="Malgun Gothic" pitchFamily="34" charset="-120"/>
+              </a:rPr>
+              <a:t>실제 배경: </a:t>
+            </a:r>
+            <a:pPr indent="0" marL="0">
+              <a:buNone/>
+            </a:pPr>
+            <a:r>
+              <a:rPr lang="en-US" sz="1500" dirty="0">
+                <a:solidFill>
+                  <a:srgbClr val="E8EDF2"/>
+                </a:solidFill>
+                <a:latin typeface="Malgun Gothic" pitchFamily="34" charset="0"/>
+                <a:ea typeface="Malgun Gothic" pitchFamily="34" charset="-122"/>
+                <a:cs typeface="Malgun Gothic" pitchFamily="34" charset="-120"/>
+              </a:rPr>
+              <a:t>이 도구는 NCSA의 대규모 GPU 클러스터(500+ Tesla GPU) 운영에서 나왔습니다. 원논문은 doc/ 폴더에 있고, 한국어 EPUB 번역본도 함께 제공됩니다.</a:t>
+            </a:r>
+            <a:endParaRPr lang="en-US" sz="1500" dirty="0"/>
           </a:p>
         </p:txBody>
       </p:sp>
@@ -6873,7 +8369,7 @@
                 <a:ea typeface="Courier New" pitchFamily="34" charset="-122"/>
                 <a:cs typeface="Courier New" pitchFamily="34" charset="-120"/>
               </a:rPr>
-              <a:t>5</a:t>
+              <a:t>4</a:t>
             </a:r>
             <a:endParaRPr lang="en-US" sz="2200" dirty="0"/>
           </a:p>
@@ -6912,7 +8408,7 @@
                 <a:ea typeface="Malgun Gothic" pitchFamily="34" charset="-122"/>
                 <a:cs typeface="Malgun Gothic" pitchFamily="34" charset="-120"/>
               </a:rPr>
-              <a:t>첫 실행</a:t>
+              <a:t>빌드 시스템 · CMake</a:t>
             </a:r>
             <a:endParaRPr lang="en-US" sz="3000" dirty="0"/>
           </a:p>
@@ -6926,73 +8422,12 @@
         </p:nvSpPr>
         <p:spPr>
           <a:xfrm>
-            <a:off x="548640" y="1600200"/>
-            <a:ext cx="11064240" cy="1234440"/>
+            <a:off x="548640" y="1554480"/>
+            <a:ext cx="11064240" cy="1828800"/>
           </a:xfrm>
           <a:prstGeom prst="roundRect">
             <a:avLst>
-              <a:gd name="adj" fmla="val 5926"/>
-            </a:avLst>
-          </a:prstGeom>
-          <a:solidFill>
-            <a:srgbClr val="1E232C"/>
-          </a:solidFill>
-          <a:ln/>
-        </p:spPr>
-      </p:sp>
-      <p:sp>
-        <p:nvSpPr>
-          <p:cNvPr id="5" name="Text 3"/>
-          <p:cNvSpPr/>
-          <p:nvPr/>
-        </p:nvSpPr>
-        <p:spPr>
-          <a:xfrm>
-            <a:off x="822960" y="1764792"/>
-            <a:ext cx="3291840" cy="914400"/>
-          </a:xfrm>
-          <a:prstGeom prst="rect">
-            <a:avLst/>
-          </a:prstGeom>
-          <a:noFill/>
-          <a:ln/>
-        </p:spPr>
-        <p:txBody>
-          <a:bodyPr wrap="square" lIns="0" tIns="0" rIns="0" bIns="0" rtlCol="0" anchor="ctr"/>
-          <a:lstStyle/>
-          <a:p>
-            <a:pPr indent="0" marL="0">
-              <a:buNone/>
-            </a:pPr>
-            <a:r>
-              <a:rPr lang="en-US" sz="1700" b="1" dirty="0">
-                <a:solidFill>
-                  <a:srgbClr val="8CC63F"/>
-                </a:solidFill>
-                <a:latin typeface="Malgun Gothic" pitchFamily="34" charset="0"/>
-                <a:ea typeface="Malgun Gothic" pitchFamily="34" charset="-122"/>
-                <a:cs typeface="Malgun Gothic" pitchFamily="34" charset="-120"/>
-              </a:rPr>
-              <a:t>테스트 목록 보기</a:t>
-            </a:r>
-            <a:endParaRPr lang="en-US" sz="1700" dirty="0"/>
-          </a:p>
-        </p:txBody>
-      </p:sp>
-      <p:sp>
-        <p:nvSpPr>
-          <p:cNvPr id="6" name="Shape 4"/>
-          <p:cNvSpPr/>
-          <p:nvPr/>
-        </p:nvSpPr>
-        <p:spPr>
-          <a:xfrm>
-            <a:off x="4206240" y="1801368"/>
-            <a:ext cx="5669280" cy="502920"/>
-          </a:xfrm>
-          <a:prstGeom prst="roundRect">
-            <a:avLst>
-              <a:gd name="adj" fmla="val 7273"/>
+              <a:gd name="adj" fmla="val 3000"/>
             </a:avLst>
           </a:prstGeom>
           <a:solidFill>
@@ -7008,30 +8443,33 @@
       </p:sp>
       <p:sp>
         <p:nvSpPr>
-          <p:cNvPr id="7" name="Text 5"/>
-          <p:cNvSpPr/>
-          <p:nvPr/>
-        </p:nvSpPr>
-        <p:spPr>
-          <a:xfrm>
-            <a:off x="4389120" y="1801368"/>
-            <a:ext cx="5303520" cy="502920"/>
-          </a:xfrm>
-          <a:prstGeom prst="rect">
-            <a:avLst/>
-          </a:prstGeom>
-          <a:noFill/>
-          <a:ln/>
-        </p:spPr>
-        <p:txBody>
-          <a:bodyPr wrap="square" lIns="0" tIns="0" rIns="0" bIns="0" rtlCol="0" anchor="ctr"/>
-          <a:lstStyle/>
-          <a:p>
-            <a:pPr indent="0" marL="0">
-              <a:buNone/>
-            </a:pPr>
-            <a:r>
-              <a:rPr lang="en-US" sz="1200" dirty="0">
+          <p:cNvPr id="5" name="Text 3"/>
+          <p:cNvSpPr/>
+          <p:nvPr/>
+        </p:nvSpPr>
+        <p:spPr>
+          <a:xfrm>
+            <a:off x="749808" y="1700784"/>
+            <a:ext cx="10661904" cy="1536192"/>
+          </a:xfrm>
+          <a:prstGeom prst="rect">
+            <a:avLst/>
+          </a:prstGeom>
+          <a:noFill/>
+          <a:ln/>
+        </p:spPr>
+        <p:txBody>
+          <a:bodyPr wrap="square" lIns="0" tIns="0" rIns="0" bIns="0" rtlCol="0" anchor="t"/>
+          <a:lstStyle/>
+          <a:p>
+            <a:pPr algn="l" indent="0" marL="0">
+              <a:lnSpc>
+                <a:spcPct val="108000"/>
+              </a:lnSpc>
+              <a:buNone/>
+            </a:pPr>
+            <a:r>
+              <a:rPr lang="en-US" sz="1350" dirty="0">
                 <a:solidFill>
                   <a:srgbClr val="E8EDF2"/>
                 </a:solidFill>
@@ -7039,65 +8477,115 @@
                 <a:ea typeface="Courier New" pitchFamily="34" charset="-122"/>
                 <a:cs typeface="Courier New" pitchFamily="34" charset="-120"/>
               </a:rPr>
-              <a:t>./cuda_memtest --list_tests</a:t>
-            </a:r>
-            <a:endParaRPr lang="en-US" sz="1200" dirty="0"/>
-          </a:p>
-        </p:txBody>
-      </p:sp>
-      <p:sp>
-        <p:nvSpPr>
-          <p:cNvPr id="8" name="Text 6"/>
-          <p:cNvSpPr/>
-          <p:nvPr/>
-        </p:nvSpPr>
-        <p:spPr>
-          <a:xfrm>
-            <a:off x="4206240" y="2331720"/>
-            <a:ext cx="7132320" cy="365760"/>
-          </a:xfrm>
-          <a:prstGeom prst="rect">
-            <a:avLst/>
-          </a:prstGeom>
-          <a:noFill/>
-          <a:ln/>
-        </p:spPr>
-        <p:txBody>
-          <a:bodyPr wrap="square" lIns="0" tIns="0" rIns="0" bIns="0" rtlCol="0" anchor="ctr"/>
-          <a:lstStyle/>
-          <a:p>
-            <a:pPr indent="0" marL="0">
-              <a:buNone/>
-            </a:pPr>
-            <a:r>
-              <a:rPr lang="en-US" sz="1300" dirty="0">
+              <a:t>mkdir build &amp;&amp; cd build</a:t>
+            </a:r>
+            <a:endParaRPr lang="en-US" sz="1350" dirty="0"/>
+          </a:p>
+          <a:p>
+            <a:pPr algn="l" indent="0" marL="0">
+              <a:lnSpc>
+                <a:spcPct val="108000"/>
+              </a:lnSpc>
+              <a:buNone/>
+            </a:pPr>
+            <a:r>
+              <a:rPr lang="en-US" sz="1350" dirty="0">
+                <a:solidFill>
+                  <a:srgbClr val="8CC63F"/>
+                </a:solidFill>
+                <a:latin typeface="Courier New" pitchFamily="34" charset="0"/>
+                <a:ea typeface="Courier New" pitchFamily="34" charset="-122"/>
+                <a:cs typeface="Courier New" pitchFamily="34" charset="-120"/>
+              </a:rPr>
+              <a:t>cmake -DCMAKE_CUDA_ARCHITECTURES=86 ..   # 본인 GPU 번호로 교체</a:t>
+            </a:r>
+            <a:endParaRPr lang="en-US" sz="1350" dirty="0"/>
+          </a:p>
+          <a:p>
+            <a:pPr algn="l" indent="0" marL="0">
+              <a:lnSpc>
+                <a:spcPct val="108000"/>
+              </a:lnSpc>
+              <a:buNone/>
+            </a:pPr>
+            <a:r>
+              <a:rPr lang="en-US" sz="1350" dirty="0">
+                <a:solidFill>
+                  <a:srgbClr val="E8EDF2"/>
+                </a:solidFill>
+                <a:latin typeface="Courier New" pitchFamily="34" charset="0"/>
+                <a:ea typeface="Courier New" pitchFamily="34" charset="-122"/>
+                <a:cs typeface="Courier New" pitchFamily="34" charset="-120"/>
+              </a:rPr>
+              <a:t>make -j</a:t>
+            </a:r>
+            <a:endParaRPr lang="en-US" sz="1350" dirty="0"/>
+          </a:p>
+          <a:p>
+            <a:pPr algn="l" indent="0" marL="0">
+              <a:lnSpc>
+                <a:spcPct val="108000"/>
+              </a:lnSpc>
+              <a:buNone/>
+            </a:pPr>
+            <a:endParaRPr lang="en-US" sz="1350" dirty="0"/>
+          </a:p>
+          <a:p>
+            <a:pPr algn="l" indent="0" marL="0">
+              <a:lnSpc>
+                <a:spcPct val="108000"/>
+              </a:lnSpc>
+              <a:buNone/>
+            </a:pPr>
+            <a:r>
+              <a:rPr lang="en-US" sz="1350" dirty="0">
                 <a:solidFill>
                   <a:srgbClr val="9AA6B2"/>
                 </a:solidFill>
-                <a:latin typeface="Malgun Gothic" pitchFamily="34" charset="0"/>
-                <a:ea typeface="Malgun Gothic" pitchFamily="34" charset="-122"/>
-                <a:cs typeface="Malgun Gothic" pitchFamily="34" charset="-120"/>
-              </a:rPr>
-              <a:t>11개 메모리 테스트가 나옴</a:t>
-            </a:r>
-            <a:endParaRPr lang="en-US" sz="1300" dirty="0"/>
-          </a:p>
-        </p:txBody>
-      </p:sp>
-      <p:sp>
-        <p:nvSpPr>
-          <p:cNvPr id="9" name="Shape 7"/>
-          <p:cNvSpPr/>
-          <p:nvPr/>
-        </p:nvSpPr>
-        <p:spPr>
-          <a:xfrm>
-            <a:off x="548640" y="2971800"/>
-            <a:ext cx="11064240" cy="1234440"/>
+                <a:latin typeface="Courier New" pitchFamily="34" charset="0"/>
+                <a:ea typeface="Courier New" pitchFamily="34" charset="-122"/>
+                <a:cs typeface="Courier New" pitchFamily="34" charset="-120"/>
+              </a:rPr>
+              <a:t># AMD GPU면 HIP 백엔드</a:t>
+            </a:r>
+            <a:endParaRPr lang="en-US" sz="1350" dirty="0"/>
+          </a:p>
+          <a:p>
+            <a:pPr algn="l" indent="0" marL="0">
+              <a:lnSpc>
+                <a:spcPct val="108000"/>
+              </a:lnSpc>
+              <a:buNone/>
+            </a:pPr>
+            <a:r>
+              <a:rPr lang="en-US" sz="1350" dirty="0">
+                <a:solidFill>
+                  <a:srgbClr val="4FB0C6"/>
+                </a:solidFill>
+                <a:latin typeface="Courier New" pitchFamily="34" charset="0"/>
+                <a:ea typeface="Courier New" pitchFamily="34" charset="-122"/>
+                <a:cs typeface="Courier New" pitchFamily="34" charset="-120"/>
+              </a:rPr>
+              <a:t>cmake -DCUDA_MEMTEST_BACKEND=hip -DGPU_TARGETS=gfx90a ..</a:t>
+            </a:r>
+            <a:endParaRPr lang="en-US" sz="1350" dirty="0"/>
+          </a:p>
+        </p:txBody>
+      </p:sp>
+      <p:sp>
+        <p:nvSpPr>
+          <p:cNvPr id="6" name="Shape 4"/>
+          <p:cNvSpPr/>
+          <p:nvPr/>
+        </p:nvSpPr>
+        <p:spPr>
+          <a:xfrm>
+            <a:off x="548640" y="3703320"/>
+            <a:ext cx="5349240" cy="1737360"/>
           </a:xfrm>
           <a:prstGeom prst="roundRect">
             <a:avLst>
-              <a:gd name="adj" fmla="val 5926"/>
+              <a:gd name="adj" fmla="val 4211"/>
             </a:avLst>
           </a:prstGeom>
           <a:solidFill>
@@ -7108,162 +8596,99 @@
       </p:sp>
       <p:sp>
         <p:nvSpPr>
-          <p:cNvPr id="10" name="Text 8"/>
-          <p:cNvSpPr/>
-          <p:nvPr/>
-        </p:nvSpPr>
-        <p:spPr>
-          <a:xfrm>
-            <a:off x="822960" y="3136392"/>
-            <a:ext cx="3291840" cy="914400"/>
-          </a:xfrm>
-          <a:prstGeom prst="rect">
-            <a:avLst/>
-          </a:prstGeom>
-          <a:noFill/>
-          <a:ln/>
-        </p:spPr>
-        <p:txBody>
-          <a:bodyPr wrap="square" lIns="0" tIns="0" rIns="0" bIns="0" rtlCol="0" anchor="ctr"/>
-          <a:lstStyle/>
-          <a:p>
-            <a:pPr indent="0" marL="0">
-              <a:buNone/>
-            </a:pPr>
-            <a:r>
-              <a:rPr lang="en-US" sz="1700" b="1" dirty="0">
-                <a:solidFill>
-                  <a:srgbClr val="4FB0C6"/>
-                </a:solidFill>
-                <a:latin typeface="Malgun Gothic" pitchFamily="34" charset="0"/>
-                <a:ea typeface="Malgun Gothic" pitchFamily="34" charset="-122"/>
-                <a:cs typeface="Malgun Gothic" pitchFamily="34" charset="-120"/>
-              </a:rPr>
-              <a:t>빠른 스트레스 실행</a:t>
-            </a:r>
-            <a:endParaRPr lang="en-US" sz="1700" dirty="0"/>
-          </a:p>
-        </p:txBody>
-      </p:sp>
-      <p:sp>
-        <p:nvSpPr>
-          <p:cNvPr id="11" name="Shape 9"/>
-          <p:cNvSpPr/>
-          <p:nvPr/>
-        </p:nvSpPr>
-        <p:spPr>
-          <a:xfrm>
-            <a:off x="4206240" y="3172968"/>
-            <a:ext cx="5669280" cy="502920"/>
-          </a:xfrm>
-          <a:prstGeom prst="roundRect">
-            <a:avLst>
-              <a:gd name="adj" fmla="val 7273"/>
-            </a:avLst>
-          </a:prstGeom>
-          <a:solidFill>
-            <a:srgbClr val="0E1116"/>
-          </a:solidFill>
-          <a:ln w="12700">
-            <a:solidFill>
-              <a:srgbClr val="2C3440"/>
-            </a:solidFill>
-            <a:prstDash val="solid"/>
-          </a:ln>
-        </p:spPr>
-      </p:sp>
-      <p:sp>
-        <p:nvSpPr>
-          <p:cNvPr id="12" name="Text 10"/>
-          <p:cNvSpPr/>
-          <p:nvPr/>
-        </p:nvSpPr>
-        <p:spPr>
-          <a:xfrm>
-            <a:off x="4389120" y="3172968"/>
-            <a:ext cx="5303520" cy="502920"/>
-          </a:xfrm>
-          <a:prstGeom prst="rect">
-            <a:avLst/>
-          </a:prstGeom>
-          <a:noFill/>
-          <a:ln/>
-        </p:spPr>
-        <p:txBody>
-          <a:bodyPr wrap="square" lIns="0" tIns="0" rIns="0" bIns="0" rtlCol="0" anchor="ctr"/>
-          <a:lstStyle/>
-          <a:p>
-            <a:pPr indent="0" marL="0">
-              <a:buNone/>
-            </a:pPr>
-            <a:r>
-              <a:rPr lang="en-US" sz="1200" dirty="0">
-                <a:solidFill>
-                  <a:srgbClr val="E8EDF2"/>
+          <p:cNvPr id="7" name="Text 5"/>
+          <p:cNvSpPr/>
+          <p:nvPr/>
+        </p:nvSpPr>
+        <p:spPr>
+          <a:xfrm>
+            <a:off x="777240" y="3886200"/>
+            <a:ext cx="4892040" cy="640080"/>
+          </a:xfrm>
+          <a:prstGeom prst="rect">
+            <a:avLst/>
+          </a:prstGeom>
+          <a:noFill/>
+          <a:ln/>
+        </p:spPr>
+        <p:txBody>
+          <a:bodyPr wrap="square" lIns="0" tIns="0" rIns="0" bIns="0" rtlCol="0" anchor="t"/>
+          <a:lstStyle/>
+          <a:p>
+            <a:pPr indent="0" marL="0">
+              <a:buNone/>
+            </a:pPr>
+            <a:r>
+              <a:rPr lang="en-US" sz="1400" b="1" dirty="0">
+                <a:solidFill>
+                  <a:srgbClr val="8CC63F"/>
                 </a:solidFill>
                 <a:latin typeface="Courier New" pitchFamily="34" charset="0"/>
                 <a:ea typeface="Courier New" pitchFamily="34" charset="-122"/>
                 <a:cs typeface="Courier New" pitchFamily="34" charset="-120"/>
               </a:rPr>
-              <a:t>./cuda_memtest --stress --num_iterations 100 --num_passes 1</a:t>
-            </a:r>
-            <a:endParaRPr lang="en-US" sz="1200" dirty="0"/>
-          </a:p>
-        </p:txBody>
-      </p:sp>
-      <p:sp>
-        <p:nvSpPr>
-          <p:cNvPr id="13" name="Text 11"/>
-          <p:cNvSpPr/>
-          <p:nvPr/>
-        </p:nvSpPr>
-        <p:spPr>
-          <a:xfrm>
-            <a:off x="4206240" y="3703320"/>
-            <a:ext cx="7132320" cy="365760"/>
-          </a:xfrm>
-          <a:prstGeom prst="rect">
-            <a:avLst/>
-          </a:prstGeom>
-          <a:noFill/>
-          <a:ln/>
-        </p:spPr>
-        <p:txBody>
-          <a:bodyPr wrap="square" lIns="0" tIns="0" rIns="0" bIns="0" rtlCol="0" anchor="ctr"/>
-          <a:lstStyle/>
-          <a:p>
-            <a:pPr indent="0" marL="0">
-              <a:buNone/>
-            </a:pPr>
-            <a:r>
-              <a:rPr lang="en-US" sz="1300" dirty="0">
-                <a:solidFill>
-                  <a:srgbClr val="9AA6B2"/>
-                </a:solidFill>
-                <a:latin typeface="Malgun Gothic" pitchFamily="34" charset="0"/>
-                <a:ea typeface="Malgun Gothic" pitchFamily="34" charset="-122"/>
-                <a:cs typeface="Malgun Gothic" pitchFamily="34" charset="-120"/>
-              </a:rPr>
-              <a:t>GPU 메모리를 실제로 검사</a:t>
-            </a:r>
-            <a:endParaRPr lang="en-US" sz="1300" dirty="0"/>
-          </a:p>
-        </p:txBody>
-      </p:sp>
-      <p:sp>
-        <p:nvSpPr>
-          <p:cNvPr id="14" name="Shape 12"/>
-          <p:cNvSpPr/>
-          <p:nvPr/>
-        </p:nvSpPr>
-        <p:spPr>
-          <a:xfrm>
-            <a:off x="548640" y="4343400"/>
-            <a:ext cx="11064240" cy="1234440"/>
+              <a:t>CMAKE_CUDA_ARCHITECTURES</a:t>
+            </a:r>
+            <a:endParaRPr lang="en-US" sz="1400" dirty="0"/>
+          </a:p>
+        </p:txBody>
+      </p:sp>
+      <p:sp>
+        <p:nvSpPr>
+          <p:cNvPr id="8" name="Text 6"/>
+          <p:cNvSpPr/>
+          <p:nvPr/>
+        </p:nvSpPr>
+        <p:spPr>
+          <a:xfrm>
+            <a:off x="777240" y="4526280"/>
+            <a:ext cx="4892040" cy="822960"/>
+          </a:xfrm>
+          <a:prstGeom prst="rect">
+            <a:avLst/>
+          </a:prstGeom>
+          <a:noFill/>
+          <a:ln/>
+        </p:spPr>
+        <p:txBody>
+          <a:bodyPr wrap="square" lIns="0" tIns="0" rIns="0" bIns="0" rtlCol="0" anchor="t"/>
+          <a:lstStyle/>
+          <a:p>
+            <a:pPr indent="0" marL="0">
+              <a:lnSpc>
+                <a:spcPct val="120000"/>
+              </a:lnSpc>
+              <a:buNone/>
+            </a:pPr>
+            <a:r>
+              <a:rPr lang="en-US" sz="1400" dirty="0">
+                <a:solidFill>
+                  <a:srgbClr val="E8EDF2"/>
+                </a:solidFill>
+                <a:latin typeface="Malgun Gothic" pitchFamily="34" charset="0"/>
+                <a:ea typeface="Malgun Gothic" pitchFamily="34" charset="-122"/>
+                <a:cs typeface="Malgun Gothic" pitchFamily="34" charset="-120"/>
+              </a:rPr>
+              <a:t>GPU 세대(sm_XX)를 지정. 세대마다 기계어가 다름.</a:t>
+            </a:r>
+            <a:endParaRPr lang="en-US" sz="1400" dirty="0"/>
+          </a:p>
+        </p:txBody>
+      </p:sp>
+      <p:sp>
+        <p:nvSpPr>
+          <p:cNvPr id="9" name="Shape 7"/>
+          <p:cNvSpPr/>
+          <p:nvPr/>
+        </p:nvSpPr>
+        <p:spPr>
+          <a:xfrm>
+            <a:off x="6263640" y="3703320"/>
+            <a:ext cx="5349240" cy="1737360"/>
           </a:xfrm>
           <a:prstGeom prst="roundRect">
             <a:avLst>
-              <a:gd name="adj" fmla="val 5926"/>
+              <a:gd name="adj" fmla="val 4211"/>
             </a:avLst>
           </a:prstGeom>
           <a:solidFill>
@@ -7274,135 +8699,111 @@
       </p:sp>
       <p:sp>
         <p:nvSpPr>
-          <p:cNvPr id="15" name="Text 13"/>
-          <p:cNvSpPr/>
-          <p:nvPr/>
-        </p:nvSpPr>
-        <p:spPr>
-          <a:xfrm>
-            <a:off x="822960" y="4507992"/>
-            <a:ext cx="3291840" cy="914400"/>
-          </a:xfrm>
-          <a:prstGeom prst="rect">
-            <a:avLst/>
-          </a:prstGeom>
-          <a:noFill/>
-          <a:ln/>
-        </p:spPr>
-        <p:txBody>
-          <a:bodyPr wrap="square" lIns="0" tIns="0" rIns="0" bIns="0" rtlCol="0" anchor="ctr"/>
-          <a:lstStyle/>
-          <a:p>
-            <a:pPr indent="0" marL="0">
-              <a:buNone/>
-            </a:pPr>
-            <a:r>
-              <a:rPr lang="en-US" sz="1700" b="1" dirty="0">
-                <a:solidFill>
-                  <a:srgbClr val="E0A458"/>
-                </a:solidFill>
-                <a:latin typeface="Malgun Gothic" pitchFamily="34" charset="0"/>
-                <a:ea typeface="Malgun Gothic" pitchFamily="34" charset="-122"/>
-                <a:cs typeface="Malgun Gothic" pitchFamily="34" charset="-120"/>
-              </a:rPr>
-              <a:t>상태 점검 스크립트</a:t>
-            </a:r>
-            <a:endParaRPr lang="en-US" sz="1700" dirty="0"/>
-          </a:p>
-        </p:txBody>
-      </p:sp>
-      <p:sp>
-        <p:nvSpPr>
-          <p:cNvPr id="16" name="Shape 14"/>
-          <p:cNvSpPr/>
-          <p:nvPr/>
-        </p:nvSpPr>
-        <p:spPr>
-          <a:xfrm>
-            <a:off x="4206240" y="4544568"/>
-            <a:ext cx="5669280" cy="502920"/>
-          </a:xfrm>
-          <a:prstGeom prst="roundRect">
-            <a:avLst>
-              <a:gd name="adj" fmla="val 7273"/>
-            </a:avLst>
-          </a:prstGeom>
-          <a:solidFill>
-            <a:srgbClr val="0E1116"/>
-          </a:solidFill>
-          <a:ln w="12700">
-            <a:solidFill>
-              <a:srgbClr val="2C3440"/>
-            </a:solidFill>
-            <a:prstDash val="solid"/>
-          </a:ln>
-        </p:spPr>
-      </p:sp>
-      <p:sp>
-        <p:nvSpPr>
-          <p:cNvPr id="17" name="Text 15"/>
-          <p:cNvSpPr/>
-          <p:nvPr/>
-        </p:nvSpPr>
-        <p:spPr>
-          <a:xfrm>
-            <a:off x="4389120" y="4544568"/>
-            <a:ext cx="5303520" cy="502920"/>
-          </a:xfrm>
-          <a:prstGeom prst="rect">
-            <a:avLst/>
-          </a:prstGeom>
-          <a:noFill/>
-          <a:ln/>
-        </p:spPr>
-        <p:txBody>
-          <a:bodyPr wrap="square" lIns="0" tIns="0" rIns="0" bIns="0" rtlCol="0" anchor="ctr"/>
-          <a:lstStyle/>
-          <a:p>
-            <a:pPr indent="0" marL="0">
-              <a:buNone/>
-            </a:pPr>
-            <a:r>
-              <a:rPr lang="en-US" sz="1200" dirty="0">
-                <a:solidFill>
-                  <a:srgbClr val="E8EDF2"/>
+          <p:cNvPr id="10" name="Text 8"/>
+          <p:cNvSpPr/>
+          <p:nvPr/>
+        </p:nvSpPr>
+        <p:spPr>
+          <a:xfrm>
+            <a:off x="6492240" y="3886200"/>
+            <a:ext cx="4892040" cy="640080"/>
+          </a:xfrm>
+          <a:prstGeom prst="rect">
+            <a:avLst/>
+          </a:prstGeom>
+          <a:noFill/>
+          <a:ln/>
+        </p:spPr>
+        <p:txBody>
+          <a:bodyPr wrap="square" lIns="0" tIns="0" rIns="0" bIns="0" rtlCol="0" anchor="t"/>
+          <a:lstStyle/>
+          <a:p>
+            <a:pPr indent="0" marL="0">
+              <a:buNone/>
+            </a:pPr>
+            <a:r>
+              <a:rPr lang="en-US" sz="1400" b="1" dirty="0">
+                <a:solidFill>
+                  <a:srgbClr val="4FB0C6"/>
                 </a:solidFill>
                 <a:latin typeface="Courier New" pitchFamily="34" charset="0"/>
                 <a:ea typeface="Courier New" pitchFamily="34" charset="-122"/>
                 <a:cs typeface="Courier New" pitchFamily="34" charset="-120"/>
               </a:rPr>
-              <a:t>./sanity_check.sh 0</a:t>
-            </a:r>
-            <a:endParaRPr lang="en-US" sz="1200" dirty="0"/>
-          </a:p>
-        </p:txBody>
-      </p:sp>
-      <p:sp>
-        <p:nvSpPr>
-          <p:cNvPr id="18" name="Text 16"/>
-          <p:cNvSpPr/>
-          <p:nvPr/>
-        </p:nvSpPr>
-        <p:spPr>
-          <a:xfrm>
-            <a:off x="4206240" y="5074920"/>
-            <a:ext cx="7132320" cy="365760"/>
-          </a:xfrm>
-          <a:prstGeom prst="rect">
-            <a:avLst/>
-          </a:prstGeom>
-          <a:noFill/>
-          <a:ln/>
-        </p:spPr>
-        <p:txBody>
-          <a:bodyPr wrap="square" lIns="0" tIns="0" rIns="0" bIns="0" rtlCol="0" anchor="ctr"/>
-          <a:lstStyle/>
-          <a:p>
-            <a:pPr indent="0" marL="0">
-              <a:buNone/>
-            </a:pPr>
-            <a:r>
-              <a:rPr lang="en-US" sz="1300" dirty="0">
+              <a:t>CUDA_MEMTEST_BACKEND</a:t>
+            </a:r>
+            <a:endParaRPr lang="en-US" sz="1400" dirty="0"/>
+          </a:p>
+        </p:txBody>
+      </p:sp>
+      <p:sp>
+        <p:nvSpPr>
+          <p:cNvPr id="11" name="Text 9"/>
+          <p:cNvSpPr/>
+          <p:nvPr/>
+        </p:nvSpPr>
+        <p:spPr>
+          <a:xfrm>
+            <a:off x="6492240" y="4526280"/>
+            <a:ext cx="4892040" cy="822960"/>
+          </a:xfrm>
+          <a:prstGeom prst="rect">
+            <a:avLst/>
+          </a:prstGeom>
+          <a:noFill/>
+          <a:ln/>
+        </p:spPr>
+        <p:txBody>
+          <a:bodyPr wrap="square" lIns="0" tIns="0" rIns="0" bIns="0" rtlCol="0" anchor="t"/>
+          <a:lstStyle/>
+          <a:p>
+            <a:pPr indent="0" marL="0">
+              <a:lnSpc>
+                <a:spcPct val="120000"/>
+              </a:lnSpc>
+              <a:buNone/>
+            </a:pPr>
+            <a:r>
+              <a:rPr lang="en-US" sz="1400" dirty="0">
+                <a:solidFill>
+                  <a:srgbClr val="E8EDF2"/>
+                </a:solidFill>
+                <a:latin typeface="Malgun Gothic" pitchFamily="34" charset="0"/>
+                <a:ea typeface="Malgun Gothic" pitchFamily="34" charset="-122"/>
+                <a:cs typeface="Malgun Gothic" pitchFamily="34" charset="-120"/>
+              </a:rPr>
+              <a:t>cuda / hip 백엔드 선택 (CMakeLists.txt:22).</a:t>
+            </a:r>
+            <a:endParaRPr lang="en-US" sz="1400" dirty="0"/>
+          </a:p>
+        </p:txBody>
+      </p:sp>
+      <p:sp>
+        <p:nvSpPr>
+          <p:cNvPr id="12" name="Text 10"/>
+          <p:cNvSpPr/>
+          <p:nvPr/>
+        </p:nvSpPr>
+        <p:spPr>
+          <a:xfrm>
+            <a:off x="548640" y="5623560"/>
+            <a:ext cx="11064240" cy="457200"/>
+          </a:xfrm>
+          <a:prstGeom prst="rect">
+            <a:avLst/>
+          </a:prstGeom>
+          <a:noFill/>
+          <a:ln/>
+        </p:spPr>
+        <p:txBody>
+          <a:bodyPr wrap="square" lIns="0" tIns="0" rIns="0" bIns="0" rtlCol="0" anchor="ctr"/>
+          <a:lstStyle/>
+          <a:p>
+            <a:pPr indent="0" marL="0">
+              <a:buNone/>
+            </a:pPr>
+            <a:r>
+              <a:rPr lang="en-US" sz="1300" i="1" dirty="0">
                 <a:solidFill>
                   <a:srgbClr val="9AA6B2"/>
                 </a:solidFill>
@@ -7410,48 +8811,9 @@
                 <a:ea typeface="Malgun Gothic" pitchFamily="34" charset="-122"/>
                 <a:cs typeface="Malgun Gothic" pitchFamily="34" charset="-120"/>
               </a:rPr>
-              <a:t>특정 GPU 건강 빠르게 점검</a:t>
+              <a:t>본인 GPU의 sm_XX 번호: developer.nvidia.com/cuda-gpus  (예: T4→75, RTX30→86, RTX40→89, A100→80)</a:t>
             </a:r>
             <a:endParaRPr lang="en-US" sz="1300" dirty="0"/>
-          </a:p>
-        </p:txBody>
-      </p:sp>
-      <p:sp>
-        <p:nvSpPr>
-          <p:cNvPr id="19" name="Text 17"/>
-          <p:cNvSpPr/>
-          <p:nvPr/>
-        </p:nvSpPr>
-        <p:spPr>
-          <a:xfrm>
-            <a:off x="548640" y="5852160"/>
-            <a:ext cx="11064240" cy="365760"/>
-          </a:xfrm>
-          <a:prstGeom prst="rect">
-            <a:avLst/>
-          </a:prstGeom>
-          <a:noFill/>
-          <a:ln/>
-        </p:spPr>
-        <p:txBody>
-          <a:bodyPr wrap="square" lIns="0" tIns="0" rIns="0" bIns="0" rtlCol="0" anchor="ctr"/>
-          <a:lstStyle/>
-          <a:p>
-            <a:pPr algn="ctr" indent="0" marL="0">
-              <a:buNone/>
-            </a:pPr>
-            <a:r>
-              <a:rPr lang="en-US" sz="1400" i="1" dirty="0">
-                <a:solidFill>
-                  <a:srgbClr val="9AA6B2"/>
-                </a:solidFill>
-                <a:latin typeface="Malgun Gothic" pitchFamily="34" charset="0"/>
-                <a:ea typeface="Malgun Gothic" pitchFamily="34" charset="-122"/>
-                <a:cs typeface="Malgun Gothic" pitchFamily="34" charset="-120"/>
-              </a:rPr>
-              <a:t>오류 없이 끝나면 성공입니다 — 건강한 GPU는 '아무 일도 안 일어난 것처럼' 조용히 끝납니다.</a:t>
-            </a:r>
-            <a:endParaRPr lang="en-US" sz="1400" dirty="0"/>
           </a:p>
         </p:txBody>
       </p:sp>
@@ -7524,7 +8886,7 @@
                 <a:ea typeface="Courier New" pitchFamily="34" charset="-122"/>
                 <a:cs typeface="Courier New" pitchFamily="34" charset="-120"/>
               </a:rPr>
-              <a:t>6</a:t>
+              <a:t>5</a:t>
             </a:r>
             <a:endParaRPr lang="en-US" sz="2200" dirty="0"/>
           </a:p>
@@ -7563,7 +8925,7 @@
                 <a:ea typeface="Malgun Gothic" pitchFamily="34" charset="-122"/>
                 <a:cs typeface="Malgun Gothic" pitchFamily="34" charset="-120"/>
               </a:rPr>
-              <a:t>11개 테스트 한눈에</a:t>
+              <a:t>첫 실행</a:t>
             </a:r>
             <a:endParaRPr lang="en-US" sz="3000" dirty="0"/>
           </a:p>
@@ -7578,11 +8940,11 @@
         <p:spPr>
           <a:xfrm>
             <a:off x="548640" y="1600200"/>
-            <a:ext cx="3505200" cy="786384"/>
+            <a:ext cx="11064240" cy="1234440"/>
           </a:xfrm>
           <a:prstGeom prst="roundRect">
             <a:avLst>
-              <a:gd name="adj" fmla="val 6977"/>
+              <a:gd name="adj" fmla="val 5926"/>
             </a:avLst>
           </a:prstGeom>
           <a:solidFill>
@@ -7599,106 +8961,129 @@
         </p:nvSpPr>
         <p:spPr>
           <a:xfrm>
-            <a:off x="731520" y="1728216"/>
-            <a:ext cx="658368" cy="530352"/>
+            <a:off x="822960" y="1764792"/>
+            <a:ext cx="3291840" cy="914400"/>
+          </a:xfrm>
+          <a:prstGeom prst="rect">
+            <a:avLst/>
+          </a:prstGeom>
+          <a:noFill/>
+          <a:ln/>
+        </p:spPr>
+        <p:txBody>
+          <a:bodyPr wrap="square" lIns="0" tIns="0" rIns="0" bIns="0" rtlCol="0" anchor="ctr"/>
+          <a:lstStyle/>
+          <a:p>
+            <a:pPr indent="0" marL="0">
+              <a:buNone/>
+            </a:pPr>
+            <a:r>
+              <a:rPr lang="en-US" sz="1700" b="1" dirty="0">
+                <a:solidFill>
+                  <a:srgbClr val="8CC63F"/>
+                </a:solidFill>
+                <a:latin typeface="Malgun Gothic" pitchFamily="34" charset="0"/>
+                <a:ea typeface="Malgun Gothic" pitchFamily="34" charset="-122"/>
+                <a:cs typeface="Malgun Gothic" pitchFamily="34" charset="-120"/>
+              </a:rPr>
+              <a:t>테스트 목록 보기</a:t>
+            </a:r>
+            <a:endParaRPr lang="en-US" sz="1700" dirty="0"/>
+          </a:p>
+        </p:txBody>
+      </p:sp>
+      <p:sp>
+        <p:nvSpPr>
+          <p:cNvPr id="6" name="Shape 4"/>
+          <p:cNvSpPr/>
+          <p:nvPr/>
+        </p:nvSpPr>
+        <p:spPr>
+          <a:xfrm>
+            <a:off x="4206240" y="1801368"/>
+            <a:ext cx="5669280" cy="502920"/>
           </a:xfrm>
           <a:prstGeom prst="roundRect">
             <a:avLst>
-              <a:gd name="adj" fmla="val 10345"/>
+              <a:gd name="adj" fmla="val 7273"/>
             </a:avLst>
           </a:prstGeom>
           <a:solidFill>
-            <a:srgbClr val="4FB0C6"/>
+            <a:srgbClr val="0E1116"/>
           </a:solidFill>
-          <a:ln/>
-        </p:spPr>
-        <p:txBody>
-          <a:bodyPr wrap="square" rtlCol="0" anchor="ctr"/>
-          <a:lstStyle/>
-          <a:p>
-            <a:pPr algn="ctr" indent="0" marL="0">
-              <a:buNone/>
-            </a:pPr>
-            <a:r>
-              <a:rPr lang="en-US" sz="1600" b="1" dirty="0">
-                <a:solidFill>
-                  <a:srgbClr val="13161C"/>
+          <a:ln w="12700">
+            <a:solidFill>
+              <a:srgbClr val="2C3440"/>
+            </a:solidFill>
+            <a:prstDash val="solid"/>
+          </a:ln>
+        </p:spPr>
+      </p:sp>
+      <p:sp>
+        <p:nvSpPr>
+          <p:cNvPr id="7" name="Text 5"/>
+          <p:cNvSpPr/>
+          <p:nvPr/>
+        </p:nvSpPr>
+        <p:spPr>
+          <a:xfrm>
+            <a:off x="4389120" y="1801368"/>
+            <a:ext cx="5303520" cy="502920"/>
+          </a:xfrm>
+          <a:prstGeom prst="rect">
+            <a:avLst/>
+          </a:prstGeom>
+          <a:noFill/>
+          <a:ln/>
+        </p:spPr>
+        <p:txBody>
+          <a:bodyPr wrap="square" lIns="0" tIns="0" rIns="0" bIns="0" rtlCol="0" anchor="ctr"/>
+          <a:lstStyle/>
+          <a:p>
+            <a:pPr indent="0" marL="0">
+              <a:buNone/>
+            </a:pPr>
+            <a:r>
+              <a:rPr lang="en-US" sz="1200" dirty="0">
+                <a:solidFill>
+                  <a:srgbClr val="E8EDF2"/>
                 </a:solidFill>
                 <a:latin typeface="Courier New" pitchFamily="34" charset="0"/>
                 <a:ea typeface="Courier New" pitchFamily="34" charset="-122"/>
                 <a:cs typeface="Courier New" pitchFamily="34" charset="-120"/>
               </a:rPr>
-              <a:t>0</a:t>
-            </a:r>
-            <a:endParaRPr lang="en-US" sz="1600" dirty="0"/>
-          </a:p>
-        </p:txBody>
-      </p:sp>
-      <p:sp>
-        <p:nvSpPr>
-          <p:cNvPr id="6" name="Text 4"/>
-          <p:cNvSpPr/>
-          <p:nvPr/>
-        </p:nvSpPr>
-        <p:spPr>
-          <a:xfrm>
-            <a:off x="1508760" y="1691640"/>
-            <a:ext cx="2407920" cy="384048"/>
-          </a:xfrm>
-          <a:prstGeom prst="rect">
-            <a:avLst/>
-          </a:prstGeom>
-          <a:noFill/>
-          <a:ln/>
-        </p:spPr>
-        <p:txBody>
-          <a:bodyPr wrap="square" lIns="0" tIns="0" rIns="0" bIns="0" rtlCol="0" anchor="ctr"/>
-          <a:lstStyle/>
-          <a:p>
-            <a:pPr indent="0" marL="0">
-              <a:buNone/>
-            </a:pPr>
-            <a:r>
-              <a:rPr lang="en-US" sz="1350" b="1" dirty="0">
-                <a:solidFill>
-                  <a:srgbClr val="E8EDF2"/>
-                </a:solidFill>
-                <a:latin typeface="Malgun Gothic" pitchFamily="34" charset="0"/>
-                <a:ea typeface="Malgun Gothic" pitchFamily="34" charset="-122"/>
-                <a:cs typeface="Malgun Gothic" pitchFamily="34" charset="-120"/>
-              </a:rPr>
-              <a:t>Walking 1 bit</a:t>
-            </a:r>
-            <a:endParaRPr lang="en-US" sz="1350" dirty="0"/>
-          </a:p>
-        </p:txBody>
-      </p:sp>
-      <p:sp>
-        <p:nvSpPr>
-          <p:cNvPr id="7" name="Text 5"/>
-          <p:cNvSpPr/>
-          <p:nvPr/>
-        </p:nvSpPr>
-        <p:spPr>
-          <a:xfrm>
-            <a:off x="1508760" y="2020824"/>
-            <a:ext cx="2407920" cy="310896"/>
-          </a:xfrm>
-          <a:prstGeom prst="rect">
-            <a:avLst/>
-          </a:prstGeom>
-          <a:noFill/>
-          <a:ln/>
-        </p:spPr>
-        <p:txBody>
-          <a:bodyPr wrap="square" lIns="0" tIns="0" rIns="0" bIns="0" rtlCol="0" anchor="ctr"/>
-          <a:lstStyle/>
-          <a:p>
-            <a:pPr indent="0" marL="0">
-              <a:buNone/>
-            </a:pPr>
-            <a:r>
-              <a:rPr lang="en-US" sz="1150" dirty="0">
+              <a:t>./cuda_memtest --list_tests</a:t>
+            </a:r>
+            <a:endParaRPr lang="en-US" sz="1200" dirty="0"/>
+          </a:p>
+        </p:txBody>
+      </p:sp>
+      <p:sp>
+        <p:nvSpPr>
+          <p:cNvPr id="8" name="Text 6"/>
+          <p:cNvSpPr/>
+          <p:nvPr/>
+        </p:nvSpPr>
+        <p:spPr>
+          <a:xfrm>
+            <a:off x="4206240" y="2331720"/>
+            <a:ext cx="7132320" cy="365760"/>
+          </a:xfrm>
+          <a:prstGeom prst="rect">
+            <a:avLst/>
+          </a:prstGeom>
+          <a:noFill/>
+          <a:ln/>
+        </p:spPr>
+        <p:txBody>
+          <a:bodyPr wrap="square" lIns="0" tIns="0" rIns="0" bIns="0" rtlCol="0" anchor="ctr"/>
+          <a:lstStyle/>
+          <a:p>
+            <a:pPr indent="0" marL="0">
+              <a:buNone/>
+            </a:pPr>
+            <a:r>
+              <a:rPr lang="en-US" sz="1300" dirty="0">
                 <a:solidFill>
                   <a:srgbClr val="9AA6B2"/>
                 </a:solidFill>
@@ -7706,26 +9091,26 @@
                 <a:ea typeface="Malgun Gothic" pitchFamily="34" charset="-122"/>
                 <a:cs typeface="Malgun Gothic" pitchFamily="34" charset="-120"/>
               </a:rPr>
-              <a:t>주소 배선</a:t>
-            </a:r>
-            <a:endParaRPr lang="en-US" sz="1150" dirty="0"/>
-          </a:p>
-        </p:txBody>
-      </p:sp>
-      <p:sp>
-        <p:nvSpPr>
-          <p:cNvPr id="8" name="Shape 6"/>
-          <p:cNvSpPr/>
-          <p:nvPr/>
-        </p:nvSpPr>
-        <p:spPr>
-          <a:xfrm>
-            <a:off x="4328160" y="1600200"/>
-            <a:ext cx="3505200" cy="786384"/>
+              <a:t>11개 메모리 테스트가 나옴</a:t>
+            </a:r>
+            <a:endParaRPr lang="en-US" sz="1300" dirty="0"/>
+          </a:p>
+        </p:txBody>
+      </p:sp>
+      <p:sp>
+        <p:nvSpPr>
+          <p:cNvPr id="9" name="Shape 7"/>
+          <p:cNvSpPr/>
+          <p:nvPr/>
+        </p:nvSpPr>
+        <p:spPr>
+          <a:xfrm>
+            <a:off x="548640" y="2971800"/>
+            <a:ext cx="11064240" cy="1234440"/>
           </a:xfrm>
           <a:prstGeom prst="roundRect">
             <a:avLst>
-              <a:gd name="adj" fmla="val 6977"/>
+              <a:gd name="adj" fmla="val 5926"/>
             </a:avLst>
           </a:prstGeom>
           <a:solidFill>
@@ -7736,112 +9121,135 @@
       </p:sp>
       <p:sp>
         <p:nvSpPr>
-          <p:cNvPr id="9" name="Text 7"/>
-          <p:cNvSpPr/>
-          <p:nvPr/>
-        </p:nvSpPr>
-        <p:spPr>
-          <a:xfrm>
-            <a:off x="4511040" y="1728216"/>
-            <a:ext cx="658368" cy="530352"/>
+          <p:cNvPr id="10" name="Text 8"/>
+          <p:cNvSpPr/>
+          <p:nvPr/>
+        </p:nvSpPr>
+        <p:spPr>
+          <a:xfrm>
+            <a:off x="822960" y="3136392"/>
+            <a:ext cx="3291840" cy="914400"/>
+          </a:xfrm>
+          <a:prstGeom prst="rect">
+            <a:avLst/>
+          </a:prstGeom>
+          <a:noFill/>
+          <a:ln/>
+        </p:spPr>
+        <p:txBody>
+          <a:bodyPr wrap="square" lIns="0" tIns="0" rIns="0" bIns="0" rtlCol="0" anchor="ctr"/>
+          <a:lstStyle/>
+          <a:p>
+            <a:pPr indent="0" marL="0">
+              <a:buNone/>
+            </a:pPr>
+            <a:r>
+              <a:rPr lang="en-US" sz="1700" b="1" dirty="0">
+                <a:solidFill>
+                  <a:srgbClr val="4FB0C6"/>
+                </a:solidFill>
+                <a:latin typeface="Malgun Gothic" pitchFamily="34" charset="0"/>
+                <a:ea typeface="Malgun Gothic" pitchFamily="34" charset="-122"/>
+                <a:cs typeface="Malgun Gothic" pitchFamily="34" charset="-120"/>
+              </a:rPr>
+              <a:t>빠른 스트레스 실행</a:t>
+            </a:r>
+            <a:endParaRPr lang="en-US" sz="1700" dirty="0"/>
+          </a:p>
+        </p:txBody>
+      </p:sp>
+      <p:sp>
+        <p:nvSpPr>
+          <p:cNvPr id="11" name="Shape 9"/>
+          <p:cNvSpPr/>
+          <p:nvPr/>
+        </p:nvSpPr>
+        <p:spPr>
+          <a:xfrm>
+            <a:off x="4206240" y="3172968"/>
+            <a:ext cx="5669280" cy="502920"/>
           </a:xfrm>
           <a:prstGeom prst="roundRect">
             <a:avLst>
-              <a:gd name="adj" fmla="val 10345"/>
+              <a:gd name="adj" fmla="val 7273"/>
             </a:avLst>
           </a:prstGeom>
           <a:solidFill>
-            <a:srgbClr val="4FB0C6"/>
+            <a:srgbClr val="0E1116"/>
           </a:solidFill>
-          <a:ln/>
-        </p:spPr>
-        <p:txBody>
-          <a:bodyPr wrap="square" rtlCol="0" anchor="ctr"/>
-          <a:lstStyle/>
-          <a:p>
-            <a:pPr algn="ctr" indent="0" marL="0">
-              <a:buNone/>
-            </a:pPr>
-            <a:r>
-              <a:rPr lang="en-US" sz="1600" b="1" dirty="0">
-                <a:solidFill>
-                  <a:srgbClr val="13161C"/>
+          <a:ln w="12700">
+            <a:solidFill>
+              <a:srgbClr val="2C3440"/>
+            </a:solidFill>
+            <a:prstDash val="solid"/>
+          </a:ln>
+        </p:spPr>
+      </p:sp>
+      <p:sp>
+        <p:nvSpPr>
+          <p:cNvPr id="12" name="Text 10"/>
+          <p:cNvSpPr/>
+          <p:nvPr/>
+        </p:nvSpPr>
+        <p:spPr>
+          <a:xfrm>
+            <a:off x="4389120" y="3172968"/>
+            <a:ext cx="5303520" cy="502920"/>
+          </a:xfrm>
+          <a:prstGeom prst="rect">
+            <a:avLst/>
+          </a:prstGeom>
+          <a:noFill/>
+          <a:ln/>
+        </p:spPr>
+        <p:txBody>
+          <a:bodyPr wrap="square" lIns="0" tIns="0" rIns="0" bIns="0" rtlCol="0" anchor="ctr"/>
+          <a:lstStyle/>
+          <a:p>
+            <a:pPr indent="0" marL="0">
+              <a:buNone/>
+            </a:pPr>
+            <a:r>
+              <a:rPr lang="en-US" sz="1200" dirty="0">
+                <a:solidFill>
+                  <a:srgbClr val="E8EDF2"/>
                 </a:solidFill>
                 <a:latin typeface="Courier New" pitchFamily="34" charset="0"/>
                 <a:ea typeface="Courier New" pitchFamily="34" charset="-122"/>
                 <a:cs typeface="Courier New" pitchFamily="34" charset="-120"/>
               </a:rPr>
-              <a:t>1</a:t>
-            </a:r>
-            <a:endParaRPr lang="en-US" sz="1600" dirty="0"/>
-          </a:p>
-        </p:txBody>
-      </p:sp>
-      <p:sp>
-        <p:nvSpPr>
-          <p:cNvPr id="10" name="Text 8"/>
-          <p:cNvSpPr/>
-          <p:nvPr/>
-        </p:nvSpPr>
-        <p:spPr>
-          <a:xfrm>
-            <a:off x="5288280" y="1691640"/>
-            <a:ext cx="2407920" cy="384048"/>
-          </a:xfrm>
-          <a:prstGeom prst="rect">
-            <a:avLst/>
-          </a:prstGeom>
-          <a:noFill/>
-          <a:ln/>
-        </p:spPr>
-        <p:txBody>
-          <a:bodyPr wrap="square" lIns="0" tIns="0" rIns="0" bIns="0" rtlCol="0" anchor="ctr"/>
-          <a:lstStyle/>
-          <a:p>
-            <a:pPr indent="0" marL="0">
-              <a:buNone/>
-            </a:pPr>
-            <a:r>
-              <a:rPr lang="en-US" sz="1350" b="1" dirty="0">
-                <a:solidFill>
-                  <a:srgbClr val="E8EDF2"/>
-                </a:solidFill>
-                <a:latin typeface="Malgun Gothic" pitchFamily="34" charset="0"/>
-                <a:ea typeface="Malgun Gothic" pitchFamily="34" charset="-122"/>
-                <a:cs typeface="Malgun Gothic" pitchFamily="34" charset="-120"/>
-              </a:rPr>
-              <a:t>Own address</a:t>
-            </a:r>
-            <a:endParaRPr lang="en-US" sz="1350" dirty="0"/>
-          </a:p>
-        </p:txBody>
-      </p:sp>
-      <p:sp>
-        <p:nvSpPr>
-          <p:cNvPr id="11" name="Text 9"/>
-          <p:cNvSpPr/>
-          <p:nvPr/>
-        </p:nvSpPr>
-        <p:spPr>
-          <a:xfrm>
-            <a:off x="5288280" y="2020824"/>
-            <a:ext cx="2407920" cy="310896"/>
-          </a:xfrm>
-          <a:prstGeom prst="rect">
-            <a:avLst/>
-          </a:prstGeom>
-          <a:noFill/>
-          <a:ln/>
-        </p:spPr>
-        <p:txBody>
-          <a:bodyPr wrap="square" lIns="0" tIns="0" rIns="0" bIns="0" rtlCol="0" anchor="ctr"/>
-          <a:lstStyle/>
-          <a:p>
-            <a:pPr indent="0" marL="0">
-              <a:buNone/>
-            </a:pPr>
-            <a:r>
-              <a:rPr lang="en-US" sz="1150" dirty="0">
+              <a:t>./cuda_memtest --stress --num_iterations 100 --num_passes 1</a:t>
+            </a:r>
+            <a:endParaRPr lang="en-US" sz="1200" dirty="0"/>
+          </a:p>
+        </p:txBody>
+      </p:sp>
+      <p:sp>
+        <p:nvSpPr>
+          <p:cNvPr id="13" name="Text 11"/>
+          <p:cNvSpPr/>
+          <p:nvPr/>
+        </p:nvSpPr>
+        <p:spPr>
+          <a:xfrm>
+            <a:off x="4206240" y="3703320"/>
+            <a:ext cx="7132320" cy="365760"/>
+          </a:xfrm>
+          <a:prstGeom prst="rect">
+            <a:avLst/>
+          </a:prstGeom>
+          <a:noFill/>
+          <a:ln/>
+        </p:spPr>
+        <p:txBody>
+          <a:bodyPr wrap="square" lIns="0" tIns="0" rIns="0" bIns="0" rtlCol="0" anchor="ctr"/>
+          <a:lstStyle/>
+          <a:p>
+            <a:pPr indent="0" marL="0">
+              <a:buNone/>
+            </a:pPr>
+            <a:r>
+              <a:rPr lang="en-US" sz="1300" dirty="0">
                 <a:solidFill>
                   <a:srgbClr val="9AA6B2"/>
                 </a:solidFill>
@@ -7849,26 +9257,26 @@
                 <a:ea typeface="Malgun Gothic" pitchFamily="34" charset="-122"/>
                 <a:cs typeface="Malgun Gothic" pitchFamily="34" charset="-120"/>
               </a:rPr>
-              <a:t>주소 검사</a:t>
-            </a:r>
-            <a:endParaRPr lang="en-US" sz="1150" dirty="0"/>
-          </a:p>
-        </p:txBody>
-      </p:sp>
-      <p:sp>
-        <p:nvSpPr>
-          <p:cNvPr id="12" name="Shape 10"/>
-          <p:cNvSpPr/>
-          <p:nvPr/>
-        </p:nvSpPr>
-        <p:spPr>
-          <a:xfrm>
-            <a:off x="8107680" y="1600200"/>
-            <a:ext cx="3505200" cy="786384"/>
+              <a:t>GPU 메모리를 실제로 검사</a:t>
+            </a:r>
+            <a:endParaRPr lang="en-US" sz="1300" dirty="0"/>
+          </a:p>
+        </p:txBody>
+      </p:sp>
+      <p:sp>
+        <p:nvSpPr>
+          <p:cNvPr id="14" name="Shape 12"/>
+          <p:cNvSpPr/>
+          <p:nvPr/>
+        </p:nvSpPr>
+        <p:spPr>
+          <a:xfrm>
+            <a:off x="548640" y="4343400"/>
+            <a:ext cx="11064240" cy="1234440"/>
           </a:xfrm>
           <a:prstGeom prst="roundRect">
             <a:avLst>
-              <a:gd name="adj" fmla="val 6977"/>
+              <a:gd name="adj" fmla="val 5926"/>
             </a:avLst>
           </a:prstGeom>
           <a:solidFill>
@@ -7879,112 +9287,135 @@
       </p:sp>
       <p:sp>
         <p:nvSpPr>
-          <p:cNvPr id="13" name="Text 11"/>
-          <p:cNvSpPr/>
-          <p:nvPr/>
-        </p:nvSpPr>
-        <p:spPr>
-          <a:xfrm>
-            <a:off x="8290560" y="1728216"/>
-            <a:ext cx="658368" cy="530352"/>
+          <p:cNvPr id="15" name="Text 13"/>
+          <p:cNvSpPr/>
+          <p:nvPr/>
+        </p:nvSpPr>
+        <p:spPr>
+          <a:xfrm>
+            <a:off x="822960" y="4507992"/>
+            <a:ext cx="3291840" cy="914400"/>
+          </a:xfrm>
+          <a:prstGeom prst="rect">
+            <a:avLst/>
+          </a:prstGeom>
+          <a:noFill/>
+          <a:ln/>
+        </p:spPr>
+        <p:txBody>
+          <a:bodyPr wrap="square" lIns="0" tIns="0" rIns="0" bIns="0" rtlCol="0" anchor="ctr"/>
+          <a:lstStyle/>
+          <a:p>
+            <a:pPr indent="0" marL="0">
+              <a:buNone/>
+            </a:pPr>
+            <a:r>
+              <a:rPr lang="en-US" sz="1700" b="1" dirty="0">
+                <a:solidFill>
+                  <a:srgbClr val="E0A458"/>
+                </a:solidFill>
+                <a:latin typeface="Malgun Gothic" pitchFamily="34" charset="0"/>
+                <a:ea typeface="Malgun Gothic" pitchFamily="34" charset="-122"/>
+                <a:cs typeface="Malgun Gothic" pitchFamily="34" charset="-120"/>
+              </a:rPr>
+              <a:t>상태 점검 스크립트</a:t>
+            </a:r>
+            <a:endParaRPr lang="en-US" sz="1700" dirty="0"/>
+          </a:p>
+        </p:txBody>
+      </p:sp>
+      <p:sp>
+        <p:nvSpPr>
+          <p:cNvPr id="16" name="Shape 14"/>
+          <p:cNvSpPr/>
+          <p:nvPr/>
+        </p:nvSpPr>
+        <p:spPr>
+          <a:xfrm>
+            <a:off x="4206240" y="4544568"/>
+            <a:ext cx="5669280" cy="502920"/>
           </a:xfrm>
           <a:prstGeom prst="roundRect">
             <a:avLst>
-              <a:gd name="adj" fmla="val 10345"/>
+              <a:gd name="adj" fmla="val 7273"/>
             </a:avLst>
           </a:prstGeom>
           <a:solidFill>
-            <a:srgbClr val="4FB0C6"/>
+            <a:srgbClr val="0E1116"/>
           </a:solidFill>
-          <a:ln/>
-        </p:spPr>
-        <p:txBody>
-          <a:bodyPr wrap="square" rtlCol="0" anchor="ctr"/>
-          <a:lstStyle/>
-          <a:p>
-            <a:pPr algn="ctr" indent="0" marL="0">
-              <a:buNone/>
-            </a:pPr>
-            <a:r>
-              <a:rPr lang="en-US" sz="1600" b="1" dirty="0">
-                <a:solidFill>
-                  <a:srgbClr val="13161C"/>
+          <a:ln w="12700">
+            <a:solidFill>
+              <a:srgbClr val="2C3440"/>
+            </a:solidFill>
+            <a:prstDash val="solid"/>
+          </a:ln>
+        </p:spPr>
+      </p:sp>
+      <p:sp>
+        <p:nvSpPr>
+          <p:cNvPr id="17" name="Text 15"/>
+          <p:cNvSpPr/>
+          <p:nvPr/>
+        </p:nvSpPr>
+        <p:spPr>
+          <a:xfrm>
+            <a:off x="4389120" y="4544568"/>
+            <a:ext cx="5303520" cy="502920"/>
+          </a:xfrm>
+          <a:prstGeom prst="rect">
+            <a:avLst/>
+          </a:prstGeom>
+          <a:noFill/>
+          <a:ln/>
+        </p:spPr>
+        <p:txBody>
+          <a:bodyPr wrap="square" lIns="0" tIns="0" rIns="0" bIns="0" rtlCol="0" anchor="ctr"/>
+          <a:lstStyle/>
+          <a:p>
+            <a:pPr indent="0" marL="0">
+              <a:buNone/>
+            </a:pPr>
+            <a:r>
+              <a:rPr lang="en-US" sz="1200" dirty="0">
+                <a:solidFill>
+                  <a:srgbClr val="E8EDF2"/>
                 </a:solidFill>
                 <a:latin typeface="Courier New" pitchFamily="34" charset="0"/>
                 <a:ea typeface="Courier New" pitchFamily="34" charset="-122"/>
                 <a:cs typeface="Courier New" pitchFamily="34" charset="-120"/>
               </a:rPr>
-              <a:t>2</a:t>
-            </a:r>
-            <a:endParaRPr lang="en-US" sz="1600" dirty="0"/>
-          </a:p>
-        </p:txBody>
-      </p:sp>
-      <p:sp>
-        <p:nvSpPr>
-          <p:cNvPr id="14" name="Text 12"/>
-          <p:cNvSpPr/>
-          <p:nvPr/>
-        </p:nvSpPr>
-        <p:spPr>
-          <a:xfrm>
-            <a:off x="9067800" y="1691640"/>
-            <a:ext cx="2407920" cy="384048"/>
-          </a:xfrm>
-          <a:prstGeom prst="rect">
-            <a:avLst/>
-          </a:prstGeom>
-          <a:noFill/>
-          <a:ln/>
-        </p:spPr>
-        <p:txBody>
-          <a:bodyPr wrap="square" lIns="0" tIns="0" rIns="0" bIns="0" rtlCol="0" anchor="ctr"/>
-          <a:lstStyle/>
-          <a:p>
-            <a:pPr indent="0" marL="0">
-              <a:buNone/>
-            </a:pPr>
-            <a:r>
-              <a:rPr lang="en-US" sz="1350" b="1" dirty="0">
-                <a:solidFill>
-                  <a:srgbClr val="E8EDF2"/>
-                </a:solidFill>
-                <a:latin typeface="Malgun Gothic" pitchFamily="34" charset="0"/>
-                <a:ea typeface="Malgun Gothic" pitchFamily="34" charset="-122"/>
-                <a:cs typeface="Malgun Gothic" pitchFamily="34" charset="-120"/>
-              </a:rPr>
-              <a:t>Moving inv. (0/1)</a:t>
-            </a:r>
-            <a:endParaRPr lang="en-US" sz="1350" dirty="0"/>
-          </a:p>
-        </p:txBody>
-      </p:sp>
-      <p:sp>
-        <p:nvSpPr>
-          <p:cNvPr id="15" name="Text 13"/>
-          <p:cNvSpPr/>
-          <p:nvPr/>
-        </p:nvSpPr>
-        <p:spPr>
-          <a:xfrm>
-            <a:off x="9067800" y="2020824"/>
-            <a:ext cx="2407920" cy="310896"/>
-          </a:xfrm>
-          <a:prstGeom prst="rect">
-            <a:avLst/>
-          </a:prstGeom>
-          <a:noFill/>
-          <a:ln/>
-        </p:spPr>
-        <p:txBody>
-          <a:bodyPr wrap="square" lIns="0" tIns="0" rIns="0" bIns="0" rtlCol="0" anchor="ctr"/>
-          <a:lstStyle/>
-          <a:p>
-            <a:pPr indent="0" marL="0">
-              <a:buNone/>
-            </a:pPr>
-            <a:r>
-              <a:rPr lang="en-US" sz="1150" dirty="0">
+              <a:t>./sanity_check.sh 0</a:t>
+            </a:r>
+            <a:endParaRPr lang="en-US" sz="1200" dirty="0"/>
+          </a:p>
+        </p:txBody>
+      </p:sp>
+      <p:sp>
+        <p:nvSpPr>
+          <p:cNvPr id="18" name="Text 16"/>
+          <p:cNvSpPr/>
+          <p:nvPr/>
+        </p:nvSpPr>
+        <p:spPr>
+          <a:xfrm>
+            <a:off x="4206240" y="5074920"/>
+            <a:ext cx="7132320" cy="365760"/>
+          </a:xfrm>
+          <a:prstGeom prst="rect">
+            <a:avLst/>
+          </a:prstGeom>
+          <a:noFill/>
+          <a:ln/>
+        </p:spPr>
+        <p:txBody>
+          <a:bodyPr wrap="square" lIns="0" tIns="0" rIns="0" bIns="0" rtlCol="0" anchor="ctr"/>
+          <a:lstStyle/>
+          <a:p>
+            <a:pPr indent="0" marL="0">
+              <a:buNone/>
+            </a:pPr>
+            <a:r>
+              <a:rPr lang="en-US" sz="1300" dirty="0">
                 <a:solidFill>
                   <a:srgbClr val="9AA6B2"/>
                 </a:solidFill>
@@ -7992,142 +9423,38 @@
                 <a:ea typeface="Malgun Gothic" pitchFamily="34" charset="-122"/>
                 <a:cs typeface="Malgun Gothic" pitchFamily="34" charset="-120"/>
               </a:rPr>
-              <a:t>고착 오류</a:t>
-            </a:r>
-            <a:endParaRPr lang="en-US" sz="1150" dirty="0"/>
-          </a:p>
-        </p:txBody>
-      </p:sp>
-      <p:sp>
-        <p:nvSpPr>
-          <p:cNvPr id="16" name="Shape 14"/>
-          <p:cNvSpPr/>
-          <p:nvPr/>
-        </p:nvSpPr>
-        <p:spPr>
-          <a:xfrm>
-            <a:off x="548640" y="2532888"/>
-            <a:ext cx="3505200" cy="786384"/>
-          </a:xfrm>
-          <a:prstGeom prst="roundRect">
-            <a:avLst>
-              <a:gd name="adj" fmla="val 6977"/>
-            </a:avLst>
-          </a:prstGeom>
-          <a:solidFill>
-            <a:srgbClr val="1E232C"/>
-          </a:solidFill>
-          <a:ln/>
-        </p:spPr>
-      </p:sp>
-      <p:sp>
-        <p:nvSpPr>
-          <p:cNvPr id="17" name="Text 15"/>
-          <p:cNvSpPr/>
-          <p:nvPr/>
-        </p:nvSpPr>
-        <p:spPr>
-          <a:xfrm>
-            <a:off x="731520" y="2660904"/>
-            <a:ext cx="658368" cy="530352"/>
-          </a:xfrm>
-          <a:prstGeom prst="roundRect">
-            <a:avLst>
-              <a:gd name="adj" fmla="val 10345"/>
-            </a:avLst>
-          </a:prstGeom>
-          <a:solidFill>
-            <a:srgbClr val="4FB0C6"/>
-          </a:solidFill>
-          <a:ln/>
-        </p:spPr>
-        <p:txBody>
-          <a:bodyPr wrap="square" rtlCol="0" anchor="ctr"/>
+              <a:t>특정 GPU 건강 빠르게 점검</a:t>
+            </a:r>
+            <a:endParaRPr lang="en-US" sz="1300" dirty="0"/>
+          </a:p>
+        </p:txBody>
+      </p:sp>
+      <p:sp>
+        <p:nvSpPr>
+          <p:cNvPr id="19" name="Text 17"/>
+          <p:cNvSpPr/>
+          <p:nvPr/>
+        </p:nvSpPr>
+        <p:spPr>
+          <a:xfrm>
+            <a:off x="548640" y="5852160"/>
+            <a:ext cx="11064240" cy="365760"/>
+          </a:xfrm>
+          <a:prstGeom prst="rect">
+            <a:avLst/>
+          </a:prstGeom>
+          <a:noFill/>
+          <a:ln/>
+        </p:spPr>
+        <p:txBody>
+          <a:bodyPr wrap="square" lIns="0" tIns="0" rIns="0" bIns="0" rtlCol="0" anchor="ctr"/>
           <a:lstStyle/>
           <a:p>
             <a:pPr algn="ctr" indent="0" marL="0">
               <a:buNone/>
             </a:pPr>
             <a:r>
-              <a:rPr lang="en-US" sz="1600" b="1" dirty="0">
-                <a:solidFill>
-                  <a:srgbClr val="13161C"/>
-                </a:solidFill>
-                <a:latin typeface="Courier New" pitchFamily="34" charset="0"/>
-                <a:ea typeface="Courier New" pitchFamily="34" charset="-122"/>
-                <a:cs typeface="Courier New" pitchFamily="34" charset="-120"/>
-              </a:rPr>
-              <a:t>3</a:t>
-            </a:r>
-            <a:endParaRPr lang="en-US" sz="1600" dirty="0"/>
-          </a:p>
-        </p:txBody>
-      </p:sp>
-      <p:sp>
-        <p:nvSpPr>
-          <p:cNvPr id="18" name="Text 16"/>
-          <p:cNvSpPr/>
-          <p:nvPr/>
-        </p:nvSpPr>
-        <p:spPr>
-          <a:xfrm>
-            <a:off x="1508760" y="2624328"/>
-            <a:ext cx="2407920" cy="384048"/>
-          </a:xfrm>
-          <a:prstGeom prst="rect">
-            <a:avLst/>
-          </a:prstGeom>
-          <a:noFill/>
-          <a:ln/>
-        </p:spPr>
-        <p:txBody>
-          <a:bodyPr wrap="square" lIns="0" tIns="0" rIns="0" bIns="0" rtlCol="0" anchor="ctr"/>
-          <a:lstStyle/>
-          <a:p>
-            <a:pPr indent="0" marL="0">
-              <a:buNone/>
-            </a:pPr>
-            <a:r>
-              <a:rPr lang="en-US" sz="1350" b="1" dirty="0">
-                <a:solidFill>
-                  <a:srgbClr val="E8EDF2"/>
-                </a:solidFill>
-                <a:latin typeface="Malgun Gothic" pitchFamily="34" charset="0"/>
-                <a:ea typeface="Malgun Gothic" pitchFamily="34" charset="-122"/>
-                <a:cs typeface="Malgun Gothic" pitchFamily="34" charset="-120"/>
-              </a:rPr>
-              <a:t>Moving inv. (8bit)</a:t>
-            </a:r>
-            <a:endParaRPr lang="en-US" sz="1350" dirty="0"/>
-          </a:p>
-        </p:txBody>
-      </p:sp>
-      <p:sp>
-        <p:nvSpPr>
-          <p:cNvPr id="19" name="Text 17"/>
-          <p:cNvSpPr/>
-          <p:nvPr/>
-        </p:nvSpPr>
-        <p:spPr>
-          <a:xfrm>
-            <a:off x="1508760" y="2953512"/>
-            <a:ext cx="2407920" cy="310896"/>
-          </a:xfrm>
-          <a:prstGeom prst="rect">
-            <a:avLst/>
-          </a:prstGeom>
-          <a:noFill/>
-          <a:ln/>
-        </p:spPr>
-        <p:txBody>
-          <a:bodyPr wrap="square" lIns="0" tIns="0" rIns="0" bIns="0" rtlCol="0" anchor="ctr"/>
-          <a:lstStyle/>
-          <a:p>
-            <a:pPr indent="0" marL="0">
-              <a:buNone/>
-            </a:pPr>
-            <a:r>
-              <a:rPr lang="en-US" sz="1150" dirty="0">
+              <a:rPr lang="en-US" sz="1400" i="1" dirty="0">
                 <a:solidFill>
                   <a:srgbClr val="9AA6B2"/>
                 </a:solidFill>
@@ -8135,1049 +9462,9 @@
                 <a:ea typeface="Malgun Gothic" pitchFamily="34" charset="-122"/>
                 <a:cs typeface="Malgun Gothic" pitchFamily="34" charset="-120"/>
               </a:rPr>
-              <a:t>고착 오류</a:t>
-            </a:r>
-            <a:endParaRPr lang="en-US" sz="1150" dirty="0"/>
-          </a:p>
-        </p:txBody>
-      </p:sp>
-      <p:sp>
-        <p:nvSpPr>
-          <p:cNvPr id="20" name="Shape 18"/>
-          <p:cNvSpPr/>
-          <p:nvPr/>
-        </p:nvSpPr>
-        <p:spPr>
-          <a:xfrm>
-            <a:off x="4328160" y="2532888"/>
-            <a:ext cx="3505200" cy="786384"/>
-          </a:xfrm>
-          <a:prstGeom prst="roundRect">
-            <a:avLst>
-              <a:gd name="adj" fmla="val 6977"/>
-            </a:avLst>
-          </a:prstGeom>
-          <a:solidFill>
-            <a:srgbClr val="1E232C"/>
-          </a:solidFill>
-          <a:ln/>
-        </p:spPr>
-      </p:sp>
-      <p:sp>
-        <p:nvSpPr>
-          <p:cNvPr id="21" name="Text 19"/>
-          <p:cNvSpPr/>
-          <p:nvPr/>
-        </p:nvSpPr>
-        <p:spPr>
-          <a:xfrm>
-            <a:off x="4511040" y="2660904"/>
-            <a:ext cx="658368" cy="530352"/>
-          </a:xfrm>
-          <a:prstGeom prst="roundRect">
-            <a:avLst>
-              <a:gd name="adj" fmla="val 10345"/>
-            </a:avLst>
-          </a:prstGeom>
-          <a:solidFill>
-            <a:srgbClr val="4FB0C6"/>
-          </a:solidFill>
-          <a:ln/>
-        </p:spPr>
-        <p:txBody>
-          <a:bodyPr wrap="square" rtlCol="0" anchor="ctr"/>
-          <a:lstStyle/>
-          <a:p>
-            <a:pPr algn="ctr" indent="0" marL="0">
-              <a:buNone/>
-            </a:pPr>
-            <a:r>
-              <a:rPr lang="en-US" sz="1600" b="1" dirty="0">
-                <a:solidFill>
-                  <a:srgbClr val="13161C"/>
-                </a:solidFill>
-                <a:latin typeface="Courier New" pitchFamily="34" charset="0"/>
-                <a:ea typeface="Courier New" pitchFamily="34" charset="-122"/>
-                <a:cs typeface="Courier New" pitchFamily="34" charset="-120"/>
-              </a:rPr>
-              <a:t>4</a:t>
-            </a:r>
-            <a:endParaRPr lang="en-US" sz="1600" dirty="0"/>
-          </a:p>
-        </p:txBody>
-      </p:sp>
-      <p:sp>
-        <p:nvSpPr>
-          <p:cNvPr id="22" name="Text 20"/>
-          <p:cNvSpPr/>
-          <p:nvPr/>
-        </p:nvSpPr>
-        <p:spPr>
-          <a:xfrm>
-            <a:off x="5288280" y="2624328"/>
-            <a:ext cx="2407920" cy="384048"/>
-          </a:xfrm>
-          <a:prstGeom prst="rect">
-            <a:avLst/>
-          </a:prstGeom>
-          <a:noFill/>
-          <a:ln/>
-        </p:spPr>
-        <p:txBody>
-          <a:bodyPr wrap="square" lIns="0" tIns="0" rIns="0" bIns="0" rtlCol="0" anchor="ctr"/>
-          <a:lstStyle/>
-          <a:p>
-            <a:pPr indent="0" marL="0">
-              <a:buNone/>
-            </a:pPr>
-            <a:r>
-              <a:rPr lang="en-US" sz="1350" b="1" dirty="0">
-                <a:solidFill>
-                  <a:srgbClr val="E8EDF2"/>
-                </a:solidFill>
-                <a:latin typeface="Malgun Gothic" pitchFamily="34" charset="0"/>
-                <a:ea typeface="Malgun Gothic" pitchFamily="34" charset="-122"/>
-                <a:cs typeface="Malgun Gothic" pitchFamily="34" charset="-120"/>
-              </a:rPr>
-              <a:t>Moving inv. (random)</a:t>
-            </a:r>
-            <a:endParaRPr lang="en-US" sz="1350" dirty="0"/>
-          </a:p>
-        </p:txBody>
-      </p:sp>
-      <p:sp>
-        <p:nvSpPr>
-          <p:cNvPr id="23" name="Text 21"/>
-          <p:cNvSpPr/>
-          <p:nvPr/>
-        </p:nvSpPr>
-        <p:spPr>
-          <a:xfrm>
-            <a:off x="5288280" y="2953512"/>
-            <a:ext cx="2407920" cy="310896"/>
-          </a:xfrm>
-          <a:prstGeom prst="rect">
-            <a:avLst/>
-          </a:prstGeom>
-          <a:noFill/>
-          <a:ln/>
-        </p:spPr>
-        <p:txBody>
-          <a:bodyPr wrap="square" lIns="0" tIns="0" rIns="0" bIns="0" rtlCol="0" anchor="ctr"/>
-          <a:lstStyle/>
-          <a:p>
-            <a:pPr indent="0" marL="0">
-              <a:buNone/>
-            </a:pPr>
-            <a:r>
-              <a:rPr lang="en-US" sz="1150" dirty="0">
-                <a:solidFill>
-                  <a:srgbClr val="9AA6B2"/>
-                </a:solidFill>
-                <a:latin typeface="Malgun Gothic" pitchFamily="34" charset="0"/>
-                <a:ea typeface="Malgun Gothic" pitchFamily="34" charset="-122"/>
-                <a:cs typeface="Malgun Gothic" pitchFamily="34" charset="-120"/>
-              </a:rPr>
-              <a:t>데이터 민감</a:t>
-            </a:r>
-            <a:endParaRPr lang="en-US" sz="1150" dirty="0"/>
-          </a:p>
-        </p:txBody>
-      </p:sp>
-      <p:sp>
-        <p:nvSpPr>
-          <p:cNvPr id="24" name="Shape 22"/>
-          <p:cNvSpPr/>
-          <p:nvPr/>
-        </p:nvSpPr>
-        <p:spPr>
-          <a:xfrm>
-            <a:off x="8107680" y="2532888"/>
-            <a:ext cx="3505200" cy="786384"/>
-          </a:xfrm>
-          <a:prstGeom prst="roundRect">
-            <a:avLst>
-              <a:gd name="adj" fmla="val 6977"/>
-            </a:avLst>
-          </a:prstGeom>
-          <a:solidFill>
-            <a:srgbClr val="1E232C"/>
-          </a:solidFill>
-          <a:ln/>
-        </p:spPr>
-      </p:sp>
-      <p:sp>
-        <p:nvSpPr>
-          <p:cNvPr id="25" name="Text 23"/>
-          <p:cNvSpPr/>
-          <p:nvPr/>
-        </p:nvSpPr>
-        <p:spPr>
-          <a:xfrm>
-            <a:off x="8290560" y="2660904"/>
-            <a:ext cx="658368" cy="530352"/>
-          </a:xfrm>
-          <a:prstGeom prst="roundRect">
-            <a:avLst>
-              <a:gd name="adj" fmla="val 10345"/>
-            </a:avLst>
-          </a:prstGeom>
-          <a:solidFill>
-            <a:srgbClr val="4FB0C6"/>
-          </a:solidFill>
-          <a:ln/>
-        </p:spPr>
-        <p:txBody>
-          <a:bodyPr wrap="square" rtlCol="0" anchor="ctr"/>
-          <a:lstStyle/>
-          <a:p>
-            <a:pPr algn="ctr" indent="0" marL="0">
-              <a:buNone/>
-            </a:pPr>
-            <a:r>
-              <a:rPr lang="en-US" sz="1600" b="1" dirty="0">
-                <a:solidFill>
-                  <a:srgbClr val="13161C"/>
-                </a:solidFill>
-                <a:latin typeface="Courier New" pitchFamily="34" charset="0"/>
-                <a:ea typeface="Courier New" pitchFamily="34" charset="-122"/>
-                <a:cs typeface="Courier New" pitchFamily="34" charset="-120"/>
-              </a:rPr>
-              <a:t>5</a:t>
-            </a:r>
-            <a:endParaRPr lang="en-US" sz="1600" dirty="0"/>
-          </a:p>
-        </p:txBody>
-      </p:sp>
-      <p:sp>
-        <p:nvSpPr>
-          <p:cNvPr id="26" name="Text 24"/>
-          <p:cNvSpPr/>
-          <p:nvPr/>
-        </p:nvSpPr>
-        <p:spPr>
-          <a:xfrm>
-            <a:off x="9067800" y="2624328"/>
-            <a:ext cx="2407920" cy="384048"/>
-          </a:xfrm>
-          <a:prstGeom prst="rect">
-            <a:avLst/>
-          </a:prstGeom>
-          <a:noFill/>
-          <a:ln/>
-        </p:spPr>
-        <p:txBody>
-          <a:bodyPr wrap="square" lIns="0" tIns="0" rIns="0" bIns="0" rtlCol="0" anchor="ctr"/>
-          <a:lstStyle/>
-          <a:p>
-            <a:pPr indent="0" marL="0">
-              <a:buNone/>
-            </a:pPr>
-            <a:r>
-              <a:rPr lang="en-US" sz="1350" b="1" dirty="0">
-                <a:solidFill>
-                  <a:srgbClr val="E8EDF2"/>
-                </a:solidFill>
-                <a:latin typeface="Malgun Gothic" pitchFamily="34" charset="0"/>
-                <a:ea typeface="Malgun Gothic" pitchFamily="34" charset="-122"/>
-                <a:cs typeface="Malgun Gothic" pitchFamily="34" charset="-120"/>
-              </a:rPr>
-              <a:t>Block move</a:t>
-            </a:r>
-            <a:endParaRPr lang="en-US" sz="1350" dirty="0"/>
-          </a:p>
-        </p:txBody>
-      </p:sp>
-      <p:sp>
-        <p:nvSpPr>
-          <p:cNvPr id="27" name="Text 25"/>
-          <p:cNvSpPr/>
-          <p:nvPr/>
-        </p:nvSpPr>
-        <p:spPr>
-          <a:xfrm>
-            <a:off x="9067800" y="2953512"/>
-            <a:ext cx="2407920" cy="310896"/>
-          </a:xfrm>
-          <a:prstGeom prst="rect">
-            <a:avLst/>
-          </a:prstGeom>
-          <a:noFill/>
-          <a:ln/>
-        </p:spPr>
-        <p:txBody>
-          <a:bodyPr wrap="square" lIns="0" tIns="0" rIns="0" bIns="0" rtlCol="0" anchor="ctr"/>
-          <a:lstStyle/>
-          <a:p>
-            <a:pPr indent="0" marL="0">
-              <a:buNone/>
-            </a:pPr>
-            <a:r>
-              <a:rPr lang="en-US" sz="1150" dirty="0">
-                <a:solidFill>
-                  <a:srgbClr val="9AA6B2"/>
-                </a:solidFill>
-                <a:latin typeface="Malgun Gothic" pitchFamily="34" charset="0"/>
-                <a:ea typeface="Malgun Gothic" pitchFamily="34" charset="-122"/>
-                <a:cs typeface="Malgun Gothic" pitchFamily="34" charset="-120"/>
-              </a:rPr>
-              <a:t>데이터 민감</a:t>
-            </a:r>
-            <a:endParaRPr lang="en-US" sz="1150" dirty="0"/>
-          </a:p>
-        </p:txBody>
-      </p:sp>
-      <p:sp>
-        <p:nvSpPr>
-          <p:cNvPr id="28" name="Shape 26"/>
-          <p:cNvSpPr/>
-          <p:nvPr/>
-        </p:nvSpPr>
-        <p:spPr>
-          <a:xfrm>
-            <a:off x="548640" y="3465576"/>
-            <a:ext cx="3505200" cy="786384"/>
-          </a:xfrm>
-          <a:prstGeom prst="roundRect">
-            <a:avLst>
-              <a:gd name="adj" fmla="val 6977"/>
-            </a:avLst>
-          </a:prstGeom>
-          <a:solidFill>
-            <a:srgbClr val="1E232C"/>
-          </a:solidFill>
-          <a:ln/>
-        </p:spPr>
-      </p:sp>
-      <p:sp>
-        <p:nvSpPr>
-          <p:cNvPr id="29" name="Text 27"/>
-          <p:cNvSpPr/>
-          <p:nvPr/>
-        </p:nvSpPr>
-        <p:spPr>
-          <a:xfrm>
-            <a:off x="731520" y="3593592"/>
-            <a:ext cx="658368" cy="530352"/>
-          </a:xfrm>
-          <a:prstGeom prst="roundRect">
-            <a:avLst>
-              <a:gd name="adj" fmla="val 10345"/>
-            </a:avLst>
-          </a:prstGeom>
-          <a:solidFill>
-            <a:srgbClr val="4FB0C6"/>
-          </a:solidFill>
-          <a:ln/>
-        </p:spPr>
-        <p:txBody>
-          <a:bodyPr wrap="square" rtlCol="0" anchor="ctr"/>
-          <a:lstStyle/>
-          <a:p>
-            <a:pPr algn="ctr" indent="0" marL="0">
-              <a:buNone/>
-            </a:pPr>
-            <a:r>
-              <a:rPr lang="en-US" sz="1600" b="1" dirty="0">
-                <a:solidFill>
-                  <a:srgbClr val="13161C"/>
-                </a:solidFill>
-                <a:latin typeface="Courier New" pitchFamily="34" charset="0"/>
-                <a:ea typeface="Courier New" pitchFamily="34" charset="-122"/>
-                <a:cs typeface="Courier New" pitchFamily="34" charset="-120"/>
-              </a:rPr>
-              <a:t>6</a:t>
-            </a:r>
-            <a:endParaRPr lang="en-US" sz="1600" dirty="0"/>
-          </a:p>
-        </p:txBody>
-      </p:sp>
-      <p:sp>
-        <p:nvSpPr>
-          <p:cNvPr id="30" name="Text 28"/>
-          <p:cNvSpPr/>
-          <p:nvPr/>
-        </p:nvSpPr>
-        <p:spPr>
-          <a:xfrm>
-            <a:off x="1508760" y="3557016"/>
-            <a:ext cx="2407920" cy="384048"/>
-          </a:xfrm>
-          <a:prstGeom prst="rect">
-            <a:avLst/>
-          </a:prstGeom>
-          <a:noFill/>
-          <a:ln/>
-        </p:spPr>
-        <p:txBody>
-          <a:bodyPr wrap="square" lIns="0" tIns="0" rIns="0" bIns="0" rtlCol="0" anchor="ctr"/>
-          <a:lstStyle/>
-          <a:p>
-            <a:pPr indent="0" marL="0">
-              <a:buNone/>
-            </a:pPr>
-            <a:r>
-              <a:rPr lang="en-US" sz="1350" b="1" dirty="0">
-                <a:solidFill>
-                  <a:srgbClr val="E8EDF2"/>
-                </a:solidFill>
-                <a:latin typeface="Malgun Gothic" pitchFamily="34" charset="0"/>
-                <a:ea typeface="Malgun Gothic" pitchFamily="34" charset="-122"/>
-                <a:cs typeface="Malgun Gothic" pitchFamily="34" charset="-120"/>
-              </a:rPr>
-              <a:t>Moving inv. (shift)</a:t>
-            </a:r>
-            <a:endParaRPr lang="en-US" sz="1350" dirty="0"/>
-          </a:p>
-        </p:txBody>
-      </p:sp>
-      <p:sp>
-        <p:nvSpPr>
-          <p:cNvPr id="31" name="Text 29"/>
-          <p:cNvSpPr/>
-          <p:nvPr/>
-        </p:nvSpPr>
-        <p:spPr>
-          <a:xfrm>
-            <a:off x="1508760" y="3886200"/>
-            <a:ext cx="2407920" cy="310896"/>
-          </a:xfrm>
-          <a:prstGeom prst="rect">
-            <a:avLst/>
-          </a:prstGeom>
-          <a:noFill/>
-          <a:ln/>
-        </p:spPr>
-        <p:txBody>
-          <a:bodyPr wrap="square" lIns="0" tIns="0" rIns="0" bIns="0" rtlCol="0" anchor="ctr"/>
-          <a:lstStyle/>
-          <a:p>
-            <a:pPr indent="0" marL="0">
-              <a:buNone/>
-            </a:pPr>
-            <a:r>
-              <a:rPr lang="en-US" sz="1150" dirty="0">
-                <a:solidFill>
-                  <a:srgbClr val="9AA6B2"/>
-                </a:solidFill>
-                <a:latin typeface="Malgun Gothic" pitchFamily="34" charset="0"/>
-                <a:ea typeface="Malgun Gothic" pitchFamily="34" charset="-122"/>
-                <a:cs typeface="Malgun Gothic" pitchFamily="34" charset="-120"/>
-              </a:rPr>
-              <a:t>데이터 민감</a:t>
-            </a:r>
-            <a:endParaRPr lang="en-US" sz="1150" dirty="0"/>
-          </a:p>
-        </p:txBody>
-      </p:sp>
-      <p:sp>
-        <p:nvSpPr>
-          <p:cNvPr id="32" name="Shape 30"/>
-          <p:cNvSpPr/>
-          <p:nvPr/>
-        </p:nvSpPr>
-        <p:spPr>
-          <a:xfrm>
-            <a:off x="4328160" y="3465576"/>
-            <a:ext cx="3505200" cy="786384"/>
-          </a:xfrm>
-          <a:prstGeom prst="roundRect">
-            <a:avLst>
-              <a:gd name="adj" fmla="val 6977"/>
-            </a:avLst>
-          </a:prstGeom>
-          <a:solidFill>
-            <a:srgbClr val="1E232C"/>
-          </a:solidFill>
-          <a:ln/>
-        </p:spPr>
-      </p:sp>
-      <p:sp>
-        <p:nvSpPr>
-          <p:cNvPr id="33" name="Text 31"/>
-          <p:cNvSpPr/>
-          <p:nvPr/>
-        </p:nvSpPr>
-        <p:spPr>
-          <a:xfrm>
-            <a:off x="4511040" y="3593592"/>
-            <a:ext cx="658368" cy="530352"/>
-          </a:xfrm>
-          <a:prstGeom prst="roundRect">
-            <a:avLst>
-              <a:gd name="adj" fmla="val 10345"/>
-            </a:avLst>
-          </a:prstGeom>
-          <a:solidFill>
-            <a:srgbClr val="4FB0C6"/>
-          </a:solidFill>
-          <a:ln/>
-        </p:spPr>
-        <p:txBody>
-          <a:bodyPr wrap="square" rtlCol="0" anchor="ctr"/>
-          <a:lstStyle/>
-          <a:p>
-            <a:pPr algn="ctr" indent="0" marL="0">
-              <a:buNone/>
-            </a:pPr>
-            <a:r>
-              <a:rPr lang="en-US" sz="1600" b="1" dirty="0">
-                <a:solidFill>
-                  <a:srgbClr val="13161C"/>
-                </a:solidFill>
-                <a:latin typeface="Courier New" pitchFamily="34" charset="0"/>
-                <a:ea typeface="Courier New" pitchFamily="34" charset="-122"/>
-                <a:cs typeface="Courier New" pitchFamily="34" charset="-120"/>
-              </a:rPr>
-              <a:t>7</a:t>
-            </a:r>
-            <a:endParaRPr lang="en-US" sz="1600" dirty="0"/>
-          </a:p>
-        </p:txBody>
-      </p:sp>
-      <p:sp>
-        <p:nvSpPr>
-          <p:cNvPr id="34" name="Text 32"/>
-          <p:cNvSpPr/>
-          <p:nvPr/>
-        </p:nvSpPr>
-        <p:spPr>
-          <a:xfrm>
-            <a:off x="5288280" y="3557016"/>
-            <a:ext cx="2407920" cy="384048"/>
-          </a:xfrm>
-          <a:prstGeom prst="rect">
-            <a:avLst/>
-          </a:prstGeom>
-          <a:noFill/>
-          <a:ln/>
-        </p:spPr>
-        <p:txBody>
-          <a:bodyPr wrap="square" lIns="0" tIns="0" rIns="0" bIns="0" rtlCol="0" anchor="ctr"/>
-          <a:lstStyle/>
-          <a:p>
-            <a:pPr indent="0" marL="0">
-              <a:buNone/>
-            </a:pPr>
-            <a:r>
-              <a:rPr lang="en-US" sz="1350" b="1" dirty="0">
-                <a:solidFill>
-                  <a:srgbClr val="E8EDF2"/>
-                </a:solidFill>
-                <a:latin typeface="Malgun Gothic" pitchFamily="34" charset="0"/>
-                <a:ea typeface="Malgun Gothic" pitchFamily="34" charset="-122"/>
-                <a:cs typeface="Malgun Gothic" pitchFamily="34" charset="-120"/>
-              </a:rPr>
-              <a:t>Random sequence</a:t>
-            </a:r>
-            <a:endParaRPr lang="en-US" sz="1350" dirty="0"/>
-          </a:p>
-        </p:txBody>
-      </p:sp>
-      <p:sp>
-        <p:nvSpPr>
-          <p:cNvPr id="35" name="Text 33"/>
-          <p:cNvSpPr/>
-          <p:nvPr/>
-        </p:nvSpPr>
-        <p:spPr>
-          <a:xfrm>
-            <a:off x="5288280" y="3886200"/>
-            <a:ext cx="2407920" cy="310896"/>
-          </a:xfrm>
-          <a:prstGeom prst="rect">
-            <a:avLst/>
-          </a:prstGeom>
-          <a:noFill/>
-          <a:ln/>
-        </p:spPr>
-        <p:txBody>
-          <a:bodyPr wrap="square" lIns="0" tIns="0" rIns="0" bIns="0" rtlCol="0" anchor="ctr"/>
-          <a:lstStyle/>
-          <a:p>
-            <a:pPr indent="0" marL="0">
-              <a:buNone/>
-            </a:pPr>
-            <a:r>
-              <a:rPr lang="en-US" sz="1150" dirty="0">
-                <a:solidFill>
-                  <a:srgbClr val="9AA6B2"/>
-                </a:solidFill>
-                <a:latin typeface="Malgun Gothic" pitchFamily="34" charset="0"/>
-                <a:ea typeface="Malgun Gothic" pitchFamily="34" charset="-122"/>
-                <a:cs typeface="Malgun Gothic" pitchFamily="34" charset="-120"/>
-              </a:rPr>
-              <a:t>데이터 민감</a:t>
-            </a:r>
-            <a:endParaRPr lang="en-US" sz="1150" dirty="0"/>
-          </a:p>
-        </p:txBody>
-      </p:sp>
-      <p:sp>
-        <p:nvSpPr>
-          <p:cNvPr id="36" name="Shape 34"/>
-          <p:cNvSpPr/>
-          <p:nvPr/>
-        </p:nvSpPr>
-        <p:spPr>
-          <a:xfrm>
-            <a:off x="8107680" y="3465576"/>
-            <a:ext cx="3505200" cy="786384"/>
-          </a:xfrm>
-          <a:prstGeom prst="roundRect">
-            <a:avLst>
-              <a:gd name="adj" fmla="val 6977"/>
-            </a:avLst>
-          </a:prstGeom>
-          <a:solidFill>
-            <a:srgbClr val="1E232C"/>
-          </a:solidFill>
-          <a:ln/>
-        </p:spPr>
-      </p:sp>
-      <p:sp>
-        <p:nvSpPr>
-          <p:cNvPr id="37" name="Text 35"/>
-          <p:cNvSpPr/>
-          <p:nvPr/>
-        </p:nvSpPr>
-        <p:spPr>
-          <a:xfrm>
-            <a:off x="8290560" y="3593592"/>
-            <a:ext cx="658368" cy="530352"/>
-          </a:xfrm>
-          <a:prstGeom prst="roundRect">
-            <a:avLst>
-              <a:gd name="adj" fmla="val 10345"/>
-            </a:avLst>
-          </a:prstGeom>
-          <a:solidFill>
-            <a:srgbClr val="4FB0C6"/>
-          </a:solidFill>
-          <a:ln/>
-        </p:spPr>
-        <p:txBody>
-          <a:bodyPr wrap="square" rtlCol="0" anchor="ctr"/>
-          <a:lstStyle/>
-          <a:p>
-            <a:pPr algn="ctr" indent="0" marL="0">
-              <a:buNone/>
-            </a:pPr>
-            <a:r>
-              <a:rPr lang="en-US" sz="1600" b="1" dirty="0">
-                <a:solidFill>
-                  <a:srgbClr val="13161C"/>
-                </a:solidFill>
-                <a:latin typeface="Courier New" pitchFamily="34" charset="0"/>
-                <a:ea typeface="Courier New" pitchFamily="34" charset="-122"/>
-                <a:cs typeface="Courier New" pitchFamily="34" charset="-120"/>
-              </a:rPr>
-              <a:t>8</a:t>
-            </a:r>
-            <a:endParaRPr lang="en-US" sz="1600" dirty="0"/>
-          </a:p>
-        </p:txBody>
-      </p:sp>
-      <p:sp>
-        <p:nvSpPr>
-          <p:cNvPr id="38" name="Text 36"/>
-          <p:cNvSpPr/>
-          <p:nvPr/>
-        </p:nvSpPr>
-        <p:spPr>
-          <a:xfrm>
-            <a:off x="9067800" y="3557016"/>
-            <a:ext cx="2407920" cy="384048"/>
-          </a:xfrm>
-          <a:prstGeom prst="rect">
-            <a:avLst/>
-          </a:prstGeom>
-          <a:noFill/>
-          <a:ln/>
-        </p:spPr>
-        <p:txBody>
-          <a:bodyPr wrap="square" lIns="0" tIns="0" rIns="0" bIns="0" rtlCol="0" anchor="ctr"/>
-          <a:lstStyle/>
-          <a:p>
-            <a:pPr indent="0" marL="0">
-              <a:buNone/>
-            </a:pPr>
-            <a:r>
-              <a:rPr lang="en-US" sz="1350" b="1" dirty="0">
-                <a:solidFill>
-                  <a:srgbClr val="E8EDF2"/>
-                </a:solidFill>
-                <a:latin typeface="Malgun Gothic" pitchFamily="34" charset="0"/>
-                <a:ea typeface="Malgun Gothic" pitchFamily="34" charset="-122"/>
-                <a:cs typeface="Malgun Gothic" pitchFamily="34" charset="-120"/>
-              </a:rPr>
-              <a:t>Modulo 20</a:t>
-            </a:r>
-            <a:endParaRPr lang="en-US" sz="1350" dirty="0"/>
-          </a:p>
-        </p:txBody>
-      </p:sp>
-      <p:sp>
-        <p:nvSpPr>
-          <p:cNvPr id="39" name="Text 37"/>
-          <p:cNvSpPr/>
-          <p:nvPr/>
-        </p:nvSpPr>
-        <p:spPr>
-          <a:xfrm>
-            <a:off x="9067800" y="3886200"/>
-            <a:ext cx="2407920" cy="310896"/>
-          </a:xfrm>
-          <a:prstGeom prst="rect">
-            <a:avLst/>
-          </a:prstGeom>
-          <a:noFill/>
-          <a:ln/>
-        </p:spPr>
-        <p:txBody>
-          <a:bodyPr wrap="square" lIns="0" tIns="0" rIns="0" bIns="0" rtlCol="0" anchor="ctr"/>
-          <a:lstStyle/>
-          <a:p>
-            <a:pPr indent="0" marL="0">
-              <a:buNone/>
-            </a:pPr>
-            <a:r>
-              <a:rPr lang="en-US" sz="1150" dirty="0">
-                <a:solidFill>
-                  <a:srgbClr val="9AA6B2"/>
-                </a:solidFill>
-                <a:latin typeface="Malgun Gothic" pitchFamily="34" charset="0"/>
-                <a:ea typeface="Malgun Gothic" pitchFamily="34" charset="-122"/>
-                <a:cs typeface="Malgun Gothic" pitchFamily="34" charset="-120"/>
-              </a:rPr>
-              <a:t>데이터 민감</a:t>
-            </a:r>
-            <a:endParaRPr lang="en-US" sz="1150" dirty="0"/>
-          </a:p>
-        </p:txBody>
-      </p:sp>
-      <p:sp>
-        <p:nvSpPr>
-          <p:cNvPr id="40" name="Shape 38"/>
-          <p:cNvSpPr/>
-          <p:nvPr/>
-        </p:nvSpPr>
-        <p:spPr>
-          <a:xfrm>
-            <a:off x="548640" y="4398264"/>
-            <a:ext cx="3505200" cy="786384"/>
-          </a:xfrm>
-          <a:prstGeom prst="roundRect">
-            <a:avLst>
-              <a:gd name="adj" fmla="val 6977"/>
-            </a:avLst>
-          </a:prstGeom>
-          <a:solidFill>
-            <a:srgbClr val="1E232C"/>
-          </a:solidFill>
-          <a:ln/>
-        </p:spPr>
-      </p:sp>
-      <p:sp>
-        <p:nvSpPr>
-          <p:cNvPr id="41" name="Text 39"/>
-          <p:cNvSpPr/>
-          <p:nvPr/>
-        </p:nvSpPr>
-        <p:spPr>
-          <a:xfrm>
-            <a:off x="731520" y="4526280"/>
-            <a:ext cx="658368" cy="530352"/>
-          </a:xfrm>
-          <a:prstGeom prst="roundRect">
-            <a:avLst>
-              <a:gd name="adj" fmla="val 10345"/>
-            </a:avLst>
-          </a:prstGeom>
-          <a:solidFill>
-            <a:srgbClr val="E0A458"/>
-          </a:solidFill>
-          <a:ln/>
-        </p:spPr>
-        <p:txBody>
-          <a:bodyPr wrap="square" rtlCol="0" anchor="ctr"/>
-          <a:lstStyle/>
-          <a:p>
-            <a:pPr algn="ctr" indent="0" marL="0">
-              <a:buNone/>
-            </a:pPr>
-            <a:r>
-              <a:rPr lang="en-US" sz="1600" b="1" dirty="0">
-                <a:solidFill>
-                  <a:srgbClr val="13161C"/>
-                </a:solidFill>
-                <a:latin typeface="Courier New" pitchFamily="34" charset="0"/>
-                <a:ea typeface="Courier New" pitchFamily="34" charset="-122"/>
-                <a:cs typeface="Courier New" pitchFamily="34" charset="-120"/>
-              </a:rPr>
-              <a:t>9</a:t>
-            </a:r>
-            <a:endParaRPr lang="en-US" sz="1600" dirty="0"/>
-          </a:p>
-        </p:txBody>
-      </p:sp>
-      <p:sp>
-        <p:nvSpPr>
-          <p:cNvPr id="42" name="Text 40"/>
-          <p:cNvSpPr/>
-          <p:nvPr/>
-        </p:nvSpPr>
-        <p:spPr>
-          <a:xfrm>
-            <a:off x="1508760" y="4489704"/>
-            <a:ext cx="2407920" cy="384048"/>
-          </a:xfrm>
-          <a:prstGeom prst="rect">
-            <a:avLst/>
-          </a:prstGeom>
-          <a:noFill/>
-          <a:ln/>
-        </p:spPr>
-        <p:txBody>
-          <a:bodyPr wrap="square" lIns="0" tIns="0" rIns="0" bIns="0" rtlCol="0" anchor="ctr"/>
-          <a:lstStyle/>
-          <a:p>
-            <a:pPr indent="0" marL="0">
-              <a:buNone/>
-            </a:pPr>
-            <a:r>
-              <a:rPr lang="en-US" sz="1350" b="1" dirty="0">
-                <a:solidFill>
-                  <a:srgbClr val="E8EDF2"/>
-                </a:solidFill>
-                <a:latin typeface="Malgun Gothic" pitchFamily="34" charset="0"/>
-                <a:ea typeface="Malgun Gothic" pitchFamily="34" charset="-122"/>
-                <a:cs typeface="Malgun Gothic" pitchFamily="34" charset="-120"/>
-              </a:rPr>
-              <a:t>Bit fade (3h)</a:t>
-            </a:r>
-            <a:endParaRPr lang="en-US" sz="1350" dirty="0"/>
-          </a:p>
-        </p:txBody>
-      </p:sp>
-      <p:sp>
-        <p:nvSpPr>
-          <p:cNvPr id="43" name="Text 41"/>
-          <p:cNvSpPr/>
-          <p:nvPr/>
-        </p:nvSpPr>
-        <p:spPr>
-          <a:xfrm>
-            <a:off x="1508760" y="4818888"/>
-            <a:ext cx="2407920" cy="310896"/>
-          </a:xfrm>
-          <a:prstGeom prst="rect">
-            <a:avLst/>
-          </a:prstGeom>
-          <a:noFill/>
-          <a:ln/>
-        </p:spPr>
-        <p:txBody>
-          <a:bodyPr wrap="square" lIns="0" tIns="0" rIns="0" bIns="0" rtlCol="0" anchor="ctr"/>
-          <a:lstStyle/>
-          <a:p>
-            <a:pPr indent="0" marL="0">
-              <a:buNone/>
-            </a:pPr>
-            <a:r>
-              <a:rPr lang="en-US" sz="1150" dirty="0">
-                <a:solidFill>
-                  <a:srgbClr val="9AA6B2"/>
-                </a:solidFill>
-                <a:latin typeface="Malgun Gothic" pitchFamily="34" charset="0"/>
-                <a:ea typeface="Malgun Gothic" pitchFamily="34" charset="-122"/>
-                <a:cs typeface="Malgun Gothic" pitchFamily="34" charset="-120"/>
-              </a:rPr>
-              <a:t>데이터 보존</a:t>
-            </a:r>
-            <a:endParaRPr lang="en-US" sz="1150" dirty="0"/>
-          </a:p>
-        </p:txBody>
-      </p:sp>
-      <p:sp>
-        <p:nvSpPr>
-          <p:cNvPr id="44" name="Shape 42"/>
-          <p:cNvSpPr/>
-          <p:nvPr/>
-        </p:nvSpPr>
-        <p:spPr>
-          <a:xfrm>
-            <a:off x="4328160" y="4398264"/>
-            <a:ext cx="3505200" cy="786384"/>
-          </a:xfrm>
-          <a:prstGeom prst="roundRect">
-            <a:avLst>
-              <a:gd name="adj" fmla="val 6977"/>
-            </a:avLst>
-          </a:prstGeom>
-          <a:solidFill>
-            <a:srgbClr val="1E232C"/>
-          </a:solidFill>
-          <a:ln/>
-        </p:spPr>
-      </p:sp>
-      <p:sp>
-        <p:nvSpPr>
-          <p:cNvPr id="45" name="Text 43"/>
-          <p:cNvSpPr/>
-          <p:nvPr/>
-        </p:nvSpPr>
-        <p:spPr>
-          <a:xfrm>
-            <a:off x="4511040" y="4526280"/>
-            <a:ext cx="658368" cy="530352"/>
-          </a:xfrm>
-          <a:prstGeom prst="roundRect">
-            <a:avLst>
-              <a:gd name="adj" fmla="val 10345"/>
-            </a:avLst>
-          </a:prstGeom>
-          <a:solidFill>
-            <a:srgbClr val="E0A458"/>
-          </a:solidFill>
-          <a:ln/>
-        </p:spPr>
-        <p:txBody>
-          <a:bodyPr wrap="square" rtlCol="0" anchor="ctr"/>
-          <a:lstStyle/>
-          <a:p>
-            <a:pPr algn="ctr" indent="0" marL="0">
-              <a:buNone/>
-            </a:pPr>
-            <a:r>
-              <a:rPr lang="en-US" sz="1600" b="1" dirty="0">
-                <a:solidFill>
-                  <a:srgbClr val="13161C"/>
-                </a:solidFill>
-                <a:latin typeface="Courier New" pitchFamily="34" charset="0"/>
-                <a:ea typeface="Courier New" pitchFamily="34" charset="-122"/>
-                <a:cs typeface="Courier New" pitchFamily="34" charset="-120"/>
-              </a:rPr>
-              <a:t>10</a:t>
-            </a:r>
-            <a:endParaRPr lang="en-US" sz="1600" dirty="0"/>
-          </a:p>
-        </p:txBody>
-      </p:sp>
-      <p:sp>
-        <p:nvSpPr>
-          <p:cNvPr id="46" name="Text 44"/>
-          <p:cNvSpPr/>
-          <p:nvPr/>
-        </p:nvSpPr>
-        <p:spPr>
-          <a:xfrm>
-            <a:off x="5288280" y="4489704"/>
-            <a:ext cx="2407920" cy="384048"/>
-          </a:xfrm>
-          <a:prstGeom prst="rect">
-            <a:avLst/>
-          </a:prstGeom>
-          <a:noFill/>
-          <a:ln/>
-        </p:spPr>
-        <p:txBody>
-          <a:bodyPr wrap="square" lIns="0" tIns="0" rIns="0" bIns="0" rtlCol="0" anchor="ctr"/>
-          <a:lstStyle/>
-          <a:p>
-            <a:pPr indent="0" marL="0">
-              <a:buNone/>
-            </a:pPr>
-            <a:r>
-              <a:rPr lang="en-US" sz="1350" b="1" dirty="0">
-                <a:solidFill>
-                  <a:srgbClr val="E8EDF2"/>
-                </a:solidFill>
-                <a:latin typeface="Malgun Gothic" pitchFamily="34" charset="0"/>
-                <a:ea typeface="Malgun Gothic" pitchFamily="34" charset="-122"/>
-                <a:cs typeface="Malgun Gothic" pitchFamily="34" charset="-120"/>
-              </a:rPr>
-              <a:t>Memory stress</a:t>
-            </a:r>
-            <a:endParaRPr lang="en-US" sz="1350" dirty="0"/>
-          </a:p>
-        </p:txBody>
-      </p:sp>
-      <p:sp>
-        <p:nvSpPr>
-          <p:cNvPr id="47" name="Text 45"/>
-          <p:cNvSpPr/>
-          <p:nvPr/>
-        </p:nvSpPr>
-        <p:spPr>
-          <a:xfrm>
-            <a:off x="5288280" y="4818888"/>
-            <a:ext cx="2407920" cy="310896"/>
-          </a:xfrm>
-          <a:prstGeom prst="rect">
-            <a:avLst/>
-          </a:prstGeom>
-          <a:noFill/>
-          <a:ln/>
-        </p:spPr>
-        <p:txBody>
-          <a:bodyPr wrap="square" lIns="0" tIns="0" rIns="0" bIns="0" rtlCol="0" anchor="ctr"/>
-          <a:lstStyle/>
-          <a:p>
-            <a:pPr indent="0" marL="0">
-              <a:buNone/>
-            </a:pPr>
-            <a:r>
-              <a:rPr lang="en-US" sz="1150" dirty="0">
-                <a:solidFill>
-                  <a:srgbClr val="9AA6B2"/>
-                </a:solidFill>
-                <a:latin typeface="Malgun Gothic" pitchFamily="34" charset="0"/>
-                <a:ea typeface="Malgun Gothic" pitchFamily="34" charset="-122"/>
-                <a:cs typeface="Malgun Gothic" pitchFamily="34" charset="-120"/>
-              </a:rPr>
-              <a:t>스트레스·소프트</a:t>
-            </a:r>
-            <a:endParaRPr lang="en-US" sz="1150" dirty="0"/>
-          </a:p>
-        </p:txBody>
-      </p:sp>
-      <p:sp>
-        <p:nvSpPr>
-          <p:cNvPr id="48" name="Text 46"/>
-          <p:cNvSpPr/>
-          <p:nvPr/>
-        </p:nvSpPr>
-        <p:spPr>
-          <a:xfrm>
-            <a:off x="548640" y="5943600"/>
-            <a:ext cx="11064240" cy="457200"/>
-          </a:xfrm>
-          <a:prstGeom prst="rect">
-            <a:avLst/>
-          </a:prstGeom>
-          <a:noFill/>
-          <a:ln/>
-        </p:spPr>
-        <p:txBody>
-          <a:bodyPr wrap="square" lIns="0" tIns="0" rIns="0" bIns="0" rtlCol="0" anchor="ctr"/>
-          <a:lstStyle/>
-          <a:p>
-            <a:pPr algn="ctr" indent="0" marL="0">
-              <a:buNone/>
-            </a:pPr>
-            <a:r>
-              <a:rPr lang="en-US" sz="1300" i="1" dirty="0">
-                <a:solidFill>
-                  <a:srgbClr val="9AA6B2"/>
-                </a:solidFill>
-                <a:latin typeface="Malgun Gothic" pitchFamily="34" charset="0"/>
-                <a:ea typeface="Malgun Gothic" pitchFamily="34" charset="-122"/>
-                <a:cs typeface="Malgun Gothic" pitchFamily="34" charset="-120"/>
-              </a:rPr>
-              <a:t>Test 9(bit fade)는 3시간 걸려 기본 비활성. Test 10(스트레스)은 소프트 오류·급성 하드 오류에 특히 유용.</a:t>
-            </a:r>
-            <a:endParaRPr lang="en-US" sz="1300" dirty="0"/>
+              <a:t>오류 없이 끝나면 성공입니다 — 건강한 GPU는 '아무 일도 안 일어난 것처럼' 조용히 끝납니다.</a:t>
+            </a:r>
+            <a:endParaRPr lang="en-US" sz="1400" dirty="0"/>
           </a:p>
         </p:txBody>
       </p:sp>
@@ -9250,7 +9537,7 @@
                 <a:ea typeface="Courier New" pitchFamily="34" charset="-122"/>
                 <a:cs typeface="Courier New" pitchFamily="34" charset="-120"/>
               </a:rPr>
-              <a:t>7</a:t>
+              <a:t>6</a:t>
             </a:r>
             <a:endParaRPr lang="en-US" sz="2200" dirty="0"/>
           </a:p>
@@ -9289,7 +9576,7 @@
                 <a:ea typeface="Malgun Gothic" pitchFamily="34" charset="-122"/>
                 <a:cs typeface="Malgun Gothic" pitchFamily="34" charset="-120"/>
               </a:rPr>
-              <a:t>프로그램의 큰 흐름</a:t>
+              <a:t>11개 테스트 한눈에</a:t>
             </a:r>
             <a:endParaRPr lang="en-US" sz="3000" dirty="0"/>
           </a:p>
@@ -9303,12 +9590,12 @@
         </p:nvSpPr>
         <p:spPr>
           <a:xfrm>
-            <a:off x="548640" y="1828800"/>
-            <a:ext cx="2560320" cy="2377440"/>
+            <a:off x="548640" y="1600200"/>
+            <a:ext cx="3505200" cy="786384"/>
           </a:xfrm>
           <a:prstGeom prst="roundRect">
             <a:avLst>
-              <a:gd name="adj" fmla="val 3077"/>
+              <a:gd name="adj" fmla="val 6977"/>
             </a:avLst>
           </a:prstGeom>
           <a:solidFill>
@@ -9325,16 +9612,16 @@
         </p:nvSpPr>
         <p:spPr>
           <a:xfrm>
-            <a:off x="731520" y="2011680"/>
-            <a:ext cx="548640" cy="548640"/>
+            <a:off x="731520" y="1728216"/>
+            <a:ext cx="658368" cy="530352"/>
           </a:xfrm>
           <a:prstGeom prst="roundRect">
             <a:avLst>
-              <a:gd name="adj" fmla="val 50000"/>
+              <a:gd name="adj" fmla="val 10345"/>
             </a:avLst>
           </a:prstGeom>
           <a:solidFill>
-            <a:srgbClr val="8CC63F"/>
+            <a:srgbClr val="4FB0C6"/>
           </a:solidFill>
           <a:ln/>
         </p:spPr>
@@ -9346,7 +9633,7 @@
               <a:buNone/>
             </a:pPr>
             <a:r>
-              <a:rPr lang="en-US" sz="1800" b="1" dirty="0">
+              <a:rPr lang="en-US" sz="1600" b="1" dirty="0">
                 <a:solidFill>
                   <a:srgbClr val="13161C"/>
                 </a:solidFill>
@@ -9354,9 +9641,9 @@
                 <a:ea typeface="Courier New" pitchFamily="34" charset="-122"/>
                 <a:cs typeface="Courier New" pitchFamily="34" charset="-120"/>
               </a:rPr>
-              <a:t>1</a:t>
-            </a:r>
-            <a:endParaRPr lang="en-US" sz="1800" dirty="0"/>
+              <a:t>0</a:t>
+            </a:r>
+            <a:endParaRPr lang="en-US" sz="1600" dirty="0"/>
           </a:p>
         </p:txBody>
       </p:sp>
@@ -9368,63 +9655,167 @@
         </p:nvSpPr>
         <p:spPr>
           <a:xfrm>
-            <a:off x="731520" y="2697480"/>
-            <a:ext cx="2194560" cy="457200"/>
-          </a:xfrm>
-          <a:prstGeom prst="rect">
-            <a:avLst/>
-          </a:prstGeom>
-          <a:noFill/>
-          <a:ln/>
-        </p:spPr>
-        <p:txBody>
-          <a:bodyPr wrap="square" lIns="0" tIns="0" rIns="0" bIns="0" rtlCol="0" anchor="ctr"/>
-          <a:lstStyle/>
-          <a:p>
-            <a:pPr indent="0" marL="0">
-              <a:buNone/>
-            </a:pPr>
-            <a:r>
-              <a:rPr lang="en-US" sz="1400" b="1" dirty="0">
-                <a:solidFill>
-                  <a:srgbClr val="8CC63F"/>
+            <a:off x="1508760" y="1691640"/>
+            <a:ext cx="2407920" cy="384048"/>
+          </a:xfrm>
+          <a:prstGeom prst="rect">
+            <a:avLst/>
+          </a:prstGeom>
+          <a:noFill/>
+          <a:ln/>
+        </p:spPr>
+        <p:txBody>
+          <a:bodyPr wrap="square" lIns="0" tIns="0" rIns="0" bIns="0" rtlCol="0" anchor="ctr"/>
+          <a:lstStyle/>
+          <a:p>
+            <a:pPr indent="0" marL="0">
+              <a:buNone/>
+            </a:pPr>
+            <a:r>
+              <a:rPr lang="en-US" sz="1350" b="1" dirty="0">
+                <a:solidFill>
+                  <a:srgbClr val="E8EDF2"/>
+                </a:solidFill>
+                <a:latin typeface="Malgun Gothic" pitchFamily="34" charset="0"/>
+                <a:ea typeface="Malgun Gothic" pitchFamily="34" charset="-122"/>
+                <a:cs typeface="Malgun Gothic" pitchFamily="34" charset="-120"/>
+              </a:rPr>
+              <a:t>Walking 1 bit</a:t>
+            </a:r>
+            <a:endParaRPr lang="en-US" sz="1350" dirty="0"/>
+          </a:p>
+        </p:txBody>
+      </p:sp>
+      <p:sp>
+        <p:nvSpPr>
+          <p:cNvPr id="7" name="Text 5"/>
+          <p:cNvSpPr/>
+          <p:nvPr/>
+        </p:nvSpPr>
+        <p:spPr>
+          <a:xfrm>
+            <a:off x="1508760" y="2020824"/>
+            <a:ext cx="2407920" cy="310896"/>
+          </a:xfrm>
+          <a:prstGeom prst="rect">
+            <a:avLst/>
+          </a:prstGeom>
+          <a:noFill/>
+          <a:ln/>
+        </p:spPr>
+        <p:txBody>
+          <a:bodyPr wrap="square" lIns="0" tIns="0" rIns="0" bIns="0" rtlCol="0" anchor="ctr"/>
+          <a:lstStyle/>
+          <a:p>
+            <a:pPr indent="0" marL="0">
+              <a:buNone/>
+            </a:pPr>
+            <a:r>
+              <a:rPr lang="en-US" sz="1150" dirty="0">
+                <a:solidFill>
+                  <a:srgbClr val="9AA6B2"/>
+                </a:solidFill>
+                <a:latin typeface="Malgun Gothic" pitchFamily="34" charset="0"/>
+                <a:ea typeface="Malgun Gothic" pitchFamily="34" charset="-122"/>
+                <a:cs typeface="Malgun Gothic" pitchFamily="34" charset="-120"/>
+              </a:rPr>
+              <a:t>주소 배선</a:t>
+            </a:r>
+            <a:endParaRPr lang="en-US" sz="1150" dirty="0"/>
+          </a:p>
+        </p:txBody>
+      </p:sp>
+      <p:sp>
+        <p:nvSpPr>
+          <p:cNvPr id="8" name="Shape 6"/>
+          <p:cNvSpPr/>
+          <p:nvPr/>
+        </p:nvSpPr>
+        <p:spPr>
+          <a:xfrm>
+            <a:off x="4328160" y="1600200"/>
+            <a:ext cx="3505200" cy="786384"/>
+          </a:xfrm>
+          <a:prstGeom prst="roundRect">
+            <a:avLst>
+              <a:gd name="adj" fmla="val 6977"/>
+            </a:avLst>
+          </a:prstGeom>
+          <a:solidFill>
+            <a:srgbClr val="1E232C"/>
+          </a:solidFill>
+          <a:ln/>
+        </p:spPr>
+      </p:sp>
+      <p:sp>
+        <p:nvSpPr>
+          <p:cNvPr id="9" name="Text 7"/>
+          <p:cNvSpPr/>
+          <p:nvPr/>
+        </p:nvSpPr>
+        <p:spPr>
+          <a:xfrm>
+            <a:off x="4511040" y="1728216"/>
+            <a:ext cx="658368" cy="530352"/>
+          </a:xfrm>
+          <a:prstGeom prst="roundRect">
+            <a:avLst>
+              <a:gd name="adj" fmla="val 10345"/>
+            </a:avLst>
+          </a:prstGeom>
+          <a:solidFill>
+            <a:srgbClr val="4FB0C6"/>
+          </a:solidFill>
+          <a:ln/>
+        </p:spPr>
+        <p:txBody>
+          <a:bodyPr wrap="square" rtlCol="0" anchor="ctr"/>
+          <a:lstStyle/>
+          <a:p>
+            <a:pPr algn="ctr" indent="0" marL="0">
+              <a:buNone/>
+            </a:pPr>
+            <a:r>
+              <a:rPr lang="en-US" sz="1600" b="1" dirty="0">
+                <a:solidFill>
+                  <a:srgbClr val="13161C"/>
                 </a:solidFill>
                 <a:latin typeface="Courier New" pitchFamily="34" charset="0"/>
                 <a:ea typeface="Courier New" pitchFamily="34" charset="-122"/>
                 <a:cs typeface="Courier New" pitchFamily="34" charset="-120"/>
               </a:rPr>
-              <a:t>main()</a:t>
-            </a:r>
-            <a:endParaRPr lang="en-US" sz="1400" dirty="0"/>
-          </a:p>
-        </p:txBody>
-      </p:sp>
-      <p:sp>
-        <p:nvSpPr>
-          <p:cNvPr id="7" name="Text 5"/>
-          <p:cNvSpPr/>
-          <p:nvPr/>
-        </p:nvSpPr>
-        <p:spPr>
-          <a:xfrm>
-            <a:off x="731520" y="3108960"/>
-            <a:ext cx="2194560" cy="365760"/>
-          </a:xfrm>
-          <a:prstGeom prst="rect">
-            <a:avLst/>
-          </a:prstGeom>
-          <a:noFill/>
-          <a:ln/>
-        </p:spPr>
-        <p:txBody>
-          <a:bodyPr wrap="square" lIns="0" tIns="0" rIns="0" bIns="0" rtlCol="0" anchor="ctr"/>
-          <a:lstStyle/>
-          <a:p>
-            <a:pPr indent="0" marL="0">
-              <a:buNone/>
-            </a:pPr>
-            <a:r>
-              <a:rPr lang="en-US" sz="1400" b="1" dirty="0">
+              <a:t>1</a:t>
+            </a:r>
+            <a:endParaRPr lang="en-US" sz="1600" dirty="0"/>
+          </a:p>
+        </p:txBody>
+      </p:sp>
+      <p:sp>
+        <p:nvSpPr>
+          <p:cNvPr id="10" name="Text 8"/>
+          <p:cNvSpPr/>
+          <p:nvPr/>
+        </p:nvSpPr>
+        <p:spPr>
+          <a:xfrm>
+            <a:off x="5288280" y="1691640"/>
+            <a:ext cx="2407920" cy="384048"/>
+          </a:xfrm>
+          <a:prstGeom prst="rect">
+            <a:avLst/>
+          </a:prstGeom>
+          <a:noFill/>
+          <a:ln/>
+        </p:spPr>
+        <p:txBody>
+          <a:bodyPr wrap="square" lIns="0" tIns="0" rIns="0" bIns="0" rtlCol="0" anchor="ctr"/>
+          <a:lstStyle/>
+          <a:p>
+            <a:pPr indent="0" marL="0">
+              <a:buNone/>
+            </a:pPr>
+            <a:r>
+              <a:rPr lang="en-US" sz="1350" b="1" dirty="0">
                 <a:solidFill>
                   <a:srgbClr val="E8EDF2"/>
                 </a:solidFill>
@@ -9432,37 +9823,34 @@
                 <a:ea typeface="Malgun Gothic" pitchFamily="34" charset="-122"/>
                 <a:cs typeface="Malgun Gothic" pitchFamily="34" charset="-120"/>
               </a:rPr>
-              <a:t>GPU 개수 확인</a:t>
-            </a:r>
-            <a:endParaRPr lang="en-US" sz="1400" dirty="0"/>
-          </a:p>
-        </p:txBody>
-      </p:sp>
-      <p:sp>
-        <p:nvSpPr>
-          <p:cNvPr id="8" name="Text 6"/>
-          <p:cNvSpPr/>
-          <p:nvPr/>
-        </p:nvSpPr>
-        <p:spPr>
-          <a:xfrm>
-            <a:off x="731520" y="3474720"/>
-            <a:ext cx="2194560" cy="640080"/>
-          </a:xfrm>
-          <a:prstGeom prst="rect">
-            <a:avLst/>
-          </a:prstGeom>
-          <a:noFill/>
-          <a:ln/>
-        </p:spPr>
-        <p:txBody>
-          <a:bodyPr wrap="square" lIns="0" tIns="0" rIns="0" bIns="0" rtlCol="0" anchor="t"/>
-          <a:lstStyle/>
-          <a:p>
-            <a:pPr indent="0" marL="0">
-              <a:lnSpc>
-                <a:spcPct val="110000"/>
-              </a:lnSpc>
+              <a:t>Own address</a:t>
+            </a:r>
+            <a:endParaRPr lang="en-US" sz="1350" dirty="0"/>
+          </a:p>
+        </p:txBody>
+      </p:sp>
+      <p:sp>
+        <p:nvSpPr>
+          <p:cNvPr id="11" name="Text 9"/>
+          <p:cNvSpPr/>
+          <p:nvPr/>
+        </p:nvSpPr>
+        <p:spPr>
+          <a:xfrm>
+            <a:off x="5288280" y="2020824"/>
+            <a:ext cx="2407920" cy="310896"/>
+          </a:xfrm>
+          <a:prstGeom prst="rect">
+            <a:avLst/>
+          </a:prstGeom>
+          <a:noFill/>
+          <a:ln/>
+        </p:spPr>
+        <p:txBody>
+          <a:bodyPr wrap="square" lIns="0" tIns="0" rIns="0" bIns="0" rtlCol="0" anchor="ctr"/>
+          <a:lstStyle/>
+          <a:p>
+            <a:pPr indent="0" marL="0">
               <a:buNone/>
             </a:pPr>
             <a:r>
@@ -9474,7 +9862,7 @@
                 <a:ea typeface="Malgun Gothic" pitchFamily="34" charset="-122"/>
                 <a:cs typeface="Malgun Gothic" pitchFamily="34" charset="-120"/>
               </a:rPr>
-              <a:t>cudaGetDeviceCount (cuda_memtest.cpp:299)</a:t>
+              <a:t>주소 검사</a:t>
             </a:r>
             <a:endParaRPr lang="en-US" sz="1150" dirty="0"/>
           </a:p>
@@ -9482,57 +9870,161 @@
       </p:sp>
       <p:sp>
         <p:nvSpPr>
-          <p:cNvPr id="9" name="Text 7"/>
-          <p:cNvSpPr/>
-          <p:nvPr/>
-        </p:nvSpPr>
-        <p:spPr>
-          <a:xfrm>
-            <a:off x="3118104" y="2743200"/>
-            <a:ext cx="256032" cy="548640"/>
-          </a:xfrm>
-          <a:prstGeom prst="rect">
-            <a:avLst/>
-          </a:prstGeom>
-          <a:noFill/>
-          <a:ln/>
-        </p:spPr>
-        <p:txBody>
-          <a:bodyPr wrap="square" lIns="0" tIns="0" rIns="0" bIns="0" rtlCol="0" anchor="ctr"/>
+          <p:cNvPr id="12" name="Shape 10"/>
+          <p:cNvSpPr/>
+          <p:nvPr/>
+        </p:nvSpPr>
+        <p:spPr>
+          <a:xfrm>
+            <a:off x="8107680" y="1600200"/>
+            <a:ext cx="3505200" cy="786384"/>
+          </a:xfrm>
+          <a:prstGeom prst="roundRect">
+            <a:avLst>
+              <a:gd name="adj" fmla="val 6977"/>
+            </a:avLst>
+          </a:prstGeom>
+          <a:solidFill>
+            <a:srgbClr val="1E232C"/>
+          </a:solidFill>
+          <a:ln/>
+        </p:spPr>
+      </p:sp>
+      <p:sp>
+        <p:nvSpPr>
+          <p:cNvPr id="13" name="Text 11"/>
+          <p:cNvSpPr/>
+          <p:nvPr/>
+        </p:nvSpPr>
+        <p:spPr>
+          <a:xfrm>
+            <a:off x="8290560" y="1728216"/>
+            <a:ext cx="658368" cy="530352"/>
+          </a:xfrm>
+          <a:prstGeom prst="roundRect">
+            <a:avLst>
+              <a:gd name="adj" fmla="val 10345"/>
+            </a:avLst>
+          </a:prstGeom>
+          <a:solidFill>
+            <a:srgbClr val="4FB0C6"/>
+          </a:solidFill>
+          <a:ln/>
+        </p:spPr>
+        <p:txBody>
+          <a:bodyPr wrap="square" rtlCol="0" anchor="ctr"/>
           <a:lstStyle/>
           <a:p>
             <a:pPr algn="ctr" indent="0" marL="0">
               <a:buNone/>
             </a:pPr>
             <a:r>
-              <a:rPr lang="en-US" sz="2000" b="1" dirty="0">
-                <a:solidFill>
-                  <a:srgbClr val="9AA6B2"/>
+              <a:rPr lang="en-US" sz="1600" b="1" dirty="0">
+                <a:solidFill>
+                  <a:srgbClr val="13161C"/>
                 </a:solidFill>
                 <a:latin typeface="Courier New" pitchFamily="34" charset="0"/>
                 <a:ea typeface="Courier New" pitchFamily="34" charset="-122"/>
                 <a:cs typeface="Courier New" pitchFamily="34" charset="-120"/>
               </a:rPr>
-              <a:t>→</a:t>
-            </a:r>
-            <a:endParaRPr lang="en-US" sz="2000" dirty="0"/>
-          </a:p>
-        </p:txBody>
-      </p:sp>
-      <p:sp>
-        <p:nvSpPr>
-          <p:cNvPr id="10" name="Shape 8"/>
-          <p:cNvSpPr/>
-          <p:nvPr/>
-        </p:nvSpPr>
-        <p:spPr>
-          <a:xfrm>
-            <a:off x="3383280" y="1828800"/>
-            <a:ext cx="2560320" cy="2377440"/>
+              <a:t>2</a:t>
+            </a:r>
+            <a:endParaRPr lang="en-US" sz="1600" dirty="0"/>
+          </a:p>
+        </p:txBody>
+      </p:sp>
+      <p:sp>
+        <p:nvSpPr>
+          <p:cNvPr id="14" name="Text 12"/>
+          <p:cNvSpPr/>
+          <p:nvPr/>
+        </p:nvSpPr>
+        <p:spPr>
+          <a:xfrm>
+            <a:off x="9067800" y="1691640"/>
+            <a:ext cx="2407920" cy="384048"/>
+          </a:xfrm>
+          <a:prstGeom prst="rect">
+            <a:avLst/>
+          </a:prstGeom>
+          <a:noFill/>
+          <a:ln/>
+        </p:spPr>
+        <p:txBody>
+          <a:bodyPr wrap="square" lIns="0" tIns="0" rIns="0" bIns="0" rtlCol="0" anchor="ctr"/>
+          <a:lstStyle/>
+          <a:p>
+            <a:pPr indent="0" marL="0">
+              <a:buNone/>
+            </a:pPr>
+            <a:r>
+              <a:rPr lang="en-US" sz="1350" b="1" dirty="0">
+                <a:solidFill>
+                  <a:srgbClr val="E8EDF2"/>
+                </a:solidFill>
+                <a:latin typeface="Malgun Gothic" pitchFamily="34" charset="0"/>
+                <a:ea typeface="Malgun Gothic" pitchFamily="34" charset="-122"/>
+                <a:cs typeface="Malgun Gothic" pitchFamily="34" charset="-120"/>
+              </a:rPr>
+              <a:t>Moving inv. (0/1)</a:t>
+            </a:r>
+            <a:endParaRPr lang="en-US" sz="1350" dirty="0"/>
+          </a:p>
+        </p:txBody>
+      </p:sp>
+      <p:sp>
+        <p:nvSpPr>
+          <p:cNvPr id="15" name="Text 13"/>
+          <p:cNvSpPr/>
+          <p:nvPr/>
+        </p:nvSpPr>
+        <p:spPr>
+          <a:xfrm>
+            <a:off x="9067800" y="2020824"/>
+            <a:ext cx="2407920" cy="310896"/>
+          </a:xfrm>
+          <a:prstGeom prst="rect">
+            <a:avLst/>
+          </a:prstGeom>
+          <a:noFill/>
+          <a:ln/>
+        </p:spPr>
+        <p:txBody>
+          <a:bodyPr wrap="square" lIns="0" tIns="0" rIns="0" bIns="0" rtlCol="0" anchor="ctr"/>
+          <a:lstStyle/>
+          <a:p>
+            <a:pPr indent="0" marL="0">
+              <a:buNone/>
+            </a:pPr>
+            <a:r>
+              <a:rPr lang="en-US" sz="1150" dirty="0">
+                <a:solidFill>
+                  <a:srgbClr val="9AA6B2"/>
+                </a:solidFill>
+                <a:latin typeface="Malgun Gothic" pitchFamily="34" charset="0"/>
+                <a:ea typeface="Malgun Gothic" pitchFamily="34" charset="-122"/>
+                <a:cs typeface="Malgun Gothic" pitchFamily="34" charset="-120"/>
+              </a:rPr>
+              <a:t>고착 오류</a:t>
+            </a:r>
+            <a:endParaRPr lang="en-US" sz="1150" dirty="0"/>
+          </a:p>
+        </p:txBody>
+      </p:sp>
+      <p:sp>
+        <p:nvSpPr>
+          <p:cNvPr id="16" name="Shape 14"/>
+          <p:cNvSpPr/>
+          <p:nvPr/>
+        </p:nvSpPr>
+        <p:spPr>
+          <a:xfrm>
+            <a:off x="548640" y="2532888"/>
+            <a:ext cx="3505200" cy="786384"/>
           </a:xfrm>
           <a:prstGeom prst="roundRect">
             <a:avLst>
-              <a:gd name="adj" fmla="val 3077"/>
+              <a:gd name="adj" fmla="val 6977"/>
             </a:avLst>
           </a:prstGeom>
           <a:solidFill>
@@ -9543,18 +10035,18 @@
       </p:sp>
       <p:sp>
         <p:nvSpPr>
-          <p:cNvPr id="11" name="Text 9"/>
-          <p:cNvSpPr/>
-          <p:nvPr/>
-        </p:nvSpPr>
-        <p:spPr>
-          <a:xfrm>
-            <a:off x="3566160" y="2011680"/>
-            <a:ext cx="548640" cy="548640"/>
+          <p:cNvPr id="17" name="Text 15"/>
+          <p:cNvSpPr/>
+          <p:nvPr/>
+        </p:nvSpPr>
+        <p:spPr>
+          <a:xfrm>
+            <a:off x="731520" y="2660904"/>
+            <a:ext cx="658368" cy="530352"/>
           </a:xfrm>
           <a:prstGeom prst="roundRect">
             <a:avLst>
-              <a:gd name="adj" fmla="val 50000"/>
+              <a:gd name="adj" fmla="val 10345"/>
             </a:avLst>
           </a:prstGeom>
           <a:solidFill>
@@ -9570,7 +10062,7 @@
               <a:buNone/>
             </a:pPr>
             <a:r>
-              <a:rPr lang="en-US" sz="1800" b="1" dirty="0">
+              <a:rPr lang="en-US" sz="1600" b="1" dirty="0">
                 <a:solidFill>
                   <a:srgbClr val="13161C"/>
                 </a:solidFill>
@@ -9578,77 +10070,181 @@
                 <a:ea typeface="Courier New" pitchFamily="34" charset="-122"/>
                 <a:cs typeface="Courier New" pitchFamily="34" charset="-120"/>
               </a:rPr>
-              <a:t>2</a:t>
-            </a:r>
-            <a:endParaRPr lang="en-US" sz="1800" dirty="0"/>
-          </a:p>
-        </p:txBody>
-      </p:sp>
-      <p:sp>
-        <p:nvSpPr>
-          <p:cNvPr id="12" name="Text 10"/>
-          <p:cNvSpPr/>
-          <p:nvPr/>
-        </p:nvSpPr>
-        <p:spPr>
-          <a:xfrm>
-            <a:off x="3566160" y="2697480"/>
-            <a:ext cx="2194560" cy="457200"/>
-          </a:xfrm>
-          <a:prstGeom prst="rect">
-            <a:avLst/>
-          </a:prstGeom>
-          <a:noFill/>
-          <a:ln/>
-        </p:spPr>
-        <p:txBody>
-          <a:bodyPr wrap="square" lIns="0" tIns="0" rIns="0" bIns="0" rtlCol="0" anchor="ctr"/>
-          <a:lstStyle/>
-          <a:p>
-            <a:pPr indent="0" marL="0">
-              <a:buNone/>
-            </a:pPr>
-            <a:r>
-              <a:rPr lang="en-US" sz="1400" b="1" dirty="0">
-                <a:solidFill>
-                  <a:srgbClr val="4FB0C6"/>
+              <a:t>3</a:t>
+            </a:r>
+            <a:endParaRPr lang="en-US" sz="1600" dirty="0"/>
+          </a:p>
+        </p:txBody>
+      </p:sp>
+      <p:sp>
+        <p:nvSpPr>
+          <p:cNvPr id="18" name="Text 16"/>
+          <p:cNvSpPr/>
+          <p:nvPr/>
+        </p:nvSpPr>
+        <p:spPr>
+          <a:xfrm>
+            <a:off x="1508760" y="2624328"/>
+            <a:ext cx="2407920" cy="384048"/>
+          </a:xfrm>
+          <a:prstGeom prst="rect">
+            <a:avLst/>
+          </a:prstGeom>
+          <a:noFill/>
+          <a:ln/>
+        </p:spPr>
+        <p:txBody>
+          <a:bodyPr wrap="square" lIns="0" tIns="0" rIns="0" bIns="0" rtlCol="0" anchor="ctr"/>
+          <a:lstStyle/>
+          <a:p>
+            <a:pPr indent="0" marL="0">
+              <a:buNone/>
+            </a:pPr>
+            <a:r>
+              <a:rPr lang="en-US" sz="1350" b="1" dirty="0">
+                <a:solidFill>
+                  <a:srgbClr val="E8EDF2"/>
+                </a:solidFill>
+                <a:latin typeface="Malgun Gothic" pitchFamily="34" charset="0"/>
+                <a:ea typeface="Malgun Gothic" pitchFamily="34" charset="-122"/>
+                <a:cs typeface="Malgun Gothic" pitchFamily="34" charset="-120"/>
+              </a:rPr>
+              <a:t>Moving inv. (8bit)</a:t>
+            </a:r>
+            <a:endParaRPr lang="en-US" sz="1350" dirty="0"/>
+          </a:p>
+        </p:txBody>
+      </p:sp>
+      <p:sp>
+        <p:nvSpPr>
+          <p:cNvPr id="19" name="Text 17"/>
+          <p:cNvSpPr/>
+          <p:nvPr/>
+        </p:nvSpPr>
+        <p:spPr>
+          <a:xfrm>
+            <a:off x="1508760" y="2953512"/>
+            <a:ext cx="2407920" cy="310896"/>
+          </a:xfrm>
+          <a:prstGeom prst="rect">
+            <a:avLst/>
+          </a:prstGeom>
+          <a:noFill/>
+          <a:ln/>
+        </p:spPr>
+        <p:txBody>
+          <a:bodyPr wrap="square" lIns="0" tIns="0" rIns="0" bIns="0" rtlCol="0" anchor="ctr"/>
+          <a:lstStyle/>
+          <a:p>
+            <a:pPr indent="0" marL="0">
+              <a:buNone/>
+            </a:pPr>
+            <a:r>
+              <a:rPr lang="en-US" sz="1150" dirty="0">
+                <a:solidFill>
+                  <a:srgbClr val="9AA6B2"/>
+                </a:solidFill>
+                <a:latin typeface="Malgun Gothic" pitchFamily="34" charset="0"/>
+                <a:ea typeface="Malgun Gothic" pitchFamily="34" charset="-122"/>
+                <a:cs typeface="Malgun Gothic" pitchFamily="34" charset="-120"/>
+              </a:rPr>
+              <a:t>고착 오류</a:t>
+            </a:r>
+            <a:endParaRPr lang="en-US" sz="1150" dirty="0"/>
+          </a:p>
+        </p:txBody>
+      </p:sp>
+      <p:sp>
+        <p:nvSpPr>
+          <p:cNvPr id="20" name="Shape 18"/>
+          <p:cNvSpPr/>
+          <p:nvPr/>
+        </p:nvSpPr>
+        <p:spPr>
+          <a:xfrm>
+            <a:off x="4328160" y="2532888"/>
+            <a:ext cx="3505200" cy="786384"/>
+          </a:xfrm>
+          <a:prstGeom prst="roundRect">
+            <a:avLst>
+              <a:gd name="adj" fmla="val 6977"/>
+            </a:avLst>
+          </a:prstGeom>
+          <a:solidFill>
+            <a:srgbClr val="1E232C"/>
+          </a:solidFill>
+          <a:ln/>
+        </p:spPr>
+      </p:sp>
+      <p:sp>
+        <p:nvSpPr>
+          <p:cNvPr id="21" name="Text 19"/>
+          <p:cNvSpPr/>
+          <p:nvPr/>
+        </p:nvSpPr>
+        <p:spPr>
+          <a:xfrm>
+            <a:off x="4511040" y="2660904"/>
+            <a:ext cx="658368" cy="530352"/>
+          </a:xfrm>
+          <a:prstGeom prst="roundRect">
+            <a:avLst>
+              <a:gd name="adj" fmla="val 10345"/>
+            </a:avLst>
+          </a:prstGeom>
+          <a:solidFill>
+            <a:srgbClr val="4FB0C6"/>
+          </a:solidFill>
+          <a:ln/>
+        </p:spPr>
+        <p:txBody>
+          <a:bodyPr wrap="square" rtlCol="0" anchor="ctr"/>
+          <a:lstStyle/>
+          <a:p>
+            <a:pPr algn="ctr" indent="0" marL="0">
+              <a:buNone/>
+            </a:pPr>
+            <a:r>
+              <a:rPr lang="en-US" sz="1600" b="1" dirty="0">
+                <a:solidFill>
+                  <a:srgbClr val="13161C"/>
                 </a:solidFill>
                 <a:latin typeface="Courier New" pitchFamily="34" charset="0"/>
                 <a:ea typeface="Courier New" pitchFamily="34" charset="-122"/>
                 <a:cs typeface="Courier New" pitchFamily="34" charset="-120"/>
               </a:rPr>
-              <a:t>thread_func</a:t>
-            </a:r>
-            <a:endParaRPr lang="en-US" sz="1400" dirty="0"/>
-          </a:p>
-        </p:txBody>
-      </p:sp>
-      <p:sp>
-        <p:nvSpPr>
-          <p:cNvPr id="13" name="Text 11"/>
-          <p:cNvSpPr/>
-          <p:nvPr/>
-        </p:nvSpPr>
-        <p:spPr>
-          <a:xfrm>
-            <a:off x="3566160" y="3108960"/>
-            <a:ext cx="2194560" cy="365760"/>
-          </a:xfrm>
-          <a:prstGeom prst="rect">
-            <a:avLst/>
-          </a:prstGeom>
-          <a:noFill/>
-          <a:ln/>
-        </p:spPr>
-        <p:txBody>
-          <a:bodyPr wrap="square" lIns="0" tIns="0" rIns="0" bIns="0" rtlCol="0" anchor="ctr"/>
-          <a:lstStyle/>
-          <a:p>
-            <a:pPr indent="0" marL="0">
-              <a:buNone/>
-            </a:pPr>
-            <a:r>
-              <a:rPr lang="en-US" sz="1400" b="1" dirty="0">
+              <a:t>4</a:t>
+            </a:r>
+            <a:endParaRPr lang="en-US" sz="1600" dirty="0"/>
+          </a:p>
+        </p:txBody>
+      </p:sp>
+      <p:sp>
+        <p:nvSpPr>
+          <p:cNvPr id="22" name="Text 20"/>
+          <p:cNvSpPr/>
+          <p:nvPr/>
+        </p:nvSpPr>
+        <p:spPr>
+          <a:xfrm>
+            <a:off x="5288280" y="2624328"/>
+            <a:ext cx="2407920" cy="384048"/>
+          </a:xfrm>
+          <a:prstGeom prst="rect">
+            <a:avLst/>
+          </a:prstGeom>
+          <a:noFill/>
+          <a:ln/>
+        </p:spPr>
+        <p:txBody>
+          <a:bodyPr wrap="square" lIns="0" tIns="0" rIns="0" bIns="0" rtlCol="0" anchor="ctr"/>
+          <a:lstStyle/>
+          <a:p>
+            <a:pPr indent="0" marL="0">
+              <a:buNone/>
+            </a:pPr>
+            <a:r>
+              <a:rPr lang="en-US" sz="1350" b="1" dirty="0">
                 <a:solidFill>
                   <a:srgbClr val="E8EDF2"/>
                 </a:solidFill>
@@ -9656,37 +10252,34 @@
                 <a:ea typeface="Malgun Gothic" pitchFamily="34" charset="-122"/>
                 <a:cs typeface="Malgun Gothic" pitchFamily="34" charset="-120"/>
               </a:rPr>
-              <a:t>GPU마다 스레드</a:t>
-            </a:r>
-            <a:endParaRPr lang="en-US" sz="1400" dirty="0"/>
-          </a:p>
-        </p:txBody>
-      </p:sp>
-      <p:sp>
-        <p:nvSpPr>
-          <p:cNvPr id="14" name="Text 12"/>
-          <p:cNvSpPr/>
-          <p:nvPr/>
-        </p:nvSpPr>
-        <p:spPr>
-          <a:xfrm>
-            <a:off x="3566160" y="3474720"/>
-            <a:ext cx="2194560" cy="640080"/>
-          </a:xfrm>
-          <a:prstGeom prst="rect">
-            <a:avLst/>
-          </a:prstGeom>
-          <a:noFill/>
-          <a:ln/>
-        </p:spPr>
-        <p:txBody>
-          <a:bodyPr wrap="square" lIns="0" tIns="0" rIns="0" bIns="0" rtlCol="0" anchor="t"/>
-          <a:lstStyle/>
-          <a:p>
-            <a:pPr indent="0" marL="0">
-              <a:lnSpc>
-                <a:spcPct val="110000"/>
-              </a:lnSpc>
+              <a:t>Moving inv. (random)</a:t>
+            </a:r>
+            <a:endParaRPr lang="en-US" sz="1350" dirty="0"/>
+          </a:p>
+        </p:txBody>
+      </p:sp>
+      <p:sp>
+        <p:nvSpPr>
+          <p:cNvPr id="23" name="Text 21"/>
+          <p:cNvSpPr/>
+          <p:nvPr/>
+        </p:nvSpPr>
+        <p:spPr>
+          <a:xfrm>
+            <a:off x="5288280" y="2953512"/>
+            <a:ext cx="2407920" cy="310896"/>
+          </a:xfrm>
+          <a:prstGeom prst="rect">
+            <a:avLst/>
+          </a:prstGeom>
+          <a:noFill/>
+          <a:ln/>
+        </p:spPr>
+        <p:txBody>
+          <a:bodyPr wrap="square" lIns="0" tIns="0" rIns="0" bIns="0" rtlCol="0" anchor="ctr"/>
+          <a:lstStyle/>
+          <a:p>
+            <a:pPr indent="0" marL="0">
               <a:buNone/>
             </a:pPr>
             <a:r>
@@ -9698,7 +10291,7 @@
                 <a:ea typeface="Malgun Gothic" pitchFamily="34" charset="-122"/>
                 <a:cs typeface="Malgun Gothic" pitchFamily="34" charset="-120"/>
               </a:rPr>
-              <a:t>각 GPU를 cudaSetDevice로 선택</a:t>
+              <a:t>데이터 민감</a:t>
             </a:r>
             <a:endParaRPr lang="en-US" sz="1150" dirty="0"/>
           </a:p>
@@ -9706,57 +10299,161 @@
       </p:sp>
       <p:sp>
         <p:nvSpPr>
-          <p:cNvPr id="15" name="Text 13"/>
-          <p:cNvSpPr/>
-          <p:nvPr/>
-        </p:nvSpPr>
-        <p:spPr>
-          <a:xfrm>
-            <a:off x="5952744" y="2743200"/>
-            <a:ext cx="256032" cy="548640"/>
-          </a:xfrm>
-          <a:prstGeom prst="rect">
-            <a:avLst/>
-          </a:prstGeom>
-          <a:noFill/>
-          <a:ln/>
-        </p:spPr>
-        <p:txBody>
-          <a:bodyPr wrap="square" lIns="0" tIns="0" rIns="0" bIns="0" rtlCol="0" anchor="ctr"/>
+          <p:cNvPr id="24" name="Shape 22"/>
+          <p:cNvSpPr/>
+          <p:nvPr/>
+        </p:nvSpPr>
+        <p:spPr>
+          <a:xfrm>
+            <a:off x="8107680" y="2532888"/>
+            <a:ext cx="3505200" cy="786384"/>
+          </a:xfrm>
+          <a:prstGeom prst="roundRect">
+            <a:avLst>
+              <a:gd name="adj" fmla="val 6977"/>
+            </a:avLst>
+          </a:prstGeom>
+          <a:solidFill>
+            <a:srgbClr val="1E232C"/>
+          </a:solidFill>
+          <a:ln/>
+        </p:spPr>
+      </p:sp>
+      <p:sp>
+        <p:nvSpPr>
+          <p:cNvPr id="25" name="Text 23"/>
+          <p:cNvSpPr/>
+          <p:nvPr/>
+        </p:nvSpPr>
+        <p:spPr>
+          <a:xfrm>
+            <a:off x="8290560" y="2660904"/>
+            <a:ext cx="658368" cy="530352"/>
+          </a:xfrm>
+          <a:prstGeom prst="roundRect">
+            <a:avLst>
+              <a:gd name="adj" fmla="val 10345"/>
+            </a:avLst>
+          </a:prstGeom>
+          <a:solidFill>
+            <a:srgbClr val="4FB0C6"/>
+          </a:solidFill>
+          <a:ln/>
+        </p:spPr>
+        <p:txBody>
+          <a:bodyPr wrap="square" rtlCol="0" anchor="ctr"/>
           <a:lstStyle/>
           <a:p>
             <a:pPr algn="ctr" indent="0" marL="0">
               <a:buNone/>
             </a:pPr>
             <a:r>
-              <a:rPr lang="en-US" sz="2000" b="1" dirty="0">
-                <a:solidFill>
-                  <a:srgbClr val="9AA6B2"/>
+              <a:rPr lang="en-US" sz="1600" b="1" dirty="0">
+                <a:solidFill>
+                  <a:srgbClr val="13161C"/>
                 </a:solidFill>
                 <a:latin typeface="Courier New" pitchFamily="34" charset="0"/>
                 <a:ea typeface="Courier New" pitchFamily="34" charset="-122"/>
                 <a:cs typeface="Courier New" pitchFamily="34" charset="-120"/>
               </a:rPr>
-              <a:t>→</a:t>
-            </a:r>
-            <a:endParaRPr lang="en-US" sz="2000" dirty="0"/>
-          </a:p>
-        </p:txBody>
-      </p:sp>
-      <p:sp>
-        <p:nvSpPr>
-          <p:cNvPr id="16" name="Shape 14"/>
-          <p:cNvSpPr/>
-          <p:nvPr/>
-        </p:nvSpPr>
-        <p:spPr>
-          <a:xfrm>
-            <a:off x="6217920" y="1828800"/>
-            <a:ext cx="2560320" cy="2377440"/>
+              <a:t>5</a:t>
+            </a:r>
+            <a:endParaRPr lang="en-US" sz="1600" dirty="0"/>
+          </a:p>
+        </p:txBody>
+      </p:sp>
+      <p:sp>
+        <p:nvSpPr>
+          <p:cNvPr id="26" name="Text 24"/>
+          <p:cNvSpPr/>
+          <p:nvPr/>
+        </p:nvSpPr>
+        <p:spPr>
+          <a:xfrm>
+            <a:off x="9067800" y="2624328"/>
+            <a:ext cx="2407920" cy="384048"/>
+          </a:xfrm>
+          <a:prstGeom prst="rect">
+            <a:avLst/>
+          </a:prstGeom>
+          <a:noFill/>
+          <a:ln/>
+        </p:spPr>
+        <p:txBody>
+          <a:bodyPr wrap="square" lIns="0" tIns="0" rIns="0" bIns="0" rtlCol="0" anchor="ctr"/>
+          <a:lstStyle/>
+          <a:p>
+            <a:pPr indent="0" marL="0">
+              <a:buNone/>
+            </a:pPr>
+            <a:r>
+              <a:rPr lang="en-US" sz="1350" b="1" dirty="0">
+                <a:solidFill>
+                  <a:srgbClr val="E8EDF2"/>
+                </a:solidFill>
+                <a:latin typeface="Malgun Gothic" pitchFamily="34" charset="0"/>
+                <a:ea typeface="Malgun Gothic" pitchFamily="34" charset="-122"/>
+                <a:cs typeface="Malgun Gothic" pitchFamily="34" charset="-120"/>
+              </a:rPr>
+              <a:t>Block move</a:t>
+            </a:r>
+            <a:endParaRPr lang="en-US" sz="1350" dirty="0"/>
+          </a:p>
+        </p:txBody>
+      </p:sp>
+      <p:sp>
+        <p:nvSpPr>
+          <p:cNvPr id="27" name="Text 25"/>
+          <p:cNvSpPr/>
+          <p:nvPr/>
+        </p:nvSpPr>
+        <p:spPr>
+          <a:xfrm>
+            <a:off x="9067800" y="2953512"/>
+            <a:ext cx="2407920" cy="310896"/>
+          </a:xfrm>
+          <a:prstGeom prst="rect">
+            <a:avLst/>
+          </a:prstGeom>
+          <a:noFill/>
+          <a:ln/>
+        </p:spPr>
+        <p:txBody>
+          <a:bodyPr wrap="square" lIns="0" tIns="0" rIns="0" bIns="0" rtlCol="0" anchor="ctr"/>
+          <a:lstStyle/>
+          <a:p>
+            <a:pPr indent="0" marL="0">
+              <a:buNone/>
+            </a:pPr>
+            <a:r>
+              <a:rPr lang="en-US" sz="1150" dirty="0">
+                <a:solidFill>
+                  <a:srgbClr val="9AA6B2"/>
+                </a:solidFill>
+                <a:latin typeface="Malgun Gothic" pitchFamily="34" charset="0"/>
+                <a:ea typeface="Malgun Gothic" pitchFamily="34" charset="-122"/>
+                <a:cs typeface="Malgun Gothic" pitchFamily="34" charset="-120"/>
+              </a:rPr>
+              <a:t>데이터 민감</a:t>
+            </a:r>
+            <a:endParaRPr lang="en-US" sz="1150" dirty="0"/>
+          </a:p>
+        </p:txBody>
+      </p:sp>
+      <p:sp>
+        <p:nvSpPr>
+          <p:cNvPr id="28" name="Shape 26"/>
+          <p:cNvSpPr/>
+          <p:nvPr/>
+        </p:nvSpPr>
+        <p:spPr>
+          <a:xfrm>
+            <a:off x="548640" y="3465576"/>
+            <a:ext cx="3505200" cy="786384"/>
           </a:xfrm>
           <a:prstGeom prst="roundRect">
             <a:avLst>
-              <a:gd name="adj" fmla="val 3077"/>
+              <a:gd name="adj" fmla="val 6977"/>
             </a:avLst>
           </a:prstGeom>
           <a:solidFill>
@@ -9767,18 +10464,447 @@
       </p:sp>
       <p:sp>
         <p:nvSpPr>
-          <p:cNvPr id="17" name="Text 15"/>
-          <p:cNvSpPr/>
-          <p:nvPr/>
-        </p:nvSpPr>
-        <p:spPr>
-          <a:xfrm>
-            <a:off x="6400800" y="2011680"/>
-            <a:ext cx="548640" cy="548640"/>
+          <p:cNvPr id="29" name="Text 27"/>
+          <p:cNvSpPr/>
+          <p:nvPr/>
+        </p:nvSpPr>
+        <p:spPr>
+          <a:xfrm>
+            <a:off x="731520" y="3593592"/>
+            <a:ext cx="658368" cy="530352"/>
           </a:xfrm>
           <a:prstGeom prst="roundRect">
             <a:avLst>
-              <a:gd name="adj" fmla="val 50000"/>
+              <a:gd name="adj" fmla="val 10345"/>
+            </a:avLst>
+          </a:prstGeom>
+          <a:solidFill>
+            <a:srgbClr val="4FB0C6"/>
+          </a:solidFill>
+          <a:ln/>
+        </p:spPr>
+        <p:txBody>
+          <a:bodyPr wrap="square" rtlCol="0" anchor="ctr"/>
+          <a:lstStyle/>
+          <a:p>
+            <a:pPr algn="ctr" indent="0" marL="0">
+              <a:buNone/>
+            </a:pPr>
+            <a:r>
+              <a:rPr lang="en-US" sz="1600" b="1" dirty="0">
+                <a:solidFill>
+                  <a:srgbClr val="13161C"/>
+                </a:solidFill>
+                <a:latin typeface="Courier New" pitchFamily="34" charset="0"/>
+                <a:ea typeface="Courier New" pitchFamily="34" charset="-122"/>
+                <a:cs typeface="Courier New" pitchFamily="34" charset="-120"/>
+              </a:rPr>
+              <a:t>6</a:t>
+            </a:r>
+            <a:endParaRPr lang="en-US" sz="1600" dirty="0"/>
+          </a:p>
+        </p:txBody>
+      </p:sp>
+      <p:sp>
+        <p:nvSpPr>
+          <p:cNvPr id="30" name="Text 28"/>
+          <p:cNvSpPr/>
+          <p:nvPr/>
+        </p:nvSpPr>
+        <p:spPr>
+          <a:xfrm>
+            <a:off x="1508760" y="3557016"/>
+            <a:ext cx="2407920" cy="384048"/>
+          </a:xfrm>
+          <a:prstGeom prst="rect">
+            <a:avLst/>
+          </a:prstGeom>
+          <a:noFill/>
+          <a:ln/>
+        </p:spPr>
+        <p:txBody>
+          <a:bodyPr wrap="square" lIns="0" tIns="0" rIns="0" bIns="0" rtlCol="0" anchor="ctr"/>
+          <a:lstStyle/>
+          <a:p>
+            <a:pPr indent="0" marL="0">
+              <a:buNone/>
+            </a:pPr>
+            <a:r>
+              <a:rPr lang="en-US" sz="1350" b="1" dirty="0">
+                <a:solidFill>
+                  <a:srgbClr val="E8EDF2"/>
+                </a:solidFill>
+                <a:latin typeface="Malgun Gothic" pitchFamily="34" charset="0"/>
+                <a:ea typeface="Malgun Gothic" pitchFamily="34" charset="-122"/>
+                <a:cs typeface="Malgun Gothic" pitchFamily="34" charset="-120"/>
+              </a:rPr>
+              <a:t>Moving inv. (shift)</a:t>
+            </a:r>
+            <a:endParaRPr lang="en-US" sz="1350" dirty="0"/>
+          </a:p>
+        </p:txBody>
+      </p:sp>
+      <p:sp>
+        <p:nvSpPr>
+          <p:cNvPr id="31" name="Text 29"/>
+          <p:cNvSpPr/>
+          <p:nvPr/>
+        </p:nvSpPr>
+        <p:spPr>
+          <a:xfrm>
+            <a:off x="1508760" y="3886200"/>
+            <a:ext cx="2407920" cy="310896"/>
+          </a:xfrm>
+          <a:prstGeom prst="rect">
+            <a:avLst/>
+          </a:prstGeom>
+          <a:noFill/>
+          <a:ln/>
+        </p:spPr>
+        <p:txBody>
+          <a:bodyPr wrap="square" lIns="0" tIns="0" rIns="0" bIns="0" rtlCol="0" anchor="ctr"/>
+          <a:lstStyle/>
+          <a:p>
+            <a:pPr indent="0" marL="0">
+              <a:buNone/>
+            </a:pPr>
+            <a:r>
+              <a:rPr lang="en-US" sz="1150" dirty="0">
+                <a:solidFill>
+                  <a:srgbClr val="9AA6B2"/>
+                </a:solidFill>
+                <a:latin typeface="Malgun Gothic" pitchFamily="34" charset="0"/>
+                <a:ea typeface="Malgun Gothic" pitchFamily="34" charset="-122"/>
+                <a:cs typeface="Malgun Gothic" pitchFamily="34" charset="-120"/>
+              </a:rPr>
+              <a:t>데이터 민감</a:t>
+            </a:r>
+            <a:endParaRPr lang="en-US" sz="1150" dirty="0"/>
+          </a:p>
+        </p:txBody>
+      </p:sp>
+      <p:sp>
+        <p:nvSpPr>
+          <p:cNvPr id="32" name="Shape 30"/>
+          <p:cNvSpPr/>
+          <p:nvPr/>
+        </p:nvSpPr>
+        <p:spPr>
+          <a:xfrm>
+            <a:off x="4328160" y="3465576"/>
+            <a:ext cx="3505200" cy="786384"/>
+          </a:xfrm>
+          <a:prstGeom prst="roundRect">
+            <a:avLst>
+              <a:gd name="adj" fmla="val 6977"/>
+            </a:avLst>
+          </a:prstGeom>
+          <a:solidFill>
+            <a:srgbClr val="1E232C"/>
+          </a:solidFill>
+          <a:ln/>
+        </p:spPr>
+      </p:sp>
+      <p:sp>
+        <p:nvSpPr>
+          <p:cNvPr id="33" name="Text 31"/>
+          <p:cNvSpPr/>
+          <p:nvPr/>
+        </p:nvSpPr>
+        <p:spPr>
+          <a:xfrm>
+            <a:off x="4511040" y="3593592"/>
+            <a:ext cx="658368" cy="530352"/>
+          </a:xfrm>
+          <a:prstGeom prst="roundRect">
+            <a:avLst>
+              <a:gd name="adj" fmla="val 10345"/>
+            </a:avLst>
+          </a:prstGeom>
+          <a:solidFill>
+            <a:srgbClr val="4FB0C6"/>
+          </a:solidFill>
+          <a:ln/>
+        </p:spPr>
+        <p:txBody>
+          <a:bodyPr wrap="square" rtlCol="0" anchor="ctr"/>
+          <a:lstStyle/>
+          <a:p>
+            <a:pPr algn="ctr" indent="0" marL="0">
+              <a:buNone/>
+            </a:pPr>
+            <a:r>
+              <a:rPr lang="en-US" sz="1600" b="1" dirty="0">
+                <a:solidFill>
+                  <a:srgbClr val="13161C"/>
+                </a:solidFill>
+                <a:latin typeface="Courier New" pitchFamily="34" charset="0"/>
+                <a:ea typeface="Courier New" pitchFamily="34" charset="-122"/>
+                <a:cs typeface="Courier New" pitchFamily="34" charset="-120"/>
+              </a:rPr>
+              <a:t>7</a:t>
+            </a:r>
+            <a:endParaRPr lang="en-US" sz="1600" dirty="0"/>
+          </a:p>
+        </p:txBody>
+      </p:sp>
+      <p:sp>
+        <p:nvSpPr>
+          <p:cNvPr id="34" name="Text 32"/>
+          <p:cNvSpPr/>
+          <p:nvPr/>
+        </p:nvSpPr>
+        <p:spPr>
+          <a:xfrm>
+            <a:off x="5288280" y="3557016"/>
+            <a:ext cx="2407920" cy="384048"/>
+          </a:xfrm>
+          <a:prstGeom prst="rect">
+            <a:avLst/>
+          </a:prstGeom>
+          <a:noFill/>
+          <a:ln/>
+        </p:spPr>
+        <p:txBody>
+          <a:bodyPr wrap="square" lIns="0" tIns="0" rIns="0" bIns="0" rtlCol="0" anchor="ctr"/>
+          <a:lstStyle/>
+          <a:p>
+            <a:pPr indent="0" marL="0">
+              <a:buNone/>
+            </a:pPr>
+            <a:r>
+              <a:rPr lang="en-US" sz="1350" b="1" dirty="0">
+                <a:solidFill>
+                  <a:srgbClr val="E8EDF2"/>
+                </a:solidFill>
+                <a:latin typeface="Malgun Gothic" pitchFamily="34" charset="0"/>
+                <a:ea typeface="Malgun Gothic" pitchFamily="34" charset="-122"/>
+                <a:cs typeface="Malgun Gothic" pitchFamily="34" charset="-120"/>
+              </a:rPr>
+              <a:t>Random sequence</a:t>
+            </a:r>
+            <a:endParaRPr lang="en-US" sz="1350" dirty="0"/>
+          </a:p>
+        </p:txBody>
+      </p:sp>
+      <p:sp>
+        <p:nvSpPr>
+          <p:cNvPr id="35" name="Text 33"/>
+          <p:cNvSpPr/>
+          <p:nvPr/>
+        </p:nvSpPr>
+        <p:spPr>
+          <a:xfrm>
+            <a:off x="5288280" y="3886200"/>
+            <a:ext cx="2407920" cy="310896"/>
+          </a:xfrm>
+          <a:prstGeom prst="rect">
+            <a:avLst/>
+          </a:prstGeom>
+          <a:noFill/>
+          <a:ln/>
+        </p:spPr>
+        <p:txBody>
+          <a:bodyPr wrap="square" lIns="0" tIns="0" rIns="0" bIns="0" rtlCol="0" anchor="ctr"/>
+          <a:lstStyle/>
+          <a:p>
+            <a:pPr indent="0" marL="0">
+              <a:buNone/>
+            </a:pPr>
+            <a:r>
+              <a:rPr lang="en-US" sz="1150" dirty="0">
+                <a:solidFill>
+                  <a:srgbClr val="9AA6B2"/>
+                </a:solidFill>
+                <a:latin typeface="Malgun Gothic" pitchFamily="34" charset="0"/>
+                <a:ea typeface="Malgun Gothic" pitchFamily="34" charset="-122"/>
+                <a:cs typeface="Malgun Gothic" pitchFamily="34" charset="-120"/>
+              </a:rPr>
+              <a:t>데이터 민감</a:t>
+            </a:r>
+            <a:endParaRPr lang="en-US" sz="1150" dirty="0"/>
+          </a:p>
+        </p:txBody>
+      </p:sp>
+      <p:sp>
+        <p:nvSpPr>
+          <p:cNvPr id="36" name="Shape 34"/>
+          <p:cNvSpPr/>
+          <p:nvPr/>
+        </p:nvSpPr>
+        <p:spPr>
+          <a:xfrm>
+            <a:off x="8107680" y="3465576"/>
+            <a:ext cx="3505200" cy="786384"/>
+          </a:xfrm>
+          <a:prstGeom prst="roundRect">
+            <a:avLst>
+              <a:gd name="adj" fmla="val 6977"/>
+            </a:avLst>
+          </a:prstGeom>
+          <a:solidFill>
+            <a:srgbClr val="1E232C"/>
+          </a:solidFill>
+          <a:ln/>
+        </p:spPr>
+      </p:sp>
+      <p:sp>
+        <p:nvSpPr>
+          <p:cNvPr id="37" name="Text 35"/>
+          <p:cNvSpPr/>
+          <p:nvPr/>
+        </p:nvSpPr>
+        <p:spPr>
+          <a:xfrm>
+            <a:off x="8290560" y="3593592"/>
+            <a:ext cx="658368" cy="530352"/>
+          </a:xfrm>
+          <a:prstGeom prst="roundRect">
+            <a:avLst>
+              <a:gd name="adj" fmla="val 10345"/>
+            </a:avLst>
+          </a:prstGeom>
+          <a:solidFill>
+            <a:srgbClr val="4FB0C6"/>
+          </a:solidFill>
+          <a:ln/>
+        </p:spPr>
+        <p:txBody>
+          <a:bodyPr wrap="square" rtlCol="0" anchor="ctr"/>
+          <a:lstStyle/>
+          <a:p>
+            <a:pPr algn="ctr" indent="0" marL="0">
+              <a:buNone/>
+            </a:pPr>
+            <a:r>
+              <a:rPr lang="en-US" sz="1600" b="1" dirty="0">
+                <a:solidFill>
+                  <a:srgbClr val="13161C"/>
+                </a:solidFill>
+                <a:latin typeface="Courier New" pitchFamily="34" charset="0"/>
+                <a:ea typeface="Courier New" pitchFamily="34" charset="-122"/>
+                <a:cs typeface="Courier New" pitchFamily="34" charset="-120"/>
+              </a:rPr>
+              <a:t>8</a:t>
+            </a:r>
+            <a:endParaRPr lang="en-US" sz="1600" dirty="0"/>
+          </a:p>
+        </p:txBody>
+      </p:sp>
+      <p:sp>
+        <p:nvSpPr>
+          <p:cNvPr id="38" name="Text 36"/>
+          <p:cNvSpPr/>
+          <p:nvPr/>
+        </p:nvSpPr>
+        <p:spPr>
+          <a:xfrm>
+            <a:off x="9067800" y="3557016"/>
+            <a:ext cx="2407920" cy="384048"/>
+          </a:xfrm>
+          <a:prstGeom prst="rect">
+            <a:avLst/>
+          </a:prstGeom>
+          <a:noFill/>
+          <a:ln/>
+        </p:spPr>
+        <p:txBody>
+          <a:bodyPr wrap="square" lIns="0" tIns="0" rIns="0" bIns="0" rtlCol="0" anchor="ctr"/>
+          <a:lstStyle/>
+          <a:p>
+            <a:pPr indent="0" marL="0">
+              <a:buNone/>
+            </a:pPr>
+            <a:r>
+              <a:rPr lang="en-US" sz="1350" b="1" dirty="0">
+                <a:solidFill>
+                  <a:srgbClr val="E8EDF2"/>
+                </a:solidFill>
+                <a:latin typeface="Malgun Gothic" pitchFamily="34" charset="0"/>
+                <a:ea typeface="Malgun Gothic" pitchFamily="34" charset="-122"/>
+                <a:cs typeface="Malgun Gothic" pitchFamily="34" charset="-120"/>
+              </a:rPr>
+              <a:t>Modulo 20</a:t>
+            </a:r>
+            <a:endParaRPr lang="en-US" sz="1350" dirty="0"/>
+          </a:p>
+        </p:txBody>
+      </p:sp>
+      <p:sp>
+        <p:nvSpPr>
+          <p:cNvPr id="39" name="Text 37"/>
+          <p:cNvSpPr/>
+          <p:nvPr/>
+        </p:nvSpPr>
+        <p:spPr>
+          <a:xfrm>
+            <a:off x="9067800" y="3886200"/>
+            <a:ext cx="2407920" cy="310896"/>
+          </a:xfrm>
+          <a:prstGeom prst="rect">
+            <a:avLst/>
+          </a:prstGeom>
+          <a:noFill/>
+          <a:ln/>
+        </p:spPr>
+        <p:txBody>
+          <a:bodyPr wrap="square" lIns="0" tIns="0" rIns="0" bIns="0" rtlCol="0" anchor="ctr"/>
+          <a:lstStyle/>
+          <a:p>
+            <a:pPr indent="0" marL="0">
+              <a:buNone/>
+            </a:pPr>
+            <a:r>
+              <a:rPr lang="en-US" sz="1150" dirty="0">
+                <a:solidFill>
+                  <a:srgbClr val="9AA6B2"/>
+                </a:solidFill>
+                <a:latin typeface="Malgun Gothic" pitchFamily="34" charset="0"/>
+                <a:ea typeface="Malgun Gothic" pitchFamily="34" charset="-122"/>
+                <a:cs typeface="Malgun Gothic" pitchFamily="34" charset="-120"/>
+              </a:rPr>
+              <a:t>데이터 민감</a:t>
+            </a:r>
+            <a:endParaRPr lang="en-US" sz="1150" dirty="0"/>
+          </a:p>
+        </p:txBody>
+      </p:sp>
+      <p:sp>
+        <p:nvSpPr>
+          <p:cNvPr id="40" name="Shape 38"/>
+          <p:cNvSpPr/>
+          <p:nvPr/>
+        </p:nvSpPr>
+        <p:spPr>
+          <a:xfrm>
+            <a:off x="548640" y="4398264"/>
+            <a:ext cx="3505200" cy="786384"/>
+          </a:xfrm>
+          <a:prstGeom prst="roundRect">
+            <a:avLst>
+              <a:gd name="adj" fmla="val 6977"/>
+            </a:avLst>
+          </a:prstGeom>
+          <a:solidFill>
+            <a:srgbClr val="1E232C"/>
+          </a:solidFill>
+          <a:ln/>
+        </p:spPr>
+      </p:sp>
+      <p:sp>
+        <p:nvSpPr>
+          <p:cNvPr id="41" name="Text 39"/>
+          <p:cNvSpPr/>
+          <p:nvPr/>
+        </p:nvSpPr>
+        <p:spPr>
+          <a:xfrm>
+            <a:off x="731520" y="4526280"/>
+            <a:ext cx="658368" cy="530352"/>
+          </a:xfrm>
+          <a:prstGeom prst="roundRect">
+            <a:avLst>
+              <a:gd name="adj" fmla="val 10345"/>
             </a:avLst>
           </a:prstGeom>
           <a:solidFill>
@@ -9794,7 +10920,7 @@
               <a:buNone/>
             </a:pPr>
             <a:r>
-              <a:rPr lang="en-US" sz="1800" b="1" dirty="0">
+              <a:rPr lang="en-US" sz="1600" b="1" dirty="0">
                 <a:solidFill>
                   <a:srgbClr val="13161C"/>
                 </a:solidFill>
@@ -9802,77 +10928,181 @@
                 <a:ea typeface="Courier New" pitchFamily="34" charset="-122"/>
                 <a:cs typeface="Courier New" pitchFamily="34" charset="-120"/>
               </a:rPr>
-              <a:t>3</a:t>
-            </a:r>
-            <a:endParaRPr lang="en-US" sz="1800" dirty="0"/>
-          </a:p>
-        </p:txBody>
-      </p:sp>
-      <p:sp>
-        <p:nvSpPr>
-          <p:cNvPr id="18" name="Text 16"/>
-          <p:cNvSpPr/>
-          <p:nvPr/>
-        </p:nvSpPr>
-        <p:spPr>
-          <a:xfrm>
-            <a:off x="6400800" y="2697480"/>
-            <a:ext cx="2194560" cy="457200"/>
-          </a:xfrm>
-          <a:prstGeom prst="rect">
-            <a:avLst/>
-          </a:prstGeom>
-          <a:noFill/>
-          <a:ln/>
-        </p:spPr>
-        <p:txBody>
-          <a:bodyPr wrap="square" lIns="0" tIns="0" rIns="0" bIns="0" rtlCol="0" anchor="ctr"/>
-          <a:lstStyle/>
-          <a:p>
-            <a:pPr indent="0" marL="0">
-              <a:buNone/>
-            </a:pPr>
-            <a:r>
-              <a:rPr lang="en-US" sz="1400" b="1" dirty="0">
-                <a:solidFill>
-                  <a:srgbClr val="E0A458"/>
+              <a:t>9</a:t>
+            </a:r>
+            <a:endParaRPr lang="en-US" sz="1600" dirty="0"/>
+          </a:p>
+        </p:txBody>
+      </p:sp>
+      <p:sp>
+        <p:nvSpPr>
+          <p:cNvPr id="42" name="Text 40"/>
+          <p:cNvSpPr/>
+          <p:nvPr/>
+        </p:nvSpPr>
+        <p:spPr>
+          <a:xfrm>
+            <a:off x="1508760" y="4489704"/>
+            <a:ext cx="2407920" cy="384048"/>
+          </a:xfrm>
+          <a:prstGeom prst="rect">
+            <a:avLst/>
+          </a:prstGeom>
+          <a:noFill/>
+          <a:ln/>
+        </p:spPr>
+        <p:txBody>
+          <a:bodyPr wrap="square" lIns="0" tIns="0" rIns="0" bIns="0" rtlCol="0" anchor="ctr"/>
+          <a:lstStyle/>
+          <a:p>
+            <a:pPr indent="0" marL="0">
+              <a:buNone/>
+            </a:pPr>
+            <a:r>
+              <a:rPr lang="en-US" sz="1350" b="1" dirty="0">
+                <a:solidFill>
+                  <a:srgbClr val="E8EDF2"/>
+                </a:solidFill>
+                <a:latin typeface="Malgun Gothic" pitchFamily="34" charset="0"/>
+                <a:ea typeface="Malgun Gothic" pitchFamily="34" charset="-122"/>
+                <a:cs typeface="Malgun Gothic" pitchFamily="34" charset="-120"/>
+              </a:rPr>
+              <a:t>Bit fade (3h)</a:t>
+            </a:r>
+            <a:endParaRPr lang="en-US" sz="1350" dirty="0"/>
+          </a:p>
+        </p:txBody>
+      </p:sp>
+      <p:sp>
+        <p:nvSpPr>
+          <p:cNvPr id="43" name="Text 41"/>
+          <p:cNvSpPr/>
+          <p:nvPr/>
+        </p:nvSpPr>
+        <p:spPr>
+          <a:xfrm>
+            <a:off x="1508760" y="4818888"/>
+            <a:ext cx="2407920" cy="310896"/>
+          </a:xfrm>
+          <a:prstGeom prst="rect">
+            <a:avLst/>
+          </a:prstGeom>
+          <a:noFill/>
+          <a:ln/>
+        </p:spPr>
+        <p:txBody>
+          <a:bodyPr wrap="square" lIns="0" tIns="0" rIns="0" bIns="0" rtlCol="0" anchor="ctr"/>
+          <a:lstStyle/>
+          <a:p>
+            <a:pPr indent="0" marL="0">
+              <a:buNone/>
+            </a:pPr>
+            <a:r>
+              <a:rPr lang="en-US" sz="1150" dirty="0">
+                <a:solidFill>
+                  <a:srgbClr val="9AA6B2"/>
+                </a:solidFill>
+                <a:latin typeface="Malgun Gothic" pitchFamily="34" charset="0"/>
+                <a:ea typeface="Malgun Gothic" pitchFamily="34" charset="-122"/>
+                <a:cs typeface="Malgun Gothic" pitchFamily="34" charset="-120"/>
+              </a:rPr>
+              <a:t>데이터 보존</a:t>
+            </a:r>
+            <a:endParaRPr lang="en-US" sz="1150" dirty="0"/>
+          </a:p>
+        </p:txBody>
+      </p:sp>
+      <p:sp>
+        <p:nvSpPr>
+          <p:cNvPr id="44" name="Shape 42"/>
+          <p:cNvSpPr/>
+          <p:nvPr/>
+        </p:nvSpPr>
+        <p:spPr>
+          <a:xfrm>
+            <a:off x="4328160" y="4398264"/>
+            <a:ext cx="3505200" cy="786384"/>
+          </a:xfrm>
+          <a:prstGeom prst="roundRect">
+            <a:avLst>
+              <a:gd name="adj" fmla="val 6977"/>
+            </a:avLst>
+          </a:prstGeom>
+          <a:solidFill>
+            <a:srgbClr val="1E232C"/>
+          </a:solidFill>
+          <a:ln/>
+        </p:spPr>
+      </p:sp>
+      <p:sp>
+        <p:nvSpPr>
+          <p:cNvPr id="45" name="Text 43"/>
+          <p:cNvSpPr/>
+          <p:nvPr/>
+        </p:nvSpPr>
+        <p:spPr>
+          <a:xfrm>
+            <a:off x="4511040" y="4526280"/>
+            <a:ext cx="658368" cy="530352"/>
+          </a:xfrm>
+          <a:prstGeom prst="roundRect">
+            <a:avLst>
+              <a:gd name="adj" fmla="val 10345"/>
+            </a:avLst>
+          </a:prstGeom>
+          <a:solidFill>
+            <a:srgbClr val="E0A458"/>
+          </a:solidFill>
+          <a:ln/>
+        </p:spPr>
+        <p:txBody>
+          <a:bodyPr wrap="square" rtlCol="0" anchor="ctr"/>
+          <a:lstStyle/>
+          <a:p>
+            <a:pPr algn="ctr" indent="0" marL="0">
+              <a:buNone/>
+            </a:pPr>
+            <a:r>
+              <a:rPr lang="en-US" sz="1600" b="1" dirty="0">
+                <a:solidFill>
+                  <a:srgbClr val="13161C"/>
                 </a:solidFill>
                 <a:latin typeface="Courier New" pitchFamily="34" charset="0"/>
                 <a:ea typeface="Courier New" pitchFamily="34" charset="-122"/>
                 <a:cs typeface="Courier New" pitchFamily="34" charset="-120"/>
               </a:rPr>
-              <a:t>run_tests</a:t>
-            </a:r>
-            <a:endParaRPr lang="en-US" sz="1400" dirty="0"/>
-          </a:p>
-        </p:txBody>
-      </p:sp>
-      <p:sp>
-        <p:nvSpPr>
-          <p:cNvPr id="19" name="Text 17"/>
-          <p:cNvSpPr/>
-          <p:nvPr/>
-        </p:nvSpPr>
-        <p:spPr>
-          <a:xfrm>
-            <a:off x="6400800" y="3108960"/>
-            <a:ext cx="2194560" cy="365760"/>
-          </a:xfrm>
-          <a:prstGeom prst="rect">
-            <a:avLst/>
-          </a:prstGeom>
-          <a:noFill/>
-          <a:ln/>
-        </p:spPr>
-        <p:txBody>
-          <a:bodyPr wrap="square" lIns="0" tIns="0" rIns="0" bIns="0" rtlCol="0" anchor="ctr"/>
-          <a:lstStyle/>
-          <a:p>
-            <a:pPr indent="0" marL="0">
-              <a:buNone/>
-            </a:pPr>
-            <a:r>
-              <a:rPr lang="en-US" sz="1400" b="1" dirty="0">
+              <a:t>10</a:t>
+            </a:r>
+            <a:endParaRPr lang="en-US" sz="1600" dirty="0"/>
+          </a:p>
+        </p:txBody>
+      </p:sp>
+      <p:sp>
+        <p:nvSpPr>
+          <p:cNvPr id="46" name="Text 44"/>
+          <p:cNvSpPr/>
+          <p:nvPr/>
+        </p:nvSpPr>
+        <p:spPr>
+          <a:xfrm>
+            <a:off x="5288280" y="4489704"/>
+            <a:ext cx="2407920" cy="384048"/>
+          </a:xfrm>
+          <a:prstGeom prst="rect">
+            <a:avLst/>
+          </a:prstGeom>
+          <a:noFill/>
+          <a:ln/>
+        </p:spPr>
+        <p:txBody>
+          <a:bodyPr wrap="square" lIns="0" tIns="0" rIns="0" bIns="0" rtlCol="0" anchor="ctr"/>
+          <a:lstStyle/>
+          <a:p>
+            <a:pPr indent="0" marL="0">
+              <a:buNone/>
+            </a:pPr>
+            <a:r>
+              <a:rPr lang="en-US" sz="1350" b="1" dirty="0">
                 <a:solidFill>
                   <a:srgbClr val="E8EDF2"/>
                 </a:solidFill>
@@ -9880,37 +11110,34 @@
                 <a:ea typeface="Malgun Gothic" pitchFamily="34" charset="-122"/>
                 <a:cs typeface="Malgun Gothic" pitchFamily="34" charset="-120"/>
               </a:rPr>
-              <a:t>테스트 실행</a:t>
-            </a:r>
-            <a:endParaRPr lang="en-US" sz="1400" dirty="0"/>
-          </a:p>
-        </p:txBody>
-      </p:sp>
-      <p:sp>
-        <p:nvSpPr>
-          <p:cNvPr id="20" name="Text 18"/>
-          <p:cNvSpPr/>
-          <p:nvPr/>
-        </p:nvSpPr>
-        <p:spPr>
-          <a:xfrm>
-            <a:off x="6400800" y="3474720"/>
-            <a:ext cx="2194560" cy="640080"/>
-          </a:xfrm>
-          <a:prstGeom prst="rect">
-            <a:avLst/>
-          </a:prstGeom>
-          <a:noFill/>
-          <a:ln/>
-        </p:spPr>
-        <p:txBody>
-          <a:bodyPr wrap="square" lIns="0" tIns="0" rIns="0" bIns="0" rtlCol="0" anchor="t"/>
-          <a:lstStyle/>
-          <a:p>
-            <a:pPr indent="0" marL="0">
-              <a:lnSpc>
-                <a:spcPct val="110000"/>
-              </a:lnSpc>
+              <a:t>Memory stress</a:t>
+            </a:r>
+            <a:endParaRPr lang="en-US" sz="1350" dirty="0"/>
+          </a:p>
+        </p:txBody>
+      </p:sp>
+      <p:sp>
+        <p:nvSpPr>
+          <p:cNvPr id="47" name="Text 45"/>
+          <p:cNvSpPr/>
+          <p:nvPr/>
+        </p:nvSpPr>
+        <p:spPr>
+          <a:xfrm>
+            <a:off x="5288280" y="4818888"/>
+            <a:ext cx="2407920" cy="310896"/>
+          </a:xfrm>
+          <a:prstGeom prst="rect">
+            <a:avLst/>
+          </a:prstGeom>
+          <a:noFill/>
+          <a:ln/>
+        </p:spPr>
+        <p:txBody>
+          <a:bodyPr wrap="square" lIns="0" tIns="0" rIns="0" bIns="0" rtlCol="0" anchor="ctr"/>
+          <a:lstStyle/>
+          <a:p>
+            <a:pPr indent="0" marL="0">
               <a:buNone/>
             </a:pPr>
             <a:r>
@@ -9922,7 +11149,7 @@
                 <a:ea typeface="Malgun Gothic" pitchFamily="34" charset="-122"/>
                 <a:cs typeface="Malgun Gothic" pitchFamily="34" charset="-120"/>
               </a:rPr>
-              <a:t>cuda_memtests[] 배열을 순회</a:t>
+              <a:t>스트레스·소프트</a:t>
             </a:r>
             <a:endParaRPr lang="en-US" sz="1150" dirty="0"/>
           </a:p>
@@ -9930,14 +11157,14 @@
       </p:sp>
       <p:sp>
         <p:nvSpPr>
-          <p:cNvPr id="21" name="Text 19"/>
-          <p:cNvSpPr/>
-          <p:nvPr/>
-        </p:nvSpPr>
-        <p:spPr>
-          <a:xfrm>
-            <a:off x="8787384" y="2743200"/>
-            <a:ext cx="256032" cy="548640"/>
+          <p:cNvPr id="48" name="Text 46"/>
+          <p:cNvSpPr/>
+          <p:nvPr/>
+        </p:nvSpPr>
+        <p:spPr>
+          <a:xfrm>
+            <a:off x="548640" y="5943600"/>
+            <a:ext cx="11064240" cy="457200"/>
           </a:xfrm>
           <a:prstGeom prst="rect">
             <a:avLst/>
@@ -9953,241 +11180,17 @@
               <a:buNone/>
             </a:pPr>
             <a:r>
-              <a:rPr lang="en-US" sz="2000" b="1" dirty="0">
+              <a:rPr lang="en-US" sz="1300" i="1" dirty="0">
                 <a:solidFill>
                   <a:srgbClr val="9AA6B2"/>
                 </a:solidFill>
-                <a:latin typeface="Courier New" pitchFamily="34" charset="0"/>
-                <a:ea typeface="Courier New" pitchFamily="34" charset="-122"/>
-                <a:cs typeface="Courier New" pitchFamily="34" charset="-120"/>
-              </a:rPr>
-              <a:t>→</a:t>
-            </a:r>
-            <a:endParaRPr lang="en-US" sz="2000" dirty="0"/>
-          </a:p>
-        </p:txBody>
-      </p:sp>
-      <p:sp>
-        <p:nvSpPr>
-          <p:cNvPr id="22" name="Shape 20"/>
-          <p:cNvSpPr/>
-          <p:nvPr/>
-        </p:nvSpPr>
-        <p:spPr>
-          <a:xfrm>
-            <a:off x="9052560" y="1828800"/>
-            <a:ext cx="2560320" cy="2377440"/>
-          </a:xfrm>
-          <a:prstGeom prst="roundRect">
-            <a:avLst>
-              <a:gd name="adj" fmla="val 3077"/>
-            </a:avLst>
-          </a:prstGeom>
-          <a:solidFill>
-            <a:srgbClr val="1E232C"/>
-          </a:solidFill>
-          <a:ln/>
-        </p:spPr>
-      </p:sp>
-      <p:sp>
-        <p:nvSpPr>
-          <p:cNvPr id="23" name="Text 21"/>
-          <p:cNvSpPr/>
-          <p:nvPr/>
-        </p:nvSpPr>
-        <p:spPr>
-          <a:xfrm>
-            <a:off x="9235440" y="2011680"/>
-            <a:ext cx="548640" cy="548640"/>
-          </a:xfrm>
-          <a:prstGeom prst="roundRect">
-            <a:avLst>
-              <a:gd name="adj" fmla="val 50000"/>
-            </a:avLst>
-          </a:prstGeom>
-          <a:solidFill>
-            <a:srgbClr val="8CC63F"/>
-          </a:solidFill>
-          <a:ln/>
-        </p:spPr>
-        <p:txBody>
-          <a:bodyPr wrap="square" rtlCol="0" anchor="ctr"/>
-          <a:lstStyle/>
-          <a:p>
-            <a:pPr algn="ctr" indent="0" marL="0">
-              <a:buNone/>
-            </a:pPr>
-            <a:r>
-              <a:rPr lang="en-US" sz="1800" b="1" dirty="0">
-                <a:solidFill>
-                  <a:srgbClr val="13161C"/>
-                </a:solidFill>
-                <a:latin typeface="Courier New" pitchFamily="34" charset="0"/>
-                <a:ea typeface="Courier New" pitchFamily="34" charset="-122"/>
-                <a:cs typeface="Courier New" pitchFamily="34" charset="-120"/>
-              </a:rPr>
-              <a:t>4</a:t>
-            </a:r>
-            <a:endParaRPr lang="en-US" sz="1800" dirty="0"/>
-          </a:p>
-        </p:txBody>
-      </p:sp>
-      <p:sp>
-        <p:nvSpPr>
-          <p:cNvPr id="24" name="Text 22"/>
-          <p:cNvSpPr/>
-          <p:nvPr/>
-        </p:nvSpPr>
-        <p:spPr>
-          <a:xfrm>
-            <a:off x="9235440" y="2697480"/>
-            <a:ext cx="2194560" cy="457200"/>
-          </a:xfrm>
-          <a:prstGeom prst="rect">
-            <a:avLst/>
-          </a:prstGeom>
-          <a:noFill/>
-          <a:ln/>
-        </p:spPr>
-        <p:txBody>
-          <a:bodyPr wrap="square" lIns="0" tIns="0" rIns="0" bIns="0" rtlCol="0" anchor="ctr"/>
-          <a:lstStyle/>
-          <a:p>
-            <a:pPr indent="0" marL="0">
-              <a:buNone/>
-            </a:pPr>
-            <a:r>
-              <a:rPr lang="en-US" sz="1400" b="1" dirty="0">
-                <a:solidFill>
-                  <a:srgbClr val="8CC63F"/>
-                </a:solidFill>
-                <a:latin typeface="Courier New" pitchFamily="34" charset="0"/>
-                <a:ea typeface="Courier New" pitchFamily="34" charset="-122"/>
-                <a:cs typeface="Courier New" pitchFamily="34" charset="-120"/>
-              </a:rPr>
-              <a:t>각 테스트</a:t>
-            </a:r>
-            <a:endParaRPr lang="en-US" sz="1400" dirty="0"/>
-          </a:p>
-        </p:txBody>
-      </p:sp>
-      <p:sp>
-        <p:nvSpPr>
-          <p:cNvPr id="25" name="Text 23"/>
-          <p:cNvSpPr/>
-          <p:nvPr/>
-        </p:nvSpPr>
-        <p:spPr>
-          <a:xfrm>
-            <a:off x="9235440" y="3108960"/>
-            <a:ext cx="2194560" cy="365760"/>
-          </a:xfrm>
-          <a:prstGeom prst="rect">
-            <a:avLst/>
-          </a:prstGeom>
-          <a:noFill/>
-          <a:ln/>
-        </p:spPr>
-        <p:txBody>
-          <a:bodyPr wrap="square" lIns="0" tIns="0" rIns="0" bIns="0" rtlCol="0" anchor="ctr"/>
-          <a:lstStyle/>
-          <a:p>
-            <a:pPr indent="0" marL="0">
-              <a:buNone/>
-            </a:pPr>
-            <a:r>
-              <a:rPr lang="en-US" sz="1400" b="1" dirty="0">
-                <a:solidFill>
-                  <a:srgbClr val="E8EDF2"/>
-                </a:solidFill>
-                <a:latin typeface="Malgun Gothic" pitchFamily="34" charset="0"/>
-                <a:ea typeface="Malgun Gothic" pitchFamily="34" charset="-122"/>
-                <a:cs typeface="Malgun Gothic" pitchFamily="34" charset="-120"/>
-              </a:rPr>
-              <a:t>커널 실행</a:t>
-            </a:r>
-            <a:endParaRPr lang="en-US" sz="1400" dirty="0"/>
-          </a:p>
-        </p:txBody>
-      </p:sp>
-      <p:sp>
-        <p:nvSpPr>
-          <p:cNvPr id="26" name="Text 24"/>
-          <p:cNvSpPr/>
-          <p:nvPr/>
-        </p:nvSpPr>
-        <p:spPr>
-          <a:xfrm>
-            <a:off x="9235440" y="3474720"/>
-            <a:ext cx="2194560" cy="640080"/>
-          </a:xfrm>
-          <a:prstGeom prst="rect">
-            <a:avLst/>
-          </a:prstGeom>
-          <a:noFill/>
-          <a:ln/>
-        </p:spPr>
-        <p:txBody>
-          <a:bodyPr wrap="square" lIns="0" tIns="0" rIns="0" bIns="0" rtlCol="0" anchor="t"/>
-          <a:lstStyle/>
-          <a:p>
-            <a:pPr indent="0" marL="0">
-              <a:lnSpc>
-                <a:spcPct val="110000"/>
-              </a:lnSpc>
-              <a:buNone/>
-            </a:pPr>
-            <a:r>
-              <a:rPr lang="en-US" sz="1150" dirty="0">
-                <a:solidFill>
-                  <a:srgbClr val="9AA6B2"/>
-                </a:solidFill>
-                <a:latin typeface="Malgun Gothic" pitchFamily="34" charset="0"/>
-                <a:ea typeface="Malgun Gothic" pitchFamily="34" charset="-122"/>
-                <a:cs typeface="Malgun Gothic" pitchFamily="34" charset="-120"/>
-              </a:rPr>
-              <a:t>write → read → check (세션 1~2)</a:t>
-            </a:r>
-            <a:endParaRPr lang="en-US" sz="1150" dirty="0"/>
-          </a:p>
-        </p:txBody>
-      </p:sp>
-      <p:sp>
-        <p:nvSpPr>
-          <p:cNvPr id="27" name="Text 25"/>
-          <p:cNvSpPr/>
-          <p:nvPr/>
-        </p:nvSpPr>
-        <p:spPr>
-          <a:xfrm>
-            <a:off x="548640" y="4754880"/>
-            <a:ext cx="11064240" cy="457200"/>
-          </a:xfrm>
-          <a:prstGeom prst="rect">
-            <a:avLst/>
-          </a:prstGeom>
-          <a:noFill/>
-          <a:ln/>
-        </p:spPr>
-        <p:txBody>
-          <a:bodyPr wrap="square" lIns="0" tIns="0" rIns="0" bIns="0" rtlCol="0" anchor="ctr"/>
-          <a:lstStyle/>
-          <a:p>
-            <a:pPr algn="ctr" indent="0" marL="0">
-              <a:buNone/>
-            </a:pPr>
-            <a:r>
-              <a:rPr lang="en-US" sz="1500" dirty="0">
-                <a:solidFill>
-                  <a:srgbClr val="E8EDF2"/>
-                </a:solidFill>
-                <a:latin typeface="Malgun Gothic" pitchFamily="34" charset="0"/>
-                <a:ea typeface="Malgun Gothic" pitchFamily="34" charset="-122"/>
-                <a:cs typeface="Malgun Gothic" pitchFamily="34" charset="-120"/>
-              </a:rPr>
-              <a:t>이 흐름의 각 단계를 앞으로 5회에 걸쳐 안쪽까지 파고듭니다. 오늘은 지도만 봐 두세요.</a:t>
-            </a:r>
-            <a:endParaRPr lang="en-US" sz="1500" dirty="0"/>
+                <a:latin typeface="Malgun Gothic" pitchFamily="34" charset="0"/>
+                <a:ea typeface="Malgun Gothic" pitchFamily="34" charset="-122"/>
+                <a:cs typeface="Malgun Gothic" pitchFamily="34" charset="-120"/>
+              </a:rPr>
+              <a:t>Test 9(bit fade)는 3시간 걸려 기본 비활성. Test 10(스트레스)은 소프트 오류·급성 하드 오류에 특히 유용.</a:t>
+            </a:r>
+            <a:endParaRPr lang="en-US" sz="1300" dirty="0"/>
           </a:p>
         </p:txBody>
       </p:sp>
